--- a/docs/slides/pptx/M1-understanding.pptx
+++ b/docs/slides/pptx/M1-understanding.pptx
@@ -21,6 +21,10 @@
     <p:sldId id="269" r:id="rId21"/>
     <p:sldId id="270" r:id="rId22"/>
     <p:sldId id="271" r:id="rId23"/>
+    <p:sldId id="272" r:id="rId24"/>
+    <p:sldId id="273" r:id="rId25"/>
+    <p:sldId id="274" r:id="rId26"/>
+    <p:sldId id="275" r:id="rId27"/>
   </p:sldIdLst>
   <p:sldSz cx="12191695" cy="6858000" type="screen4x3"/>
   <p:notesSz cx="6858000" cy="9144000"/>
@@ -587,6 +591,321 @@
           <a:lstStyle/>
           <a:p>
             <a:r>
+              <a:t>Track the happy/unhappy signal weekly and a defect surfaces months before returns spike. One product in the corpus has that problem buried in its reviews.</a:t>
+            </a:r>
+          </a:p>
+        </p:txBody>
+      </p:sp>
+      <p:sp>
+        <p:nvSpPr>
+          <p:cNvPr id="4" name="Slide Number Placeholder 3"/>
+          <p:cNvSpPr>
+            <a:spLocks noGrp="1"/>
+          </p:cNvSpPr>
+          <p:nvPr>
+            <p:ph type="sldNum" idx="5" sz="quarter"/>
+          </p:nvPr>
+        </p:nvSpPr>
+        <p:spPr/>
+      </p:sp>
+    </p:spTree>
+  </p:cSld>
+  <p:clrMapOvr>
+    <a:masterClrMapping/>
+  </p:clrMapOvr>
+</p:notes>
+</file>
+
+<file path=ppt/notesSlides/notesSlide11.xml><?xml version="1.0" encoding="utf-8"?>
+<p:notes xmlns:a="http://schemas.openxmlformats.org/drawingml/2006/main" xmlns:p="http://schemas.openxmlformats.org/presentationml/2006/main" xmlns:r="http://schemas.openxmlformats.org/officeDocument/2006/relationships">
+  <p:cSld>
+    <p:spTree>
+      <p:nvGrpSpPr>
+        <p:cNvPr id="1" name=""/>
+        <p:cNvGrpSpPr/>
+        <p:nvPr/>
+      </p:nvGrpSpPr>
+      <p:grpSpPr>
+        <a:xfrm>
+          <a:off x="0" y="0"/>
+          <a:ext cx="0" cy="0"/>
+          <a:chOff x="0" y="0"/>
+          <a:chExt cx="0" cy="0"/>
+        </a:xfrm>
+      </p:grpSpPr>
+      <p:sp>
+        <p:nvSpPr>
+          <p:cNvPr id="2" name="Slide Image Placeholder 1"/>
+          <p:cNvSpPr>
+            <a:spLocks noGrp="1"/>
+          </p:cNvSpPr>
+          <p:nvPr>
+            <p:ph type="sldImg" idx="2"/>
+          </p:nvPr>
+        </p:nvSpPr>
+        <p:spPr/>
+      </p:sp>
+      <p:sp>
+        <p:nvSpPr>
+          <p:cNvPr id="3" name="Notes Placeholder 2"/>
+          <p:cNvSpPr>
+            <a:spLocks noGrp="1"/>
+          </p:cNvSpPr>
+          <p:nvPr>
+            <p:ph type="body" idx="3" sz="quarter"/>
+          </p:nvPr>
+        </p:nvSpPr>
+        <p:spPr/>
+        <p:txBody>
+          <a:bodyPr/>
+          <a:lstStyle/>
+          <a:p>
+            <a:r>
+              <a:t>Most teams never run that experiment. The room runs it before lunch.</a:t>
+            </a:r>
+          </a:p>
+        </p:txBody>
+      </p:sp>
+      <p:sp>
+        <p:nvSpPr>
+          <p:cNvPr id="4" name="Slide Number Placeholder 3"/>
+          <p:cNvSpPr>
+            <a:spLocks noGrp="1"/>
+          </p:cNvSpPr>
+          <p:nvPr>
+            <p:ph type="sldNum" idx="5" sz="quarter"/>
+          </p:nvPr>
+        </p:nvSpPr>
+        <p:spPr/>
+      </p:sp>
+    </p:spTree>
+  </p:cSld>
+  <p:clrMapOvr>
+    <a:masterClrMapping/>
+  </p:clrMapOvr>
+</p:notes>
+</file>
+
+<file path=ppt/notesSlides/notesSlide12.xml><?xml version="1.0" encoding="utf-8"?>
+<p:notes xmlns:a="http://schemas.openxmlformats.org/drawingml/2006/main" xmlns:p="http://schemas.openxmlformats.org/presentationml/2006/main" xmlns:r="http://schemas.openxmlformats.org/officeDocument/2006/relationships">
+  <p:cSld>
+    <p:spTree>
+      <p:nvGrpSpPr>
+        <p:cNvPr id="1" name=""/>
+        <p:cNvGrpSpPr/>
+        <p:nvPr/>
+      </p:nvGrpSpPr>
+      <p:grpSpPr>
+        <a:xfrm>
+          <a:off x="0" y="0"/>
+          <a:ext cx="0" cy="0"/>
+          <a:chOff x="0" y="0"/>
+          <a:chExt cx="0" cy="0"/>
+        </a:xfrm>
+      </p:grpSpPr>
+      <p:sp>
+        <p:nvSpPr>
+          <p:cNvPr id="2" name="Slide Image Placeholder 1"/>
+          <p:cNvSpPr>
+            <a:spLocks noGrp="1"/>
+          </p:cNvSpPr>
+          <p:nvPr>
+            <p:ph type="sldImg" idx="2"/>
+          </p:nvPr>
+        </p:nvSpPr>
+        <p:spPr/>
+      </p:sp>
+      <p:sp>
+        <p:nvSpPr>
+          <p:cNvPr id="3" name="Notes Placeholder 2"/>
+          <p:cNvSpPr>
+            <a:spLocks noGrp="1"/>
+          </p:cNvSpPr>
+          <p:nvPr>
+            <p:ph type="body" idx="3" sz="quarter"/>
+          </p:nvPr>
+        </p:nvSpPr>
+        <p:spPr/>
+        <p:txBody>
+          <a:bodyPr/>
+          <a:lstStyle/>
+          <a:p>
+            <a:r>
+              <a:t>This is the slide that sets up the "which model" argument the demo measures.</a:t>
+            </a:r>
+          </a:p>
+        </p:txBody>
+      </p:sp>
+      <p:sp>
+        <p:nvSpPr>
+          <p:cNvPr id="4" name="Slide Number Placeholder 3"/>
+          <p:cNvSpPr>
+            <a:spLocks noGrp="1"/>
+          </p:cNvSpPr>
+          <p:nvPr>
+            <p:ph type="sldNum" idx="5" sz="quarter"/>
+          </p:nvPr>
+        </p:nvSpPr>
+        <p:spPr/>
+      </p:sp>
+    </p:spTree>
+  </p:cSld>
+  <p:clrMapOvr>
+    <a:masterClrMapping/>
+  </p:clrMapOvr>
+</p:notes>
+</file>
+
+<file path=ppt/notesSlides/notesSlide13.xml><?xml version="1.0" encoding="utf-8"?>
+<p:notes xmlns:a="http://schemas.openxmlformats.org/drawingml/2006/main" xmlns:p="http://schemas.openxmlformats.org/presentationml/2006/main" xmlns:r="http://schemas.openxmlformats.org/officeDocument/2006/relationships">
+  <p:cSld>
+    <p:spTree>
+      <p:nvGrpSpPr>
+        <p:cNvPr id="1" name=""/>
+        <p:cNvGrpSpPr/>
+        <p:nvPr/>
+      </p:nvGrpSpPr>
+      <p:grpSpPr>
+        <a:xfrm>
+          <a:off x="0" y="0"/>
+          <a:ext cx="0" cy="0"/>
+          <a:chOff x="0" y="0"/>
+          <a:chExt cx="0" cy="0"/>
+        </a:xfrm>
+      </p:grpSpPr>
+      <p:sp>
+        <p:nvSpPr>
+          <p:cNvPr id="2" name="Slide Image Placeholder 1"/>
+          <p:cNvSpPr>
+            <a:spLocks noGrp="1"/>
+          </p:cNvSpPr>
+          <p:nvPr>
+            <p:ph type="sldImg" idx="2"/>
+          </p:nvPr>
+        </p:nvSpPr>
+        <p:spPr/>
+      </p:sp>
+      <p:sp>
+        <p:nvSpPr>
+          <p:cNvPr id="3" name="Notes Placeholder 2"/>
+          <p:cNvSpPr>
+            <a:spLocks noGrp="1"/>
+          </p:cNvSpPr>
+          <p:nvPr>
+            <p:ph type="body" idx="3" sz="quarter"/>
+          </p:nvPr>
+        </p:nvSpPr>
+        <p:spPr/>
+        <p:txBody>
+          <a:bodyPr/>
+          <a:lstStyle/>
+          <a:p>
+            <a:r>
+              <a:t>Both halves of the argument hold: ordinary reviews barely need the big model, and the sarcastic slice does, 7/10 vs 10/10, with every disagreement going the frontier model's way. Also worth 20 seconds: the local stand-in tied phi3, so a comparison against the wrong big model would have said the gap does not exist. Side finding worth 20 seconds: reflowing the identical prompt onto one line dropped phi3 to 7/10 and 4/10. Small models are sensitive to formatting.</a:t>
+            </a:r>
+          </a:p>
+          <a:p>
+            <a:r>
+              <a:t>Demo script (the demo outline that used to live in the spec, sized for the 30-minute block: skip the break-it-on-purpose beats first if you are running long):</a:t>
+            </a:r>
+          </a:p>
+          <a:p>
+            <a:r>
+              <a:t>1. Show the Cascade 65's reviews and point at a 4-star review with furious text, which is the whole case for reading the text rather than the stars.</a:t>
+            </a:r>
+          </a:p>
+          <a:p>
+            <a:r>
+              <a:t>2. Starter project: one classify method whose prompt returns exactly positive | negative | mixed. Because of Microsoft.Extensions.AI, the same code runs against both providers, and the swap is one line in DI registration. Say that out loud, since it's the provider-flexibility slide made real.</a:t>
+            </a:r>
+          </a:p>
+          <a:p>
+            <a:r>
+              <a:t>3. Run 20 easy reviews through phi3 locally, where it is fast, free, and correct, and let the small model win the first round.</a:t>
+            </a:r>
+          </a:p>
+          <a:p>
+            <a:r>
+              <a:t>4. Run the same 20 through gpt-4.1 on Foundry and get the same labels on nine of ten (the frontier model also gets the deadpan four-star rave that phi3 calls mixed), which is the first payoff: on ordinary reviews you'd have paid for very little.</a:t>
+            </a:r>
+          </a:p>
+          <a:p>
+            <a:r>
+              <a:t>5. Now the hard set, sarcasm and mixed reviews. Run both and diff the labels on screen. Second payoff: phi3 drops to 7/10 and gpt-4.1 holds at 10/10, and every disagreement is one the frontier model gets right. This is the slice that earns its price, and you know that because you measured it rather than assumed it. Check expected-output.md for what happened when this was built, and be ready for the room's answer to differ from yours.</a:t>
+            </a:r>
+          </a:p>
+          <a:p>
+            <a:r>
+              <a:t>6. Close with the decision recipe: labeled sample, run both, count disagreements, price the errors. That recipe generalizes to every feature today.</a:t>
+            </a:r>
+          </a:p>
+        </p:txBody>
+      </p:sp>
+      <p:sp>
+        <p:nvSpPr>
+          <p:cNvPr id="4" name="Slide Number Placeholder 3"/>
+          <p:cNvSpPr>
+            <a:spLocks noGrp="1"/>
+          </p:cNvSpPr>
+          <p:nvPr>
+            <p:ph type="sldNum" idx="5" sz="quarter"/>
+          </p:nvPr>
+        </p:nvSpPr>
+        <p:spPr/>
+      </p:sp>
+    </p:spTree>
+  </p:cSld>
+  <p:clrMapOvr>
+    <a:masterClrMapping/>
+  </p:clrMapOvr>
+</p:notes>
+</file>
+
+<file path=ppt/notesSlides/notesSlide14.xml><?xml version="1.0" encoding="utf-8"?>
+<p:notes xmlns:a="http://schemas.openxmlformats.org/drawingml/2006/main" xmlns:p="http://schemas.openxmlformats.org/presentationml/2006/main" xmlns:r="http://schemas.openxmlformats.org/officeDocument/2006/relationships">
+  <p:cSld>
+    <p:spTree>
+      <p:nvGrpSpPr>
+        <p:cNvPr id="1" name=""/>
+        <p:cNvGrpSpPr/>
+        <p:nvPr/>
+      </p:nvGrpSpPr>
+      <p:grpSpPr>
+        <a:xfrm>
+          <a:off x="0" y="0"/>
+          <a:ext cx="0" cy="0"/>
+          <a:chOff x="0" y="0"/>
+          <a:chExt cx="0" cy="0"/>
+        </a:xfrm>
+      </p:grpSpPr>
+      <p:sp>
+        <p:nvSpPr>
+          <p:cNvPr id="2" name="Slide Image Placeholder 1"/>
+          <p:cNvSpPr>
+            <a:spLocks noGrp="1"/>
+          </p:cNvSpPr>
+          <p:nvPr>
+            <p:ph type="sldImg" idx="2"/>
+          </p:nvPr>
+        </p:nvSpPr>
+        <p:spPr/>
+      </p:sp>
+      <p:sp>
+        <p:nvSpPr>
+          <p:cNvPr id="3" name="Notes Placeholder 2"/>
+          <p:cNvSpPr>
+            <a:spLocks noGrp="1"/>
+          </p:cNvSpPr>
+          <p:nvPr>
+            <p:ph type="body" idx="3" sz="quarter"/>
+          </p:nvPr>
+        </p:nvSpPr>
+        <p:spPr/>
+        <p:txBody>
+          <a:bodyPr/>
+          <a:lstStyle/>
+          <a:p>
+            <a:r>
               <a:t>Start with 01 regardless of experience. Everything else today assumes you've made one model call and seen what comes back. Finished everything? Help someone near you.</a:t>
             </a:r>
           </a:p>
@@ -727,7 +1046,7 @@
           <a:lstStyle/>
           <a:p>
             <a:r>
-              <a:t>Small local model handles all of this. This feature never touches the cloud.</a:t>
+              <a:t>Thirty seconds. The point is that "understanding" is one HTTP call three ways, and the module thread (a wrong-shaped answer is a bug in the instruction) applies to all three.</a:t>
             </a:r>
           </a:p>
         </p:txBody>
@@ -797,47 +1116,7 @@
           <a:lstStyle/>
           <a:p>
             <a:r>
-              <a:t>A required "hazards" slot with nothing honest to put in it is an invitation to make something up. Numbers are in expected-output.md. Point at the Ollama endpoint at the end: there was no API key, and no data left the room.</a:t>
-            </a:r>
-          </a:p>
-          <a:p>
-            <a:r>
-              <a:t>Demo script (the demo outline that used to live in the spec, sized for the 30-minute block: skip the break-it-on-purpose beats first if you are running long):</a:t>
-            </a:r>
-          </a:p>
-          <a:p>
-            <a:r>
-              <a:t>1. Open a raw trip report from data/trip-reports/ on screen and scroll through it slowly, so the room feels the problem before seeing the fix.</a:t>
-            </a:r>
-          </a:p>
-          <a:p>
-            <a:r>
-              <a:t>2. Starter project: IChatClient wired to Ollama via Microsoft.Extensions.AI. One method, one prompt: "Summarize this trip report."</a:t>
-            </a:r>
-          </a:p>
-          <a:p>
-            <a:r>
-              <a:t>3. Run it and get a faithful, generic, useless book report, then name the failure out loud: right model, wrong instruction.</a:t>
-            </a:r>
-          </a:p>
-          <a:p>
-            <a:r>
-              <a:t>4. Iterate the prompt live into the hiker-focused version (conditions, hazards, crowding, ignore everything else). Run again. This is the payoff: three bullets, and the bridge warning surfaces.</a:t>
-            </a:r>
-          </a:p>
-          <a:p>
-            <a:r>
-              <a:t>5. Point at the last two lines of that prompt, the grounding lines. Without them, this exact prompt run against the clean report invented a bear-related trail closure in roughly half of runs, because a required "hazards" slot with nothing honest to put in it is an invitation to make something up. The numbers and the failing outputs are in expected-output.md.</a:t>
-            </a:r>
-          </a:p>
-          <a:p>
-            <a:r>
-              <a:t>6. Change the shape: same call, but output a one-line "trail status" headline for a card UI. Same feature, different product surface.</a:t>
-            </a:r>
-          </a:p>
-          <a:p>
-            <a:r>
-              <a:t>7. Point at the Ollama endpoint in the code. This ran entirely on the laptop, with no API key and no data leaving the room.</a:t>
+              <a:t>Small local model handles all of this. This feature never touches the cloud.</a:t>
             </a:r>
           </a:p>
         </p:txBody>
@@ -907,7 +1186,7 @@
           <a:lstStyle/>
           <a:p>
             <a:r>
-              <a:t>This is where the LLM stops being a chat feature and becomes a data-pipeline component. Extraction runs on private data at volume, so free and on-prem matters here more than anywhere.</a:t>
+              <a:t>Read the prompt aloud once. Everything they build in the lab is a change to the middle box.</a:t>
             </a:r>
           </a:p>
         </p:txBody>
@@ -977,7 +1256,7 @@
           <a:lstStyle/>
           <a:p>
             <a:r>
-              <a:t>Zero is the dangerous miss: it is a value, and a pipeline will store it without complaint. Ship the schema plus a rejection rule.</a:t>
+              <a:t>A required "hazards" slot with nothing honest to put in it is an invitation to make something up. Numbers are in expected-output.md. Point at the Ollama endpoint at the end: there was no API key, and no data left the room.</a:t>
             </a:r>
           </a:p>
           <a:p>
@@ -987,32 +1266,37 @@
           </a:p>
           <a:p>
             <a:r>
-              <a:t>1. Show the same messy trip report from feature 01. This time the goal isn't a summary, it's a database row.</a:t>
-            </a:r>
-          </a:p>
-          <a:p>
-            <a:r>
-              <a:t>2. Define a C# record (TripFacts: trail, park, date, distance, wildlife, conditions) and use Microsoft.Extensions.AI's typed-response support to request it directly. The schema is code.</a:t>
-            </a:r>
-          </a:p>
-          <a:p>
-            <a:r>
-              <a:t>3. Run it: prose in, populated .NET object out, with no parsing step. This is the payoff moment.</a:t>
-            </a:r>
-          </a:p>
-          <a:p>
-            <a:r>
-              <a:t>4. Break it on purpose: run a report that never mentions distance, and watch the model invent distance_mi: 5.0.</a:t>
-            </a:r>
-          </a:p>
-          <a:p>
-            <a:r>
-              <a:t>5. Fix it in the schema with nullable fields and "null when not stated" descriptions. Re-run: the invented distance usually goes away, and something else usually doesn't. Run it two or three times live so the room sees the variance rather than one lucky result. Then say the quiet part: this is better, and it is not a guarantee. The last mile is a validator that rejects a date like "early last month" and a 0 that should have been null, which is ordinary code your team already knows how to write.</a:t>
-            </a:r>
-          </a:p>
-          <a:p>
-            <a:r>
-              <a:t>6. Zoom out: loop over ten reports and print rows. That's an ingestion pipeline in thirty lines, and the "trail stats" panel is now just a query.</a:t>
+              <a:t>1. Open a raw trip report from data/trip-reports/ on screen and scroll through it slowly, so the room feels the problem before seeing the fix.</a:t>
+            </a:r>
+          </a:p>
+          <a:p>
+            <a:r>
+              <a:t>2. Starter project: IChatClient wired to Ollama via Microsoft.Extensions.AI. One method, one prompt: "Summarize this trip report."</a:t>
+            </a:r>
+          </a:p>
+          <a:p>
+            <a:r>
+              <a:t>3. Run it and get a faithful, generic, useless book report, then name the failure out loud: right model, wrong instruction.</a:t>
+            </a:r>
+          </a:p>
+          <a:p>
+            <a:r>
+              <a:t>4. Iterate the prompt live into the hiker-focused version (conditions, hazards, crowding, ignore everything else). Run again. This is the payoff: three bullets, and the bridge warning surfaces.</a:t>
+            </a:r>
+          </a:p>
+          <a:p>
+            <a:r>
+              <a:t>5. Point at the last two lines of that prompt, the grounding lines. Without them, this exact prompt run against the clean report invented a bear-related trail closure in roughly half of runs, because a required "hazards" slot with nothing honest to put in it is an invitation to make something up. The numbers and the failing outputs are in expected-output.md.</a:t>
+            </a:r>
+          </a:p>
+          <a:p>
+            <a:r>
+              <a:t>6. Change the shape: same call, but output a one-line "trail status" headline for a card UI. Same feature, different product surface.</a:t>
+            </a:r>
+          </a:p>
+          <a:p>
+            <a:r>
+              <a:t>7. Point at the Ollama endpoint in the code. This ran entirely on the laptop, with no API key and no data leaving the room.</a:t>
             </a:r>
           </a:p>
         </p:txBody>
@@ -1082,7 +1366,7 @@
           <a:lstStyle/>
           <a:p>
             <a:r>
-              <a:t>Track the happy/unhappy signal weekly and a defect surfaces months before returns spike. One product in the corpus has that problem buried in its reviews.</a:t>
+              <a:t>This is where the LLM stops being a chat feature and becomes a data-pipeline component. Extraction runs on private data at volume, so free and on-prem matters here more than anywhere.</a:t>
             </a:r>
           </a:p>
         </p:txBody>
@@ -1152,7 +1436,7 @@
           <a:lstStyle/>
           <a:p>
             <a:r>
-              <a:t>Most teams never run that experiment. The room runs it before lunch.</a:t>
+              <a:t>The last box is the one people skip. Say plainly that extraction without validation is a data-corruption feature.</a:t>
             </a:r>
           </a:p>
         </p:txBody>
@@ -1222,7 +1506,7 @@
           <a:lstStyle/>
           <a:p>
             <a:r>
-              <a:t>Both halves of the argument hold: ordinary reviews barely need the big model, and the sarcastic slice does, 7/10 vs 10/10, with every disagreement going the frontier model's way. Also worth 20 seconds: the local stand-in tied phi3, so a comparison against the wrong big model would have said the gap does not exist. Side finding worth 20 seconds: reflowing the identical prompt onto one line dropped phi3 to 7/10 and 4/10. Small models are sensitive to formatting.</a:t>
+              <a:t>Zero is the dangerous miss: it is a value, and a pipeline will store it without complaint. Ship the schema plus a rejection rule.</a:t>
             </a:r>
           </a:p>
           <a:p>
@@ -1232,32 +1516,32 @@
           </a:p>
           <a:p>
             <a:r>
-              <a:t>1. Show the Cascade 65's reviews and point at a 4-star review with furious text, which is the whole case for reading the text rather than the stars.</a:t>
-            </a:r>
-          </a:p>
-          <a:p>
-            <a:r>
-              <a:t>2. Starter project: one classify method whose prompt returns exactly positive | negative | mixed. Because of Microsoft.Extensions.AI, the same code runs against both providers, and the swap is one line in DI registration. Say that out loud, since it's the provider-flexibility slide made real.</a:t>
-            </a:r>
-          </a:p>
-          <a:p>
-            <a:r>
-              <a:t>3. Run 20 easy reviews through phi3 locally, where it is fast, free, and correct, and let the small model win the first round.</a:t>
-            </a:r>
-          </a:p>
-          <a:p>
-            <a:r>
-              <a:t>4. Run the same 20 through gpt-4.1 on Foundry and get the same labels on nine of ten (the frontier model also gets the deadpan four-star rave that phi3 calls mixed), which is the first payoff: on ordinary reviews you'd have paid for very little.</a:t>
-            </a:r>
-          </a:p>
-          <a:p>
-            <a:r>
-              <a:t>5. Now the hard set, sarcasm and mixed reviews. Run both and diff the labels on screen. Second payoff: phi3 drops to 7/10 and gpt-4.1 holds at 10/10, and every disagreement is one the frontier model gets right. This is the slice that earns its price, and you know that because you measured it rather than assumed it. Check expected-output.md for what happened when this was built, and be ready for the room's answer to differ from yours.</a:t>
-            </a:r>
-          </a:p>
-          <a:p>
-            <a:r>
-              <a:t>6. Close with the decision recipe: labeled sample, run both, count disagreements, price the errors. That recipe generalizes to every feature today.</a:t>
+              <a:t>1. Show the same messy trip report from feature 01. This time the goal isn't a summary, it's a database row.</a:t>
+            </a:r>
+          </a:p>
+          <a:p>
+            <a:r>
+              <a:t>2. Define a C# record (TripFacts: trail, park, date, distance, wildlife, conditions) and use Microsoft.Extensions.AI's typed-response support to request it directly. The schema is code.</a:t>
+            </a:r>
+          </a:p>
+          <a:p>
+            <a:r>
+              <a:t>3. Run it: prose in, populated .NET object out, with no parsing step. This is the payoff moment.</a:t>
+            </a:r>
+          </a:p>
+          <a:p>
+            <a:r>
+              <a:t>4. Break it on purpose: run a report that never mentions distance, and watch the model invent distance_mi: 5.0.</a:t>
+            </a:r>
+          </a:p>
+          <a:p>
+            <a:r>
+              <a:t>5. Fix it in the schema with nullable fields and "null when not stated" descriptions. Re-run: the invented distance usually goes away, and something else usually doesn't. Run it two or three times live so the room sees the variance rather than one lucky result. Then say the quiet part: this is better, and it is not a guarantee. The last mile is a validator that rejects a date like "early last month" and a 0 that should have been null, which is ordinary code your team already knows how to write.</a:t>
+            </a:r>
+          </a:p>
+          <a:p>
+            <a:r>
+              <a:t>6. Zoom out: loop over ten reports and print rows. That's an ingestion pipeline in thirty lines, and the "trail stats" panel is now just a query.</a:t>
             </a:r>
           </a:p>
         </p:txBody>
@@ -4364,7 +4648,7 @@
           <a:lstStyle/>
           <a:p>
             <a:r>
-              <a:t>02 · Leadership Card</a:t>
+              <a:t>02 · The Concept</a:t>
             </a:r>
           </a:p>
         </p:txBody>
@@ -4382,7 +4666,7 @@
         <p:spPr>
           <a:xfrm>
             <a:off x="612648" y="1600200"/>
-            <a:ext cx="10966399" cy="4800600"/>
+            <a:ext cx="10966399" cy="4892040"/>
           </a:xfrm>
         </p:spPr>
         <p:txBody>
@@ -4392,21 +4676,28 @@
             <a:pPr/>
             <a:r>
               <a:rPr sz="2000"/>
-              <a:t>When: valuable data trapped in documents. Invoices, resumes, support emails, contracts, legacy records.</a:t>
+              <a:t>Summarization's sibling: the output is data your code consumes, not text a person reads</a:t>
             </a:r>
           </a:p>
           <a:p>
             <a:pPr/>
             <a:r>
               <a:rPr sz="2000"/>
-              <a:t>Cost: days to a working pipeline. The real work is schema design and spot-checking accuracy.</a:t>
+              <a:t>JSON mode: the model is constrained to emit valid JSON matching your schema</a:t>
             </a:r>
           </a:p>
           <a:p>
             <a:pPr/>
             <a:r>
               <a:rPr sz="2000"/>
-              <a:t>"We have years of data trapped in documents. This turns it into queryable rows without anyone re-typing it."</a:t>
+              <a:t>The schema does most of the prompting: field names, descriptions, "use null when the report doesn't say"</a:t>
+            </a:r>
+          </a:p>
+          <a:p>
+            <a:pPr/>
+            <a:r>
+              <a:rPr sz="2000"/>
+              <a:t>Structured shape guarantees the JSON parses. It does not guarantee the JSON is true.</a:t>
             </a:r>
           </a:p>
         </p:txBody>
@@ -4450,7 +4741,7 @@
           <a:lstStyle/>
           <a:p>
             <a:r>
-              <a:t>03 · Sentiment: The User Problem</a:t>
+              <a:t>02 · How It Works</a:t>
             </a:r>
           </a:p>
         </p:txBody>
@@ -4467,8 +4758,8 @@
         </p:nvSpPr>
         <p:spPr>
           <a:xfrm>
-            <a:off x="612648" y="1600200"/>
-            <a:ext cx="10966399" cy="4800600"/>
+            <a:off x="612648" y="3099816"/>
+            <a:ext cx="10966399" cy="3392424"/>
           </a:xfrm>
         </p:spPr>
         <p:txBody>
@@ -4477,22 +4768,458 @@
           <a:p>
             <a:pPr/>
             <a:r>
-              <a:rPr sz="2000"/>
-              <a:t>The Cascade 65 backpack has 300 reviews. Are people happy, and what are they mad about?</a:t>
+              <a:rPr sz="1600"/>
+              <a:t>The model writes JSON; your code decides whether to believe it</a:t>
             </a:r>
           </a:p>
           <a:p>
             <a:pPr/>
             <a:r>
-              <a:rPr sz="2000"/>
-              <a:t>Star ratings lie: "4 stars, but the hip belt broke on day two"</a:t>
+              <a:rPr sz="1600"/>
+              <a:t>JSON mode guarantees syntax, not truth. The schema check and the null rule are the feature.</a:t>
             </a:r>
           </a:p>
           <a:p>
             <a:pPr/>
             <a:r>
-              <a:rPr sz="2000"/>
-              <a:t>The user here is the product team, not the hiker</a:t>
+              <a:rPr sz="1600"/>
+              <a:t>A rejected record is a good outcome. A silently stored zero is the bug.</a:t>
+            </a:r>
+          </a:p>
+        </p:txBody>
+      </p:sp>
+      <p:sp>
+        <p:nvSpPr>
+          <p:cNvPr id="4" name="Rounded Rectangle 3"/>
+          <p:cNvSpPr/>
+          <p:nvPr/>
+        </p:nvSpPr>
+        <p:spPr>
+          <a:xfrm>
+            <a:off x="612648" y="1554480"/>
+            <a:ext cx="1864095" cy="1271016"/>
+          </a:xfrm>
+          <a:prstGeom prst="roundRect">
+            <a:avLst/>
+          </a:prstGeom>
+          <a:noFill/>
+          <a:ln w="19050">
+            <a:solidFill>
+              <a:srgbClr val="000000"/>
+            </a:solidFill>
+          </a:ln>
+          <a:effectLst/>
+        </p:spPr>
+        <p:style>
+          <a:lnRef idx="1">
+            <a:schemeClr val="accent1"/>
+          </a:lnRef>
+          <a:fillRef idx="3">
+            <a:schemeClr val="accent1"/>
+          </a:fillRef>
+          <a:effectRef idx="2">
+            <a:schemeClr val="accent1"/>
+          </a:effectRef>
+          <a:fontRef idx="minor">
+            <a:schemeClr val="lt1"/>
+          </a:fontRef>
+        </p:style>
+        <p:txBody>
+          <a:bodyPr rtlCol="0" anchor="ctr" wrap="square" lIns="73152" rIns="73152"/>
+          <a:lstStyle/>
+          <a:p>
+            <a:pPr algn="ctr"/>
+            <a:r>
+              <a:rPr sz="1300">
+                <a:solidFill>
+                  <a:srgbClr val="000000"/>
+                </a:solidFill>
+              </a:rPr>
+              <a:t>Trip report</a:t>
+            </a:r>
+          </a:p>
+        </p:txBody>
+      </p:sp>
+      <p:sp>
+        <p:nvSpPr>
+          <p:cNvPr id="5" name="Right Arrow 4"/>
+          <p:cNvSpPr/>
+          <p:nvPr/>
+        </p:nvSpPr>
+        <p:spPr>
+          <a:xfrm>
+            <a:off x="2531607" y="2043684"/>
+            <a:ext cx="301752" cy="292608"/>
+          </a:xfrm>
+          <a:prstGeom prst="rightArrow">
+            <a:avLst/>
+          </a:prstGeom>
+          <a:solidFill>
+            <a:srgbClr val="000000"/>
+          </a:solidFill>
+          <a:ln>
+            <a:noFill/>
+          </a:ln>
+          <a:effectLst/>
+        </p:spPr>
+        <p:style>
+          <a:lnRef idx="1">
+            <a:schemeClr val="accent1"/>
+          </a:lnRef>
+          <a:fillRef idx="3">
+            <a:schemeClr val="accent1"/>
+          </a:fillRef>
+          <a:effectRef idx="2">
+            <a:schemeClr val="accent1"/>
+          </a:effectRef>
+          <a:fontRef idx="minor">
+            <a:schemeClr val="lt1"/>
+          </a:fontRef>
+        </p:style>
+        <p:txBody>
+          <a:bodyPr rtlCol="0" anchor="ctr"/>
+          <a:lstStyle/>
+          <a:p>
+            <a:pPr algn="ctr"/>
+          </a:p>
+        </p:txBody>
+      </p:sp>
+      <p:sp>
+        <p:nvSpPr>
+          <p:cNvPr id="6" name="Rounded Rectangle 5"/>
+          <p:cNvSpPr/>
+          <p:nvPr/>
+        </p:nvSpPr>
+        <p:spPr>
+          <a:xfrm>
+            <a:off x="2888223" y="1554480"/>
+            <a:ext cx="1864095" cy="1271016"/>
+          </a:xfrm>
+          <a:prstGeom prst="roundRect">
+            <a:avLst/>
+          </a:prstGeom>
+          <a:noFill/>
+          <a:ln w="19050">
+            <a:solidFill>
+              <a:srgbClr val="000000"/>
+            </a:solidFill>
+          </a:ln>
+          <a:effectLst/>
+        </p:spPr>
+        <p:style>
+          <a:lnRef idx="1">
+            <a:schemeClr val="accent1"/>
+          </a:lnRef>
+          <a:fillRef idx="3">
+            <a:schemeClr val="accent1"/>
+          </a:fillRef>
+          <a:effectRef idx="2">
+            <a:schemeClr val="accent1"/>
+          </a:effectRef>
+          <a:fontRef idx="minor">
+            <a:schemeClr val="lt1"/>
+          </a:fontRef>
+        </p:style>
+        <p:txBody>
+          <a:bodyPr rtlCol="0" anchor="ctr" wrap="square" lIns="73152" rIns="73152"/>
+          <a:lstStyle/>
+          <a:p>
+            <a:pPr algn="ctr"/>
+            <a:r>
+              <a:rPr sz="1300">
+                <a:solidFill>
+                  <a:srgbClr val="000000"/>
+                </a:solidFill>
+              </a:rPr>
+              <a:t>Prompt: fields, types, examples, "null when absent"</a:t>
+            </a:r>
+          </a:p>
+        </p:txBody>
+      </p:sp>
+      <p:sp>
+        <p:nvSpPr>
+          <p:cNvPr id="7" name="Right Arrow 6"/>
+          <p:cNvSpPr/>
+          <p:nvPr/>
+        </p:nvSpPr>
+        <p:spPr>
+          <a:xfrm>
+            <a:off x="4807183" y="2043684"/>
+            <a:ext cx="301752" cy="292608"/>
+          </a:xfrm>
+          <a:prstGeom prst="rightArrow">
+            <a:avLst/>
+          </a:prstGeom>
+          <a:solidFill>
+            <a:srgbClr val="000000"/>
+          </a:solidFill>
+          <a:ln>
+            <a:noFill/>
+          </a:ln>
+          <a:effectLst/>
+        </p:spPr>
+        <p:style>
+          <a:lnRef idx="1">
+            <a:schemeClr val="accent1"/>
+          </a:lnRef>
+          <a:fillRef idx="3">
+            <a:schemeClr val="accent1"/>
+          </a:fillRef>
+          <a:effectRef idx="2">
+            <a:schemeClr val="accent1"/>
+          </a:effectRef>
+          <a:fontRef idx="minor">
+            <a:schemeClr val="lt1"/>
+          </a:fontRef>
+        </p:style>
+        <p:txBody>
+          <a:bodyPr rtlCol="0" anchor="ctr"/>
+          <a:lstStyle/>
+          <a:p>
+            <a:pPr algn="ctr"/>
+          </a:p>
+        </p:txBody>
+      </p:sp>
+      <p:sp>
+        <p:nvSpPr>
+          <p:cNvPr id="8" name="Rounded Rectangle 7"/>
+          <p:cNvSpPr/>
+          <p:nvPr/>
+        </p:nvSpPr>
+        <p:spPr>
+          <a:xfrm>
+            <a:off x="5163799" y="1554480"/>
+            <a:ext cx="1864095" cy="1271016"/>
+          </a:xfrm>
+          <a:prstGeom prst="roundRect">
+            <a:avLst/>
+          </a:prstGeom>
+          <a:noFill/>
+          <a:ln w="19050">
+            <a:solidFill>
+              <a:srgbClr val="000000"/>
+            </a:solidFill>
+          </a:ln>
+          <a:effectLst/>
+        </p:spPr>
+        <p:style>
+          <a:lnRef idx="1">
+            <a:schemeClr val="accent1"/>
+          </a:lnRef>
+          <a:fillRef idx="3">
+            <a:schemeClr val="accent1"/>
+          </a:fillRef>
+          <a:effectRef idx="2">
+            <a:schemeClr val="accent1"/>
+          </a:effectRef>
+          <a:fontRef idx="minor">
+            <a:schemeClr val="lt1"/>
+          </a:fontRef>
+        </p:style>
+        <p:txBody>
+          <a:bodyPr rtlCol="0" anchor="ctr" wrap="square" lIns="73152" rIns="73152"/>
+          <a:lstStyle/>
+          <a:p>
+            <a:pPr algn="ctr"/>
+            <a:r>
+              <a:rPr sz="1300">
+                <a:solidFill>
+                  <a:srgbClr val="000000"/>
+                </a:solidFill>
+              </a:rPr>
+              <a:t>llama3.2 in JSON mode</a:t>
+            </a:r>
+          </a:p>
+        </p:txBody>
+      </p:sp>
+      <p:sp>
+        <p:nvSpPr>
+          <p:cNvPr id="9" name="Right Arrow 8"/>
+          <p:cNvSpPr/>
+          <p:nvPr/>
+        </p:nvSpPr>
+        <p:spPr>
+          <a:xfrm>
+            <a:off x="7082759" y="2043684"/>
+            <a:ext cx="301752" cy="292608"/>
+          </a:xfrm>
+          <a:prstGeom prst="rightArrow">
+            <a:avLst/>
+          </a:prstGeom>
+          <a:solidFill>
+            <a:srgbClr val="000000"/>
+          </a:solidFill>
+          <a:ln>
+            <a:noFill/>
+          </a:ln>
+          <a:effectLst/>
+        </p:spPr>
+        <p:style>
+          <a:lnRef idx="1">
+            <a:schemeClr val="accent1"/>
+          </a:lnRef>
+          <a:fillRef idx="3">
+            <a:schemeClr val="accent1"/>
+          </a:fillRef>
+          <a:effectRef idx="2">
+            <a:schemeClr val="accent1"/>
+          </a:effectRef>
+          <a:fontRef idx="minor">
+            <a:schemeClr val="lt1"/>
+          </a:fontRef>
+        </p:style>
+        <p:txBody>
+          <a:bodyPr rtlCol="0" anchor="ctr"/>
+          <a:lstStyle/>
+          <a:p>
+            <a:pPr algn="ctr"/>
+          </a:p>
+        </p:txBody>
+      </p:sp>
+      <p:sp>
+        <p:nvSpPr>
+          <p:cNvPr id="10" name="Rounded Rectangle 9"/>
+          <p:cNvSpPr/>
+          <p:nvPr/>
+        </p:nvSpPr>
+        <p:spPr>
+          <a:xfrm>
+            <a:off x="7439375" y="1554480"/>
+            <a:ext cx="1864095" cy="1271016"/>
+          </a:xfrm>
+          <a:prstGeom prst="roundRect">
+            <a:avLst/>
+          </a:prstGeom>
+          <a:noFill/>
+          <a:ln w="19050">
+            <a:solidFill>
+              <a:srgbClr val="000000"/>
+            </a:solidFill>
+          </a:ln>
+          <a:effectLst/>
+        </p:spPr>
+        <p:style>
+          <a:lnRef idx="1">
+            <a:schemeClr val="accent1"/>
+          </a:lnRef>
+          <a:fillRef idx="3">
+            <a:schemeClr val="accent1"/>
+          </a:fillRef>
+          <a:effectRef idx="2">
+            <a:schemeClr val="accent1"/>
+          </a:effectRef>
+          <a:fontRef idx="minor">
+            <a:schemeClr val="lt1"/>
+          </a:fontRef>
+        </p:style>
+        <p:txBody>
+          <a:bodyPr rtlCol="0" anchor="ctr" wrap="square" lIns="73152" rIns="73152"/>
+          <a:lstStyle/>
+          <a:p>
+            <a:pPr algn="ctr"/>
+            <a:r>
+              <a:rPr sz="1300">
+                <a:solidFill>
+                  <a:srgbClr val="000000"/>
+                </a:solidFill>
+              </a:rPr>
+              <a:t>Parse and validate against the schema</a:t>
+            </a:r>
+          </a:p>
+        </p:txBody>
+      </p:sp>
+      <p:sp>
+        <p:nvSpPr>
+          <p:cNvPr id="11" name="Right Arrow 10"/>
+          <p:cNvSpPr/>
+          <p:nvPr/>
+        </p:nvSpPr>
+        <p:spPr>
+          <a:xfrm>
+            <a:off x="9358335" y="2043684"/>
+            <a:ext cx="301752" cy="292608"/>
+          </a:xfrm>
+          <a:prstGeom prst="rightArrow">
+            <a:avLst/>
+          </a:prstGeom>
+          <a:solidFill>
+            <a:srgbClr val="000000"/>
+          </a:solidFill>
+          <a:ln>
+            <a:noFill/>
+          </a:ln>
+          <a:effectLst/>
+        </p:spPr>
+        <p:style>
+          <a:lnRef idx="1">
+            <a:schemeClr val="accent1"/>
+          </a:lnRef>
+          <a:fillRef idx="3">
+            <a:schemeClr val="accent1"/>
+          </a:fillRef>
+          <a:effectRef idx="2">
+            <a:schemeClr val="accent1"/>
+          </a:effectRef>
+          <a:fontRef idx="minor">
+            <a:schemeClr val="lt1"/>
+          </a:fontRef>
+        </p:style>
+        <p:txBody>
+          <a:bodyPr rtlCol="0" anchor="ctr"/>
+          <a:lstStyle/>
+          <a:p>
+            <a:pPr algn="ctr"/>
+          </a:p>
+        </p:txBody>
+      </p:sp>
+      <p:sp>
+        <p:nvSpPr>
+          <p:cNvPr id="12" name="Rounded Rectangle 11"/>
+          <p:cNvSpPr/>
+          <p:nvPr/>
+        </p:nvSpPr>
+        <p:spPr>
+          <a:xfrm>
+            <a:off x="9714951" y="1554480"/>
+            <a:ext cx="1864095" cy="1271016"/>
+          </a:xfrm>
+          <a:prstGeom prst="roundRect">
+            <a:avLst/>
+          </a:prstGeom>
+          <a:noFill/>
+          <a:ln w="19050">
+            <a:solidFill>
+              <a:srgbClr val="000000"/>
+            </a:solidFill>
+          </a:ln>
+          <a:effectLst/>
+        </p:spPr>
+        <p:style>
+          <a:lnRef idx="1">
+            <a:schemeClr val="accent1"/>
+          </a:lnRef>
+          <a:fillRef idx="3">
+            <a:schemeClr val="accent1"/>
+          </a:fillRef>
+          <a:effectRef idx="2">
+            <a:schemeClr val="accent1"/>
+          </a:effectRef>
+          <a:fontRef idx="minor">
+            <a:schemeClr val="lt1"/>
+          </a:fontRef>
+        </p:style>
+        <p:txBody>
+          <a:bodyPr rtlCol="0" anchor="ctr" wrap="square" lIns="73152" rIns="73152"/>
+          <a:lstStyle/>
+          <a:p>
+            <a:pPr algn="ctr"/>
+            <a:r>
+              <a:rPr sz="1300">
+                <a:solidFill>
+                  <a:srgbClr val="000000"/>
+                </a:solidFill>
+              </a:rPr>
+              <a:t>Store, or reject and log</a:t>
             </a:r>
           </a:p>
         </p:txBody>
@@ -4536,7 +5263,7 @@
           <a:lstStyle/>
           <a:p>
             <a:r>
-              <a:t>03 · The Concept</a:t>
+              <a:t>02 · Demo: What to Watch</a:t>
             </a:r>
           </a:p>
         </p:txBody>
@@ -4554,7 +5281,7 @@
         <p:spPr>
           <a:xfrm>
             <a:off x="612648" y="1600200"/>
-            <a:ext cx="10966399" cy="4800600"/>
+            <a:ext cx="10966399" cy="4892040"/>
           </a:xfrm>
         </p:spPr>
         <p:txBody>
@@ -4564,28 +5291,35 @@
             <a:pPr/>
             <a:r>
               <a:rPr sz="2000"/>
-              <a:t>Classification applied to text, and the day's model-selection lesson: you don't always need the big model</a:t>
+              <a:t>Define a C# record (TripFacts); typed response, no parsing step</a:t>
             </a:r>
           </a:p>
           <a:p>
             <a:pPr/>
             <a:r>
               <a:rPr sz="2000"/>
-              <a:t>phi3 (2 GB, free, private) vs Azure OpenAI, same prompt</a:t>
+              <a:t>Break it: a report that never mentions distance comes back with distance_mi: 5.0</a:t>
             </a:r>
           </a:p>
           <a:p>
             <a:pPr/>
             <a:r>
               <a:rPr sz="2000"/>
-              <a:t>Easy reviews: expect a tie. Hard reviews (sarcasm, mixed, rating contradicts text): measure the gap.</a:t>
+              <a:t>Fix in the schema: nullable fields, "null when not stated"</a:t>
             </a:r>
           </a:p>
           <a:p>
             <a:pPr/>
             <a:r>
               <a:rPr sz="2000"/>
-              <a:t>The decision is measurable: labeled sample, run both, count disagreements, price the errors</a:t>
+              <a:t>Run it two or three times: it gets better, and it is not a guarantee. elevation_gain_ft: 0 where the honest answer is null; "early last month" as a date.</a:t>
+            </a:r>
+          </a:p>
+          <a:p>
+            <a:pPr/>
+            <a:r>
+              <a:rPr sz="2000"/>
+              <a:t>The last mile is a validator, which is ordinary code your team already knows how to write.</a:t>
             </a:r>
           </a:p>
         </p:txBody>
@@ -4629,7 +5363,7 @@
           <a:lstStyle/>
           <a:p>
             <a:r>
-              <a:t>03 · Demo: What to Watch</a:t>
+              <a:t>02 · Leadership Card</a:t>
             </a:r>
           </a:p>
         </p:txBody>
@@ -4647,7 +5381,7 @@
         <p:spPr>
           <a:xfrm>
             <a:off x="612648" y="1600200"/>
-            <a:ext cx="10966399" cy="4800600"/>
+            <a:ext cx="10966399" cy="4892040"/>
           </a:xfrm>
         </p:spPr>
         <p:txBody>
@@ -4657,35 +5391,21 @@
             <a:pPr/>
             <a:r>
               <a:rPr sz="2000"/>
-              <a:t>One classify method, positive | negative | mixed; the provider swap is one DI line</a:t>
+              <a:t>When: valuable data trapped in documents. Invoices, resumes, support emails, contracts, legacy records.</a:t>
             </a:r>
           </a:p>
           <a:p>
             <a:pPr/>
             <a:r>
               <a:rPr sz="2000"/>
-              <a:t>20 easy reviews through phi3: fast, free, and correct</a:t>
+              <a:t>Cost: days to a working pipeline. The real work is schema design and spot-checking accuracy.</a:t>
             </a:r>
           </a:p>
           <a:p>
             <a:pPr/>
             <a:r>
               <a:rPr sz="2000"/>
-              <a:t>Same 20 through Azure: nine of ten identical, and the tenth goes to the frontier model</a:t>
-            </a:r>
-          </a:p>
-          <a:p>
-            <a:pPr/>
-            <a:r>
-              <a:rPr sz="2000"/>
-              <a:t>The hard set through both; diff the labels on screen. The disagreements are where the arguments live.</a:t>
-            </a:r>
-          </a:p>
-          <a:p>
-            <a:pPr/>
-            <a:r>
-              <a:rPr sz="2000"/>
-              <a:t>Measured: phi3 9/10 easy, 7/10 hard. gpt-4.1 on Azure: 10/10 and 10/10. The local stand-in (llama3.2): identical to phi3.</a:t>
+              <a:t>"We have years of data trapped in documents. This turns it into queryable rows without anyone re-typing it."</a:t>
             </a:r>
           </a:p>
         </p:txBody>
@@ -4729,7 +5449,7 @@
           <a:lstStyle/>
           <a:p>
             <a:r>
-              <a:t>03 · Leadership Card</a:t>
+              <a:t>03 · Sentiment: The User Problem</a:t>
             </a:r>
           </a:p>
         </p:txBody>
@@ -4747,7 +5467,7 @@
         <p:spPr>
           <a:xfrm>
             <a:off x="612648" y="1600200"/>
-            <a:ext cx="10966399" cy="4800600"/>
+            <a:ext cx="10966399" cy="4892040"/>
           </a:xfrm>
         </p:spPr>
         <p:txBody>
@@ -4757,21 +5477,21 @@
             <a:pPr/>
             <a:r>
               <a:rPr sz="2000"/>
-              <a:t>When: any high-volume text stream needing a judgment call. Reviews, NPS verbatims, tickets, mentions, survey answers.</a:t>
+              <a:t>The Cascade 65 backpack has 300 reviews. Are people happy, and what are they mad about?</a:t>
             </a:r>
           </a:p>
           <a:p>
             <a:pPr/>
             <a:r>
               <a:rPr sz="2000"/>
-              <a:t>Cost: days. The classifier is trivial; the diligence is a labeled sample and an error count.</a:t>
+              <a:t>Star ratings lie: "4 stars, but the hip belt broke on day two"</a:t>
             </a:r>
           </a:p>
           <a:p>
             <a:pPr/>
             <a:r>
               <a:rPr sz="2000"/>
-              <a:t>"We measured: the free local model matches the expensive one on most of this task, and we know exactly which slice needs the big gun."</a:t>
+              <a:t>The user here is the product team, not the hiker</a:t>
             </a:r>
           </a:p>
         </p:txBody>
@@ -4815,7 +5535,7 @@
           <a:lstStyle/>
           <a:p>
             <a:r>
-              <a:t>Hands-On: 60 Minutes</a:t>
+              <a:t>03 · The Concept</a:t>
             </a:r>
           </a:p>
         </p:txBody>
@@ -4833,7 +5553,7 @@
         <p:spPr>
           <a:xfrm>
             <a:off x="612648" y="1600200"/>
-            <a:ext cx="10966399" cy="4800600"/>
+            <a:ext cx="10966399" cy="4892040"/>
           </a:xfrm>
         </p:spPr>
         <p:txBody>
@@ -4843,21 +5563,28 @@
             <a:pPr/>
             <a:r>
               <a:rPr sz="2000"/>
-              <a:t>Start with 01 Summarization (Recommended). One endpoint, one prompt, two reports. New to this? Budget the full time and do the stretch goal.</a:t>
+              <a:t>Classification applied to text, and the day's model-selection lesson: you don't always need the big model</a:t>
             </a:r>
           </a:p>
           <a:p>
             <a:pPr/>
             <a:r>
               <a:rPr sz="2000"/>
-              <a:t>Then, if you have time: 02 Extraction (more code, most reusable at work) or 03 Sentiment (least code, most measurement; pick this if your question is "which model should we pay for")</a:t>
+              <a:t>phi3 (2 GB, free, private) vs Azure OpenAI, same prompt</a:t>
             </a:r>
           </a:p>
           <a:p>
             <a:pPr/>
             <a:r>
               <a:rPr sz="2000"/>
-              <a:t>Every feature folder: FNN-lab.md, http/ollama.http, expected-output.md, and data/</a:t>
+              <a:t>Easy reviews: expect a tie. Hard reviews (sarcasm, mixed, rating contradicts text): measure the gap.</a:t>
+            </a:r>
+          </a:p>
+          <a:p>
+            <a:pPr/>
+            <a:r>
+              <a:rPr sz="2000"/>
+              <a:t>The decision is measurable: labeled sample, run both, count disagreements, price the errors</a:t>
             </a:r>
           </a:p>
         </p:txBody>
@@ -4901,7 +5628,7 @@
           <a:lstStyle/>
           <a:p>
             <a:r>
-              <a:t>Debrief</a:t>
+              <a:t>03 · How It Works</a:t>
             </a:r>
           </a:p>
         </p:txBody>
@@ -4918,8 +5645,530 @@
         </p:nvSpPr>
         <p:spPr>
           <a:xfrm>
+            <a:off x="612648" y="3099816"/>
+            <a:ext cx="10966399" cy="3392424"/>
+          </a:xfrm>
+        </p:spPr>
+        <p:txBody>
+          <a:bodyPr wrap="square"/>
+          <a:lstStyle/>
+          <a:p>
+            <a:pPr/>
+            <a:r>
+              <a:rPr sz="1600"/>
+              <a:t>Same shape as extraction with a one-word output, which makes it the cleanest place to compare models</a:t>
+            </a:r>
+          </a:p>
+          <a:p>
+            <a:pPr/>
+            <a:r>
+              <a:rPr sz="1600"/>
+              <a:t>Everything else held equal: same prompt, same reviews, same gold labels. Swap the model box and count.</a:t>
+            </a:r>
+          </a:p>
+          <a:p>
+            <a:pPr/>
+            <a:r>
+              <a:rPr sz="1600"/>
+              <a:t>Small model for the easy pile, big model for the sarcastic slice: the number tells you where the money goes</a:t>
+            </a:r>
+          </a:p>
+        </p:txBody>
+      </p:sp>
+      <p:sp>
+        <p:nvSpPr>
+          <p:cNvPr id="4" name="Rounded Rectangle 3"/>
+          <p:cNvSpPr/>
+          <p:nvPr/>
+        </p:nvSpPr>
+        <p:spPr>
+          <a:xfrm>
+            <a:off x="612648" y="1554480"/>
+            <a:ext cx="1864095" cy="1271016"/>
+          </a:xfrm>
+          <a:prstGeom prst="roundRect">
+            <a:avLst/>
+          </a:prstGeom>
+          <a:noFill/>
+          <a:ln w="19050">
+            <a:solidFill>
+              <a:srgbClr val="000000"/>
+            </a:solidFill>
+          </a:ln>
+          <a:effectLst/>
+        </p:spPr>
+        <p:style>
+          <a:lnRef idx="1">
+            <a:schemeClr val="accent1"/>
+          </a:lnRef>
+          <a:fillRef idx="3">
+            <a:schemeClr val="accent1"/>
+          </a:fillRef>
+          <a:effectRef idx="2">
+            <a:schemeClr val="accent1"/>
+          </a:effectRef>
+          <a:fontRef idx="minor">
+            <a:schemeClr val="lt1"/>
+          </a:fontRef>
+        </p:style>
+        <p:txBody>
+          <a:bodyPr rtlCol="0" anchor="ctr" wrap="square" lIns="73152" rIns="73152"/>
+          <a:lstStyle/>
+          <a:p>
+            <a:pPr algn="ctr"/>
+            <a:r>
+              <a:rPr sz="1300">
+                <a:solidFill>
+                  <a:srgbClr val="000000"/>
+                </a:solidFill>
+              </a:rPr>
+              <a:t>Gear review</a:t>
+            </a:r>
+          </a:p>
+        </p:txBody>
+      </p:sp>
+      <p:sp>
+        <p:nvSpPr>
+          <p:cNvPr id="5" name="Right Arrow 4"/>
+          <p:cNvSpPr/>
+          <p:nvPr/>
+        </p:nvSpPr>
+        <p:spPr>
+          <a:xfrm>
+            <a:off x="2531607" y="2043684"/>
+            <a:ext cx="301752" cy="292608"/>
+          </a:xfrm>
+          <a:prstGeom prst="rightArrow">
+            <a:avLst/>
+          </a:prstGeom>
+          <a:solidFill>
+            <a:srgbClr val="000000"/>
+          </a:solidFill>
+          <a:ln>
+            <a:noFill/>
+          </a:ln>
+          <a:effectLst/>
+        </p:spPr>
+        <p:style>
+          <a:lnRef idx="1">
+            <a:schemeClr val="accent1"/>
+          </a:lnRef>
+          <a:fillRef idx="3">
+            <a:schemeClr val="accent1"/>
+          </a:fillRef>
+          <a:effectRef idx="2">
+            <a:schemeClr val="accent1"/>
+          </a:effectRef>
+          <a:fontRef idx="minor">
+            <a:schemeClr val="lt1"/>
+          </a:fontRef>
+        </p:style>
+        <p:txBody>
+          <a:bodyPr rtlCol="0" anchor="ctr"/>
+          <a:lstStyle/>
+          <a:p>
+            <a:pPr algn="ctr"/>
+          </a:p>
+        </p:txBody>
+      </p:sp>
+      <p:sp>
+        <p:nvSpPr>
+          <p:cNvPr id="6" name="Rounded Rectangle 5"/>
+          <p:cNvSpPr/>
+          <p:nvPr/>
+        </p:nvSpPr>
+        <p:spPr>
+          <a:xfrm>
+            <a:off x="2888223" y="1554480"/>
+            <a:ext cx="1864095" cy="1271016"/>
+          </a:xfrm>
+          <a:prstGeom prst="roundRect">
+            <a:avLst/>
+          </a:prstGeom>
+          <a:noFill/>
+          <a:ln w="19050">
+            <a:solidFill>
+              <a:srgbClr val="000000"/>
+            </a:solidFill>
+          </a:ln>
+          <a:effectLst/>
+        </p:spPr>
+        <p:style>
+          <a:lnRef idx="1">
+            <a:schemeClr val="accent1"/>
+          </a:lnRef>
+          <a:fillRef idx="3">
+            <a:schemeClr val="accent1"/>
+          </a:fillRef>
+          <a:effectRef idx="2">
+            <a:schemeClr val="accent1"/>
+          </a:effectRef>
+          <a:fontRef idx="minor">
+            <a:schemeClr val="lt1"/>
+          </a:fontRef>
+        </p:style>
+        <p:txBody>
+          <a:bodyPr rtlCol="0" anchor="ctr" wrap="square" lIns="73152" rIns="73152"/>
+          <a:lstStyle/>
+          <a:p>
+            <a:pPr algn="ctr"/>
+            <a:r>
+              <a:rPr sz="1300">
+                <a:solidFill>
+                  <a:srgbClr val="000000"/>
+                </a:solidFill>
+              </a:rPr>
+              <a:t>Prompt: the three labels, what each means, two examples</a:t>
+            </a:r>
+          </a:p>
+        </p:txBody>
+      </p:sp>
+      <p:sp>
+        <p:nvSpPr>
+          <p:cNvPr id="7" name="Right Arrow 6"/>
+          <p:cNvSpPr/>
+          <p:nvPr/>
+        </p:nvSpPr>
+        <p:spPr>
+          <a:xfrm>
+            <a:off x="4807183" y="2043684"/>
+            <a:ext cx="301752" cy="292608"/>
+          </a:xfrm>
+          <a:prstGeom prst="rightArrow">
+            <a:avLst/>
+          </a:prstGeom>
+          <a:solidFill>
+            <a:srgbClr val="000000"/>
+          </a:solidFill>
+          <a:ln>
+            <a:noFill/>
+          </a:ln>
+          <a:effectLst/>
+        </p:spPr>
+        <p:style>
+          <a:lnRef idx="1">
+            <a:schemeClr val="accent1"/>
+          </a:lnRef>
+          <a:fillRef idx="3">
+            <a:schemeClr val="accent1"/>
+          </a:fillRef>
+          <a:effectRef idx="2">
+            <a:schemeClr val="accent1"/>
+          </a:effectRef>
+          <a:fontRef idx="minor">
+            <a:schemeClr val="lt1"/>
+          </a:fontRef>
+        </p:style>
+        <p:txBody>
+          <a:bodyPr rtlCol="0" anchor="ctr"/>
+          <a:lstStyle/>
+          <a:p>
+            <a:pPr algn="ctr"/>
+          </a:p>
+        </p:txBody>
+      </p:sp>
+      <p:sp>
+        <p:nvSpPr>
+          <p:cNvPr id="8" name="Rounded Rectangle 7"/>
+          <p:cNvSpPr/>
+          <p:nvPr/>
+        </p:nvSpPr>
+        <p:spPr>
+          <a:xfrm>
+            <a:off x="5163799" y="1554480"/>
+            <a:ext cx="1864095" cy="1271016"/>
+          </a:xfrm>
+          <a:prstGeom prst="roundRect">
+            <a:avLst/>
+          </a:prstGeom>
+          <a:noFill/>
+          <a:ln w="19050">
+            <a:solidFill>
+              <a:srgbClr val="000000"/>
+            </a:solidFill>
+          </a:ln>
+          <a:effectLst/>
+        </p:spPr>
+        <p:style>
+          <a:lnRef idx="1">
+            <a:schemeClr val="accent1"/>
+          </a:lnRef>
+          <a:fillRef idx="3">
+            <a:schemeClr val="accent1"/>
+          </a:fillRef>
+          <a:effectRef idx="2">
+            <a:schemeClr val="accent1"/>
+          </a:effectRef>
+          <a:fontRef idx="minor">
+            <a:schemeClr val="lt1"/>
+          </a:fontRef>
+        </p:style>
+        <p:txBody>
+          <a:bodyPr rtlCol="0" anchor="ctr" wrap="square" lIns="73152" rIns="73152"/>
+          <a:lstStyle/>
+          <a:p>
+            <a:pPr algn="ctr"/>
+            <a:r>
+              <a:rPr sz="1300">
+                <a:solidFill>
+                  <a:srgbClr val="000000"/>
+                </a:solidFill>
+              </a:rPr>
+              <a:t>Model (phi3 local, or gpt-4.1 on Foundry)</a:t>
+            </a:r>
+          </a:p>
+        </p:txBody>
+      </p:sp>
+      <p:sp>
+        <p:nvSpPr>
+          <p:cNvPr id="9" name="Right Arrow 8"/>
+          <p:cNvSpPr/>
+          <p:nvPr/>
+        </p:nvSpPr>
+        <p:spPr>
+          <a:xfrm>
+            <a:off x="7082759" y="2043684"/>
+            <a:ext cx="301752" cy="292608"/>
+          </a:xfrm>
+          <a:prstGeom prst="rightArrow">
+            <a:avLst/>
+          </a:prstGeom>
+          <a:solidFill>
+            <a:srgbClr val="000000"/>
+          </a:solidFill>
+          <a:ln>
+            <a:noFill/>
+          </a:ln>
+          <a:effectLst/>
+        </p:spPr>
+        <p:style>
+          <a:lnRef idx="1">
+            <a:schemeClr val="accent1"/>
+          </a:lnRef>
+          <a:fillRef idx="3">
+            <a:schemeClr val="accent1"/>
+          </a:fillRef>
+          <a:effectRef idx="2">
+            <a:schemeClr val="accent1"/>
+          </a:effectRef>
+          <a:fontRef idx="minor">
+            <a:schemeClr val="lt1"/>
+          </a:fontRef>
+        </p:style>
+        <p:txBody>
+          <a:bodyPr rtlCol="0" anchor="ctr"/>
+          <a:lstStyle/>
+          <a:p>
+            <a:pPr algn="ctr"/>
+          </a:p>
+        </p:txBody>
+      </p:sp>
+      <p:sp>
+        <p:nvSpPr>
+          <p:cNvPr id="10" name="Rounded Rectangle 9"/>
+          <p:cNvSpPr/>
+          <p:nvPr/>
+        </p:nvSpPr>
+        <p:spPr>
+          <a:xfrm>
+            <a:off x="7439375" y="1554480"/>
+            <a:ext cx="1864095" cy="1271016"/>
+          </a:xfrm>
+          <a:prstGeom prst="roundRect">
+            <a:avLst/>
+          </a:prstGeom>
+          <a:noFill/>
+          <a:ln w="19050">
+            <a:solidFill>
+              <a:srgbClr val="000000"/>
+            </a:solidFill>
+          </a:ln>
+          <a:effectLst/>
+        </p:spPr>
+        <p:style>
+          <a:lnRef idx="1">
+            <a:schemeClr val="accent1"/>
+          </a:lnRef>
+          <a:fillRef idx="3">
+            <a:schemeClr val="accent1"/>
+          </a:fillRef>
+          <a:effectRef idx="2">
+            <a:schemeClr val="accent1"/>
+          </a:effectRef>
+          <a:fontRef idx="minor">
+            <a:schemeClr val="lt1"/>
+          </a:fontRef>
+        </p:style>
+        <p:txBody>
+          <a:bodyPr rtlCol="0" anchor="ctr" wrap="square" lIns="73152" rIns="73152"/>
+          <a:lstStyle/>
+          <a:p>
+            <a:pPr algn="ctr"/>
+            <a:r>
+              <a:rPr sz="1300">
+                <a:solidFill>
+                  <a:srgbClr val="000000"/>
+                </a:solidFill>
+              </a:rPr>
+              <a:t>One word</a:t>
+            </a:r>
+          </a:p>
+        </p:txBody>
+      </p:sp>
+      <p:sp>
+        <p:nvSpPr>
+          <p:cNvPr id="11" name="Right Arrow 10"/>
+          <p:cNvSpPr/>
+          <p:nvPr/>
+        </p:nvSpPr>
+        <p:spPr>
+          <a:xfrm>
+            <a:off x="9358335" y="2043684"/>
+            <a:ext cx="301752" cy="292608"/>
+          </a:xfrm>
+          <a:prstGeom prst="rightArrow">
+            <a:avLst/>
+          </a:prstGeom>
+          <a:solidFill>
+            <a:srgbClr val="000000"/>
+          </a:solidFill>
+          <a:ln>
+            <a:noFill/>
+          </a:ln>
+          <a:effectLst/>
+        </p:spPr>
+        <p:style>
+          <a:lnRef idx="1">
+            <a:schemeClr val="accent1"/>
+          </a:lnRef>
+          <a:fillRef idx="3">
+            <a:schemeClr val="accent1"/>
+          </a:fillRef>
+          <a:effectRef idx="2">
+            <a:schemeClr val="accent1"/>
+          </a:effectRef>
+          <a:fontRef idx="minor">
+            <a:schemeClr val="lt1"/>
+          </a:fontRef>
+        </p:style>
+        <p:txBody>
+          <a:bodyPr rtlCol="0" anchor="ctr"/>
+          <a:lstStyle/>
+          <a:p>
+            <a:pPr algn="ctr"/>
+          </a:p>
+        </p:txBody>
+      </p:sp>
+      <p:sp>
+        <p:nvSpPr>
+          <p:cNvPr id="12" name="Rounded Rectangle 11"/>
+          <p:cNvSpPr/>
+          <p:nvPr/>
+        </p:nvSpPr>
+        <p:spPr>
+          <a:xfrm>
+            <a:off x="9714951" y="1554480"/>
+            <a:ext cx="1864095" cy="1271016"/>
+          </a:xfrm>
+          <a:prstGeom prst="roundRect">
+            <a:avLst/>
+          </a:prstGeom>
+          <a:noFill/>
+          <a:ln w="19050">
+            <a:solidFill>
+              <a:srgbClr val="000000"/>
+            </a:solidFill>
+          </a:ln>
+          <a:effectLst/>
+        </p:spPr>
+        <p:style>
+          <a:lnRef idx="1">
+            <a:schemeClr val="accent1"/>
+          </a:lnRef>
+          <a:fillRef idx="3">
+            <a:schemeClr val="accent1"/>
+          </a:fillRef>
+          <a:effectRef idx="2">
+            <a:schemeClr val="accent1"/>
+          </a:effectRef>
+          <a:fontRef idx="minor">
+            <a:schemeClr val="lt1"/>
+          </a:fontRef>
+        </p:style>
+        <p:txBody>
+          <a:bodyPr rtlCol="0" anchor="ctr" wrap="square" lIns="73152" rIns="73152"/>
+          <a:lstStyle/>
+          <a:p>
+            <a:pPr algn="ctr"/>
+            <a:r>
+              <a:rPr sz="1300">
+                <a:solidFill>
+                  <a:srgbClr val="000000"/>
+                </a:solidFill>
+              </a:rPr>
+              <a:t>Compare with the gold label</a:t>
+            </a:r>
+          </a:p>
+        </p:txBody>
+      </p:sp>
+    </p:spTree>
+  </p:cSld>
+  <p:clrMapOvr>
+    <a:masterClrMapping/>
+  </p:clrMapOvr>
+</p:sld>
+</file>
+
+<file path=ppt/slides/slide17.xml><?xml version="1.0" encoding="utf-8"?>
+<p:sld xmlns:a="http://schemas.openxmlformats.org/drawingml/2006/main" xmlns:p="http://schemas.openxmlformats.org/presentationml/2006/main" xmlns:r="http://schemas.openxmlformats.org/officeDocument/2006/relationships">
+  <p:cSld>
+    <p:spTree>
+      <p:nvGrpSpPr>
+        <p:cNvPr id="1" name=""/>
+        <p:cNvGrpSpPr/>
+        <p:nvPr/>
+      </p:nvGrpSpPr>
+      <p:grpSpPr/>
+      <p:sp>
+        <p:nvSpPr>
+          <p:cNvPr id="2" name="Title 1"/>
+          <p:cNvSpPr>
+            <a:spLocks noGrp="1"/>
+          </p:cNvSpPr>
+          <p:nvPr>
+            <p:ph type="title"/>
+          </p:nvPr>
+        </p:nvSpPr>
+        <p:spPr>
+          <a:xfrm>
+            <a:off x="612648" y="365760"/>
+            <a:ext cx="10966399" cy="1097280"/>
+          </a:xfrm>
+        </p:spPr>
+        <p:txBody>
+          <a:bodyPr/>
+          <a:lstStyle/>
+          <a:p>
+            <a:r>
+              <a:t>03 · Demo: What to Watch</a:t>
+            </a:r>
+          </a:p>
+        </p:txBody>
+      </p:sp>
+      <p:sp>
+        <p:nvSpPr>
+          <p:cNvPr id="3" name="Content Placeholder 2"/>
+          <p:cNvSpPr>
+            <a:spLocks noGrp="1"/>
+          </p:cNvSpPr>
+          <p:nvPr>
+            <p:ph idx="1"/>
+          </p:nvPr>
+        </p:nvSpPr>
+        <p:spPr>
+          <a:xfrm>
             <a:off x="612648" y="1600200"/>
-            <a:ext cx="10966399" cy="4800600"/>
+            <a:ext cx="10966399" cy="4892040"/>
           </a:xfrm>
         </p:spPr>
         <p:txBody>
@@ -4929,21 +6178,207 @@
             <a:pPr/>
             <a:r>
               <a:rPr sz="2000"/>
-              <a:t>What surfaced the buried bridge, and what invented one?</a:t>
+              <a:t>One classify method, positive | negative | mixed; the provider swap is one DI line</a:t>
             </a:r>
           </a:p>
           <a:p>
             <a:pPr/>
             <a:r>
               <a:rPr sz="2000"/>
-              <a:t>Rows 1 to 3 of the decision framework are done</a:t>
+              <a:t>20 easy reviews through phi3: fast, free, and correct</a:t>
             </a:r>
           </a:p>
           <a:p>
             <a:pPr/>
             <a:r>
               <a:rPr sz="2000"/>
-              <a:t>Break, then Module 2.</a:t>
+              <a:t>Same 20 through Azure: nine of ten identical, and the tenth goes to the frontier model</a:t>
+            </a:r>
+          </a:p>
+          <a:p>
+            <a:pPr/>
+            <a:r>
+              <a:rPr sz="2000"/>
+              <a:t>The hard set through both; diff the labels on screen. The disagreements are where the arguments live.</a:t>
+            </a:r>
+          </a:p>
+          <a:p>
+            <a:pPr/>
+            <a:r>
+              <a:rPr sz="2000"/>
+              <a:t>Measured: phi3 9/10 easy, 7/10 hard. gpt-4.1 on Azure: 10/10 and 10/10. The local stand-in (llama3.2): identical to phi3.</a:t>
+            </a:r>
+          </a:p>
+        </p:txBody>
+      </p:sp>
+    </p:spTree>
+  </p:cSld>
+  <p:clrMapOvr>
+    <a:masterClrMapping/>
+  </p:clrMapOvr>
+</p:sld>
+</file>
+
+<file path=ppt/slides/slide18.xml><?xml version="1.0" encoding="utf-8"?>
+<p:sld xmlns:a="http://schemas.openxmlformats.org/drawingml/2006/main" xmlns:p="http://schemas.openxmlformats.org/presentationml/2006/main" xmlns:r="http://schemas.openxmlformats.org/officeDocument/2006/relationships">
+  <p:cSld>
+    <p:spTree>
+      <p:nvGrpSpPr>
+        <p:cNvPr id="1" name=""/>
+        <p:cNvGrpSpPr/>
+        <p:nvPr/>
+      </p:nvGrpSpPr>
+      <p:grpSpPr/>
+      <p:sp>
+        <p:nvSpPr>
+          <p:cNvPr id="2" name="Title 1"/>
+          <p:cNvSpPr>
+            <a:spLocks noGrp="1"/>
+          </p:cNvSpPr>
+          <p:nvPr>
+            <p:ph type="title"/>
+          </p:nvPr>
+        </p:nvSpPr>
+        <p:spPr>
+          <a:xfrm>
+            <a:off x="612648" y="365760"/>
+            <a:ext cx="10966399" cy="1097280"/>
+          </a:xfrm>
+        </p:spPr>
+        <p:txBody>
+          <a:bodyPr/>
+          <a:lstStyle/>
+          <a:p>
+            <a:r>
+              <a:t>03 · Leadership Card</a:t>
+            </a:r>
+          </a:p>
+        </p:txBody>
+      </p:sp>
+      <p:sp>
+        <p:nvSpPr>
+          <p:cNvPr id="3" name="Content Placeholder 2"/>
+          <p:cNvSpPr>
+            <a:spLocks noGrp="1"/>
+          </p:cNvSpPr>
+          <p:nvPr>
+            <p:ph idx="1"/>
+          </p:nvPr>
+        </p:nvSpPr>
+        <p:spPr>
+          <a:xfrm>
+            <a:off x="612648" y="1600200"/>
+            <a:ext cx="10966399" cy="4892040"/>
+          </a:xfrm>
+        </p:spPr>
+        <p:txBody>
+          <a:bodyPr wrap="square"/>
+          <a:lstStyle/>
+          <a:p>
+            <a:pPr/>
+            <a:r>
+              <a:rPr sz="2000"/>
+              <a:t>When: any high-volume text stream needing a judgment call. Reviews, NPS verbatims, tickets, mentions, survey answers.</a:t>
+            </a:r>
+          </a:p>
+          <a:p>
+            <a:pPr/>
+            <a:r>
+              <a:rPr sz="2000"/>
+              <a:t>Cost: days. The classifier is trivial; the diligence is a labeled sample and an error count.</a:t>
+            </a:r>
+          </a:p>
+          <a:p>
+            <a:pPr/>
+            <a:r>
+              <a:rPr sz="2000"/>
+              <a:t>"We measured: the free local model matches the expensive one on most of this task, and we know exactly which slice needs the big gun."</a:t>
+            </a:r>
+          </a:p>
+        </p:txBody>
+      </p:sp>
+    </p:spTree>
+  </p:cSld>
+  <p:clrMapOvr>
+    <a:masterClrMapping/>
+  </p:clrMapOvr>
+</p:sld>
+</file>
+
+<file path=ppt/slides/slide19.xml><?xml version="1.0" encoding="utf-8"?>
+<p:sld xmlns:a="http://schemas.openxmlformats.org/drawingml/2006/main" xmlns:p="http://schemas.openxmlformats.org/presentationml/2006/main" xmlns:r="http://schemas.openxmlformats.org/officeDocument/2006/relationships">
+  <p:cSld>
+    <p:spTree>
+      <p:nvGrpSpPr>
+        <p:cNvPr id="1" name=""/>
+        <p:cNvGrpSpPr/>
+        <p:nvPr/>
+      </p:nvGrpSpPr>
+      <p:grpSpPr/>
+      <p:sp>
+        <p:nvSpPr>
+          <p:cNvPr id="2" name="Title 1"/>
+          <p:cNvSpPr>
+            <a:spLocks noGrp="1"/>
+          </p:cNvSpPr>
+          <p:nvPr>
+            <p:ph type="title"/>
+          </p:nvPr>
+        </p:nvSpPr>
+        <p:spPr>
+          <a:xfrm>
+            <a:off x="612648" y="365760"/>
+            <a:ext cx="10966399" cy="1097280"/>
+          </a:xfrm>
+        </p:spPr>
+        <p:txBody>
+          <a:bodyPr/>
+          <a:lstStyle/>
+          <a:p>
+            <a:r>
+              <a:t>Hands-On: 60 Minutes</a:t>
+            </a:r>
+          </a:p>
+        </p:txBody>
+      </p:sp>
+      <p:sp>
+        <p:nvSpPr>
+          <p:cNvPr id="3" name="Content Placeholder 2"/>
+          <p:cNvSpPr>
+            <a:spLocks noGrp="1"/>
+          </p:cNvSpPr>
+          <p:nvPr>
+            <p:ph idx="1"/>
+          </p:nvPr>
+        </p:nvSpPr>
+        <p:spPr>
+          <a:xfrm>
+            <a:off x="612648" y="1600200"/>
+            <a:ext cx="10966399" cy="4892040"/>
+          </a:xfrm>
+        </p:spPr>
+        <p:txBody>
+          <a:bodyPr wrap="square"/>
+          <a:lstStyle/>
+          <a:p>
+            <a:pPr/>
+            <a:r>
+              <a:rPr sz="2000"/>
+              <a:t>Start with 01 Summarization (Recommended). One endpoint, one prompt, two reports. New to this? Budget the full time and do the stretch goal.</a:t>
+            </a:r>
+          </a:p>
+          <a:p>
+            <a:pPr/>
+            <a:r>
+              <a:rPr sz="2000"/>
+              <a:t>Then, if you have time: 02 Extraction (more code, most reusable at work) or 03 Sentiment (least code, most measurement; pick this if your question is "which model should we pay for")</a:t>
+            </a:r>
+          </a:p>
+          <a:p>
+            <a:pPr/>
+            <a:r>
+              <a:rPr sz="2000"/>
+              <a:t>Every feature folder: FNN-lab.md, http/ollama.http, expected-output.md, and data/</a:t>
             </a:r>
           </a:p>
         </p:txBody>
@@ -5005,7 +6440,7 @@
         <p:spPr>
           <a:xfrm>
             <a:off x="612648" y="1600200"/>
-            <a:ext cx="10966399" cy="4800600"/>
+            <a:ext cx="10966399" cy="4892040"/>
           </a:xfrm>
         </p:spPr>
         <p:txBody>
@@ -5044,6 +6479,92 @@
             <a:r>
               <a:rPr sz="2000"/>
               <a:t>A better model does not fix this. A more specific instruction, a schema that permits null, and code that checks the output do.</a:t>
+            </a:r>
+          </a:p>
+        </p:txBody>
+      </p:sp>
+    </p:spTree>
+  </p:cSld>
+  <p:clrMapOvr>
+    <a:masterClrMapping/>
+  </p:clrMapOvr>
+</p:sld>
+</file>
+
+<file path=ppt/slides/slide20.xml><?xml version="1.0" encoding="utf-8"?>
+<p:sld xmlns:a="http://schemas.openxmlformats.org/drawingml/2006/main" xmlns:p="http://schemas.openxmlformats.org/presentationml/2006/main" xmlns:r="http://schemas.openxmlformats.org/officeDocument/2006/relationships">
+  <p:cSld>
+    <p:spTree>
+      <p:nvGrpSpPr>
+        <p:cNvPr id="1" name=""/>
+        <p:cNvGrpSpPr/>
+        <p:nvPr/>
+      </p:nvGrpSpPr>
+      <p:grpSpPr/>
+      <p:sp>
+        <p:nvSpPr>
+          <p:cNvPr id="2" name="Title 1"/>
+          <p:cNvSpPr>
+            <a:spLocks noGrp="1"/>
+          </p:cNvSpPr>
+          <p:nvPr>
+            <p:ph type="title"/>
+          </p:nvPr>
+        </p:nvSpPr>
+        <p:spPr>
+          <a:xfrm>
+            <a:off x="612648" y="365760"/>
+            <a:ext cx="10966399" cy="1097280"/>
+          </a:xfrm>
+        </p:spPr>
+        <p:txBody>
+          <a:bodyPr/>
+          <a:lstStyle/>
+          <a:p>
+            <a:r>
+              <a:t>Debrief</a:t>
+            </a:r>
+          </a:p>
+        </p:txBody>
+      </p:sp>
+      <p:sp>
+        <p:nvSpPr>
+          <p:cNvPr id="3" name="Content Placeholder 2"/>
+          <p:cNvSpPr>
+            <a:spLocks noGrp="1"/>
+          </p:cNvSpPr>
+          <p:nvPr>
+            <p:ph idx="1"/>
+          </p:nvPr>
+        </p:nvSpPr>
+        <p:spPr>
+          <a:xfrm>
+            <a:off x="612648" y="1600200"/>
+            <a:ext cx="10966399" cy="4892040"/>
+          </a:xfrm>
+        </p:spPr>
+        <p:txBody>
+          <a:bodyPr wrap="square"/>
+          <a:lstStyle/>
+          <a:p>
+            <a:pPr/>
+            <a:r>
+              <a:rPr sz="2000"/>
+              <a:t>What surfaced the buried bridge, and what invented one?</a:t>
+            </a:r>
+          </a:p>
+          <a:p>
+            <a:pPr/>
+            <a:r>
+              <a:rPr sz="2000"/>
+              <a:t>Rows 1 to 3 of the decision framework are done</a:t>
+            </a:r>
+          </a:p>
+          <a:p>
+            <a:pPr/>
+            <a:r>
+              <a:rPr sz="2000"/>
+              <a:t>Break, then Module 2.</a:t>
             </a:r>
           </a:p>
         </p:txBody>
@@ -5087,7 +6608,7 @@
           <a:lstStyle/>
           <a:p>
             <a:r>
-              <a:t>01 · Summarization: The User Problem</a:t>
+              <a:t>Three Features, One Call</a:t>
             </a:r>
           </a:p>
         </p:txBody>
@@ -5104,8 +6625,8 @@
         </p:nvSpPr>
         <p:spPr>
           <a:xfrm>
-            <a:off x="612648" y="1600200"/>
-            <a:ext cx="10966399" cy="4800600"/>
+            <a:off x="612648" y="5504687"/>
+            <a:ext cx="10966399" cy="987553"/>
           </a:xfrm>
         </p:spPr>
         <p:txBody>
@@ -5114,22 +6635,1122 @@
           <a:p>
             <a:pPr/>
             <a:r>
-              <a:rPr sz="2000"/>
-              <a:t>Forty trip reports for Avalanche Lake Trail, 1,200 words each</a:t>
+              <a:rPr sz="1400"/>
+              <a:t>The pipeline is identical. Only the instruction and the output shape change.</a:t>
             </a:r>
           </a:p>
           <a:p>
             <a:pPr/>
             <a:r>
-              <a:rPr sz="2000"/>
-              <a:t>Somewhere in there: is the bridge out, and are the mosquitoes bad?</a:t>
-            </a:r>
-          </a:p>
-          <a:p>
-            <a:pPr/>
-            <a:r>
-              <a:rPr sz="2000"/>
-              <a:t>Nobody reads forty essays. They skim three, miss the warning in the fourth, and have a bad Saturday.</a:t>
+              <a:rPr sz="1400"/>
+              <a:t>Which is why the labs feel similar and why you should pick by what you would ship, not by difficulty</a:t>
+            </a:r>
+          </a:p>
+        </p:txBody>
+      </p:sp>
+      <p:sp>
+        <p:nvSpPr>
+          <p:cNvPr id="4" name="TextBox 3"/>
+          <p:cNvSpPr txBox="1"/>
+          <p:nvPr/>
+        </p:nvSpPr>
+        <p:spPr>
+          <a:xfrm>
+            <a:off x="612648" y="1554480"/>
+            <a:ext cx="1371600" cy="1271016"/>
+          </a:xfrm>
+          <a:prstGeom prst="rect">
+            <a:avLst/>
+          </a:prstGeom>
+          <a:noFill/>
+        </p:spPr>
+        <p:txBody>
+          <a:bodyPr wrap="square" anchor="ctr">
+            <a:spAutoFit/>
+          </a:bodyPr>
+          <a:lstStyle/>
+          <a:p>
+            <a:r>
+              <a:rPr sz="1400" i="1"/>
+              <a:t>01 Summarize</a:t>
+            </a:r>
+          </a:p>
+        </p:txBody>
+      </p:sp>
+      <p:sp>
+        <p:nvSpPr>
+          <p:cNvPr id="5" name="Rounded Rectangle 4"/>
+          <p:cNvSpPr/>
+          <p:nvPr/>
+        </p:nvSpPr>
+        <p:spPr>
+          <a:xfrm>
+            <a:off x="2075688" y="1554480"/>
+            <a:ext cx="2067229" cy="1271016"/>
+          </a:xfrm>
+          <a:prstGeom prst="roundRect">
+            <a:avLst/>
+          </a:prstGeom>
+          <a:noFill/>
+          <a:ln w="19050">
+            <a:solidFill>
+              <a:srgbClr val="000000"/>
+            </a:solidFill>
+          </a:ln>
+          <a:effectLst/>
+        </p:spPr>
+        <p:style>
+          <a:lnRef idx="1">
+            <a:schemeClr val="accent1"/>
+          </a:lnRef>
+          <a:fillRef idx="3">
+            <a:schemeClr val="accent1"/>
+          </a:fillRef>
+          <a:effectRef idx="2">
+            <a:schemeClr val="accent1"/>
+          </a:effectRef>
+          <a:fontRef idx="minor">
+            <a:schemeClr val="lt1"/>
+          </a:fontRef>
+        </p:style>
+        <p:txBody>
+          <a:bodyPr rtlCol="0" anchor="ctr" wrap="square" lIns="73152" rIns="73152"/>
+          <a:lstStyle/>
+          <a:p>
+            <a:pPr algn="ctr"/>
+            <a:r>
+              <a:rPr sz="1500">
+                <a:solidFill>
+                  <a:srgbClr val="000000"/>
+                </a:solidFill>
+              </a:rPr>
+              <a:t>Trip report</a:t>
+            </a:r>
+          </a:p>
+        </p:txBody>
+      </p:sp>
+      <p:sp>
+        <p:nvSpPr>
+          <p:cNvPr id="6" name="Right Arrow 5"/>
+          <p:cNvSpPr/>
+          <p:nvPr/>
+        </p:nvSpPr>
+        <p:spPr>
+          <a:xfrm>
+            <a:off x="4197781" y="2043684"/>
+            <a:ext cx="301752" cy="292608"/>
+          </a:xfrm>
+          <a:prstGeom prst="rightArrow">
+            <a:avLst/>
+          </a:prstGeom>
+          <a:solidFill>
+            <a:srgbClr val="000000"/>
+          </a:solidFill>
+          <a:ln>
+            <a:noFill/>
+          </a:ln>
+          <a:effectLst/>
+        </p:spPr>
+        <p:style>
+          <a:lnRef idx="1">
+            <a:schemeClr val="accent1"/>
+          </a:lnRef>
+          <a:fillRef idx="3">
+            <a:schemeClr val="accent1"/>
+          </a:fillRef>
+          <a:effectRef idx="2">
+            <a:schemeClr val="accent1"/>
+          </a:effectRef>
+          <a:fontRef idx="minor">
+            <a:schemeClr val="lt1"/>
+          </a:fontRef>
+        </p:style>
+        <p:txBody>
+          <a:bodyPr rtlCol="0" anchor="ctr"/>
+          <a:lstStyle/>
+          <a:p>
+            <a:pPr algn="ctr"/>
+          </a:p>
+        </p:txBody>
+      </p:sp>
+      <p:sp>
+        <p:nvSpPr>
+          <p:cNvPr id="7" name="Rounded Rectangle 6"/>
+          <p:cNvSpPr/>
+          <p:nvPr/>
+        </p:nvSpPr>
+        <p:spPr>
+          <a:xfrm>
+            <a:off x="4554397" y="1554480"/>
+            <a:ext cx="2067229" cy="1271016"/>
+          </a:xfrm>
+          <a:prstGeom prst="roundRect">
+            <a:avLst/>
+          </a:prstGeom>
+          <a:noFill/>
+          <a:ln w="19050">
+            <a:solidFill>
+              <a:srgbClr val="000000"/>
+            </a:solidFill>
+          </a:ln>
+          <a:effectLst/>
+        </p:spPr>
+        <p:style>
+          <a:lnRef idx="1">
+            <a:schemeClr val="accent1"/>
+          </a:lnRef>
+          <a:fillRef idx="3">
+            <a:schemeClr val="accent1"/>
+          </a:fillRef>
+          <a:effectRef idx="2">
+            <a:schemeClr val="accent1"/>
+          </a:effectRef>
+          <a:fontRef idx="minor">
+            <a:schemeClr val="lt1"/>
+          </a:fontRef>
+        </p:style>
+        <p:txBody>
+          <a:bodyPr rtlCol="0" anchor="ctr" wrap="square" lIns="73152" rIns="73152"/>
+          <a:lstStyle/>
+          <a:p>
+            <a:pPr algn="ctr"/>
+            <a:r>
+              <a:rPr sz="1500">
+                <a:solidFill>
+                  <a:srgbClr val="000000"/>
+                </a:solidFill>
+              </a:rPr>
+              <a:t>"In 3 bullets, for a hiker: conditions, hazards, crowding"</a:t>
+            </a:r>
+          </a:p>
+        </p:txBody>
+      </p:sp>
+      <p:sp>
+        <p:nvSpPr>
+          <p:cNvPr id="8" name="Right Arrow 7"/>
+          <p:cNvSpPr/>
+          <p:nvPr/>
+        </p:nvSpPr>
+        <p:spPr>
+          <a:xfrm>
+            <a:off x="6676491" y="2043684"/>
+            <a:ext cx="301752" cy="292608"/>
+          </a:xfrm>
+          <a:prstGeom prst="rightArrow">
+            <a:avLst/>
+          </a:prstGeom>
+          <a:solidFill>
+            <a:srgbClr val="000000"/>
+          </a:solidFill>
+          <a:ln>
+            <a:noFill/>
+          </a:ln>
+          <a:effectLst/>
+        </p:spPr>
+        <p:style>
+          <a:lnRef idx="1">
+            <a:schemeClr val="accent1"/>
+          </a:lnRef>
+          <a:fillRef idx="3">
+            <a:schemeClr val="accent1"/>
+          </a:fillRef>
+          <a:effectRef idx="2">
+            <a:schemeClr val="accent1"/>
+          </a:effectRef>
+          <a:fontRef idx="minor">
+            <a:schemeClr val="lt1"/>
+          </a:fontRef>
+        </p:style>
+        <p:txBody>
+          <a:bodyPr rtlCol="0" anchor="ctr"/>
+          <a:lstStyle/>
+          <a:p>
+            <a:pPr algn="ctr"/>
+          </a:p>
+        </p:txBody>
+      </p:sp>
+      <p:sp>
+        <p:nvSpPr>
+          <p:cNvPr id="9" name="Rounded Rectangle 8"/>
+          <p:cNvSpPr/>
+          <p:nvPr/>
+        </p:nvSpPr>
+        <p:spPr>
+          <a:xfrm>
+            <a:off x="7033107" y="1554480"/>
+            <a:ext cx="2067229" cy="1271016"/>
+          </a:xfrm>
+          <a:prstGeom prst="roundRect">
+            <a:avLst/>
+          </a:prstGeom>
+          <a:noFill/>
+          <a:ln w="19050">
+            <a:solidFill>
+              <a:srgbClr val="000000"/>
+            </a:solidFill>
+          </a:ln>
+          <a:effectLst/>
+        </p:spPr>
+        <p:style>
+          <a:lnRef idx="1">
+            <a:schemeClr val="accent1"/>
+          </a:lnRef>
+          <a:fillRef idx="3">
+            <a:schemeClr val="accent1"/>
+          </a:fillRef>
+          <a:effectRef idx="2">
+            <a:schemeClr val="accent1"/>
+          </a:effectRef>
+          <a:fontRef idx="minor">
+            <a:schemeClr val="lt1"/>
+          </a:fontRef>
+        </p:style>
+        <p:txBody>
+          <a:bodyPr rtlCol="0" anchor="ctr" wrap="square" lIns="73152" rIns="73152"/>
+          <a:lstStyle/>
+          <a:p>
+            <a:pPr algn="ctr"/>
+            <a:r>
+              <a:rPr sz="1500">
+                <a:solidFill>
+                  <a:srgbClr val="000000"/>
+                </a:solidFill>
+              </a:rPr>
+              <a:t>llama3.2</a:t>
+            </a:r>
+          </a:p>
+        </p:txBody>
+      </p:sp>
+      <p:sp>
+        <p:nvSpPr>
+          <p:cNvPr id="10" name="Right Arrow 9"/>
+          <p:cNvSpPr/>
+          <p:nvPr/>
+        </p:nvSpPr>
+        <p:spPr>
+          <a:xfrm>
+            <a:off x="9155201" y="2043684"/>
+            <a:ext cx="301752" cy="292608"/>
+          </a:xfrm>
+          <a:prstGeom prst="rightArrow">
+            <a:avLst/>
+          </a:prstGeom>
+          <a:solidFill>
+            <a:srgbClr val="000000"/>
+          </a:solidFill>
+          <a:ln>
+            <a:noFill/>
+          </a:ln>
+          <a:effectLst/>
+        </p:spPr>
+        <p:style>
+          <a:lnRef idx="1">
+            <a:schemeClr val="accent1"/>
+          </a:lnRef>
+          <a:fillRef idx="3">
+            <a:schemeClr val="accent1"/>
+          </a:fillRef>
+          <a:effectRef idx="2">
+            <a:schemeClr val="accent1"/>
+          </a:effectRef>
+          <a:fontRef idx="minor">
+            <a:schemeClr val="lt1"/>
+          </a:fontRef>
+        </p:style>
+        <p:txBody>
+          <a:bodyPr rtlCol="0" anchor="ctr"/>
+          <a:lstStyle/>
+          <a:p>
+            <a:pPr algn="ctr"/>
+          </a:p>
+        </p:txBody>
+      </p:sp>
+      <p:sp>
+        <p:nvSpPr>
+          <p:cNvPr id="11" name="Rounded Rectangle 10"/>
+          <p:cNvSpPr/>
+          <p:nvPr/>
+        </p:nvSpPr>
+        <p:spPr>
+          <a:xfrm>
+            <a:off x="9511817" y="1554480"/>
+            <a:ext cx="2067229" cy="1271016"/>
+          </a:xfrm>
+          <a:prstGeom prst="roundRect">
+            <a:avLst/>
+          </a:prstGeom>
+          <a:noFill/>
+          <a:ln w="19050">
+            <a:solidFill>
+              <a:srgbClr val="000000"/>
+            </a:solidFill>
+          </a:ln>
+          <a:effectLst/>
+        </p:spPr>
+        <p:style>
+          <a:lnRef idx="1">
+            <a:schemeClr val="accent1"/>
+          </a:lnRef>
+          <a:fillRef idx="3">
+            <a:schemeClr val="accent1"/>
+          </a:fillRef>
+          <a:effectRef idx="2">
+            <a:schemeClr val="accent1"/>
+          </a:effectRef>
+          <a:fontRef idx="minor">
+            <a:schemeClr val="lt1"/>
+          </a:fontRef>
+        </p:style>
+        <p:txBody>
+          <a:bodyPr rtlCol="0" anchor="ctr" wrap="square" lIns="73152" rIns="73152"/>
+          <a:lstStyle/>
+          <a:p>
+            <a:pPr algn="ctr"/>
+            <a:r>
+              <a:rPr sz="1500">
+                <a:solidFill>
+                  <a:srgbClr val="000000"/>
+                </a:solidFill>
+              </a:rPr>
+              <a:t>Prose or bullets</a:t>
+            </a:r>
+          </a:p>
+        </p:txBody>
+      </p:sp>
+      <p:sp>
+        <p:nvSpPr>
+          <p:cNvPr id="12" name="TextBox 11"/>
+          <p:cNvSpPr txBox="1"/>
+          <p:nvPr/>
+        </p:nvSpPr>
+        <p:spPr>
+          <a:xfrm>
+            <a:off x="612648" y="3099816"/>
+            <a:ext cx="1371600" cy="1033271"/>
+          </a:xfrm>
+          <a:prstGeom prst="rect">
+            <a:avLst/>
+          </a:prstGeom>
+          <a:noFill/>
+        </p:spPr>
+        <p:txBody>
+          <a:bodyPr wrap="square" anchor="ctr">
+            <a:spAutoFit/>
+          </a:bodyPr>
+          <a:lstStyle/>
+          <a:p>
+            <a:r>
+              <a:rPr sz="1400" i="1"/>
+              <a:t>02 Extract</a:t>
+            </a:r>
+          </a:p>
+        </p:txBody>
+      </p:sp>
+      <p:sp>
+        <p:nvSpPr>
+          <p:cNvPr id="13" name="Rounded Rectangle 12"/>
+          <p:cNvSpPr/>
+          <p:nvPr/>
+        </p:nvSpPr>
+        <p:spPr>
+          <a:xfrm>
+            <a:off x="2075688" y="3099816"/>
+            <a:ext cx="2067229" cy="1033271"/>
+          </a:xfrm>
+          <a:prstGeom prst="roundRect">
+            <a:avLst/>
+          </a:prstGeom>
+          <a:noFill/>
+          <a:ln w="19050">
+            <a:solidFill>
+              <a:srgbClr val="000000"/>
+            </a:solidFill>
+          </a:ln>
+          <a:effectLst/>
+        </p:spPr>
+        <p:style>
+          <a:lnRef idx="1">
+            <a:schemeClr val="accent1"/>
+          </a:lnRef>
+          <a:fillRef idx="3">
+            <a:schemeClr val="accent1"/>
+          </a:fillRef>
+          <a:effectRef idx="2">
+            <a:schemeClr val="accent1"/>
+          </a:effectRef>
+          <a:fontRef idx="minor">
+            <a:schemeClr val="lt1"/>
+          </a:fontRef>
+        </p:style>
+        <p:txBody>
+          <a:bodyPr rtlCol="0" anchor="ctr" wrap="square" lIns="73152" rIns="73152"/>
+          <a:lstStyle/>
+          <a:p>
+            <a:pPr algn="ctr"/>
+            <a:r>
+              <a:rPr sz="1500">
+                <a:solidFill>
+                  <a:srgbClr val="000000"/>
+                </a:solidFill>
+              </a:rPr>
+              <a:t>Trip report</a:t>
+            </a:r>
+          </a:p>
+        </p:txBody>
+      </p:sp>
+      <p:sp>
+        <p:nvSpPr>
+          <p:cNvPr id="14" name="Right Arrow 13"/>
+          <p:cNvSpPr/>
+          <p:nvPr/>
+        </p:nvSpPr>
+        <p:spPr>
+          <a:xfrm>
+            <a:off x="4197781" y="3470147"/>
+            <a:ext cx="301752" cy="292608"/>
+          </a:xfrm>
+          <a:prstGeom prst="rightArrow">
+            <a:avLst/>
+          </a:prstGeom>
+          <a:solidFill>
+            <a:srgbClr val="000000"/>
+          </a:solidFill>
+          <a:ln>
+            <a:noFill/>
+          </a:ln>
+          <a:effectLst/>
+        </p:spPr>
+        <p:style>
+          <a:lnRef idx="1">
+            <a:schemeClr val="accent1"/>
+          </a:lnRef>
+          <a:fillRef idx="3">
+            <a:schemeClr val="accent1"/>
+          </a:fillRef>
+          <a:effectRef idx="2">
+            <a:schemeClr val="accent1"/>
+          </a:effectRef>
+          <a:fontRef idx="minor">
+            <a:schemeClr val="lt1"/>
+          </a:fontRef>
+        </p:style>
+        <p:txBody>
+          <a:bodyPr rtlCol="0" anchor="ctr"/>
+          <a:lstStyle/>
+          <a:p>
+            <a:pPr algn="ctr"/>
+          </a:p>
+        </p:txBody>
+      </p:sp>
+      <p:sp>
+        <p:nvSpPr>
+          <p:cNvPr id="15" name="Rounded Rectangle 14"/>
+          <p:cNvSpPr/>
+          <p:nvPr/>
+        </p:nvSpPr>
+        <p:spPr>
+          <a:xfrm>
+            <a:off x="4554397" y="3099816"/>
+            <a:ext cx="2067229" cy="1033271"/>
+          </a:xfrm>
+          <a:prstGeom prst="roundRect">
+            <a:avLst/>
+          </a:prstGeom>
+          <a:noFill/>
+          <a:ln w="19050">
+            <a:solidFill>
+              <a:srgbClr val="000000"/>
+            </a:solidFill>
+          </a:ln>
+          <a:effectLst/>
+        </p:spPr>
+        <p:style>
+          <a:lnRef idx="1">
+            <a:schemeClr val="accent1"/>
+          </a:lnRef>
+          <a:fillRef idx="3">
+            <a:schemeClr val="accent1"/>
+          </a:fillRef>
+          <a:effectRef idx="2">
+            <a:schemeClr val="accent1"/>
+          </a:effectRef>
+          <a:fontRef idx="minor">
+            <a:schemeClr val="lt1"/>
+          </a:fontRef>
+        </p:style>
+        <p:txBody>
+          <a:bodyPr rtlCol="0" anchor="ctr" wrap="square" lIns="73152" rIns="73152"/>
+          <a:lstStyle/>
+          <a:p>
+            <a:pPr algn="ctr"/>
+            <a:r>
+              <a:rPr sz="1500">
+                <a:solidFill>
+                  <a:srgbClr val="000000"/>
+                </a:solidFill>
+              </a:rPr>
+              <a:t>Prompt + JSON schema, nulls allowed</a:t>
+            </a:r>
+          </a:p>
+        </p:txBody>
+      </p:sp>
+      <p:sp>
+        <p:nvSpPr>
+          <p:cNvPr id="16" name="Right Arrow 15"/>
+          <p:cNvSpPr/>
+          <p:nvPr/>
+        </p:nvSpPr>
+        <p:spPr>
+          <a:xfrm>
+            <a:off x="6676491" y="3470147"/>
+            <a:ext cx="301752" cy="292608"/>
+          </a:xfrm>
+          <a:prstGeom prst="rightArrow">
+            <a:avLst/>
+          </a:prstGeom>
+          <a:solidFill>
+            <a:srgbClr val="000000"/>
+          </a:solidFill>
+          <a:ln>
+            <a:noFill/>
+          </a:ln>
+          <a:effectLst/>
+        </p:spPr>
+        <p:style>
+          <a:lnRef idx="1">
+            <a:schemeClr val="accent1"/>
+          </a:lnRef>
+          <a:fillRef idx="3">
+            <a:schemeClr val="accent1"/>
+          </a:fillRef>
+          <a:effectRef idx="2">
+            <a:schemeClr val="accent1"/>
+          </a:effectRef>
+          <a:fontRef idx="minor">
+            <a:schemeClr val="lt1"/>
+          </a:fontRef>
+        </p:style>
+        <p:txBody>
+          <a:bodyPr rtlCol="0" anchor="ctr"/>
+          <a:lstStyle/>
+          <a:p>
+            <a:pPr algn="ctr"/>
+          </a:p>
+        </p:txBody>
+      </p:sp>
+      <p:sp>
+        <p:nvSpPr>
+          <p:cNvPr id="17" name="Rounded Rectangle 16"/>
+          <p:cNvSpPr/>
+          <p:nvPr/>
+        </p:nvSpPr>
+        <p:spPr>
+          <a:xfrm>
+            <a:off x="7033107" y="3099816"/>
+            <a:ext cx="2067229" cy="1033271"/>
+          </a:xfrm>
+          <a:prstGeom prst="roundRect">
+            <a:avLst/>
+          </a:prstGeom>
+          <a:noFill/>
+          <a:ln w="19050">
+            <a:solidFill>
+              <a:srgbClr val="000000"/>
+            </a:solidFill>
+          </a:ln>
+          <a:effectLst/>
+        </p:spPr>
+        <p:style>
+          <a:lnRef idx="1">
+            <a:schemeClr val="accent1"/>
+          </a:lnRef>
+          <a:fillRef idx="3">
+            <a:schemeClr val="accent1"/>
+          </a:fillRef>
+          <a:effectRef idx="2">
+            <a:schemeClr val="accent1"/>
+          </a:effectRef>
+          <a:fontRef idx="minor">
+            <a:schemeClr val="lt1"/>
+          </a:fontRef>
+        </p:style>
+        <p:txBody>
+          <a:bodyPr rtlCol="0" anchor="ctr" wrap="square" lIns="73152" rIns="73152"/>
+          <a:lstStyle/>
+          <a:p>
+            <a:pPr algn="ctr"/>
+            <a:r>
+              <a:rPr sz="1500">
+                <a:solidFill>
+                  <a:srgbClr val="000000"/>
+                </a:solidFill>
+              </a:rPr>
+              <a:t>llama3.2, JSON mode</a:t>
+            </a:r>
+          </a:p>
+        </p:txBody>
+      </p:sp>
+      <p:sp>
+        <p:nvSpPr>
+          <p:cNvPr id="18" name="Right Arrow 17"/>
+          <p:cNvSpPr/>
+          <p:nvPr/>
+        </p:nvSpPr>
+        <p:spPr>
+          <a:xfrm>
+            <a:off x="9155201" y="3470147"/>
+            <a:ext cx="301752" cy="292608"/>
+          </a:xfrm>
+          <a:prstGeom prst="rightArrow">
+            <a:avLst/>
+          </a:prstGeom>
+          <a:solidFill>
+            <a:srgbClr val="000000"/>
+          </a:solidFill>
+          <a:ln>
+            <a:noFill/>
+          </a:ln>
+          <a:effectLst/>
+        </p:spPr>
+        <p:style>
+          <a:lnRef idx="1">
+            <a:schemeClr val="accent1"/>
+          </a:lnRef>
+          <a:fillRef idx="3">
+            <a:schemeClr val="accent1"/>
+          </a:fillRef>
+          <a:effectRef idx="2">
+            <a:schemeClr val="accent1"/>
+          </a:effectRef>
+          <a:fontRef idx="minor">
+            <a:schemeClr val="lt1"/>
+          </a:fontRef>
+        </p:style>
+        <p:txBody>
+          <a:bodyPr rtlCol="0" anchor="ctr"/>
+          <a:lstStyle/>
+          <a:p>
+            <a:pPr algn="ctr"/>
+          </a:p>
+        </p:txBody>
+      </p:sp>
+      <p:sp>
+        <p:nvSpPr>
+          <p:cNvPr id="19" name="Rounded Rectangle 18"/>
+          <p:cNvSpPr/>
+          <p:nvPr/>
+        </p:nvSpPr>
+        <p:spPr>
+          <a:xfrm>
+            <a:off x="9511817" y="3099816"/>
+            <a:ext cx="2067229" cy="1033271"/>
+          </a:xfrm>
+          <a:prstGeom prst="roundRect">
+            <a:avLst/>
+          </a:prstGeom>
+          <a:noFill/>
+          <a:ln w="19050">
+            <a:solidFill>
+              <a:srgbClr val="000000"/>
+            </a:solidFill>
+          </a:ln>
+          <a:effectLst/>
+        </p:spPr>
+        <p:style>
+          <a:lnRef idx="1">
+            <a:schemeClr val="accent1"/>
+          </a:lnRef>
+          <a:fillRef idx="3">
+            <a:schemeClr val="accent1"/>
+          </a:fillRef>
+          <a:effectRef idx="2">
+            <a:schemeClr val="accent1"/>
+          </a:effectRef>
+          <a:fontRef idx="minor">
+            <a:schemeClr val="lt1"/>
+          </a:fontRef>
+        </p:style>
+        <p:txBody>
+          <a:bodyPr rtlCol="0" anchor="ctr" wrap="square" lIns="73152" rIns="73152"/>
+          <a:lstStyle/>
+          <a:p>
+            <a:pPr algn="ctr"/>
+            <a:r>
+              <a:rPr sz="1500">
+                <a:solidFill>
+                  <a:srgbClr val="000000"/>
+                </a:solidFill>
+              </a:rPr>
+              <a:t>Validated JSON</a:t>
+            </a:r>
+          </a:p>
+        </p:txBody>
+      </p:sp>
+      <p:sp>
+        <p:nvSpPr>
+          <p:cNvPr id="20" name="TextBox 19"/>
+          <p:cNvSpPr txBox="1"/>
+          <p:nvPr/>
+        </p:nvSpPr>
+        <p:spPr>
+          <a:xfrm>
+            <a:off x="612648" y="4407407"/>
+            <a:ext cx="1371600" cy="822960"/>
+          </a:xfrm>
+          <a:prstGeom prst="rect">
+            <a:avLst/>
+          </a:prstGeom>
+          <a:noFill/>
+        </p:spPr>
+        <p:txBody>
+          <a:bodyPr wrap="square" anchor="ctr">
+            <a:spAutoFit/>
+          </a:bodyPr>
+          <a:lstStyle/>
+          <a:p>
+            <a:r>
+              <a:rPr sz="1400" i="1"/>
+              <a:t>03 Classify</a:t>
+            </a:r>
+          </a:p>
+        </p:txBody>
+      </p:sp>
+      <p:sp>
+        <p:nvSpPr>
+          <p:cNvPr id="21" name="Rounded Rectangle 20"/>
+          <p:cNvSpPr/>
+          <p:nvPr/>
+        </p:nvSpPr>
+        <p:spPr>
+          <a:xfrm>
+            <a:off x="2075688" y="4407407"/>
+            <a:ext cx="2067229" cy="822960"/>
+          </a:xfrm>
+          <a:prstGeom prst="roundRect">
+            <a:avLst/>
+          </a:prstGeom>
+          <a:noFill/>
+          <a:ln w="19050">
+            <a:solidFill>
+              <a:srgbClr val="000000"/>
+            </a:solidFill>
+          </a:ln>
+          <a:effectLst/>
+        </p:spPr>
+        <p:style>
+          <a:lnRef idx="1">
+            <a:schemeClr val="accent1"/>
+          </a:lnRef>
+          <a:fillRef idx="3">
+            <a:schemeClr val="accent1"/>
+          </a:fillRef>
+          <a:effectRef idx="2">
+            <a:schemeClr val="accent1"/>
+          </a:effectRef>
+          <a:fontRef idx="minor">
+            <a:schemeClr val="lt1"/>
+          </a:fontRef>
+        </p:style>
+        <p:txBody>
+          <a:bodyPr rtlCol="0" anchor="ctr" wrap="square" lIns="73152" rIns="73152"/>
+          <a:lstStyle/>
+          <a:p>
+            <a:pPr algn="ctr"/>
+            <a:r>
+              <a:rPr sz="1500">
+                <a:solidFill>
+                  <a:srgbClr val="000000"/>
+                </a:solidFill>
+              </a:rPr>
+              <a:t>Gear review</a:t>
+            </a:r>
+          </a:p>
+        </p:txBody>
+      </p:sp>
+      <p:sp>
+        <p:nvSpPr>
+          <p:cNvPr id="22" name="Right Arrow 21"/>
+          <p:cNvSpPr/>
+          <p:nvPr/>
+        </p:nvSpPr>
+        <p:spPr>
+          <a:xfrm>
+            <a:off x="4197781" y="4672583"/>
+            <a:ext cx="301752" cy="292608"/>
+          </a:xfrm>
+          <a:prstGeom prst="rightArrow">
+            <a:avLst/>
+          </a:prstGeom>
+          <a:solidFill>
+            <a:srgbClr val="000000"/>
+          </a:solidFill>
+          <a:ln>
+            <a:noFill/>
+          </a:ln>
+          <a:effectLst/>
+        </p:spPr>
+        <p:style>
+          <a:lnRef idx="1">
+            <a:schemeClr val="accent1"/>
+          </a:lnRef>
+          <a:fillRef idx="3">
+            <a:schemeClr val="accent1"/>
+          </a:fillRef>
+          <a:effectRef idx="2">
+            <a:schemeClr val="accent1"/>
+          </a:effectRef>
+          <a:fontRef idx="minor">
+            <a:schemeClr val="lt1"/>
+          </a:fontRef>
+        </p:style>
+        <p:txBody>
+          <a:bodyPr rtlCol="0" anchor="ctr"/>
+          <a:lstStyle/>
+          <a:p>
+            <a:pPr algn="ctr"/>
+          </a:p>
+        </p:txBody>
+      </p:sp>
+      <p:sp>
+        <p:nvSpPr>
+          <p:cNvPr id="23" name="Rounded Rectangle 22"/>
+          <p:cNvSpPr/>
+          <p:nvPr/>
+        </p:nvSpPr>
+        <p:spPr>
+          <a:xfrm>
+            <a:off x="4554397" y="4407407"/>
+            <a:ext cx="2067229" cy="822960"/>
+          </a:xfrm>
+          <a:prstGeom prst="roundRect">
+            <a:avLst/>
+          </a:prstGeom>
+          <a:noFill/>
+          <a:ln w="19050">
+            <a:solidFill>
+              <a:srgbClr val="000000"/>
+            </a:solidFill>
+          </a:ln>
+          <a:effectLst/>
+        </p:spPr>
+        <p:style>
+          <a:lnRef idx="1">
+            <a:schemeClr val="accent1"/>
+          </a:lnRef>
+          <a:fillRef idx="3">
+            <a:schemeClr val="accent1"/>
+          </a:fillRef>
+          <a:effectRef idx="2">
+            <a:schemeClr val="accent1"/>
+          </a:effectRef>
+          <a:fontRef idx="minor">
+            <a:schemeClr val="lt1"/>
+          </a:fontRef>
+        </p:style>
+        <p:txBody>
+          <a:bodyPr rtlCol="0" anchor="ctr" wrap="square" lIns="73152" rIns="73152"/>
+          <a:lstStyle/>
+          <a:p>
+            <a:pPr algn="ctr"/>
+            <a:r>
+              <a:rPr sz="1500">
+                <a:solidFill>
+                  <a:srgbClr val="000000"/>
+                </a:solidFill>
+              </a:rPr>
+              <a:t>Prompt: the label set + examples</a:t>
+            </a:r>
+          </a:p>
+        </p:txBody>
+      </p:sp>
+      <p:sp>
+        <p:nvSpPr>
+          <p:cNvPr id="24" name="Right Arrow 23"/>
+          <p:cNvSpPr/>
+          <p:nvPr/>
+        </p:nvSpPr>
+        <p:spPr>
+          <a:xfrm>
+            <a:off x="6676491" y="4672583"/>
+            <a:ext cx="301752" cy="292608"/>
+          </a:xfrm>
+          <a:prstGeom prst="rightArrow">
+            <a:avLst/>
+          </a:prstGeom>
+          <a:solidFill>
+            <a:srgbClr val="000000"/>
+          </a:solidFill>
+          <a:ln>
+            <a:noFill/>
+          </a:ln>
+          <a:effectLst/>
+        </p:spPr>
+        <p:style>
+          <a:lnRef idx="1">
+            <a:schemeClr val="accent1"/>
+          </a:lnRef>
+          <a:fillRef idx="3">
+            <a:schemeClr val="accent1"/>
+          </a:fillRef>
+          <a:effectRef idx="2">
+            <a:schemeClr val="accent1"/>
+          </a:effectRef>
+          <a:fontRef idx="minor">
+            <a:schemeClr val="lt1"/>
+          </a:fontRef>
+        </p:style>
+        <p:txBody>
+          <a:bodyPr rtlCol="0" anchor="ctr"/>
+          <a:lstStyle/>
+          <a:p>
+            <a:pPr algn="ctr"/>
+          </a:p>
+        </p:txBody>
+      </p:sp>
+      <p:sp>
+        <p:nvSpPr>
+          <p:cNvPr id="25" name="Rounded Rectangle 24"/>
+          <p:cNvSpPr/>
+          <p:nvPr/>
+        </p:nvSpPr>
+        <p:spPr>
+          <a:xfrm>
+            <a:off x="7033107" y="4407407"/>
+            <a:ext cx="2067229" cy="822960"/>
+          </a:xfrm>
+          <a:prstGeom prst="roundRect">
+            <a:avLst/>
+          </a:prstGeom>
+          <a:noFill/>
+          <a:ln w="19050">
+            <a:solidFill>
+              <a:srgbClr val="000000"/>
+            </a:solidFill>
+          </a:ln>
+          <a:effectLst/>
+        </p:spPr>
+        <p:style>
+          <a:lnRef idx="1">
+            <a:schemeClr val="accent1"/>
+          </a:lnRef>
+          <a:fillRef idx="3">
+            <a:schemeClr val="accent1"/>
+          </a:fillRef>
+          <a:effectRef idx="2">
+            <a:schemeClr val="accent1"/>
+          </a:effectRef>
+          <a:fontRef idx="minor">
+            <a:schemeClr val="lt1"/>
+          </a:fontRef>
+        </p:style>
+        <p:txBody>
+          <a:bodyPr rtlCol="0" anchor="ctr" wrap="square" lIns="73152" rIns="73152"/>
+          <a:lstStyle/>
+          <a:p>
+            <a:pPr algn="ctr"/>
+            <a:r>
+              <a:rPr sz="1500">
+                <a:solidFill>
+                  <a:srgbClr val="000000"/>
+                </a:solidFill>
+              </a:rPr>
+              <a:t>phi3 or gpt-4.1</a:t>
+            </a:r>
+          </a:p>
+        </p:txBody>
+      </p:sp>
+      <p:sp>
+        <p:nvSpPr>
+          <p:cNvPr id="26" name="Right Arrow 25"/>
+          <p:cNvSpPr/>
+          <p:nvPr/>
+        </p:nvSpPr>
+        <p:spPr>
+          <a:xfrm>
+            <a:off x="9155201" y="4672583"/>
+            <a:ext cx="301752" cy="292608"/>
+          </a:xfrm>
+          <a:prstGeom prst="rightArrow">
+            <a:avLst/>
+          </a:prstGeom>
+          <a:solidFill>
+            <a:srgbClr val="000000"/>
+          </a:solidFill>
+          <a:ln>
+            <a:noFill/>
+          </a:ln>
+          <a:effectLst/>
+        </p:spPr>
+        <p:style>
+          <a:lnRef idx="1">
+            <a:schemeClr val="accent1"/>
+          </a:lnRef>
+          <a:fillRef idx="3">
+            <a:schemeClr val="accent1"/>
+          </a:fillRef>
+          <a:effectRef idx="2">
+            <a:schemeClr val="accent1"/>
+          </a:effectRef>
+          <a:fontRef idx="minor">
+            <a:schemeClr val="lt1"/>
+          </a:fontRef>
+        </p:style>
+        <p:txBody>
+          <a:bodyPr rtlCol="0" anchor="ctr"/>
+          <a:lstStyle/>
+          <a:p>
+            <a:pPr algn="ctr"/>
+          </a:p>
+        </p:txBody>
+      </p:sp>
+      <p:sp>
+        <p:nvSpPr>
+          <p:cNvPr id="27" name="Rounded Rectangle 26"/>
+          <p:cNvSpPr/>
+          <p:nvPr/>
+        </p:nvSpPr>
+        <p:spPr>
+          <a:xfrm>
+            <a:off x="9511817" y="4407407"/>
+            <a:ext cx="2067229" cy="822960"/>
+          </a:xfrm>
+          <a:prstGeom prst="roundRect">
+            <a:avLst/>
+          </a:prstGeom>
+          <a:noFill/>
+          <a:ln w="19050">
+            <a:solidFill>
+              <a:srgbClr val="000000"/>
+            </a:solidFill>
+          </a:ln>
+          <a:effectLst/>
+        </p:spPr>
+        <p:style>
+          <a:lnRef idx="1">
+            <a:schemeClr val="accent1"/>
+          </a:lnRef>
+          <a:fillRef idx="3">
+            <a:schemeClr val="accent1"/>
+          </a:fillRef>
+          <a:effectRef idx="2">
+            <a:schemeClr val="accent1"/>
+          </a:effectRef>
+          <a:fontRef idx="minor">
+            <a:schemeClr val="lt1"/>
+          </a:fontRef>
+        </p:style>
+        <p:txBody>
+          <a:bodyPr rtlCol="0" anchor="ctr" wrap="square" lIns="73152" rIns="73152"/>
+          <a:lstStyle/>
+          <a:p>
+            <a:pPr algn="ctr"/>
+            <a:r>
+              <a:rPr sz="1500">
+                <a:solidFill>
+                  <a:srgbClr val="000000"/>
+                </a:solidFill>
+              </a:rPr>
+              <a:t>One label</a:t>
             </a:r>
           </a:p>
         </p:txBody>
@@ -5173,7 +7794,7 @@
           <a:lstStyle/>
           <a:p>
             <a:r>
-              <a:t>01 · The Concept</a:t>
+              <a:t>01 · Summarization: The User Problem</a:t>
             </a:r>
           </a:p>
         </p:txBody>
@@ -5191,7 +7812,7 @@
         <p:spPr>
           <a:xfrm>
             <a:off x="612648" y="1600200"/>
-            <a:ext cx="10966399" cy="4800600"/>
+            <a:ext cx="10966399" cy="4892040"/>
           </a:xfrm>
         </p:spPr>
         <p:txBody>
@@ -5201,28 +7822,21 @@
             <a:pPr/>
             <a:r>
               <a:rPr sz="2000"/>
-              <a:t>The simplest LLM feature: one chat call, a document, an instruction</a:t>
+              <a:t>Forty trip reports for Avalanche Lake Trail, 1,200 words each</a:t>
             </a:r>
           </a:p>
           <a:p>
             <a:pPr/>
             <a:r>
               <a:rPr sz="2000"/>
-              <a:t>"Summarize this" produces a book report</a:t>
+              <a:t>Somewhere in there: is the bridge out, and are the mosquitoes bad?</a:t>
             </a:r>
           </a:p>
           <a:p>
             <a:pPr/>
             <a:r>
               <a:rPr sz="2000"/>
-              <a:t>Real products ask for a summary with a purpose: "In 3 bullets, for a hiker planning a trip this week: conditions, hazards, crowding. Ignore gear talk."</a:t>
-            </a:r>
-          </a:p>
-          <a:p>
-            <a:pPr/>
-            <a:r>
-              <a:rPr sz="2000"/>
-              <a:t>Shape it to the UI slot: prose, bullets, template, a single headline</a:t>
+              <a:t>Nobody reads forty essays. They skim three, miss the warning in the fourth, and have a bad Saturday.</a:t>
             </a:r>
           </a:p>
         </p:txBody>
@@ -5266,7 +7880,7 @@
           <a:lstStyle/>
           <a:p>
             <a:r>
-              <a:t>01 · Demo: What to Watch</a:t>
+              <a:t>01 · The Concept</a:t>
             </a:r>
           </a:p>
         </p:txBody>
@@ -5284,7 +7898,7 @@
         <p:spPr>
           <a:xfrm>
             <a:off x="612648" y="1600200"/>
-            <a:ext cx="10966399" cy="4800600"/>
+            <a:ext cx="10966399" cy="4892040"/>
           </a:xfrm>
         </p:spPr>
         <p:txBody>
@@ -5294,35 +7908,28 @@
             <a:pPr/>
             <a:r>
               <a:rPr sz="2000"/>
-              <a:t>Raw report on screen first, so the room feels the problem</a:t>
+              <a:t>The simplest LLM feature: one chat call, a document, an instruction</a:t>
             </a:r>
           </a:p>
           <a:p>
             <a:pPr/>
             <a:r>
               <a:rPr sz="2000"/>
-              <a:t>Naive prompt: faithful, generic, useless</a:t>
+              <a:t>"Summarize this" produces a book report</a:t>
             </a:r>
           </a:p>
           <a:p>
             <a:pPr/>
             <a:r>
               <a:rPr sz="2000"/>
-              <a:t>Purpose-built prompt: three bullets, and the bridge warning surfaces</a:t>
+              <a:t>Real products ask for a summary with a purpose: "In 3 bullets, for a hiker planning a trip this week: conditions, hazards, crowding. Ignore gear talk."</a:t>
             </a:r>
           </a:p>
           <a:p>
             <a:pPr/>
             <a:r>
               <a:rPr sz="2000"/>
-              <a:t>The last two lines of the prompt are grounding lines: without them, roughly half of runs invented a bear-related closure on the clean report</a:t>
-            </a:r>
-          </a:p>
-          <a:p>
-            <a:pPr/>
-            <a:r>
-              <a:rPr sz="2000"/>
-              <a:t>Same call, different shape: a one-line trail-status headline</a:t>
+              <a:t>Shape it to the UI slot: prose, bullets, template, a single headline</a:t>
             </a:r>
           </a:p>
         </p:txBody>
@@ -5366,7 +7973,7 @@
           <a:lstStyle/>
           <a:p>
             <a:r>
-              <a:t>01 · Leadership Card</a:t>
+              <a:t>01 · How It Works</a:t>
             </a:r>
           </a:p>
         </p:txBody>
@@ -5383,8 +7990,8 @@
         </p:nvSpPr>
         <p:spPr>
           <a:xfrm>
-            <a:off x="612648" y="1600200"/>
-            <a:ext cx="10966399" cy="4800600"/>
+            <a:off x="612648" y="2862071"/>
+            <a:ext cx="10966399" cy="3630169"/>
           </a:xfrm>
         </p:spPr>
         <p:txBody>
@@ -5393,22 +8000,362 @@
           <a:p>
             <a:pPr/>
             <a:r>
-              <a:rPr sz="2000"/>
-              <a:t>When: anywhere users face long content they don't want to read. Reviews, tickets, reports, meeting notes, threads.</a:t>
+              <a:rPr sz="1600"/>
+              <a:t>One request, one response. There is no pipeline to build.</a:t>
             </a:r>
           </a:p>
           <a:p>
             <a:pPr/>
             <a:r>
-              <a:rPr sz="2000"/>
-              <a:t>Cost: days. One call per document, free local models, no new infrastructure.</a:t>
+              <a:rPr sz="1600"/>
+              <a:t>The instruction carries the feature: who it is for, what to keep, what to drop, and "only from the text"</a:t>
             </a:r>
           </a:p>
           <a:p>
             <a:pPr/>
             <a:r>
-              <a:rPr sz="2000"/>
-              <a:t>"Our users are drowning in text we already have. A weekend of prompt work turns it into answers."</a:t>
+              <a:rPr sz="1600"/>
+              <a:t>The output shape is a product decision: bullets for a card, a headline for a list, prose for an email</a:t>
+            </a:r>
+          </a:p>
+        </p:txBody>
+      </p:sp>
+      <p:sp>
+        <p:nvSpPr>
+          <p:cNvPr id="4" name="Rounded Rectangle 3"/>
+          <p:cNvSpPr/>
+          <p:nvPr/>
+        </p:nvSpPr>
+        <p:spPr>
+          <a:xfrm>
+            <a:off x="612648" y="1554480"/>
+            <a:ext cx="2432989" cy="1033271"/>
+          </a:xfrm>
+          <a:prstGeom prst="roundRect">
+            <a:avLst/>
+          </a:prstGeom>
+          <a:noFill/>
+          <a:ln w="19050">
+            <a:solidFill>
+              <a:srgbClr val="000000"/>
+            </a:solidFill>
+          </a:ln>
+          <a:effectLst/>
+        </p:spPr>
+        <p:style>
+          <a:lnRef idx="1">
+            <a:schemeClr val="accent1"/>
+          </a:lnRef>
+          <a:fillRef idx="3">
+            <a:schemeClr val="accent1"/>
+          </a:fillRef>
+          <a:effectRef idx="2">
+            <a:schemeClr val="accent1"/>
+          </a:effectRef>
+          <a:fontRef idx="minor">
+            <a:schemeClr val="lt1"/>
+          </a:fontRef>
+        </p:style>
+        <p:txBody>
+          <a:bodyPr rtlCol="0" anchor="ctr" wrap="square" lIns="73152" rIns="73152"/>
+          <a:lstStyle/>
+          <a:p>
+            <a:pPr algn="ctr"/>
+            <a:r>
+              <a:rPr sz="1500">
+                <a:solidFill>
+                  <a:srgbClr val="000000"/>
+                </a:solidFill>
+              </a:rPr>
+              <a:t>1,200-word trip report</a:t>
+            </a:r>
+          </a:p>
+        </p:txBody>
+      </p:sp>
+      <p:sp>
+        <p:nvSpPr>
+          <p:cNvPr id="5" name="Right Arrow 4"/>
+          <p:cNvSpPr/>
+          <p:nvPr/>
+        </p:nvSpPr>
+        <p:spPr>
+          <a:xfrm>
+            <a:off x="3100501" y="1924811"/>
+            <a:ext cx="301752" cy="292608"/>
+          </a:xfrm>
+          <a:prstGeom prst="rightArrow">
+            <a:avLst/>
+          </a:prstGeom>
+          <a:solidFill>
+            <a:srgbClr val="000000"/>
+          </a:solidFill>
+          <a:ln>
+            <a:noFill/>
+          </a:ln>
+          <a:effectLst/>
+        </p:spPr>
+        <p:style>
+          <a:lnRef idx="1">
+            <a:schemeClr val="accent1"/>
+          </a:lnRef>
+          <a:fillRef idx="3">
+            <a:schemeClr val="accent1"/>
+          </a:fillRef>
+          <a:effectRef idx="2">
+            <a:schemeClr val="accent1"/>
+          </a:effectRef>
+          <a:fontRef idx="minor">
+            <a:schemeClr val="lt1"/>
+          </a:fontRef>
+        </p:style>
+        <p:txBody>
+          <a:bodyPr rtlCol="0" anchor="ctr"/>
+          <a:lstStyle/>
+          <a:p>
+            <a:pPr algn="ctr"/>
+          </a:p>
+        </p:txBody>
+      </p:sp>
+      <p:sp>
+        <p:nvSpPr>
+          <p:cNvPr id="6" name="Rounded Rectangle 5"/>
+          <p:cNvSpPr/>
+          <p:nvPr/>
+        </p:nvSpPr>
+        <p:spPr>
+          <a:xfrm>
+            <a:off x="3457117" y="1554480"/>
+            <a:ext cx="2432989" cy="1033271"/>
+          </a:xfrm>
+          <a:prstGeom prst="roundRect">
+            <a:avLst/>
+          </a:prstGeom>
+          <a:noFill/>
+          <a:ln w="19050">
+            <a:solidFill>
+              <a:srgbClr val="000000"/>
+            </a:solidFill>
+          </a:ln>
+          <a:effectLst/>
+        </p:spPr>
+        <p:style>
+          <a:lnRef idx="1">
+            <a:schemeClr val="accent1"/>
+          </a:lnRef>
+          <a:fillRef idx="3">
+            <a:schemeClr val="accent1"/>
+          </a:fillRef>
+          <a:effectRef idx="2">
+            <a:schemeClr val="accent1"/>
+          </a:effectRef>
+          <a:fontRef idx="minor">
+            <a:schemeClr val="lt1"/>
+          </a:fontRef>
+        </p:style>
+        <p:txBody>
+          <a:bodyPr rtlCol="0" anchor="ctr" wrap="square" lIns="73152" rIns="73152"/>
+          <a:lstStyle/>
+          <a:p>
+            <a:pPr algn="ctr"/>
+            <a:r>
+              <a:rPr sz="1500">
+                <a:solidFill>
+                  <a:srgbClr val="000000"/>
+                </a:solidFill>
+              </a:rPr>
+              <a:t>Prompt: purpose, output shape, and two grounding lines</a:t>
+            </a:r>
+          </a:p>
+        </p:txBody>
+      </p:sp>
+      <p:sp>
+        <p:nvSpPr>
+          <p:cNvPr id="7" name="Right Arrow 6"/>
+          <p:cNvSpPr/>
+          <p:nvPr/>
+        </p:nvSpPr>
+        <p:spPr>
+          <a:xfrm>
+            <a:off x="5944971" y="1924811"/>
+            <a:ext cx="301752" cy="292608"/>
+          </a:xfrm>
+          <a:prstGeom prst="rightArrow">
+            <a:avLst/>
+          </a:prstGeom>
+          <a:solidFill>
+            <a:srgbClr val="000000"/>
+          </a:solidFill>
+          <a:ln>
+            <a:noFill/>
+          </a:ln>
+          <a:effectLst/>
+        </p:spPr>
+        <p:style>
+          <a:lnRef idx="1">
+            <a:schemeClr val="accent1"/>
+          </a:lnRef>
+          <a:fillRef idx="3">
+            <a:schemeClr val="accent1"/>
+          </a:fillRef>
+          <a:effectRef idx="2">
+            <a:schemeClr val="accent1"/>
+          </a:effectRef>
+          <a:fontRef idx="minor">
+            <a:schemeClr val="lt1"/>
+          </a:fontRef>
+        </p:style>
+        <p:txBody>
+          <a:bodyPr rtlCol="0" anchor="ctr"/>
+          <a:lstStyle/>
+          <a:p>
+            <a:pPr algn="ctr"/>
+          </a:p>
+        </p:txBody>
+      </p:sp>
+      <p:sp>
+        <p:nvSpPr>
+          <p:cNvPr id="8" name="Rounded Rectangle 7"/>
+          <p:cNvSpPr/>
+          <p:nvPr/>
+        </p:nvSpPr>
+        <p:spPr>
+          <a:xfrm>
+            <a:off x="6301587" y="1554480"/>
+            <a:ext cx="2432989" cy="1033271"/>
+          </a:xfrm>
+          <a:prstGeom prst="roundRect">
+            <a:avLst/>
+          </a:prstGeom>
+          <a:noFill/>
+          <a:ln w="19050">
+            <a:solidFill>
+              <a:srgbClr val="000000"/>
+            </a:solidFill>
+          </a:ln>
+          <a:effectLst/>
+        </p:spPr>
+        <p:style>
+          <a:lnRef idx="1">
+            <a:schemeClr val="accent1"/>
+          </a:lnRef>
+          <a:fillRef idx="3">
+            <a:schemeClr val="accent1"/>
+          </a:fillRef>
+          <a:effectRef idx="2">
+            <a:schemeClr val="accent1"/>
+          </a:effectRef>
+          <a:fontRef idx="minor">
+            <a:schemeClr val="lt1"/>
+          </a:fontRef>
+        </p:style>
+        <p:txBody>
+          <a:bodyPr rtlCol="0" anchor="ctr" wrap="square" lIns="73152" rIns="73152"/>
+          <a:lstStyle/>
+          <a:p>
+            <a:pPr algn="ctr"/>
+            <a:r>
+              <a:rPr sz="1500">
+                <a:solidFill>
+                  <a:srgbClr val="000000"/>
+                </a:solidFill>
+              </a:rPr>
+              <a:t>llama3.2 (local, no key)</a:t>
+            </a:r>
+          </a:p>
+        </p:txBody>
+      </p:sp>
+      <p:sp>
+        <p:nvSpPr>
+          <p:cNvPr id="9" name="Right Arrow 8"/>
+          <p:cNvSpPr/>
+          <p:nvPr/>
+        </p:nvSpPr>
+        <p:spPr>
+          <a:xfrm>
+            <a:off x="8789441" y="1924811"/>
+            <a:ext cx="301752" cy="292608"/>
+          </a:xfrm>
+          <a:prstGeom prst="rightArrow">
+            <a:avLst/>
+          </a:prstGeom>
+          <a:solidFill>
+            <a:srgbClr val="000000"/>
+          </a:solidFill>
+          <a:ln>
+            <a:noFill/>
+          </a:ln>
+          <a:effectLst/>
+        </p:spPr>
+        <p:style>
+          <a:lnRef idx="1">
+            <a:schemeClr val="accent1"/>
+          </a:lnRef>
+          <a:fillRef idx="3">
+            <a:schemeClr val="accent1"/>
+          </a:fillRef>
+          <a:effectRef idx="2">
+            <a:schemeClr val="accent1"/>
+          </a:effectRef>
+          <a:fontRef idx="minor">
+            <a:schemeClr val="lt1"/>
+          </a:fontRef>
+        </p:style>
+        <p:txBody>
+          <a:bodyPr rtlCol="0" anchor="ctr"/>
+          <a:lstStyle/>
+          <a:p>
+            <a:pPr algn="ctr"/>
+          </a:p>
+        </p:txBody>
+      </p:sp>
+      <p:sp>
+        <p:nvSpPr>
+          <p:cNvPr id="10" name="Rounded Rectangle 9"/>
+          <p:cNvSpPr/>
+          <p:nvPr/>
+        </p:nvSpPr>
+        <p:spPr>
+          <a:xfrm>
+            <a:off x="9146057" y="1554480"/>
+            <a:ext cx="2432989" cy="1033271"/>
+          </a:xfrm>
+          <a:prstGeom prst="roundRect">
+            <a:avLst/>
+          </a:prstGeom>
+          <a:noFill/>
+          <a:ln w="19050">
+            <a:solidFill>
+              <a:srgbClr val="000000"/>
+            </a:solidFill>
+          </a:ln>
+          <a:effectLst/>
+        </p:spPr>
+        <p:style>
+          <a:lnRef idx="1">
+            <a:schemeClr val="accent1"/>
+          </a:lnRef>
+          <a:fillRef idx="3">
+            <a:schemeClr val="accent1"/>
+          </a:fillRef>
+          <a:effectRef idx="2">
+            <a:schemeClr val="accent1"/>
+          </a:effectRef>
+          <a:fontRef idx="minor">
+            <a:schemeClr val="lt1"/>
+          </a:fontRef>
+        </p:style>
+        <p:txBody>
+          <a:bodyPr rtlCol="0" anchor="ctr" wrap="square" lIns="73152" rIns="73152"/>
+          <a:lstStyle/>
+          <a:p>
+            <a:pPr algn="ctr"/>
+            <a:r>
+              <a:rPr sz="1500">
+                <a:solidFill>
+                  <a:srgbClr val="000000"/>
+                </a:solidFill>
+              </a:rPr>
+              <a:t>Three bullets a hiker can act on</a:t>
             </a:r>
           </a:p>
         </p:txBody>
@@ -5452,7 +8399,7 @@
           <a:lstStyle/>
           <a:p>
             <a:r>
-              <a:t>02 · Extraction: The User Problem</a:t>
+              <a:t>01 · Demo: What to Watch</a:t>
             </a:r>
           </a:p>
         </p:txBody>
@@ -5470,7 +8417,7 @@
         <p:spPr>
           <a:xfrm>
             <a:off x="612648" y="1600200"/>
-            <a:ext cx="10966399" cy="4800600"/>
+            <a:ext cx="10966399" cy="4892040"/>
           </a:xfrm>
         </p:spPr>
         <p:txBody>
@@ -5480,21 +8427,35 @@
             <a:pPr/>
             <a:r>
               <a:rPr sz="2000"/>
-              <a:t>Trailhead wants a "trail stats" panel: which trails, when, how far, what wildlife, what shape the trail was in</a:t>
+              <a:t>Raw report on screen first, so the room feels the problem</a:t>
             </a:r>
           </a:p>
           <a:p>
             <a:pPr/>
             <a:r>
               <a:rPr sz="2000"/>
-              <a:t>All of it exists, scattered through forty reports as prose</a:t>
+              <a:t>Naive prompt: faithful, generic, useless</a:t>
             </a:r>
           </a:p>
           <a:p>
             <a:pPr/>
             <a:r>
               <a:rPr sz="2000"/>
-              <a:t>Today a human would re-read every report and re-type the facts. So the panel doesn't exist.</a:t>
+              <a:t>Purpose-built prompt: three bullets, and the bridge warning surfaces</a:t>
+            </a:r>
+          </a:p>
+          <a:p>
+            <a:pPr/>
+            <a:r>
+              <a:rPr sz="2000"/>
+              <a:t>The last two lines of the prompt are grounding lines: without them, roughly half of runs invented a bear-related closure on the clean report</a:t>
+            </a:r>
+          </a:p>
+          <a:p>
+            <a:pPr/>
+            <a:r>
+              <a:rPr sz="2000"/>
+              <a:t>Same call, different shape: a one-line trail-status headline</a:t>
             </a:r>
           </a:p>
         </p:txBody>
@@ -5538,7 +8499,7 @@
           <a:lstStyle/>
           <a:p>
             <a:r>
-              <a:t>02 · The Concept</a:t>
+              <a:t>01 · Leadership Card</a:t>
             </a:r>
           </a:p>
         </p:txBody>
@@ -5556,7 +8517,7 @@
         <p:spPr>
           <a:xfrm>
             <a:off x="612648" y="1600200"/>
-            <a:ext cx="10966399" cy="4800600"/>
+            <a:ext cx="10966399" cy="4892040"/>
           </a:xfrm>
         </p:spPr>
         <p:txBody>
@@ -5566,28 +8527,21 @@
             <a:pPr/>
             <a:r>
               <a:rPr sz="2000"/>
-              <a:t>Summarization's sibling: the output is data your code consumes, not text a person reads</a:t>
+              <a:t>When: anywhere users face long content they don't want to read. Reviews, tickets, reports, meeting notes, threads.</a:t>
             </a:r>
           </a:p>
           <a:p>
             <a:pPr/>
             <a:r>
               <a:rPr sz="2000"/>
-              <a:t>JSON mode: the model is constrained to emit valid JSON matching your schema</a:t>
+              <a:t>Cost: days. One call per document, free local models, no new infrastructure.</a:t>
             </a:r>
           </a:p>
           <a:p>
             <a:pPr/>
             <a:r>
               <a:rPr sz="2000"/>
-              <a:t>The schema does most of the prompting: field names, descriptions, "use null when the report doesn't say"</a:t>
-            </a:r>
-          </a:p>
-          <a:p>
-            <a:pPr/>
-            <a:r>
-              <a:rPr sz="2000"/>
-              <a:t>Structured shape guarantees the JSON parses. It does not guarantee the JSON is true.</a:t>
+              <a:t>"Our users are drowning in text we already have. A weekend of prompt work turns it into answers."</a:t>
             </a:r>
           </a:p>
         </p:txBody>
@@ -5631,7 +8585,7 @@
           <a:lstStyle/>
           <a:p>
             <a:r>
-              <a:t>02 · Demo: What to Watch</a:t>
+              <a:t>02 · Extraction: The User Problem</a:t>
             </a:r>
           </a:p>
         </p:txBody>
@@ -5649,7 +8603,7 @@
         <p:spPr>
           <a:xfrm>
             <a:off x="612648" y="1600200"/>
-            <a:ext cx="10966399" cy="4800600"/>
+            <a:ext cx="10966399" cy="4892040"/>
           </a:xfrm>
         </p:spPr>
         <p:txBody>
@@ -5659,35 +8613,21 @@
             <a:pPr/>
             <a:r>
               <a:rPr sz="2000"/>
-              <a:t>Define a C# record (TripFacts); typed response, no parsing step</a:t>
+              <a:t>Trailhead wants a "trail stats" panel: which trails, when, how far, what wildlife, what shape the trail was in</a:t>
             </a:r>
           </a:p>
           <a:p>
             <a:pPr/>
             <a:r>
               <a:rPr sz="2000"/>
-              <a:t>Break it: a report that never mentions distance comes back with distance_mi: 5.0</a:t>
+              <a:t>All of it exists, scattered through forty reports as prose</a:t>
             </a:r>
           </a:p>
           <a:p>
             <a:pPr/>
             <a:r>
               <a:rPr sz="2000"/>
-              <a:t>Fix in the schema: nullable fields, "null when not stated"</a:t>
-            </a:r>
-          </a:p>
-          <a:p>
-            <a:pPr/>
-            <a:r>
-              <a:rPr sz="2000"/>
-              <a:t>Run it two or three times: it gets better, and it is not a guarantee. elevation_gain_ft: 0 where the honest answer is null; "early last month" as a date.</a:t>
-            </a:r>
-          </a:p>
-          <a:p>
-            <a:pPr/>
-            <a:r>
-              <a:rPr sz="2000"/>
-              <a:t>The last mile is a validator, which is ordinary code your team already knows how to write.</a:t>
+              <a:t>Today a human would re-read every report and re-type the facts. So the panel doesn't exist.</a:t>
             </a:r>
           </a:p>
         </p:txBody>

--- a/docs/slides/pptx/M1-understanding.pptx
+++ b/docs/slides/pptx/M1-understanding.pptx
@@ -2138,7 +2138,7 @@
               <a:t>llama3.2</a:t>
             </a:r>
             <a:r>
-              <a:t>) tied phi3, so a comparison against the wrong big model would have said the gap does not exist. Side finding worth 20 seconds: reflowing the identical prompt onto one line dropped phi3 to 7/10 and 4/10. Small models are sensitive to formatting.</a:t>
+              <a:t>) came within one review of phi3, so a comparison against the wrong big model would have said the gap barely exists. Side finding worth 20 seconds: reflowing the identical prompt onto one line dropped phi3 to 7/10 and 4/10. Small models are sensitive to formatting.</a:t>
             </a:r>
           </a:p>
           <a:p>
@@ -7391,11 +7391,11 @@
               </a:spcAft>
             </a:pPr>
             <a:r>
-              <a:rPr sz="2800" b="1" dirty="0"/>
+              <a:rPr sz="2800" b="1"/>
               <a:t>When:</a:t>
             </a:r>
             <a:r>
-              <a:rPr sz="2800" dirty="0"/>
+              <a:rPr sz="2800"/>
               <a:t> Too much content for people to read, easy-to-miss detail buried in avalanche of text.</a:t>
             </a:r>
           </a:p>
@@ -7406,198 +7406,12 @@
               </a:spcAft>
             </a:pPr>
             <a:r>
-              <a:rPr sz="2800" b="1" dirty="0"/>
+              <a:rPr sz="2800" b="1"/>
               <a:t>Think:</a:t>
             </a:r>
             <a:r>
-              <a:rPr sz="2800" dirty="0"/>
+              <a:rPr sz="2800"/>
               <a:t> "Our users are drowning in text we already have. A few hours of work turns it into automatic answers."</a:t>
-            </a:r>
-          </a:p>
-          <a:p>
-            <a:pPr>
-              <a:spcAft>
-                <a:spcPts val="1400"/>
-              </a:spcAft>
-            </a:pPr>
-            <a:r>
-              <a:rPr sz="2800" b="1" dirty="0"/>
-              <a:t>Difficulty:</a:t>
-            </a:r>
-            <a:r>
-              <a:rPr sz="2800" dirty="0"/>
-              <a:t> </a:t>
-            </a:r>
-          </a:p>
-        </p:txBody>
-      </p:sp>
-      <p:sp>
-        <p:nvSpPr>
-          <p:cNvPr id="4" name="Rounded Rectangle 3"/>
-          <p:cNvSpPr/>
-          <p:nvPr/>
-        </p:nvSpPr>
-        <p:spPr>
-          <a:xfrm>
-            <a:off x="2807208" y="4809744"/>
-            <a:ext cx="256032" cy="256032"/>
-          </a:xfrm>
-          <a:prstGeom prst="roundRect">
-            <a:avLst>
-              <a:gd name="adj" fmla="val 25000"/>
-            </a:avLst>
-          </a:prstGeom>
-          <a:solidFill>
-            <a:srgbClr val="017AB4"/>
-          </a:solidFill>
-          <a:ln>
-            <a:noFill/>
-          </a:ln>
-          <a:effectLst/>
-        </p:spPr>
-        <p:style>
-          <a:lnRef idx="1">
-            <a:schemeClr val="accent1"/>
-          </a:lnRef>
-          <a:fillRef idx="3">
-            <a:schemeClr val="accent1"/>
-          </a:fillRef>
-          <a:effectRef idx="2">
-            <a:schemeClr val="accent1"/>
-          </a:effectRef>
-          <a:fontRef idx="minor">
-            <a:schemeClr val="lt1"/>
-          </a:fontRef>
-        </p:style>
-        <p:txBody>
-          <a:bodyPr rtlCol="0" anchor="ctr"/>
-          <a:lstStyle/>
-          <a:p>
-            <a:pPr algn="ctr"/>
-            <a:endParaRPr/>
-          </a:p>
-        </p:txBody>
-      </p:sp>
-      <p:sp>
-        <p:nvSpPr>
-          <p:cNvPr id="5" name="Rounded Rectangle 4"/>
-          <p:cNvSpPr/>
-          <p:nvPr/>
-        </p:nvSpPr>
-        <p:spPr>
-          <a:xfrm>
-            <a:off x="3154680" y="4608576"/>
-            <a:ext cx="256032" cy="457200"/>
-          </a:xfrm>
-          <a:prstGeom prst="roundRect">
-            <a:avLst>
-              <a:gd name="adj" fmla="val 25000"/>
-            </a:avLst>
-          </a:prstGeom>
-          <a:solidFill>
-            <a:srgbClr val="D9D9D9"/>
-          </a:solidFill>
-          <a:ln>
-            <a:noFill/>
-          </a:ln>
-          <a:effectLst/>
-        </p:spPr>
-        <p:style>
-          <a:lnRef idx="1">
-            <a:schemeClr val="accent1"/>
-          </a:lnRef>
-          <a:fillRef idx="3">
-            <a:schemeClr val="accent1"/>
-          </a:fillRef>
-          <a:effectRef idx="2">
-            <a:schemeClr val="accent1"/>
-          </a:effectRef>
-          <a:fontRef idx="minor">
-            <a:schemeClr val="lt1"/>
-          </a:fontRef>
-        </p:style>
-        <p:txBody>
-          <a:bodyPr rtlCol="0" anchor="ctr"/>
-          <a:lstStyle/>
-          <a:p>
-            <a:pPr algn="ctr"/>
-            <a:endParaRPr/>
-          </a:p>
-        </p:txBody>
-      </p:sp>
-      <p:sp>
-        <p:nvSpPr>
-          <p:cNvPr id="6" name="Rounded Rectangle 5"/>
-          <p:cNvSpPr/>
-          <p:nvPr/>
-        </p:nvSpPr>
-        <p:spPr>
-          <a:xfrm>
-            <a:off x="3502152" y="4407408"/>
-            <a:ext cx="256032" cy="658368"/>
-          </a:xfrm>
-          <a:prstGeom prst="roundRect">
-            <a:avLst>
-              <a:gd name="adj" fmla="val 25000"/>
-            </a:avLst>
-          </a:prstGeom>
-          <a:solidFill>
-            <a:srgbClr val="D9D9D9"/>
-          </a:solidFill>
-          <a:ln>
-            <a:noFill/>
-          </a:ln>
-          <a:effectLst/>
-        </p:spPr>
-        <p:style>
-          <a:lnRef idx="1">
-            <a:schemeClr val="accent1"/>
-          </a:lnRef>
-          <a:fillRef idx="3">
-            <a:schemeClr val="accent1"/>
-          </a:fillRef>
-          <a:effectRef idx="2">
-            <a:schemeClr val="accent1"/>
-          </a:effectRef>
-          <a:fontRef idx="minor">
-            <a:schemeClr val="lt1"/>
-          </a:fontRef>
-        </p:style>
-        <p:txBody>
-          <a:bodyPr rtlCol="0" anchor="ctr"/>
-          <a:lstStyle/>
-          <a:p>
-            <a:pPr algn="ctr"/>
-            <a:endParaRPr/>
-          </a:p>
-        </p:txBody>
-      </p:sp>
-      <p:sp>
-        <p:nvSpPr>
-          <p:cNvPr id="7" name="TextBox 6"/>
-          <p:cNvSpPr txBox="1"/>
-          <p:nvPr/>
-        </p:nvSpPr>
-        <p:spPr>
-          <a:xfrm>
-            <a:off x="2532888" y="5120640"/>
-            <a:ext cx="1499616" cy="320040"/>
-          </a:xfrm>
-          <a:prstGeom prst="rect">
-            <a:avLst/>
-          </a:prstGeom>
-          <a:noFill/>
-        </p:spPr>
-        <p:txBody>
-          <a:bodyPr wrap="none">
-            <a:spAutoFit/>
-          </a:bodyPr>
-          <a:lstStyle/>
-          <a:p>
-            <a:pPr algn="ctr"/>
-            <a:r>
-              <a:rPr sz="1400" b="1"/>
-              <a:t>Easy</a:t>
             </a:r>
           </a:p>
         </p:txBody>
@@ -7643,59 +7457,248 @@
           <a:lstStyle/>
           <a:p>
             <a:r>
-              <a:rPr sz="4000" b="1">
-                <a:solidFill>
-                  <a:srgbClr val="017AB4"/>
-                </a:solidFill>
-              </a:rPr>
-              <a:t>F02 · Extraction</a:t>
-            </a:r>
-          </a:p>
-        </p:txBody>
-      </p:sp>
-      <p:sp>
-        <p:nvSpPr>
-          <p:cNvPr id="3" name="Text Placeholder 2"/>
-          <p:cNvSpPr>
-            <a:spLocks noGrp="1"/>
-          </p:cNvSpPr>
-          <p:nvPr>
-            <p:ph type="body" idx="1"/>
-          </p:nvPr>
-        </p:nvSpPr>
-        <p:spPr/>
-        <p:txBody>
-          <a:bodyPr/>
-          <a:lstStyle/>
-          <a:p>
+              <a:t>F01 · Summarization · Leadership Card</a:t>
+            </a:r>
+          </a:p>
+        </p:txBody>
+      </p:sp>
+      <p:sp>
+        <p:nvSpPr>
+          <p:cNvPr id="3" name="Content Placeholder 2"/>
+          <p:cNvSpPr>
+            <a:spLocks noGrp="1"/>
+          </p:cNvSpPr>
+          <p:nvPr>
+            <p:ph idx="1"/>
+          </p:nvPr>
+        </p:nvSpPr>
+        <p:spPr>
+          <a:xfrm>
+            <a:off x="612648" y="1920240"/>
+            <a:ext cx="10966704" cy="4617720"/>
+          </a:xfrm>
+        </p:spPr>
+        <p:txBody>
+          <a:bodyPr wrap="square"/>
+          <a:lstStyle/>
+          <a:p>
+            <a:pPr>
+              <a:spcAft>
+                <a:spcPts val="1400"/>
+              </a:spcAft>
+            </a:pPr>
+            <a:r>
+              <a:rPr sz="2800" b="1" dirty="0"/>
+              <a:t>When:</a:t>
+            </a:r>
+            <a:r>
+              <a:rPr sz="2800" dirty="0"/>
+              <a:t> Too much content for people to read, easy-to-miss detail buried in avalanche of text.</a:t>
+            </a:r>
+          </a:p>
+          <a:p>
+            <a:pPr>
+              <a:spcAft>
+                <a:spcPts val="1400"/>
+              </a:spcAft>
+            </a:pPr>
+            <a:r>
+              <a:rPr sz="2800" b="1" dirty="0"/>
+              <a:t>Think:</a:t>
+            </a:r>
+            <a:r>
+              <a:rPr sz="2800" dirty="0"/>
+              <a:t> "Our users are drowning in text we already have. A few hours of work turns it into automatic answers."</a:t>
+            </a:r>
+          </a:p>
+          <a:p>
+            <a:pPr>
+              <a:spcAft>
+                <a:spcPts val="1400"/>
+              </a:spcAft>
+            </a:pPr>
+            <a:r>
+              <a:rPr sz="2800" b="1" dirty="0"/>
+              <a:t>Difficulty:</a:t>
+            </a:r>
+            <a:r>
+              <a:rPr sz="2800" dirty="0"/>
+              <a:t> </a:t>
+            </a:r>
+          </a:p>
+        </p:txBody>
+      </p:sp>
+      <p:sp>
+        <p:nvSpPr>
+          <p:cNvPr id="4" name="Rounded Rectangle 3"/>
+          <p:cNvSpPr/>
+          <p:nvPr/>
+        </p:nvSpPr>
+        <p:spPr>
+          <a:xfrm>
+            <a:off x="2807208" y="4809744"/>
+            <a:ext cx="256032" cy="256032"/>
+          </a:xfrm>
+          <a:prstGeom prst="roundRect">
+            <a:avLst>
+              <a:gd name="adj" fmla="val 25000"/>
+            </a:avLst>
+          </a:prstGeom>
+          <a:solidFill>
+            <a:srgbClr val="017AB4"/>
+          </a:solidFill>
+          <a:ln>
+            <a:noFill/>
+          </a:ln>
+          <a:effectLst/>
+        </p:spPr>
+        <p:style>
+          <a:lnRef idx="1">
+            <a:schemeClr val="accent1"/>
+          </a:lnRef>
+          <a:fillRef idx="3">
+            <a:schemeClr val="accent1"/>
+          </a:fillRef>
+          <a:effectRef idx="2">
+            <a:schemeClr val="accent1"/>
+          </a:effectRef>
+          <a:fontRef idx="minor">
+            <a:schemeClr val="lt1"/>
+          </a:fontRef>
+        </p:style>
+        <p:txBody>
+          <a:bodyPr rtlCol="0" anchor="ctr"/>
+          <a:lstStyle/>
+          <a:p>
+            <a:pPr algn="ctr"/>
             <a:endParaRPr/>
           </a:p>
         </p:txBody>
       </p:sp>
-      <p:pic>
-        <p:nvPicPr>
-          <p:cNvPr id="4" name="Picture 3" descr="image.png"/>
-          <p:cNvPicPr>
-            <a:picLocks noChangeAspect="1"/>
-          </p:cNvPicPr>
+      <p:sp>
+        <p:nvSpPr>
+          <p:cNvPr id="5" name="Rounded Rectangle 4"/>
+          <p:cNvSpPr/>
           <p:nvPr/>
-        </p:nvPicPr>
-        <p:blipFill>
-          <a:blip r:embed="rId3"/>
-          <a:stretch>
-            <a:fillRect/>
-          </a:stretch>
-        </p:blipFill>
-        <p:spPr>
-          <a:xfrm>
-            <a:off x="9326880" y="5989320"/>
-            <a:ext cx="2560320" cy="640080"/>
+        </p:nvSpPr>
+        <p:spPr>
+          <a:xfrm>
+            <a:off x="3154680" y="4608576"/>
+            <a:ext cx="256032" cy="457200"/>
+          </a:xfrm>
+          <a:prstGeom prst="roundRect">
+            <a:avLst>
+              <a:gd name="adj" fmla="val 25000"/>
+            </a:avLst>
+          </a:prstGeom>
+          <a:solidFill>
+            <a:srgbClr val="D9D9D9"/>
+          </a:solidFill>
+          <a:ln>
+            <a:noFill/>
+          </a:ln>
+          <a:effectLst/>
+        </p:spPr>
+        <p:style>
+          <a:lnRef idx="1">
+            <a:schemeClr val="accent1"/>
+          </a:lnRef>
+          <a:fillRef idx="3">
+            <a:schemeClr val="accent1"/>
+          </a:fillRef>
+          <a:effectRef idx="2">
+            <a:schemeClr val="accent1"/>
+          </a:effectRef>
+          <a:fontRef idx="minor">
+            <a:schemeClr val="lt1"/>
+          </a:fontRef>
+        </p:style>
+        <p:txBody>
+          <a:bodyPr rtlCol="0" anchor="ctr"/>
+          <a:lstStyle/>
+          <a:p>
+            <a:pPr algn="ctr"/>
+            <a:endParaRPr/>
+          </a:p>
+        </p:txBody>
+      </p:sp>
+      <p:sp>
+        <p:nvSpPr>
+          <p:cNvPr id="6" name="Rounded Rectangle 5"/>
+          <p:cNvSpPr/>
+          <p:nvPr/>
+        </p:nvSpPr>
+        <p:spPr>
+          <a:xfrm>
+            <a:off x="3502152" y="4407408"/>
+            <a:ext cx="256032" cy="658368"/>
+          </a:xfrm>
+          <a:prstGeom prst="roundRect">
+            <a:avLst>
+              <a:gd name="adj" fmla="val 25000"/>
+            </a:avLst>
+          </a:prstGeom>
+          <a:solidFill>
+            <a:srgbClr val="D9D9D9"/>
+          </a:solidFill>
+          <a:ln>
+            <a:noFill/>
+          </a:ln>
+          <a:effectLst/>
+        </p:spPr>
+        <p:style>
+          <a:lnRef idx="1">
+            <a:schemeClr val="accent1"/>
+          </a:lnRef>
+          <a:fillRef idx="3">
+            <a:schemeClr val="accent1"/>
+          </a:fillRef>
+          <a:effectRef idx="2">
+            <a:schemeClr val="accent1"/>
+          </a:effectRef>
+          <a:fontRef idx="minor">
+            <a:schemeClr val="lt1"/>
+          </a:fontRef>
+        </p:style>
+        <p:txBody>
+          <a:bodyPr rtlCol="0" anchor="ctr"/>
+          <a:lstStyle/>
+          <a:p>
+            <a:pPr algn="ctr"/>
+            <a:endParaRPr/>
+          </a:p>
+        </p:txBody>
+      </p:sp>
+      <p:sp>
+        <p:nvSpPr>
+          <p:cNvPr id="7" name="TextBox 6"/>
+          <p:cNvSpPr txBox="1"/>
+          <p:nvPr/>
+        </p:nvSpPr>
+        <p:spPr>
+          <a:xfrm>
+            <a:off x="2532888" y="5120640"/>
+            <a:ext cx="1499616" cy="320040"/>
           </a:xfrm>
           <a:prstGeom prst="rect">
             <a:avLst/>
           </a:prstGeom>
-        </p:spPr>
-      </p:pic>
+          <a:noFill/>
+        </p:spPr>
+        <p:txBody>
+          <a:bodyPr wrap="none">
+            <a:spAutoFit/>
+          </a:bodyPr>
+          <a:lstStyle/>
+          <a:p>
+            <a:pPr algn="ctr"/>
+            <a:r>
+              <a:rPr sz="1400" b="1"/>
+              <a:t>Easy</a:t>
+            </a:r>
+          </a:p>
+        </p:txBody>
+      </p:sp>
     </p:spTree>
   </p:cSld>
   <p:clrMapOvr>
@@ -7737,87 +7740,59 @@
           <a:lstStyle/>
           <a:p>
             <a:r>
-              <a:t>F02 · How It Works</a:t>
-            </a:r>
-          </a:p>
-        </p:txBody>
-      </p:sp>
-      <p:sp>
-        <p:nvSpPr>
-          <p:cNvPr id="3" name="Content Placeholder 2"/>
-          <p:cNvSpPr>
-            <a:spLocks noGrp="1"/>
-          </p:cNvSpPr>
-          <p:nvPr>
-            <p:ph idx="1"/>
-          </p:nvPr>
-        </p:nvSpPr>
-        <p:spPr>
-          <a:xfrm>
-            <a:off x="612648" y="3236976"/>
-            <a:ext cx="10966704" cy="3300984"/>
-          </a:xfrm>
-        </p:spPr>
-        <p:txBody>
-          <a:bodyPr wrap="square"/>
+              <a:rPr sz="4000" b="1">
+                <a:solidFill>
+                  <a:srgbClr val="017AB4"/>
+                </a:solidFill>
+              </a:rPr>
+              <a:t>F02 · Extraction</a:t>
+            </a:r>
+          </a:p>
+        </p:txBody>
+      </p:sp>
+      <p:sp>
+        <p:nvSpPr>
+          <p:cNvPr id="3" name="Text Placeholder 2"/>
+          <p:cNvSpPr>
+            <a:spLocks noGrp="1"/>
+          </p:cNvSpPr>
+          <p:nvPr>
+            <p:ph type="body" idx="1"/>
+          </p:nvPr>
+        </p:nvSpPr>
+        <p:spPr/>
+        <p:txBody>
+          <a:bodyPr/>
           <a:lstStyle/>
           <a:p>
             <a:endParaRPr/>
           </a:p>
         </p:txBody>
       </p:sp>
-      <p:sp>
-        <p:nvSpPr>
-          <p:cNvPr id="4" name="Rounded Rectangle 3"/>
-          <p:cNvSpPr/>
+      <p:pic>
+        <p:nvPicPr>
+          <p:cNvPr id="4" name="Picture 3" descr="image.png"/>
+          <p:cNvPicPr>
+            <a:picLocks noChangeAspect="1"/>
+          </p:cNvPicPr>
           <p:nvPr/>
-        </p:nvSpPr>
-        <p:spPr>
-          <a:xfrm>
-            <a:off x="612648" y="1737360"/>
-            <a:ext cx="1864156" cy="1271016"/>
-          </a:xfrm>
-          <a:prstGeom prst="roundRect">
+        </p:nvPicPr>
+        <p:blipFill>
+          <a:blip r:embed="rId3"/>
+          <a:stretch>
+            <a:fillRect/>
+          </a:stretch>
+        </p:blipFill>
+        <p:spPr>
+          <a:xfrm>
+            <a:off x="9326880" y="5989320"/>
+            <a:ext cx="2560320" cy="640080"/>
+          </a:xfrm>
+          <a:prstGeom prst="rect">
             <a:avLst/>
           </a:prstGeom>
-          <a:noFill/>
-          <a:ln w="22225">
-            <a:solidFill>
-              <a:srgbClr val="017AB4"/>
-            </a:solidFill>
-          </a:ln>
-          <a:effectLst/>
-        </p:spPr>
-        <p:style>
-          <a:lnRef idx="1">
-            <a:schemeClr val="accent1"/>
-          </a:lnRef>
-          <a:fillRef idx="3">
-            <a:schemeClr val="accent1"/>
-          </a:fillRef>
-          <a:effectRef idx="2">
-            <a:schemeClr val="accent1"/>
-          </a:effectRef>
-          <a:fontRef idx="minor">
-            <a:schemeClr val="lt1"/>
-          </a:fontRef>
-        </p:style>
-        <p:txBody>
-          <a:bodyPr wrap="square" lIns="73152" rIns="73152" rtlCol="0" anchor="ctr"/>
-          <a:lstStyle/>
-          <a:p>
-            <a:pPr algn="ctr"/>
-            <a:r>
-              <a:rPr sz="1300">
-                <a:solidFill>
-                  <a:srgbClr val="000000"/>
-                </a:solidFill>
-              </a:rPr>
-              <a:t>Trip report</a:t>
-            </a:r>
-          </a:p>
-        </p:txBody>
-      </p:sp>
+        </p:spPr>
+      </p:pic>
     </p:spTree>
   </p:cSld>
   <p:clrMapOvr>
@@ -7827,7 +7802,7 @@
 </file>
 
 <file path=ppt/slides/slide13.xml><?xml version="1.0" encoding="utf-8"?>
-<p:sld xmlns:a="http://schemas.openxmlformats.org/drawingml/2006/main" xmlns:r="http://schemas.openxmlformats.org/officeDocument/2006/relationships" xmlns:p="http://schemas.openxmlformats.org/presentationml/2006/main">
+<p:sld xmlns:a="http://schemas.openxmlformats.org/drawingml/2006/main" xmlns:p="http://schemas.openxmlformats.org/presentationml/2006/main" xmlns:r="http://schemas.openxmlformats.org/officeDocument/2006/relationships">
   <p:cSld>
     <p:spTree>
       <p:nvGrpSpPr>
@@ -7835,208 +7810,97 @@
         <p:cNvGrpSpPr/>
         <p:nvPr/>
       </p:nvGrpSpPr>
-      <p:grpSpPr>
-        <a:xfrm>
-          <a:off x="0" y="0"/>
-          <a:ext cx="0" cy="0"/>
-          <a:chOff x="0" y="0"/>
-          <a:chExt cx="0" cy="0"/>
-        </a:xfrm>
-      </p:grpSpPr>
-      <p:sp>
-        <p:nvSpPr>
-          <p:cNvPr id="2" name="Title 1"/>
-          <p:cNvSpPr>
-            <a:spLocks noGrp="1"/>
-          </p:cNvSpPr>
-          <p:nvPr>
-            <p:ph type="title"/>
-          </p:nvPr>
-        </p:nvSpPr>
-        <p:spPr/>
-        <p:txBody>
-          <a:bodyPr wrap="square"/>
-          <a:lstStyle/>
-          <a:p>
-            <a:r>
-              <a:t>F02 · How It Works</a:t>
-            </a:r>
-          </a:p>
-        </p:txBody>
-      </p:sp>
-      <p:sp>
-        <p:nvSpPr>
-          <p:cNvPr id="3" name="Content Placeholder 2"/>
-          <p:cNvSpPr>
-            <a:spLocks noGrp="1"/>
-          </p:cNvSpPr>
-          <p:nvPr>
-            <p:ph idx="1"/>
-          </p:nvPr>
-        </p:nvSpPr>
-        <p:spPr>
-          <a:xfrm>
-            <a:off x="612648" y="3236976"/>
-            <a:ext cx="10966704" cy="3300984"/>
-          </a:xfrm>
-        </p:spPr>
-        <p:txBody>
-          <a:bodyPr wrap="square"/>
-          <a:lstStyle/>
-          <a:p>
-            <a:endParaRPr/>
-          </a:p>
-        </p:txBody>
-      </p:sp>
-      <p:sp>
-        <p:nvSpPr>
-          <p:cNvPr id="4" name="Rounded Rectangle 3"/>
-          <p:cNvSpPr/>
+      <p:grpSpPr/>
+      <p:pic>
+        <p:nvPicPr>
+          <p:cNvPr id="2" name="Picture 1" descr="image.png"/>
+          <p:cNvPicPr>
+            <a:picLocks noChangeAspect="1"/>
+          </p:cNvPicPr>
           <p:nvPr/>
-        </p:nvSpPr>
-        <p:spPr>
-          <a:xfrm>
-            <a:off x="612648" y="1737360"/>
-            <a:ext cx="1864156" cy="1271016"/>
-          </a:xfrm>
-          <a:prstGeom prst="roundRect">
+        </p:nvPicPr>
+        <p:blipFill>
+          <a:blip r:embed="rId2"/>
+          <a:stretch>
+            <a:fillRect/>
+          </a:stretch>
+        </p:blipFill>
+        <p:spPr>
+          <a:xfrm>
+            <a:off x="5638800" y="1371600"/>
+            <a:ext cx="914400" cy="914400"/>
+          </a:xfrm>
+          <a:prstGeom prst="rect">
+            <a:avLst/>
+          </a:prstGeom>
+        </p:spPr>
+      </p:pic>
+      <p:sp>
+        <p:nvSpPr>
+          <p:cNvPr id="3" name="TextBox 2"/>
+          <p:cNvSpPr txBox="1"/>
+          <p:nvPr/>
+        </p:nvSpPr>
+        <p:spPr>
+          <a:xfrm>
+            <a:off x="914400" y="2834640"/>
+            <a:ext cx="10332720" cy="2011680"/>
+          </a:xfrm>
+          <a:prstGeom prst="rect">
             <a:avLst/>
           </a:prstGeom>
           <a:noFill/>
-          <a:ln w="22225">
-            <a:solidFill>
-              <a:srgbClr val="017AB4"/>
-            </a:solidFill>
-          </a:ln>
-          <a:effectLst/>
-        </p:spPr>
-        <p:style>
-          <a:lnRef idx="1">
-            <a:schemeClr val="accent1"/>
-          </a:lnRef>
-          <a:fillRef idx="3">
-            <a:schemeClr val="accent1"/>
-          </a:fillRef>
-          <a:effectRef idx="2">
-            <a:schemeClr val="accent1"/>
-          </a:effectRef>
-          <a:fontRef idx="minor">
-            <a:schemeClr val="lt1"/>
-          </a:fontRef>
-        </p:style>
-        <p:txBody>
-          <a:bodyPr wrap="square" lIns="73152" rIns="73152" rtlCol="0" anchor="ctr"/>
+        </p:spPr>
+        <p:txBody>
+          <a:bodyPr wrap="square" anchor="ctr">
+            <a:spAutoFit/>
+          </a:bodyPr>
           <a:lstStyle/>
           <a:p>
             <a:pPr algn="ctr"/>
             <a:r>
-              <a:rPr sz="1300">
+              <a:rPr sz="4000"/>
+              <a:t>Pull facts out of free-form text into </a:t>
+            </a:r>
+            <a:r>
+              <a:rPr b="1" sz="4000">
                 <a:solidFill>
-                  <a:srgbClr val="000000"/>
+                  <a:srgbClr val="017AB4"/>
                 </a:solidFill>
               </a:rPr>
-              <a:t>Trip report</a:t>
-            </a:r>
-          </a:p>
-        </p:txBody>
-      </p:sp>
-      <p:sp>
-        <p:nvSpPr>
-          <p:cNvPr id="5" name="Right Arrow 4"/>
-          <p:cNvSpPr/>
+              <a:t>fields your code can query</a:t>
+            </a:r>
+            <a:r>
+              <a:rPr sz="4000"/>
+              <a:t>.</a:t>
+            </a:r>
+          </a:p>
+        </p:txBody>
+      </p:sp>
+      <p:pic>
+        <p:nvPicPr>
+          <p:cNvPr id="4" name="Picture 3" descr="image.png"/>
+          <p:cNvPicPr>
+            <a:picLocks noChangeAspect="1"/>
+          </p:cNvPicPr>
           <p:nvPr/>
-        </p:nvSpPr>
-        <p:spPr>
-          <a:xfrm>
-            <a:off x="2531668" y="2226564"/>
-            <a:ext cx="301752" cy="292608"/>
-          </a:xfrm>
-          <a:prstGeom prst="rightArrow">
+        </p:nvPicPr>
+        <p:blipFill>
+          <a:blip r:embed="rId3"/>
+          <a:stretch>
+            <a:fillRect/>
+          </a:stretch>
+        </p:blipFill>
+        <p:spPr>
+          <a:xfrm>
+            <a:off x="9326880" y="5989320"/>
+            <a:ext cx="2560320" cy="640080"/>
+          </a:xfrm>
+          <a:prstGeom prst="rect">
             <a:avLst/>
           </a:prstGeom>
-          <a:solidFill>
-            <a:srgbClr val="017AB4"/>
-          </a:solidFill>
-          <a:ln>
-            <a:noFill/>
-          </a:ln>
-          <a:effectLst/>
-        </p:spPr>
-        <p:style>
-          <a:lnRef idx="1">
-            <a:schemeClr val="accent1"/>
-          </a:lnRef>
-          <a:fillRef idx="3">
-            <a:schemeClr val="accent1"/>
-          </a:fillRef>
-          <a:effectRef idx="2">
-            <a:schemeClr val="accent1"/>
-          </a:effectRef>
-          <a:fontRef idx="minor">
-            <a:schemeClr val="lt1"/>
-          </a:fontRef>
-        </p:style>
-        <p:txBody>
-          <a:bodyPr rtlCol="0" anchor="ctr"/>
-          <a:lstStyle/>
-          <a:p>
-            <a:pPr algn="ctr"/>
-            <a:endParaRPr/>
-          </a:p>
-        </p:txBody>
-      </p:sp>
-      <p:sp>
-        <p:nvSpPr>
-          <p:cNvPr id="6" name="Rounded Rectangle 5"/>
-          <p:cNvSpPr/>
-          <p:nvPr/>
-        </p:nvSpPr>
-        <p:spPr>
-          <a:xfrm>
-            <a:off x="2888284" y="1737360"/>
-            <a:ext cx="1864156" cy="1271016"/>
-          </a:xfrm>
-          <a:prstGeom prst="roundRect">
-            <a:avLst/>
-          </a:prstGeom>
-          <a:noFill/>
-          <a:ln w="22225">
-            <a:solidFill>
-              <a:srgbClr val="017AB4"/>
-            </a:solidFill>
-          </a:ln>
-          <a:effectLst/>
-        </p:spPr>
-        <p:style>
-          <a:lnRef idx="1">
-            <a:schemeClr val="accent1"/>
-          </a:lnRef>
-          <a:fillRef idx="3">
-            <a:schemeClr val="accent1"/>
-          </a:fillRef>
-          <a:effectRef idx="2">
-            <a:schemeClr val="accent1"/>
-          </a:effectRef>
-          <a:fontRef idx="minor">
-            <a:schemeClr val="lt1"/>
-          </a:fontRef>
-        </p:style>
-        <p:txBody>
-          <a:bodyPr wrap="square" lIns="73152" rIns="73152" rtlCol="0" anchor="ctr"/>
-          <a:lstStyle/>
-          <a:p>
-            <a:pPr algn="ctr"/>
-            <a:r>
-              <a:rPr sz="1300">
-                <a:solidFill>
-                  <a:srgbClr val="000000"/>
-                </a:solidFill>
-              </a:rPr>
-              <a:t>Prompt: fields, types, examples, "null when absent"</a:t>
-            </a:r>
-          </a:p>
-        </p:txBody>
-      </p:sp>
+        </p:spPr>
+      </p:pic>
     </p:spTree>
   </p:cSld>
   <p:clrMapOvr>
@@ -8159,200 +8023,6 @@
           </a:p>
         </p:txBody>
       </p:sp>
-      <p:sp>
-        <p:nvSpPr>
-          <p:cNvPr id="5" name="Right Arrow 4"/>
-          <p:cNvSpPr/>
-          <p:nvPr/>
-        </p:nvSpPr>
-        <p:spPr>
-          <a:xfrm>
-            <a:off x="2531668" y="2226564"/>
-            <a:ext cx="301752" cy="292608"/>
-          </a:xfrm>
-          <a:prstGeom prst="rightArrow">
-            <a:avLst/>
-          </a:prstGeom>
-          <a:solidFill>
-            <a:srgbClr val="017AB4"/>
-          </a:solidFill>
-          <a:ln>
-            <a:noFill/>
-          </a:ln>
-          <a:effectLst/>
-        </p:spPr>
-        <p:style>
-          <a:lnRef idx="1">
-            <a:schemeClr val="accent1"/>
-          </a:lnRef>
-          <a:fillRef idx="3">
-            <a:schemeClr val="accent1"/>
-          </a:fillRef>
-          <a:effectRef idx="2">
-            <a:schemeClr val="accent1"/>
-          </a:effectRef>
-          <a:fontRef idx="minor">
-            <a:schemeClr val="lt1"/>
-          </a:fontRef>
-        </p:style>
-        <p:txBody>
-          <a:bodyPr rtlCol="0" anchor="ctr"/>
-          <a:lstStyle/>
-          <a:p>
-            <a:pPr algn="ctr"/>
-            <a:endParaRPr/>
-          </a:p>
-        </p:txBody>
-      </p:sp>
-      <p:sp>
-        <p:nvSpPr>
-          <p:cNvPr id="6" name="Rounded Rectangle 5"/>
-          <p:cNvSpPr/>
-          <p:nvPr/>
-        </p:nvSpPr>
-        <p:spPr>
-          <a:xfrm>
-            <a:off x="2888284" y="1737360"/>
-            <a:ext cx="1864156" cy="1271016"/>
-          </a:xfrm>
-          <a:prstGeom prst="roundRect">
-            <a:avLst/>
-          </a:prstGeom>
-          <a:noFill/>
-          <a:ln w="22225">
-            <a:solidFill>
-              <a:srgbClr val="017AB4"/>
-            </a:solidFill>
-          </a:ln>
-          <a:effectLst/>
-        </p:spPr>
-        <p:style>
-          <a:lnRef idx="1">
-            <a:schemeClr val="accent1"/>
-          </a:lnRef>
-          <a:fillRef idx="3">
-            <a:schemeClr val="accent1"/>
-          </a:fillRef>
-          <a:effectRef idx="2">
-            <a:schemeClr val="accent1"/>
-          </a:effectRef>
-          <a:fontRef idx="minor">
-            <a:schemeClr val="lt1"/>
-          </a:fontRef>
-        </p:style>
-        <p:txBody>
-          <a:bodyPr wrap="square" lIns="73152" rIns="73152" rtlCol="0" anchor="ctr"/>
-          <a:lstStyle/>
-          <a:p>
-            <a:pPr algn="ctr"/>
-            <a:r>
-              <a:rPr sz="1300">
-                <a:solidFill>
-                  <a:srgbClr val="000000"/>
-                </a:solidFill>
-              </a:rPr>
-              <a:t>Prompt: fields, types, examples, "null when absent"</a:t>
-            </a:r>
-          </a:p>
-        </p:txBody>
-      </p:sp>
-      <p:sp>
-        <p:nvSpPr>
-          <p:cNvPr id="7" name="Right Arrow 6"/>
-          <p:cNvSpPr/>
-          <p:nvPr/>
-        </p:nvSpPr>
-        <p:spPr>
-          <a:xfrm>
-            <a:off x="4807305" y="2226564"/>
-            <a:ext cx="301752" cy="292608"/>
-          </a:xfrm>
-          <a:prstGeom prst="rightArrow">
-            <a:avLst/>
-          </a:prstGeom>
-          <a:solidFill>
-            <a:srgbClr val="017AB4"/>
-          </a:solidFill>
-          <a:ln>
-            <a:noFill/>
-          </a:ln>
-          <a:effectLst/>
-        </p:spPr>
-        <p:style>
-          <a:lnRef idx="1">
-            <a:schemeClr val="accent1"/>
-          </a:lnRef>
-          <a:fillRef idx="3">
-            <a:schemeClr val="accent1"/>
-          </a:fillRef>
-          <a:effectRef idx="2">
-            <a:schemeClr val="accent1"/>
-          </a:effectRef>
-          <a:fontRef idx="minor">
-            <a:schemeClr val="lt1"/>
-          </a:fontRef>
-        </p:style>
-        <p:txBody>
-          <a:bodyPr rtlCol="0" anchor="ctr"/>
-          <a:lstStyle/>
-          <a:p>
-            <a:pPr algn="ctr"/>
-            <a:endParaRPr/>
-          </a:p>
-        </p:txBody>
-      </p:sp>
-      <p:sp>
-        <p:nvSpPr>
-          <p:cNvPr id="8" name="Rounded Rectangle 7"/>
-          <p:cNvSpPr/>
-          <p:nvPr/>
-        </p:nvSpPr>
-        <p:spPr>
-          <a:xfrm>
-            <a:off x="5163921" y="1737360"/>
-            <a:ext cx="1864156" cy="1271016"/>
-          </a:xfrm>
-          <a:prstGeom prst="roundRect">
-            <a:avLst/>
-          </a:prstGeom>
-          <a:noFill/>
-          <a:ln w="22225">
-            <a:solidFill>
-              <a:srgbClr val="017AB4"/>
-            </a:solidFill>
-          </a:ln>
-          <a:effectLst/>
-        </p:spPr>
-        <p:style>
-          <a:lnRef idx="1">
-            <a:schemeClr val="accent1"/>
-          </a:lnRef>
-          <a:fillRef idx="3">
-            <a:schemeClr val="accent1"/>
-          </a:fillRef>
-          <a:effectRef idx="2">
-            <a:schemeClr val="accent1"/>
-          </a:effectRef>
-          <a:fontRef idx="minor">
-            <a:schemeClr val="lt1"/>
-          </a:fontRef>
-        </p:style>
-        <p:txBody>
-          <a:bodyPr wrap="square" lIns="73152" rIns="73152" rtlCol="0" anchor="ctr"/>
-          <a:lstStyle/>
-          <a:p>
-            <a:pPr algn="ctr"/>
-            <a:r>
-              <a:rPr sz="1300">
-                <a:solidFill>
-                  <a:srgbClr val="000000"/>
-                </a:solidFill>
-              </a:rPr>
-              <a:t>llama3.2 in JSON mode</a:t>
-            </a:r>
-          </a:p>
-        </p:txBody>
-      </p:sp>
     </p:spTree>
   </p:cSld>
   <p:clrMapOvr>
@@ -8572,200 +8242,6 @@
           </a:p>
         </p:txBody>
       </p:sp>
-      <p:sp>
-        <p:nvSpPr>
-          <p:cNvPr id="7" name="Right Arrow 6"/>
-          <p:cNvSpPr/>
-          <p:nvPr/>
-        </p:nvSpPr>
-        <p:spPr>
-          <a:xfrm>
-            <a:off x="4807305" y="2226564"/>
-            <a:ext cx="301752" cy="292608"/>
-          </a:xfrm>
-          <a:prstGeom prst="rightArrow">
-            <a:avLst/>
-          </a:prstGeom>
-          <a:solidFill>
-            <a:srgbClr val="017AB4"/>
-          </a:solidFill>
-          <a:ln>
-            <a:noFill/>
-          </a:ln>
-          <a:effectLst/>
-        </p:spPr>
-        <p:style>
-          <a:lnRef idx="1">
-            <a:schemeClr val="accent1"/>
-          </a:lnRef>
-          <a:fillRef idx="3">
-            <a:schemeClr val="accent1"/>
-          </a:fillRef>
-          <a:effectRef idx="2">
-            <a:schemeClr val="accent1"/>
-          </a:effectRef>
-          <a:fontRef idx="minor">
-            <a:schemeClr val="lt1"/>
-          </a:fontRef>
-        </p:style>
-        <p:txBody>
-          <a:bodyPr rtlCol="0" anchor="ctr"/>
-          <a:lstStyle/>
-          <a:p>
-            <a:pPr algn="ctr"/>
-            <a:endParaRPr/>
-          </a:p>
-        </p:txBody>
-      </p:sp>
-      <p:sp>
-        <p:nvSpPr>
-          <p:cNvPr id="8" name="Rounded Rectangle 7"/>
-          <p:cNvSpPr/>
-          <p:nvPr/>
-        </p:nvSpPr>
-        <p:spPr>
-          <a:xfrm>
-            <a:off x="5163921" y="1737360"/>
-            <a:ext cx="1864156" cy="1271016"/>
-          </a:xfrm>
-          <a:prstGeom prst="roundRect">
-            <a:avLst/>
-          </a:prstGeom>
-          <a:noFill/>
-          <a:ln w="22225">
-            <a:solidFill>
-              <a:srgbClr val="017AB4"/>
-            </a:solidFill>
-          </a:ln>
-          <a:effectLst/>
-        </p:spPr>
-        <p:style>
-          <a:lnRef idx="1">
-            <a:schemeClr val="accent1"/>
-          </a:lnRef>
-          <a:fillRef idx="3">
-            <a:schemeClr val="accent1"/>
-          </a:fillRef>
-          <a:effectRef idx="2">
-            <a:schemeClr val="accent1"/>
-          </a:effectRef>
-          <a:fontRef idx="minor">
-            <a:schemeClr val="lt1"/>
-          </a:fontRef>
-        </p:style>
-        <p:txBody>
-          <a:bodyPr wrap="square" lIns="73152" rIns="73152" rtlCol="0" anchor="ctr"/>
-          <a:lstStyle/>
-          <a:p>
-            <a:pPr algn="ctr"/>
-            <a:r>
-              <a:rPr sz="1300">
-                <a:solidFill>
-                  <a:srgbClr val="000000"/>
-                </a:solidFill>
-              </a:rPr>
-              <a:t>llama3.2 in JSON mode</a:t>
-            </a:r>
-          </a:p>
-        </p:txBody>
-      </p:sp>
-      <p:sp>
-        <p:nvSpPr>
-          <p:cNvPr id="9" name="Right Arrow 8"/>
-          <p:cNvSpPr/>
-          <p:nvPr/>
-        </p:nvSpPr>
-        <p:spPr>
-          <a:xfrm>
-            <a:off x="7082942" y="2226564"/>
-            <a:ext cx="301752" cy="292608"/>
-          </a:xfrm>
-          <a:prstGeom prst="rightArrow">
-            <a:avLst/>
-          </a:prstGeom>
-          <a:solidFill>
-            <a:srgbClr val="017AB4"/>
-          </a:solidFill>
-          <a:ln>
-            <a:noFill/>
-          </a:ln>
-          <a:effectLst/>
-        </p:spPr>
-        <p:style>
-          <a:lnRef idx="1">
-            <a:schemeClr val="accent1"/>
-          </a:lnRef>
-          <a:fillRef idx="3">
-            <a:schemeClr val="accent1"/>
-          </a:fillRef>
-          <a:effectRef idx="2">
-            <a:schemeClr val="accent1"/>
-          </a:effectRef>
-          <a:fontRef idx="minor">
-            <a:schemeClr val="lt1"/>
-          </a:fontRef>
-        </p:style>
-        <p:txBody>
-          <a:bodyPr rtlCol="0" anchor="ctr"/>
-          <a:lstStyle/>
-          <a:p>
-            <a:pPr algn="ctr"/>
-            <a:endParaRPr/>
-          </a:p>
-        </p:txBody>
-      </p:sp>
-      <p:sp>
-        <p:nvSpPr>
-          <p:cNvPr id="10" name="Rounded Rectangle 9"/>
-          <p:cNvSpPr/>
-          <p:nvPr/>
-        </p:nvSpPr>
-        <p:spPr>
-          <a:xfrm>
-            <a:off x="7439558" y="1737360"/>
-            <a:ext cx="1864156" cy="1271016"/>
-          </a:xfrm>
-          <a:prstGeom prst="roundRect">
-            <a:avLst/>
-          </a:prstGeom>
-          <a:noFill/>
-          <a:ln w="22225">
-            <a:solidFill>
-              <a:srgbClr val="017AB4"/>
-            </a:solidFill>
-          </a:ln>
-          <a:effectLst/>
-        </p:spPr>
-        <p:style>
-          <a:lnRef idx="1">
-            <a:schemeClr val="accent1"/>
-          </a:lnRef>
-          <a:fillRef idx="3">
-            <a:schemeClr val="accent1"/>
-          </a:fillRef>
-          <a:effectRef idx="2">
-            <a:schemeClr val="accent1"/>
-          </a:effectRef>
-          <a:fontRef idx="minor">
-            <a:schemeClr val="lt1"/>
-          </a:fontRef>
-        </p:style>
-        <p:txBody>
-          <a:bodyPr wrap="square" lIns="73152" rIns="73152" rtlCol="0" anchor="ctr"/>
-          <a:lstStyle/>
-          <a:p>
-            <a:pPr algn="ctr"/>
-            <a:r>
-              <a:rPr sz="1300">
-                <a:solidFill>
-                  <a:srgbClr val="000000"/>
-                </a:solidFill>
-              </a:rPr>
-              <a:t>Parse and validate against the schema</a:t>
-            </a:r>
-          </a:p>
-        </p:txBody>
-      </p:sp>
     </p:spTree>
   </p:cSld>
   <p:clrMapOvr>
@@ -9082,200 +8558,6 @@
           </a:p>
         </p:txBody>
       </p:sp>
-      <p:sp>
-        <p:nvSpPr>
-          <p:cNvPr id="9" name="Right Arrow 8"/>
-          <p:cNvSpPr/>
-          <p:nvPr/>
-        </p:nvSpPr>
-        <p:spPr>
-          <a:xfrm>
-            <a:off x="7082942" y="2226564"/>
-            <a:ext cx="301752" cy="292608"/>
-          </a:xfrm>
-          <a:prstGeom prst="rightArrow">
-            <a:avLst/>
-          </a:prstGeom>
-          <a:solidFill>
-            <a:srgbClr val="017AB4"/>
-          </a:solidFill>
-          <a:ln>
-            <a:noFill/>
-          </a:ln>
-          <a:effectLst/>
-        </p:spPr>
-        <p:style>
-          <a:lnRef idx="1">
-            <a:schemeClr val="accent1"/>
-          </a:lnRef>
-          <a:fillRef idx="3">
-            <a:schemeClr val="accent1"/>
-          </a:fillRef>
-          <a:effectRef idx="2">
-            <a:schemeClr val="accent1"/>
-          </a:effectRef>
-          <a:fontRef idx="minor">
-            <a:schemeClr val="lt1"/>
-          </a:fontRef>
-        </p:style>
-        <p:txBody>
-          <a:bodyPr rtlCol="0" anchor="ctr"/>
-          <a:lstStyle/>
-          <a:p>
-            <a:pPr algn="ctr"/>
-            <a:endParaRPr/>
-          </a:p>
-        </p:txBody>
-      </p:sp>
-      <p:sp>
-        <p:nvSpPr>
-          <p:cNvPr id="10" name="Rounded Rectangle 9"/>
-          <p:cNvSpPr/>
-          <p:nvPr/>
-        </p:nvSpPr>
-        <p:spPr>
-          <a:xfrm>
-            <a:off x="7439558" y="1737360"/>
-            <a:ext cx="1864156" cy="1271016"/>
-          </a:xfrm>
-          <a:prstGeom prst="roundRect">
-            <a:avLst/>
-          </a:prstGeom>
-          <a:noFill/>
-          <a:ln w="22225">
-            <a:solidFill>
-              <a:srgbClr val="017AB4"/>
-            </a:solidFill>
-          </a:ln>
-          <a:effectLst/>
-        </p:spPr>
-        <p:style>
-          <a:lnRef idx="1">
-            <a:schemeClr val="accent1"/>
-          </a:lnRef>
-          <a:fillRef idx="3">
-            <a:schemeClr val="accent1"/>
-          </a:fillRef>
-          <a:effectRef idx="2">
-            <a:schemeClr val="accent1"/>
-          </a:effectRef>
-          <a:fontRef idx="minor">
-            <a:schemeClr val="lt1"/>
-          </a:fontRef>
-        </p:style>
-        <p:txBody>
-          <a:bodyPr wrap="square" lIns="73152" rIns="73152" rtlCol="0" anchor="ctr"/>
-          <a:lstStyle/>
-          <a:p>
-            <a:pPr algn="ctr"/>
-            <a:r>
-              <a:rPr sz="1300">
-                <a:solidFill>
-                  <a:srgbClr val="000000"/>
-                </a:solidFill>
-              </a:rPr>
-              <a:t>Parse and validate against the schema</a:t>
-            </a:r>
-          </a:p>
-        </p:txBody>
-      </p:sp>
-      <p:sp>
-        <p:nvSpPr>
-          <p:cNvPr id="11" name="Right Arrow 10"/>
-          <p:cNvSpPr/>
-          <p:nvPr/>
-        </p:nvSpPr>
-        <p:spPr>
-          <a:xfrm>
-            <a:off x="9358579" y="2226564"/>
-            <a:ext cx="301752" cy="292608"/>
-          </a:xfrm>
-          <a:prstGeom prst="rightArrow">
-            <a:avLst/>
-          </a:prstGeom>
-          <a:solidFill>
-            <a:srgbClr val="017AB4"/>
-          </a:solidFill>
-          <a:ln>
-            <a:noFill/>
-          </a:ln>
-          <a:effectLst/>
-        </p:spPr>
-        <p:style>
-          <a:lnRef idx="1">
-            <a:schemeClr val="accent1"/>
-          </a:lnRef>
-          <a:fillRef idx="3">
-            <a:schemeClr val="accent1"/>
-          </a:fillRef>
-          <a:effectRef idx="2">
-            <a:schemeClr val="accent1"/>
-          </a:effectRef>
-          <a:fontRef idx="minor">
-            <a:schemeClr val="lt1"/>
-          </a:fontRef>
-        </p:style>
-        <p:txBody>
-          <a:bodyPr rtlCol="0" anchor="ctr"/>
-          <a:lstStyle/>
-          <a:p>
-            <a:pPr algn="ctr"/>
-            <a:endParaRPr/>
-          </a:p>
-        </p:txBody>
-      </p:sp>
-      <p:sp>
-        <p:nvSpPr>
-          <p:cNvPr id="12" name="Rounded Rectangle 11"/>
-          <p:cNvSpPr/>
-          <p:nvPr/>
-        </p:nvSpPr>
-        <p:spPr>
-          <a:xfrm>
-            <a:off x="9715195" y="1737360"/>
-            <a:ext cx="1864156" cy="1271016"/>
-          </a:xfrm>
-          <a:prstGeom prst="roundRect">
-            <a:avLst/>
-          </a:prstGeom>
-          <a:noFill/>
-          <a:ln w="22225">
-            <a:solidFill>
-              <a:srgbClr val="017AB4"/>
-            </a:solidFill>
-          </a:ln>
-          <a:effectLst/>
-        </p:spPr>
-        <p:style>
-          <a:lnRef idx="1">
-            <a:schemeClr val="accent1"/>
-          </a:lnRef>
-          <a:fillRef idx="3">
-            <a:schemeClr val="accent1"/>
-          </a:fillRef>
-          <a:effectRef idx="2">
-            <a:schemeClr val="accent1"/>
-          </a:effectRef>
-          <a:fontRef idx="minor">
-            <a:schemeClr val="lt1"/>
-          </a:fontRef>
-        </p:style>
-        <p:txBody>
-          <a:bodyPr wrap="square" lIns="73152" rIns="73152" rtlCol="0" anchor="ctr"/>
-          <a:lstStyle/>
-          <a:p>
-            <a:pPr algn="ctr"/>
-            <a:r>
-              <a:rPr sz="1300">
-                <a:solidFill>
-                  <a:srgbClr val="000000"/>
-                </a:solidFill>
-              </a:rPr>
-              <a:t>Store, or reject and log</a:t>
-            </a:r>
-          </a:p>
-        </p:txBody>
-      </p:sp>
     </p:spTree>
   </p:cSld>
   <p:clrMapOvr>
@@ -9339,15 +8621,10 @@
           </a:xfrm>
         </p:spPr>
         <p:txBody>
-          <a:bodyPr wrap="square">
-            <a:normAutofit/>
-          </a:bodyPr>
-          <a:lstStyle/>
-          <a:p>
-            <a:r>
-              <a:rPr sz="2800" dirty="0"/>
-              <a:t>The model writes JSON; your code decides whether to believe it</a:t>
-            </a:r>
+          <a:bodyPr wrap="square"/>
+          <a:lstStyle/>
+          <a:p>
+            <a:endParaRPr/>
           </a:p>
         </p:txBody>
       </p:sp>
@@ -9690,103 +8967,6 @@
                 </a:solidFill>
               </a:rPr>
               <a:t>Parse and validate against the schema</a:t>
-            </a:r>
-          </a:p>
-        </p:txBody>
-      </p:sp>
-      <p:sp>
-        <p:nvSpPr>
-          <p:cNvPr id="11" name="Right Arrow 10"/>
-          <p:cNvSpPr/>
-          <p:nvPr/>
-        </p:nvSpPr>
-        <p:spPr>
-          <a:xfrm>
-            <a:off x="9358579" y="2226564"/>
-            <a:ext cx="301752" cy="292608"/>
-          </a:xfrm>
-          <a:prstGeom prst="rightArrow">
-            <a:avLst/>
-          </a:prstGeom>
-          <a:solidFill>
-            <a:srgbClr val="017AB4"/>
-          </a:solidFill>
-          <a:ln>
-            <a:noFill/>
-          </a:ln>
-          <a:effectLst/>
-        </p:spPr>
-        <p:style>
-          <a:lnRef idx="1">
-            <a:schemeClr val="accent1"/>
-          </a:lnRef>
-          <a:fillRef idx="3">
-            <a:schemeClr val="accent1"/>
-          </a:fillRef>
-          <a:effectRef idx="2">
-            <a:schemeClr val="accent1"/>
-          </a:effectRef>
-          <a:fontRef idx="minor">
-            <a:schemeClr val="lt1"/>
-          </a:fontRef>
-        </p:style>
-        <p:txBody>
-          <a:bodyPr rtlCol="0" anchor="ctr"/>
-          <a:lstStyle/>
-          <a:p>
-            <a:pPr algn="ctr"/>
-            <a:endParaRPr/>
-          </a:p>
-        </p:txBody>
-      </p:sp>
-      <p:sp>
-        <p:nvSpPr>
-          <p:cNvPr id="12" name="Rounded Rectangle 11"/>
-          <p:cNvSpPr/>
-          <p:nvPr/>
-        </p:nvSpPr>
-        <p:spPr>
-          <a:xfrm>
-            <a:off x="9715195" y="1737360"/>
-            <a:ext cx="1864156" cy="1271016"/>
-          </a:xfrm>
-          <a:prstGeom prst="roundRect">
-            <a:avLst/>
-          </a:prstGeom>
-          <a:noFill/>
-          <a:ln w="22225">
-            <a:solidFill>
-              <a:srgbClr val="017AB4"/>
-            </a:solidFill>
-          </a:ln>
-          <a:effectLst/>
-        </p:spPr>
-        <p:style>
-          <a:lnRef idx="1">
-            <a:schemeClr val="accent1"/>
-          </a:lnRef>
-          <a:fillRef idx="3">
-            <a:schemeClr val="accent1"/>
-          </a:fillRef>
-          <a:effectRef idx="2">
-            <a:schemeClr val="accent1"/>
-          </a:effectRef>
-          <a:fontRef idx="minor">
-            <a:schemeClr val="lt1"/>
-          </a:fontRef>
-        </p:style>
-        <p:txBody>
-          <a:bodyPr wrap="square" lIns="73152" rIns="73152" rtlCol="0" anchor="ctr"/>
-          <a:lstStyle/>
-          <a:p>
-            <a:pPr algn="ctr"/>
-            <a:r>
-              <a:rPr sz="1300">
-                <a:solidFill>
-                  <a:srgbClr val="000000"/>
-                </a:solidFill>
-              </a:rPr>
-              <a:t>Store, or reject and log</a:t>
             </a:r>
           </a:p>
         </p:txBody>
@@ -9854,31 +9034,10 @@
           </a:xfrm>
         </p:spPr>
         <p:txBody>
-          <a:bodyPr wrap="square">
-            <a:normAutofit/>
-          </a:bodyPr>
-          <a:lstStyle/>
-          <a:p>
-            <a:r>
-              <a:rPr sz="2800" dirty="0"/>
-              <a:t>The model writes JSON; your code decides whether to believe it</a:t>
-            </a:r>
-          </a:p>
-          <a:p>
-            <a:r>
-              <a:rPr sz="2800" dirty="0"/>
-              <a:t>The </a:t>
-            </a:r>
-            <a:r>
-              <a:rPr sz="2800" dirty="0">
-                <a:latin typeface="Consolas"/>
-              </a:rPr>
-              <a:t>null</a:t>
-            </a:r>
-            <a:r>
-              <a:rPr sz="2800" dirty="0"/>
-              <a:t> rule and the validator are the feature</a:t>
-            </a:r>
+          <a:bodyPr wrap="square"/>
+          <a:lstStyle/>
+          <a:p>
+            <a:endParaRPr/>
           </a:p>
         </p:txBody>
       </p:sp>
@@ -10395,28 +9554,6 @@
               <a:t>The model writes JSON; your code decides whether to believe it</a:t>
             </a:r>
           </a:p>
-          <a:p>
-            <a:r>
-              <a:rPr sz="2800" dirty="0"/>
-              <a:t>The </a:t>
-            </a:r>
-            <a:r>
-              <a:rPr sz="2800" dirty="0">
-                <a:latin typeface="Consolas"/>
-              </a:rPr>
-              <a:t>null</a:t>
-            </a:r>
-            <a:r>
-              <a:rPr sz="2800" dirty="0"/>
-              <a:t> rule and the validator are the feature</a:t>
-            </a:r>
-          </a:p>
-          <a:p>
-            <a:r>
-              <a:rPr sz="2800" dirty="0"/>
-              <a:t>A rejected record is a good outcome</a:t>
-            </a:r>
-          </a:p>
         </p:txBody>
       </p:sp>
       <p:sp>
@@ -10986,16 +10123,134 @@
       </p:grpSpPr>
       <p:sp>
         <p:nvSpPr>
-          <p:cNvPr id="2" name="Rectangle 1"/>
+          <p:cNvPr id="2" name="Title 1"/>
+          <p:cNvSpPr>
+            <a:spLocks noGrp="1"/>
+          </p:cNvSpPr>
+          <p:nvPr>
+            <p:ph type="title"/>
+          </p:nvPr>
+        </p:nvSpPr>
+        <p:spPr/>
+        <p:txBody>
+          <a:bodyPr wrap="square"/>
+          <a:lstStyle/>
+          <a:p>
+            <a:r>
+              <a:t>F02 · How It Works</a:t>
+            </a:r>
+          </a:p>
+        </p:txBody>
+      </p:sp>
+      <p:sp>
+        <p:nvSpPr>
+          <p:cNvPr id="3" name="Content Placeholder 2"/>
+          <p:cNvSpPr>
+            <a:spLocks noGrp="1"/>
+          </p:cNvSpPr>
+          <p:nvPr>
+            <p:ph idx="1"/>
+          </p:nvPr>
+        </p:nvSpPr>
+        <p:spPr>
+          <a:xfrm>
+            <a:off x="612648" y="3236976"/>
+            <a:ext cx="10966704" cy="3300984"/>
+          </a:xfrm>
+        </p:spPr>
+        <p:txBody>
+          <a:bodyPr wrap="square">
+            <a:normAutofit/>
+          </a:bodyPr>
+          <a:lstStyle/>
+          <a:p>
+            <a:r>
+              <a:rPr sz="2800" dirty="0"/>
+              <a:t>The model writes JSON; your code decides whether to believe it</a:t>
+            </a:r>
+          </a:p>
+          <a:p>
+            <a:r>
+              <a:rPr sz="2800" dirty="0"/>
+              <a:t>The </a:t>
+            </a:r>
+            <a:r>
+              <a:rPr sz="2800" dirty="0">
+                <a:latin typeface="Consolas"/>
+              </a:rPr>
+              <a:t>null</a:t>
+            </a:r>
+            <a:r>
+              <a:rPr sz="2800" dirty="0"/>
+              <a:t> rule and the validator are the feature</a:t>
+            </a:r>
+          </a:p>
+        </p:txBody>
+      </p:sp>
+      <p:sp>
+        <p:nvSpPr>
+          <p:cNvPr id="4" name="Rounded Rectangle 3"/>
           <p:cNvSpPr/>
           <p:nvPr/>
         </p:nvSpPr>
         <p:spPr>
           <a:xfrm>
-            <a:off x="0" y="0"/>
-            <a:ext cx="12192000" cy="6858000"/>
-          </a:xfrm>
-          <a:prstGeom prst="rect">
+            <a:off x="612648" y="1737360"/>
+            <a:ext cx="1864156" cy="1271016"/>
+          </a:xfrm>
+          <a:prstGeom prst="roundRect">
+            <a:avLst/>
+          </a:prstGeom>
+          <a:noFill/>
+          <a:ln w="22225">
+            <a:solidFill>
+              <a:srgbClr val="017AB4"/>
+            </a:solidFill>
+          </a:ln>
+          <a:effectLst/>
+        </p:spPr>
+        <p:style>
+          <a:lnRef idx="1">
+            <a:schemeClr val="accent1"/>
+          </a:lnRef>
+          <a:fillRef idx="3">
+            <a:schemeClr val="accent1"/>
+          </a:fillRef>
+          <a:effectRef idx="2">
+            <a:schemeClr val="accent1"/>
+          </a:effectRef>
+          <a:fontRef idx="minor">
+            <a:schemeClr val="lt1"/>
+          </a:fontRef>
+        </p:style>
+        <p:txBody>
+          <a:bodyPr wrap="square" lIns="73152" rIns="73152" rtlCol="0" anchor="ctr"/>
+          <a:lstStyle/>
+          <a:p>
+            <a:pPr algn="ctr"/>
+            <a:r>
+              <a:rPr sz="1300">
+                <a:solidFill>
+                  <a:srgbClr val="000000"/>
+                </a:solidFill>
+              </a:rPr>
+              <a:t>Trip report</a:t>
+            </a:r>
+          </a:p>
+        </p:txBody>
+      </p:sp>
+      <p:sp>
+        <p:nvSpPr>
+          <p:cNvPr id="5" name="Right Arrow 4"/>
+          <p:cNvSpPr/>
+          <p:nvPr/>
+        </p:nvSpPr>
+        <p:spPr>
+          <a:xfrm>
+            <a:off x="2531668" y="2226564"/>
+            <a:ext cx="301752" cy="292608"/>
+          </a:xfrm>
+          <a:prstGeom prst="rightArrow">
             <a:avLst/>
           </a:prstGeom>
           <a:solidFill>
@@ -11031,70 +10286,347 @@
       </p:sp>
       <p:sp>
         <p:nvSpPr>
-          <p:cNvPr id="3" name="TextBox 2"/>
-          <p:cNvSpPr txBox="1"/>
+          <p:cNvPr id="6" name="Rounded Rectangle 5"/>
+          <p:cNvSpPr/>
           <p:nvPr/>
         </p:nvSpPr>
         <p:spPr>
           <a:xfrm>
-            <a:off x="914400" y="2916936"/>
-            <a:ext cx="10332720" cy="1014984"/>
-          </a:xfrm>
-          <a:prstGeom prst="rect">
+            <a:off x="2888284" y="1737360"/>
+            <a:ext cx="1864156" cy="1271016"/>
+          </a:xfrm>
+          <a:prstGeom prst="roundRect">
             <a:avLst/>
           </a:prstGeom>
           <a:noFill/>
-        </p:spPr>
-        <p:txBody>
-          <a:bodyPr wrap="square" anchor="ctr">
-            <a:spAutoFit/>
-          </a:bodyPr>
+          <a:ln w="22225">
+            <a:solidFill>
+              <a:srgbClr val="017AB4"/>
+            </a:solidFill>
+          </a:ln>
+          <a:effectLst/>
+        </p:spPr>
+        <p:style>
+          <a:lnRef idx="1">
+            <a:schemeClr val="accent1"/>
+          </a:lnRef>
+          <a:fillRef idx="3">
+            <a:schemeClr val="accent1"/>
+          </a:fillRef>
+          <a:effectRef idx="2">
+            <a:schemeClr val="accent1"/>
+          </a:effectRef>
+          <a:fontRef idx="minor">
+            <a:schemeClr val="lt1"/>
+          </a:fontRef>
+        </p:style>
+        <p:txBody>
+          <a:bodyPr wrap="square" lIns="73152" rIns="73152" rtlCol="0" anchor="ctr"/>
           <a:lstStyle/>
           <a:p>
             <a:pPr algn="ctr"/>
             <a:r>
-              <a:rPr sz="6000" b="1">
+              <a:rPr sz="1300">
                 <a:solidFill>
-                  <a:srgbClr val="FFFFFF"/>
+                  <a:srgbClr val="000000"/>
                 </a:solidFill>
               </a:rPr>
-              <a:t>DEMO</a:t>
-            </a:r>
-            <a:r>
-              <a:rPr sz="6000">
+              <a:t>Prompt: fields, types, examples, "null when absent"</a:t>
+            </a:r>
+          </a:p>
+        </p:txBody>
+      </p:sp>
+      <p:sp>
+        <p:nvSpPr>
+          <p:cNvPr id="7" name="Right Arrow 6"/>
+          <p:cNvSpPr/>
+          <p:nvPr/>
+        </p:nvSpPr>
+        <p:spPr>
+          <a:xfrm>
+            <a:off x="4807305" y="2226564"/>
+            <a:ext cx="301752" cy="292608"/>
+          </a:xfrm>
+          <a:prstGeom prst="rightArrow">
+            <a:avLst/>
+          </a:prstGeom>
+          <a:solidFill>
+            <a:srgbClr val="017AB4"/>
+          </a:solidFill>
+          <a:ln>
+            <a:noFill/>
+          </a:ln>
+          <a:effectLst/>
+        </p:spPr>
+        <p:style>
+          <a:lnRef idx="1">
+            <a:schemeClr val="accent1"/>
+          </a:lnRef>
+          <a:fillRef idx="3">
+            <a:schemeClr val="accent1"/>
+          </a:fillRef>
+          <a:effectRef idx="2">
+            <a:schemeClr val="accent1"/>
+          </a:effectRef>
+          <a:fontRef idx="minor">
+            <a:schemeClr val="lt1"/>
+          </a:fontRef>
+        </p:style>
+        <p:txBody>
+          <a:bodyPr rtlCol="0" anchor="ctr"/>
+          <a:lstStyle/>
+          <a:p>
+            <a:pPr algn="ctr"/>
+            <a:endParaRPr/>
+          </a:p>
+        </p:txBody>
+      </p:sp>
+      <p:sp>
+        <p:nvSpPr>
+          <p:cNvPr id="8" name="Rounded Rectangle 7"/>
+          <p:cNvSpPr/>
+          <p:nvPr/>
+        </p:nvSpPr>
+        <p:spPr>
+          <a:xfrm>
+            <a:off x="5163921" y="1737360"/>
+            <a:ext cx="1864156" cy="1271016"/>
+          </a:xfrm>
+          <a:prstGeom prst="roundRect">
+            <a:avLst/>
+          </a:prstGeom>
+          <a:noFill/>
+          <a:ln w="22225">
+            <a:solidFill>
+              <a:srgbClr val="017AB4"/>
+            </a:solidFill>
+          </a:ln>
+          <a:effectLst/>
+        </p:spPr>
+        <p:style>
+          <a:lnRef idx="1">
+            <a:schemeClr val="accent1"/>
+          </a:lnRef>
+          <a:fillRef idx="3">
+            <a:schemeClr val="accent1"/>
+          </a:fillRef>
+          <a:effectRef idx="2">
+            <a:schemeClr val="accent1"/>
+          </a:effectRef>
+          <a:fontRef idx="minor">
+            <a:schemeClr val="lt1"/>
+          </a:fontRef>
+        </p:style>
+        <p:txBody>
+          <a:bodyPr wrap="square" lIns="73152" rIns="73152" rtlCol="0" anchor="ctr"/>
+          <a:lstStyle/>
+          <a:p>
+            <a:pPr algn="ctr"/>
+            <a:r>
+              <a:rPr sz="1300">
                 <a:solidFill>
-                  <a:srgbClr val="FFFFFF"/>
+                  <a:srgbClr val="000000"/>
                 </a:solidFill>
               </a:rPr>
-              <a:t> · F02 Extraction</a:t>
-            </a:r>
-          </a:p>
-        </p:txBody>
-      </p:sp>
-      <p:pic>
-        <p:nvPicPr>
-          <p:cNvPr id="4" name="Picture 3" descr="image.png"/>
-          <p:cNvPicPr>
-            <a:picLocks noChangeAspect="1"/>
-          </p:cNvPicPr>
+              <a:t>llama3.2 in JSON mode</a:t>
+            </a:r>
+          </a:p>
+        </p:txBody>
+      </p:sp>
+      <p:sp>
+        <p:nvSpPr>
+          <p:cNvPr id="9" name="Right Arrow 8"/>
+          <p:cNvSpPr/>
           <p:nvPr/>
-        </p:nvPicPr>
-        <p:blipFill>
-          <a:blip r:embed="rId2"/>
-          <a:stretch>
-            <a:fillRect/>
-          </a:stretch>
-        </p:blipFill>
-        <p:spPr>
-          <a:xfrm>
-            <a:off x="9326880" y="5989320"/>
-            <a:ext cx="2560320" cy="640080"/>
-          </a:xfrm>
-          <a:prstGeom prst="rect">
+        </p:nvSpPr>
+        <p:spPr>
+          <a:xfrm>
+            <a:off x="7082942" y="2226564"/>
+            <a:ext cx="301752" cy="292608"/>
+          </a:xfrm>
+          <a:prstGeom prst="rightArrow">
             <a:avLst/>
           </a:prstGeom>
-        </p:spPr>
-      </p:pic>
+          <a:solidFill>
+            <a:srgbClr val="017AB4"/>
+          </a:solidFill>
+          <a:ln>
+            <a:noFill/>
+          </a:ln>
+          <a:effectLst/>
+        </p:spPr>
+        <p:style>
+          <a:lnRef idx="1">
+            <a:schemeClr val="accent1"/>
+          </a:lnRef>
+          <a:fillRef idx="3">
+            <a:schemeClr val="accent1"/>
+          </a:fillRef>
+          <a:effectRef idx="2">
+            <a:schemeClr val="accent1"/>
+          </a:effectRef>
+          <a:fontRef idx="minor">
+            <a:schemeClr val="lt1"/>
+          </a:fontRef>
+        </p:style>
+        <p:txBody>
+          <a:bodyPr rtlCol="0" anchor="ctr"/>
+          <a:lstStyle/>
+          <a:p>
+            <a:pPr algn="ctr"/>
+            <a:endParaRPr/>
+          </a:p>
+        </p:txBody>
+      </p:sp>
+      <p:sp>
+        <p:nvSpPr>
+          <p:cNvPr id="10" name="Rounded Rectangle 9"/>
+          <p:cNvSpPr/>
+          <p:nvPr/>
+        </p:nvSpPr>
+        <p:spPr>
+          <a:xfrm>
+            <a:off x="7439558" y="1737360"/>
+            <a:ext cx="1864156" cy="1271016"/>
+          </a:xfrm>
+          <a:prstGeom prst="roundRect">
+            <a:avLst/>
+          </a:prstGeom>
+          <a:noFill/>
+          <a:ln w="22225">
+            <a:solidFill>
+              <a:srgbClr val="017AB4"/>
+            </a:solidFill>
+          </a:ln>
+          <a:effectLst/>
+        </p:spPr>
+        <p:style>
+          <a:lnRef idx="1">
+            <a:schemeClr val="accent1"/>
+          </a:lnRef>
+          <a:fillRef idx="3">
+            <a:schemeClr val="accent1"/>
+          </a:fillRef>
+          <a:effectRef idx="2">
+            <a:schemeClr val="accent1"/>
+          </a:effectRef>
+          <a:fontRef idx="minor">
+            <a:schemeClr val="lt1"/>
+          </a:fontRef>
+        </p:style>
+        <p:txBody>
+          <a:bodyPr wrap="square" lIns="73152" rIns="73152" rtlCol="0" anchor="ctr"/>
+          <a:lstStyle/>
+          <a:p>
+            <a:pPr algn="ctr"/>
+            <a:r>
+              <a:rPr sz="1300">
+                <a:solidFill>
+                  <a:srgbClr val="000000"/>
+                </a:solidFill>
+              </a:rPr>
+              <a:t>Parse and validate against the schema</a:t>
+            </a:r>
+          </a:p>
+        </p:txBody>
+      </p:sp>
+      <p:sp>
+        <p:nvSpPr>
+          <p:cNvPr id="11" name="Right Arrow 10"/>
+          <p:cNvSpPr/>
+          <p:nvPr/>
+        </p:nvSpPr>
+        <p:spPr>
+          <a:xfrm>
+            <a:off x="9358579" y="2226564"/>
+            <a:ext cx="301752" cy="292608"/>
+          </a:xfrm>
+          <a:prstGeom prst="rightArrow">
+            <a:avLst/>
+          </a:prstGeom>
+          <a:solidFill>
+            <a:srgbClr val="017AB4"/>
+          </a:solidFill>
+          <a:ln>
+            <a:noFill/>
+          </a:ln>
+          <a:effectLst/>
+        </p:spPr>
+        <p:style>
+          <a:lnRef idx="1">
+            <a:schemeClr val="accent1"/>
+          </a:lnRef>
+          <a:fillRef idx="3">
+            <a:schemeClr val="accent1"/>
+          </a:fillRef>
+          <a:effectRef idx="2">
+            <a:schemeClr val="accent1"/>
+          </a:effectRef>
+          <a:fontRef idx="minor">
+            <a:schemeClr val="lt1"/>
+          </a:fontRef>
+        </p:style>
+        <p:txBody>
+          <a:bodyPr rtlCol="0" anchor="ctr"/>
+          <a:lstStyle/>
+          <a:p>
+            <a:pPr algn="ctr"/>
+            <a:endParaRPr/>
+          </a:p>
+        </p:txBody>
+      </p:sp>
+      <p:sp>
+        <p:nvSpPr>
+          <p:cNvPr id="12" name="Rounded Rectangle 11"/>
+          <p:cNvSpPr/>
+          <p:nvPr/>
+        </p:nvSpPr>
+        <p:spPr>
+          <a:xfrm>
+            <a:off x="9715195" y="1737360"/>
+            <a:ext cx="1864156" cy="1271016"/>
+          </a:xfrm>
+          <a:prstGeom prst="roundRect">
+            <a:avLst/>
+          </a:prstGeom>
+          <a:noFill/>
+          <a:ln w="22225">
+            <a:solidFill>
+              <a:srgbClr val="017AB4"/>
+            </a:solidFill>
+          </a:ln>
+          <a:effectLst/>
+        </p:spPr>
+        <p:style>
+          <a:lnRef idx="1">
+            <a:schemeClr val="accent1"/>
+          </a:lnRef>
+          <a:fillRef idx="3">
+            <a:schemeClr val="accent1"/>
+          </a:fillRef>
+          <a:effectRef idx="2">
+            <a:schemeClr val="accent1"/>
+          </a:effectRef>
+          <a:fontRef idx="minor">
+            <a:schemeClr val="lt1"/>
+          </a:fontRef>
+        </p:style>
+        <p:txBody>
+          <a:bodyPr wrap="square" lIns="73152" rIns="73152" rtlCol="0" anchor="ctr"/>
+          <a:lstStyle/>
+          <a:p>
+            <a:pPr algn="ctr"/>
+            <a:r>
+              <a:rPr sz="1300">
+                <a:solidFill>
+                  <a:srgbClr val="000000"/>
+                </a:solidFill>
+              </a:rPr>
+              <a:t>Store, or reject and log</a:t>
+            </a:r>
+          </a:p>
+        </p:txBody>
+      </p:sp>
     </p:spTree>
   </p:cSld>
   <p:clrMapOvr>
@@ -11136,7 +10668,7 @@
           <a:lstStyle/>
           <a:p>
             <a:r>
-              <a:t>F02 · Extraction · Demo: What to Watch</a:t>
+              <a:t>F02 · How It Works</a:t>
             </a:r>
           </a:p>
         </p:txBody>
@@ -11153,57 +10685,481 @@
         </p:nvSpPr>
         <p:spPr>
           <a:xfrm>
-            <a:off x="612648" y="1920240"/>
-            <a:ext cx="10966704" cy="4617720"/>
-          </a:xfrm>
-        </p:spPr>
-        <p:txBody>
-          <a:bodyPr wrap="square"/>
-          <a:lstStyle/>
-          <a:p>
-            <a:r>
-              <a:rPr sz="2800"/>
-              <a:t>A C# record (</a:t>
-            </a:r>
-            <a:r>
-              <a:rPr sz="2800">
+            <a:off x="612648" y="3236976"/>
+            <a:ext cx="10966704" cy="3300984"/>
+          </a:xfrm>
+        </p:spPr>
+        <p:txBody>
+          <a:bodyPr wrap="square">
+            <a:normAutofit/>
+          </a:bodyPr>
+          <a:lstStyle/>
+          <a:p>
+            <a:r>
+              <a:rPr sz="2800" dirty="0"/>
+              <a:t>The model writes JSON; your code decides whether to believe it</a:t>
+            </a:r>
+          </a:p>
+          <a:p>
+            <a:r>
+              <a:rPr sz="2800" dirty="0"/>
+              <a:t>The </a:t>
+            </a:r>
+            <a:r>
+              <a:rPr sz="2800" dirty="0">
                 <a:latin typeface="Consolas"/>
               </a:rPr>
-              <a:t>TripFacts</a:t>
-            </a:r>
-            <a:r>
-              <a:rPr sz="2800"/>
-              <a:t>) · typed response · no parsing</a:t>
-            </a:r>
-          </a:p>
-          <a:p>
-            <a:r>
-              <a:rPr sz="2800"/>
-              <a:t>❌ No distance in the report → </a:t>
-            </a:r>
-            <a:r>
-              <a:rPr sz="2800">
-                <a:latin typeface="Consolas"/>
+              <a:t>null</a:t>
+            </a:r>
+            <a:r>
+              <a:rPr sz="2800" dirty="0"/>
+              <a:t> rule and the validator are the feature</a:t>
+            </a:r>
+          </a:p>
+          <a:p>
+            <a:r>
+              <a:rPr sz="2800" dirty="0"/>
+              <a:t>A rejected record is a good outcome</a:t>
+            </a:r>
+          </a:p>
+        </p:txBody>
+      </p:sp>
+      <p:sp>
+        <p:nvSpPr>
+          <p:cNvPr id="4" name="Rounded Rectangle 3"/>
+          <p:cNvSpPr/>
+          <p:nvPr/>
+        </p:nvSpPr>
+        <p:spPr>
+          <a:xfrm>
+            <a:off x="612648" y="1737360"/>
+            <a:ext cx="1864156" cy="1271016"/>
+          </a:xfrm>
+          <a:prstGeom prst="roundRect">
+            <a:avLst/>
+          </a:prstGeom>
+          <a:noFill/>
+          <a:ln w="22225">
+            <a:solidFill>
+              <a:srgbClr val="017AB4"/>
+            </a:solidFill>
+          </a:ln>
+          <a:effectLst/>
+        </p:spPr>
+        <p:style>
+          <a:lnRef idx="1">
+            <a:schemeClr val="accent1"/>
+          </a:lnRef>
+          <a:fillRef idx="3">
+            <a:schemeClr val="accent1"/>
+          </a:fillRef>
+          <a:effectRef idx="2">
+            <a:schemeClr val="accent1"/>
+          </a:effectRef>
+          <a:fontRef idx="minor">
+            <a:schemeClr val="lt1"/>
+          </a:fontRef>
+        </p:style>
+        <p:txBody>
+          <a:bodyPr wrap="square" lIns="73152" rIns="73152" rtlCol="0" anchor="ctr"/>
+          <a:lstStyle/>
+          <a:p>
+            <a:pPr algn="ctr"/>
+            <a:r>
+              <a:rPr sz="1300">
+                <a:solidFill>
+                  <a:srgbClr val="000000"/>
+                </a:solidFill>
               </a:rPr>
-              <a:t>distance_mi: 5.0</a:t>
-            </a:r>
-          </a:p>
-          <a:p>
-            <a:r>
-              <a:rPr sz="2800"/>
-              <a:t>✅ Nullable fields + "null when not stated"</a:t>
-            </a:r>
-          </a:p>
-          <a:p>
-            <a:r>
-              <a:rPr sz="2800"/>
-              <a:t>Run it 3×: better ≠ guaranteed</a:t>
-            </a:r>
-          </a:p>
-          <a:p>
-            <a:r>
-              <a:rPr sz="2800"/>
-              <a:t>The last mile is a validator — ordinary code</a:t>
+              <a:t>Trip report</a:t>
+            </a:r>
+          </a:p>
+        </p:txBody>
+      </p:sp>
+      <p:sp>
+        <p:nvSpPr>
+          <p:cNvPr id="5" name="Right Arrow 4"/>
+          <p:cNvSpPr/>
+          <p:nvPr/>
+        </p:nvSpPr>
+        <p:spPr>
+          <a:xfrm>
+            <a:off x="2531668" y="2226564"/>
+            <a:ext cx="301752" cy="292608"/>
+          </a:xfrm>
+          <a:prstGeom prst="rightArrow">
+            <a:avLst/>
+          </a:prstGeom>
+          <a:solidFill>
+            <a:srgbClr val="017AB4"/>
+          </a:solidFill>
+          <a:ln>
+            <a:noFill/>
+          </a:ln>
+          <a:effectLst/>
+        </p:spPr>
+        <p:style>
+          <a:lnRef idx="1">
+            <a:schemeClr val="accent1"/>
+          </a:lnRef>
+          <a:fillRef idx="3">
+            <a:schemeClr val="accent1"/>
+          </a:fillRef>
+          <a:effectRef idx="2">
+            <a:schemeClr val="accent1"/>
+          </a:effectRef>
+          <a:fontRef idx="minor">
+            <a:schemeClr val="lt1"/>
+          </a:fontRef>
+        </p:style>
+        <p:txBody>
+          <a:bodyPr rtlCol="0" anchor="ctr"/>
+          <a:lstStyle/>
+          <a:p>
+            <a:pPr algn="ctr"/>
+            <a:endParaRPr/>
+          </a:p>
+        </p:txBody>
+      </p:sp>
+      <p:sp>
+        <p:nvSpPr>
+          <p:cNvPr id="6" name="Rounded Rectangle 5"/>
+          <p:cNvSpPr/>
+          <p:nvPr/>
+        </p:nvSpPr>
+        <p:spPr>
+          <a:xfrm>
+            <a:off x="2888284" y="1737360"/>
+            <a:ext cx="1864156" cy="1271016"/>
+          </a:xfrm>
+          <a:prstGeom prst="roundRect">
+            <a:avLst/>
+          </a:prstGeom>
+          <a:noFill/>
+          <a:ln w="22225">
+            <a:solidFill>
+              <a:srgbClr val="017AB4"/>
+            </a:solidFill>
+          </a:ln>
+          <a:effectLst/>
+        </p:spPr>
+        <p:style>
+          <a:lnRef idx="1">
+            <a:schemeClr val="accent1"/>
+          </a:lnRef>
+          <a:fillRef idx="3">
+            <a:schemeClr val="accent1"/>
+          </a:fillRef>
+          <a:effectRef idx="2">
+            <a:schemeClr val="accent1"/>
+          </a:effectRef>
+          <a:fontRef idx="minor">
+            <a:schemeClr val="lt1"/>
+          </a:fontRef>
+        </p:style>
+        <p:txBody>
+          <a:bodyPr wrap="square" lIns="73152" rIns="73152" rtlCol="0" anchor="ctr"/>
+          <a:lstStyle/>
+          <a:p>
+            <a:pPr algn="ctr"/>
+            <a:r>
+              <a:rPr sz="1300">
+                <a:solidFill>
+                  <a:srgbClr val="000000"/>
+                </a:solidFill>
+              </a:rPr>
+              <a:t>Prompt: fields, types, examples, "null when absent"</a:t>
+            </a:r>
+          </a:p>
+        </p:txBody>
+      </p:sp>
+      <p:sp>
+        <p:nvSpPr>
+          <p:cNvPr id="7" name="Right Arrow 6"/>
+          <p:cNvSpPr/>
+          <p:nvPr/>
+        </p:nvSpPr>
+        <p:spPr>
+          <a:xfrm>
+            <a:off x="4807305" y="2226564"/>
+            <a:ext cx="301752" cy="292608"/>
+          </a:xfrm>
+          <a:prstGeom prst="rightArrow">
+            <a:avLst/>
+          </a:prstGeom>
+          <a:solidFill>
+            <a:srgbClr val="017AB4"/>
+          </a:solidFill>
+          <a:ln>
+            <a:noFill/>
+          </a:ln>
+          <a:effectLst/>
+        </p:spPr>
+        <p:style>
+          <a:lnRef idx="1">
+            <a:schemeClr val="accent1"/>
+          </a:lnRef>
+          <a:fillRef idx="3">
+            <a:schemeClr val="accent1"/>
+          </a:fillRef>
+          <a:effectRef idx="2">
+            <a:schemeClr val="accent1"/>
+          </a:effectRef>
+          <a:fontRef idx="minor">
+            <a:schemeClr val="lt1"/>
+          </a:fontRef>
+        </p:style>
+        <p:txBody>
+          <a:bodyPr rtlCol="0" anchor="ctr"/>
+          <a:lstStyle/>
+          <a:p>
+            <a:pPr algn="ctr"/>
+            <a:endParaRPr/>
+          </a:p>
+        </p:txBody>
+      </p:sp>
+      <p:sp>
+        <p:nvSpPr>
+          <p:cNvPr id="8" name="Rounded Rectangle 7"/>
+          <p:cNvSpPr/>
+          <p:nvPr/>
+        </p:nvSpPr>
+        <p:spPr>
+          <a:xfrm>
+            <a:off x="5163921" y="1737360"/>
+            <a:ext cx="1864156" cy="1271016"/>
+          </a:xfrm>
+          <a:prstGeom prst="roundRect">
+            <a:avLst/>
+          </a:prstGeom>
+          <a:noFill/>
+          <a:ln w="22225">
+            <a:solidFill>
+              <a:srgbClr val="017AB4"/>
+            </a:solidFill>
+          </a:ln>
+          <a:effectLst/>
+        </p:spPr>
+        <p:style>
+          <a:lnRef idx="1">
+            <a:schemeClr val="accent1"/>
+          </a:lnRef>
+          <a:fillRef idx="3">
+            <a:schemeClr val="accent1"/>
+          </a:fillRef>
+          <a:effectRef idx="2">
+            <a:schemeClr val="accent1"/>
+          </a:effectRef>
+          <a:fontRef idx="minor">
+            <a:schemeClr val="lt1"/>
+          </a:fontRef>
+        </p:style>
+        <p:txBody>
+          <a:bodyPr wrap="square" lIns="73152" rIns="73152" rtlCol="0" anchor="ctr"/>
+          <a:lstStyle/>
+          <a:p>
+            <a:pPr algn="ctr"/>
+            <a:r>
+              <a:rPr sz="1300">
+                <a:solidFill>
+                  <a:srgbClr val="000000"/>
+                </a:solidFill>
+              </a:rPr>
+              <a:t>llama3.2 in JSON mode</a:t>
+            </a:r>
+          </a:p>
+        </p:txBody>
+      </p:sp>
+      <p:sp>
+        <p:nvSpPr>
+          <p:cNvPr id="9" name="Right Arrow 8"/>
+          <p:cNvSpPr/>
+          <p:nvPr/>
+        </p:nvSpPr>
+        <p:spPr>
+          <a:xfrm>
+            <a:off x="7082942" y="2226564"/>
+            <a:ext cx="301752" cy="292608"/>
+          </a:xfrm>
+          <a:prstGeom prst="rightArrow">
+            <a:avLst/>
+          </a:prstGeom>
+          <a:solidFill>
+            <a:srgbClr val="017AB4"/>
+          </a:solidFill>
+          <a:ln>
+            <a:noFill/>
+          </a:ln>
+          <a:effectLst/>
+        </p:spPr>
+        <p:style>
+          <a:lnRef idx="1">
+            <a:schemeClr val="accent1"/>
+          </a:lnRef>
+          <a:fillRef idx="3">
+            <a:schemeClr val="accent1"/>
+          </a:fillRef>
+          <a:effectRef idx="2">
+            <a:schemeClr val="accent1"/>
+          </a:effectRef>
+          <a:fontRef idx="minor">
+            <a:schemeClr val="lt1"/>
+          </a:fontRef>
+        </p:style>
+        <p:txBody>
+          <a:bodyPr rtlCol="0" anchor="ctr"/>
+          <a:lstStyle/>
+          <a:p>
+            <a:pPr algn="ctr"/>
+            <a:endParaRPr/>
+          </a:p>
+        </p:txBody>
+      </p:sp>
+      <p:sp>
+        <p:nvSpPr>
+          <p:cNvPr id="10" name="Rounded Rectangle 9"/>
+          <p:cNvSpPr/>
+          <p:nvPr/>
+        </p:nvSpPr>
+        <p:spPr>
+          <a:xfrm>
+            <a:off x="7439558" y="1737360"/>
+            <a:ext cx="1864156" cy="1271016"/>
+          </a:xfrm>
+          <a:prstGeom prst="roundRect">
+            <a:avLst/>
+          </a:prstGeom>
+          <a:noFill/>
+          <a:ln w="22225">
+            <a:solidFill>
+              <a:srgbClr val="017AB4"/>
+            </a:solidFill>
+          </a:ln>
+          <a:effectLst/>
+        </p:spPr>
+        <p:style>
+          <a:lnRef idx="1">
+            <a:schemeClr val="accent1"/>
+          </a:lnRef>
+          <a:fillRef idx="3">
+            <a:schemeClr val="accent1"/>
+          </a:fillRef>
+          <a:effectRef idx="2">
+            <a:schemeClr val="accent1"/>
+          </a:effectRef>
+          <a:fontRef idx="minor">
+            <a:schemeClr val="lt1"/>
+          </a:fontRef>
+        </p:style>
+        <p:txBody>
+          <a:bodyPr wrap="square" lIns="73152" rIns="73152" rtlCol="0" anchor="ctr"/>
+          <a:lstStyle/>
+          <a:p>
+            <a:pPr algn="ctr"/>
+            <a:r>
+              <a:rPr sz="1300">
+                <a:solidFill>
+                  <a:srgbClr val="000000"/>
+                </a:solidFill>
+              </a:rPr>
+              <a:t>Parse and validate against the schema</a:t>
+            </a:r>
+          </a:p>
+        </p:txBody>
+      </p:sp>
+      <p:sp>
+        <p:nvSpPr>
+          <p:cNvPr id="11" name="Right Arrow 10"/>
+          <p:cNvSpPr/>
+          <p:nvPr/>
+        </p:nvSpPr>
+        <p:spPr>
+          <a:xfrm>
+            <a:off x="9358579" y="2226564"/>
+            <a:ext cx="301752" cy="292608"/>
+          </a:xfrm>
+          <a:prstGeom prst="rightArrow">
+            <a:avLst/>
+          </a:prstGeom>
+          <a:solidFill>
+            <a:srgbClr val="017AB4"/>
+          </a:solidFill>
+          <a:ln>
+            <a:noFill/>
+          </a:ln>
+          <a:effectLst/>
+        </p:spPr>
+        <p:style>
+          <a:lnRef idx="1">
+            <a:schemeClr val="accent1"/>
+          </a:lnRef>
+          <a:fillRef idx="3">
+            <a:schemeClr val="accent1"/>
+          </a:fillRef>
+          <a:effectRef idx="2">
+            <a:schemeClr val="accent1"/>
+          </a:effectRef>
+          <a:fontRef idx="minor">
+            <a:schemeClr val="lt1"/>
+          </a:fontRef>
+        </p:style>
+        <p:txBody>
+          <a:bodyPr rtlCol="0" anchor="ctr"/>
+          <a:lstStyle/>
+          <a:p>
+            <a:pPr algn="ctr"/>
+            <a:endParaRPr/>
+          </a:p>
+        </p:txBody>
+      </p:sp>
+      <p:sp>
+        <p:nvSpPr>
+          <p:cNvPr id="12" name="Rounded Rectangle 11"/>
+          <p:cNvSpPr/>
+          <p:nvPr/>
+        </p:nvSpPr>
+        <p:spPr>
+          <a:xfrm>
+            <a:off x="9715195" y="1737360"/>
+            <a:ext cx="1864156" cy="1271016"/>
+          </a:xfrm>
+          <a:prstGeom prst="roundRect">
+            <a:avLst/>
+          </a:prstGeom>
+          <a:noFill/>
+          <a:ln w="22225">
+            <a:solidFill>
+              <a:srgbClr val="017AB4"/>
+            </a:solidFill>
+          </a:ln>
+          <a:effectLst/>
+        </p:spPr>
+        <p:style>
+          <a:lnRef idx="1">
+            <a:schemeClr val="accent1"/>
+          </a:lnRef>
+          <a:fillRef idx="3">
+            <a:schemeClr val="accent1"/>
+          </a:fillRef>
+          <a:effectRef idx="2">
+            <a:schemeClr val="accent1"/>
+          </a:effectRef>
+          <a:fontRef idx="minor">
+            <a:schemeClr val="lt1"/>
+          </a:fontRef>
+        </p:style>
+        <p:txBody>
+          <a:bodyPr wrap="square" lIns="73152" rIns="73152" rtlCol="0" anchor="ctr"/>
+          <a:lstStyle/>
+          <a:p>
+            <a:pPr algn="ctr"/>
+            <a:r>
+              <a:rPr sz="1300">
+                <a:solidFill>
+                  <a:srgbClr val="000000"/>
+                </a:solidFill>
+              </a:rPr>
+              <a:t>Store, or reject and log</a:t>
             </a:r>
           </a:p>
         </p:txBody>
@@ -11235,61 +11191,115 @@
       </p:grpSpPr>
       <p:sp>
         <p:nvSpPr>
-          <p:cNvPr id="2" name="Title 1"/>
-          <p:cNvSpPr>
-            <a:spLocks noGrp="1"/>
-          </p:cNvSpPr>
-          <p:nvPr>
-            <p:ph type="title"/>
-          </p:nvPr>
-        </p:nvSpPr>
-        <p:spPr/>
-        <p:txBody>
-          <a:bodyPr wrap="square"/>
-          <a:lstStyle/>
-          <a:p>
-            <a:r>
-              <a:t>F02 · Extraction · Leadership Card</a:t>
-            </a:r>
-          </a:p>
-        </p:txBody>
-      </p:sp>
-      <p:sp>
-        <p:nvSpPr>
-          <p:cNvPr id="3" name="Content Placeholder 2"/>
-          <p:cNvSpPr>
-            <a:spLocks noGrp="1"/>
-          </p:cNvSpPr>
-          <p:nvPr>
-            <p:ph idx="1"/>
-          </p:nvPr>
-        </p:nvSpPr>
-        <p:spPr>
-          <a:xfrm>
-            <a:off x="612648" y="1920240"/>
-            <a:ext cx="10966704" cy="4617720"/>
-          </a:xfrm>
-        </p:spPr>
-        <p:txBody>
-          <a:bodyPr wrap="square"/>
-          <a:lstStyle/>
-          <a:p>
-            <a:pPr>
-              <a:spcAft>
-                <a:spcPts val="1400"/>
-              </a:spcAft>
-            </a:pPr>
-            <a:r>
-              <a:rPr sz="2800" b="1"/>
-              <a:t>When:</a:t>
-            </a:r>
-            <a:r>
-              <a:rPr sz="2800"/>
-              <a:t> Valuable data trapped in documents nobody will re-type.</a:t>
-            </a:r>
-          </a:p>
-        </p:txBody>
-      </p:sp>
+          <p:cNvPr id="2" name="Rectangle 1"/>
+          <p:cNvSpPr/>
+          <p:nvPr/>
+        </p:nvSpPr>
+        <p:spPr>
+          <a:xfrm>
+            <a:off x="0" y="0"/>
+            <a:ext cx="12192000" cy="6858000"/>
+          </a:xfrm>
+          <a:prstGeom prst="rect">
+            <a:avLst/>
+          </a:prstGeom>
+          <a:solidFill>
+            <a:srgbClr val="017AB4"/>
+          </a:solidFill>
+          <a:ln>
+            <a:noFill/>
+          </a:ln>
+          <a:effectLst/>
+        </p:spPr>
+        <p:style>
+          <a:lnRef idx="1">
+            <a:schemeClr val="accent1"/>
+          </a:lnRef>
+          <a:fillRef idx="3">
+            <a:schemeClr val="accent1"/>
+          </a:fillRef>
+          <a:effectRef idx="2">
+            <a:schemeClr val="accent1"/>
+          </a:effectRef>
+          <a:fontRef idx="minor">
+            <a:schemeClr val="lt1"/>
+          </a:fontRef>
+        </p:style>
+        <p:txBody>
+          <a:bodyPr rtlCol="0" anchor="ctr"/>
+          <a:lstStyle/>
+          <a:p>
+            <a:pPr algn="ctr"/>
+            <a:endParaRPr/>
+          </a:p>
+        </p:txBody>
+      </p:sp>
+      <p:sp>
+        <p:nvSpPr>
+          <p:cNvPr id="3" name="TextBox 2"/>
+          <p:cNvSpPr txBox="1"/>
+          <p:nvPr/>
+        </p:nvSpPr>
+        <p:spPr>
+          <a:xfrm>
+            <a:off x="914400" y="2916936"/>
+            <a:ext cx="10332720" cy="1014984"/>
+          </a:xfrm>
+          <a:prstGeom prst="rect">
+            <a:avLst/>
+          </a:prstGeom>
+          <a:noFill/>
+        </p:spPr>
+        <p:txBody>
+          <a:bodyPr wrap="square" anchor="ctr">
+            <a:spAutoFit/>
+          </a:bodyPr>
+          <a:lstStyle/>
+          <a:p>
+            <a:pPr algn="ctr"/>
+            <a:r>
+              <a:rPr sz="6000" b="1">
+                <a:solidFill>
+                  <a:srgbClr val="FFFFFF"/>
+                </a:solidFill>
+              </a:rPr>
+              <a:t>DEMO</a:t>
+            </a:r>
+            <a:r>
+              <a:rPr sz="6000">
+                <a:solidFill>
+                  <a:srgbClr val="FFFFFF"/>
+                </a:solidFill>
+              </a:rPr>
+              <a:t> · F02 Extraction</a:t>
+            </a:r>
+          </a:p>
+        </p:txBody>
+      </p:sp>
+      <p:pic>
+        <p:nvPicPr>
+          <p:cNvPr id="4" name="Picture 3" descr="image.png"/>
+          <p:cNvPicPr>
+            <a:picLocks noChangeAspect="1"/>
+          </p:cNvPicPr>
+          <p:nvPr/>
+        </p:nvPicPr>
+        <p:blipFill>
+          <a:blip r:embed="rId2"/>
+          <a:stretch>
+            <a:fillRect/>
+          </a:stretch>
+        </p:blipFill>
+        <p:spPr>
+          <a:xfrm>
+            <a:off x="9326880" y="5989320"/>
+            <a:ext cx="2560320" cy="640080"/>
+          </a:xfrm>
+          <a:prstGeom prst="rect">
+            <a:avLst/>
+          </a:prstGeom>
+        </p:spPr>
+      </p:pic>
     </p:spTree>
   </p:cSld>
   <p:clrMapOvr>
@@ -11331,7 +11341,7 @@
           <a:lstStyle/>
           <a:p>
             <a:r>
-              <a:t>F02 · Extraction · Leadership Card</a:t>
+              <a:t>F02 · Extraction · Demo: What to Watch</a:t>
             </a:r>
           </a:p>
         </p:txBody>
@@ -11356,33 +11366,49 @@
           <a:bodyPr wrap="square"/>
           <a:lstStyle/>
           <a:p>
-            <a:pPr>
-              <a:spcAft>
-                <a:spcPts val="1400"/>
-              </a:spcAft>
-            </a:pPr>
-            <a:r>
-              <a:rPr sz="2800" b="1"/>
-              <a:t>When:</a:t>
-            </a:r>
             <a:r>
               <a:rPr sz="2800"/>
-              <a:t> Valuable data trapped in documents nobody will re-type.</a:t>
-            </a:r>
-          </a:p>
-          <a:p>
-            <a:pPr>
-              <a:spcAft>
-                <a:spcPts val="1400"/>
-              </a:spcAft>
-            </a:pPr>
-            <a:r>
-              <a:rPr sz="2800" b="1"/>
-              <a:t>Think:</a:t>
+              <a:t>A C# record (</a:t>
+            </a:r>
+            <a:r>
+              <a:rPr sz="2800">
+                <a:latin typeface="Consolas"/>
+              </a:rPr>
+              <a:t>TripFacts</a:t>
             </a:r>
             <a:r>
               <a:rPr sz="2800"/>
-              <a:t> "We have years of data trapped in documents. This turns it into queryable rows without anyone re-typing it."</a:t>
+              <a:t>) · typed response · no parsing</a:t>
+            </a:r>
+          </a:p>
+          <a:p>
+            <a:r>
+              <a:rPr sz="2800"/>
+              <a:t>❌ No distance in the report → </a:t>
+            </a:r>
+            <a:r>
+              <a:rPr sz="2800">
+                <a:latin typeface="Consolas"/>
+              </a:rPr>
+              <a:t>distance_mi: 5.0</a:t>
+            </a:r>
+          </a:p>
+          <a:p>
+            <a:r>
+              <a:rPr sz="2800"/>
+              <a:t>✅ Nullable fields + "null when not stated"</a:t>
+            </a:r>
+          </a:p>
+          <a:p>
+            <a:r>
+              <a:rPr sz="2800"/>
+              <a:t>Run it 3×: better ≠ guaranteed</a:t>
+            </a:r>
+          </a:p>
+          <a:p>
+            <a:r>
+              <a:rPr sz="2800"/>
+              <a:t>The last mile is a validator — ordinary code</a:t>
             </a:r>
           </a:p>
         </p:txBody>
@@ -11396,6 +11422,185 @@
 </file>
 
 <file path=ppt/slides/slide24.xml><?xml version="1.0" encoding="utf-8"?>
+<p:sld xmlns:a="http://schemas.openxmlformats.org/drawingml/2006/main" xmlns:r="http://schemas.openxmlformats.org/officeDocument/2006/relationships" xmlns:p="http://schemas.openxmlformats.org/presentationml/2006/main">
+  <p:cSld>
+    <p:spTree>
+      <p:nvGrpSpPr>
+        <p:cNvPr id="1" name=""/>
+        <p:cNvGrpSpPr/>
+        <p:nvPr/>
+      </p:nvGrpSpPr>
+      <p:grpSpPr>
+        <a:xfrm>
+          <a:off x="0" y="0"/>
+          <a:ext cx="0" cy="0"/>
+          <a:chOff x="0" y="0"/>
+          <a:chExt cx="0" cy="0"/>
+        </a:xfrm>
+      </p:grpSpPr>
+      <p:sp>
+        <p:nvSpPr>
+          <p:cNvPr id="2" name="Title 1"/>
+          <p:cNvSpPr>
+            <a:spLocks noGrp="1"/>
+          </p:cNvSpPr>
+          <p:nvPr>
+            <p:ph type="title"/>
+          </p:nvPr>
+        </p:nvSpPr>
+        <p:spPr/>
+        <p:txBody>
+          <a:bodyPr wrap="square"/>
+          <a:lstStyle/>
+          <a:p>
+            <a:r>
+              <a:t>F02 · Extraction · Leadership Card</a:t>
+            </a:r>
+          </a:p>
+        </p:txBody>
+      </p:sp>
+      <p:sp>
+        <p:nvSpPr>
+          <p:cNvPr id="3" name="Content Placeholder 2"/>
+          <p:cNvSpPr>
+            <a:spLocks noGrp="1"/>
+          </p:cNvSpPr>
+          <p:nvPr>
+            <p:ph idx="1"/>
+          </p:nvPr>
+        </p:nvSpPr>
+        <p:spPr>
+          <a:xfrm>
+            <a:off x="612648" y="1920240"/>
+            <a:ext cx="10966704" cy="4617720"/>
+          </a:xfrm>
+        </p:spPr>
+        <p:txBody>
+          <a:bodyPr wrap="square"/>
+          <a:lstStyle/>
+          <a:p>
+            <a:pPr>
+              <a:spcAft>
+                <a:spcPts val="1400"/>
+              </a:spcAft>
+            </a:pPr>
+            <a:r>
+              <a:rPr sz="2800" b="1"/>
+              <a:t>When:</a:t>
+            </a:r>
+            <a:r>
+              <a:rPr sz="2800"/>
+              <a:t> Valuable data trapped in documents nobody will re-type.</a:t>
+            </a:r>
+          </a:p>
+        </p:txBody>
+      </p:sp>
+    </p:spTree>
+  </p:cSld>
+  <p:clrMapOvr>
+    <a:masterClrMapping/>
+  </p:clrMapOvr>
+</p:sld>
+</file>
+
+<file path=ppt/slides/slide25.xml><?xml version="1.0" encoding="utf-8"?>
+<p:sld xmlns:a="http://schemas.openxmlformats.org/drawingml/2006/main" xmlns:r="http://schemas.openxmlformats.org/officeDocument/2006/relationships" xmlns:p="http://schemas.openxmlformats.org/presentationml/2006/main">
+  <p:cSld>
+    <p:spTree>
+      <p:nvGrpSpPr>
+        <p:cNvPr id="1" name=""/>
+        <p:cNvGrpSpPr/>
+        <p:nvPr/>
+      </p:nvGrpSpPr>
+      <p:grpSpPr>
+        <a:xfrm>
+          <a:off x="0" y="0"/>
+          <a:ext cx="0" cy="0"/>
+          <a:chOff x="0" y="0"/>
+          <a:chExt cx="0" cy="0"/>
+        </a:xfrm>
+      </p:grpSpPr>
+      <p:sp>
+        <p:nvSpPr>
+          <p:cNvPr id="2" name="Title 1"/>
+          <p:cNvSpPr>
+            <a:spLocks noGrp="1"/>
+          </p:cNvSpPr>
+          <p:nvPr>
+            <p:ph type="title"/>
+          </p:nvPr>
+        </p:nvSpPr>
+        <p:spPr/>
+        <p:txBody>
+          <a:bodyPr wrap="square"/>
+          <a:lstStyle/>
+          <a:p>
+            <a:r>
+              <a:t>F02 · Extraction · Leadership Card</a:t>
+            </a:r>
+          </a:p>
+        </p:txBody>
+      </p:sp>
+      <p:sp>
+        <p:nvSpPr>
+          <p:cNvPr id="3" name="Content Placeholder 2"/>
+          <p:cNvSpPr>
+            <a:spLocks noGrp="1"/>
+          </p:cNvSpPr>
+          <p:nvPr>
+            <p:ph idx="1"/>
+          </p:nvPr>
+        </p:nvSpPr>
+        <p:spPr>
+          <a:xfrm>
+            <a:off x="612648" y="1920240"/>
+            <a:ext cx="10966704" cy="4617720"/>
+          </a:xfrm>
+        </p:spPr>
+        <p:txBody>
+          <a:bodyPr wrap="square"/>
+          <a:lstStyle/>
+          <a:p>
+            <a:pPr>
+              <a:spcAft>
+                <a:spcPts val="1400"/>
+              </a:spcAft>
+            </a:pPr>
+            <a:r>
+              <a:rPr sz="2800" b="1"/>
+              <a:t>When:</a:t>
+            </a:r>
+            <a:r>
+              <a:rPr sz="2800"/>
+              <a:t> Valuable data trapped in documents nobody will re-type.</a:t>
+            </a:r>
+          </a:p>
+          <a:p>
+            <a:pPr>
+              <a:spcAft>
+                <a:spcPts val="1400"/>
+              </a:spcAft>
+            </a:pPr>
+            <a:r>
+              <a:rPr sz="2800" b="1"/>
+              <a:t>Think:</a:t>
+            </a:r>
+            <a:r>
+              <a:rPr sz="2800"/>
+              <a:t> "We have years of data trapped in documents. This turns it into queryable rows without anyone re-typing it."</a:t>
+            </a:r>
+          </a:p>
+        </p:txBody>
+      </p:sp>
+    </p:spTree>
+  </p:cSld>
+  <p:clrMapOvr>
+    <a:masterClrMapping/>
+  </p:clrMapOvr>
+</p:sld>
+</file>
+
+<file path=ppt/slides/slide26.xml><?xml version="1.0" encoding="utf-8"?>
 <p:sld xmlns:a="http://schemas.openxmlformats.org/drawingml/2006/main" xmlns:r="http://schemas.openxmlformats.org/officeDocument/2006/relationships" xmlns:p="http://schemas.openxmlformats.org/presentationml/2006/main">
   <p:cSld>
     <p:spTree>
@@ -11715,236 +11920,6 @@
 </p:sld>
 </file>
 
-<file path=ppt/slides/slide25.xml><?xml version="1.0" encoding="utf-8"?>
-<p:sld xmlns:a="http://schemas.openxmlformats.org/drawingml/2006/main" xmlns:r="http://schemas.openxmlformats.org/officeDocument/2006/relationships" xmlns:p="http://schemas.openxmlformats.org/presentationml/2006/main">
-  <p:cSld>
-    <p:spTree>
-      <p:nvGrpSpPr>
-        <p:cNvPr id="1" name=""/>
-        <p:cNvGrpSpPr/>
-        <p:nvPr/>
-      </p:nvGrpSpPr>
-      <p:grpSpPr>
-        <a:xfrm>
-          <a:off x="0" y="0"/>
-          <a:ext cx="0" cy="0"/>
-          <a:chOff x="0" y="0"/>
-          <a:chExt cx="0" cy="0"/>
-        </a:xfrm>
-      </p:grpSpPr>
-      <p:sp>
-        <p:nvSpPr>
-          <p:cNvPr id="2" name="Title 1"/>
-          <p:cNvSpPr>
-            <a:spLocks noGrp="1"/>
-          </p:cNvSpPr>
-          <p:nvPr>
-            <p:ph type="title"/>
-          </p:nvPr>
-        </p:nvSpPr>
-        <p:spPr/>
-        <p:txBody>
-          <a:bodyPr wrap="square"/>
-          <a:lstStyle/>
-          <a:p>
-            <a:r>
-              <a:rPr sz="4000" b="1">
-                <a:solidFill>
-                  <a:srgbClr val="017AB4"/>
-                </a:solidFill>
-              </a:rPr>
-              <a:t>F03 · Sentiment</a:t>
-            </a:r>
-          </a:p>
-        </p:txBody>
-      </p:sp>
-      <p:sp>
-        <p:nvSpPr>
-          <p:cNvPr id="3" name="Text Placeholder 2"/>
-          <p:cNvSpPr>
-            <a:spLocks noGrp="1"/>
-          </p:cNvSpPr>
-          <p:nvPr>
-            <p:ph type="body" idx="1"/>
-          </p:nvPr>
-        </p:nvSpPr>
-        <p:spPr/>
-        <p:txBody>
-          <a:bodyPr/>
-          <a:lstStyle/>
-          <a:p>
-            <a:endParaRPr/>
-          </a:p>
-        </p:txBody>
-      </p:sp>
-      <p:pic>
-        <p:nvPicPr>
-          <p:cNvPr id="4" name="Picture 3" descr="image.png"/>
-          <p:cNvPicPr>
-            <a:picLocks noChangeAspect="1"/>
-          </p:cNvPicPr>
-          <p:nvPr/>
-        </p:nvPicPr>
-        <p:blipFill>
-          <a:blip r:embed="rId3"/>
-          <a:stretch>
-            <a:fillRect/>
-          </a:stretch>
-        </p:blipFill>
-        <p:spPr>
-          <a:xfrm>
-            <a:off x="9326880" y="5989320"/>
-            <a:ext cx="2560320" cy="640080"/>
-          </a:xfrm>
-          <a:prstGeom prst="rect">
-            <a:avLst/>
-          </a:prstGeom>
-        </p:spPr>
-      </p:pic>
-    </p:spTree>
-  </p:cSld>
-  <p:clrMapOvr>
-    <a:masterClrMapping/>
-  </p:clrMapOvr>
-</p:sld>
-</file>
-
-<file path=ppt/slides/slide26.xml><?xml version="1.0" encoding="utf-8"?>
-<p:sld xmlns:a="http://schemas.openxmlformats.org/drawingml/2006/main" xmlns:r="http://schemas.openxmlformats.org/officeDocument/2006/relationships" xmlns:p="http://schemas.openxmlformats.org/presentationml/2006/main">
-  <p:cSld>
-    <p:spTree>
-      <p:nvGrpSpPr>
-        <p:cNvPr id="1" name=""/>
-        <p:cNvGrpSpPr/>
-        <p:nvPr/>
-      </p:nvGrpSpPr>
-      <p:grpSpPr>
-        <a:xfrm>
-          <a:off x="0" y="0"/>
-          <a:ext cx="0" cy="0"/>
-          <a:chOff x="0" y="0"/>
-          <a:chExt cx="0" cy="0"/>
-        </a:xfrm>
-      </p:grpSpPr>
-      <p:sp>
-        <p:nvSpPr>
-          <p:cNvPr id="2" name="Rectangle 1"/>
-          <p:cNvSpPr/>
-          <p:nvPr/>
-        </p:nvSpPr>
-        <p:spPr>
-          <a:xfrm>
-            <a:off x="0" y="0"/>
-            <a:ext cx="12192000" cy="6858000"/>
-          </a:xfrm>
-          <a:prstGeom prst="rect">
-            <a:avLst/>
-          </a:prstGeom>
-          <a:solidFill>
-            <a:srgbClr val="017AB4"/>
-          </a:solidFill>
-          <a:ln>
-            <a:noFill/>
-          </a:ln>
-          <a:effectLst/>
-        </p:spPr>
-        <p:style>
-          <a:lnRef idx="1">
-            <a:schemeClr val="accent1"/>
-          </a:lnRef>
-          <a:fillRef idx="3">
-            <a:schemeClr val="accent1"/>
-          </a:fillRef>
-          <a:effectRef idx="2">
-            <a:schemeClr val="accent1"/>
-          </a:effectRef>
-          <a:fontRef idx="minor">
-            <a:schemeClr val="lt1"/>
-          </a:fontRef>
-        </p:style>
-        <p:txBody>
-          <a:bodyPr rtlCol="0" anchor="ctr"/>
-          <a:lstStyle/>
-          <a:p>
-            <a:pPr algn="ctr"/>
-            <a:endParaRPr/>
-          </a:p>
-        </p:txBody>
-      </p:sp>
-      <p:sp>
-        <p:nvSpPr>
-          <p:cNvPr id="3" name="TextBox 2"/>
-          <p:cNvSpPr txBox="1"/>
-          <p:nvPr/>
-        </p:nvSpPr>
-        <p:spPr>
-          <a:xfrm>
-            <a:off x="914400" y="2916936"/>
-            <a:ext cx="10332720" cy="1014984"/>
-          </a:xfrm>
-          <a:prstGeom prst="rect">
-            <a:avLst/>
-          </a:prstGeom>
-          <a:noFill/>
-        </p:spPr>
-        <p:txBody>
-          <a:bodyPr wrap="square" anchor="ctr">
-            <a:spAutoFit/>
-          </a:bodyPr>
-          <a:lstStyle/>
-          <a:p>
-            <a:pPr algn="ctr"/>
-            <a:r>
-              <a:rPr sz="6000" b="1">
-                <a:solidFill>
-                  <a:srgbClr val="FFFFFF"/>
-                </a:solidFill>
-              </a:rPr>
-              <a:t>DEMO</a:t>
-            </a:r>
-            <a:r>
-              <a:rPr sz="6000">
-                <a:solidFill>
-                  <a:srgbClr val="FFFFFF"/>
-                </a:solidFill>
-              </a:rPr>
-              <a:t> · F03 Sentiment</a:t>
-            </a:r>
-          </a:p>
-        </p:txBody>
-      </p:sp>
-      <p:pic>
-        <p:nvPicPr>
-          <p:cNvPr id="4" name="Picture 3" descr="image.png"/>
-          <p:cNvPicPr>
-            <a:picLocks noChangeAspect="1"/>
-          </p:cNvPicPr>
-          <p:nvPr/>
-        </p:nvPicPr>
-        <p:blipFill>
-          <a:blip r:embed="rId2"/>
-          <a:stretch>
-            <a:fillRect/>
-          </a:stretch>
-        </p:blipFill>
-        <p:spPr>
-          <a:xfrm>
-            <a:off x="9326880" y="5989320"/>
-            <a:ext cx="2560320" cy="640080"/>
-          </a:xfrm>
-          <a:prstGeom prst="rect">
-            <a:avLst/>
-          </a:prstGeom>
-        </p:spPr>
-      </p:pic>
-    </p:spTree>
-  </p:cSld>
-  <p:clrMapOvr>
-    <a:masterClrMapping/>
-  </p:clrMapOvr>
-</p:sld>
-</file>
-
 <file path=ppt/slides/slide27.xml><?xml version="1.0" encoding="utf-8"?>
 <p:sld xmlns:a="http://schemas.openxmlformats.org/drawingml/2006/main" xmlns:r="http://schemas.openxmlformats.org/officeDocument/2006/relationships" xmlns:p="http://schemas.openxmlformats.org/presentationml/2006/main">
   <p:cSld>
@@ -11978,102 +11953,59 @@
           <a:lstStyle/>
           <a:p>
             <a:r>
-              <a:t>F03 · Sentiment · Demo: What to Watch</a:t>
-            </a:r>
-          </a:p>
-        </p:txBody>
-      </p:sp>
-      <p:sp>
-        <p:nvSpPr>
-          <p:cNvPr id="3" name="Content Placeholder 2"/>
-          <p:cNvSpPr>
-            <a:spLocks noGrp="1"/>
-          </p:cNvSpPr>
-          <p:nvPr>
-            <p:ph idx="1"/>
-          </p:nvPr>
-        </p:nvSpPr>
-        <p:spPr>
-          <a:xfrm>
-            <a:off x="612648" y="1920240"/>
-            <a:ext cx="10966704" cy="4617720"/>
-          </a:xfrm>
-        </p:spPr>
-        <p:txBody>
-          <a:bodyPr wrap="square"/>
-          <a:lstStyle/>
-          <a:p>
-            <a:r>
-              <a:rPr sz="2800"/>
-              <a:t>One method · </a:t>
-            </a:r>
-            <a:r>
-              <a:rPr sz="2800">
-                <a:latin typeface="Consolas"/>
+              <a:rPr sz="4000" b="1">
+                <a:solidFill>
+                  <a:srgbClr val="017AB4"/>
+                </a:solidFill>
               </a:rPr>
-              <a:t>positive | negative | mixed</a:t>
-            </a:r>
-            <a:r>
-              <a:rPr sz="2800"/>
-              <a:t> · swap = one DI line</a:t>
-            </a:r>
-          </a:p>
-          <a:p>
-            <a:r>
-              <a:rPr sz="2800"/>
-              <a:t>20 easy through </a:t>
-            </a:r>
-            <a:r>
-              <a:rPr sz="2800">
-                <a:latin typeface="Consolas"/>
-              </a:rPr>
-              <a:t>phi3</a:t>
-            </a:r>
-            <a:r>
-              <a:rPr sz="2800"/>
-              <a:t>: fast, free, correct</a:t>
-            </a:r>
-          </a:p>
-          <a:p>
-            <a:r>
-              <a:rPr sz="2800"/>
-              <a:t>Same 20 through Azure: 9 of 10 identical</a:t>
-            </a:r>
-          </a:p>
-          <a:p>
-            <a:r>
-              <a:rPr sz="2800"/>
-              <a:t>The hard set through both — diff on screen</a:t>
-            </a:r>
-          </a:p>
-          <a:p>
-            <a:r>
-              <a:rPr sz="2800"/>
-              <a:t>📊 </a:t>
-            </a:r>
-            <a:r>
-              <a:rPr sz="2800">
-                <a:latin typeface="Consolas"/>
-              </a:rPr>
-              <a:t>phi3</a:t>
-            </a:r>
-            <a:r>
-              <a:rPr sz="2800"/>
-              <a:t> 9/10 · 7/10 — </a:t>
-            </a:r>
-            <a:r>
-              <a:rPr sz="2800">
-                <a:latin typeface="Consolas"/>
-              </a:rPr>
-              <a:t>gpt-4.1</a:t>
-            </a:r>
-            <a:r>
-              <a:rPr sz="2800"/>
-              <a:t> 10/10 · 10/10</a:t>
-            </a:r>
-          </a:p>
-        </p:txBody>
-      </p:sp>
+              <a:t>F03 · Sentiment</a:t>
+            </a:r>
+          </a:p>
+        </p:txBody>
+      </p:sp>
+      <p:sp>
+        <p:nvSpPr>
+          <p:cNvPr id="3" name="Text Placeholder 2"/>
+          <p:cNvSpPr>
+            <a:spLocks noGrp="1"/>
+          </p:cNvSpPr>
+          <p:nvPr>
+            <p:ph type="body" idx="1"/>
+          </p:nvPr>
+        </p:nvSpPr>
+        <p:spPr/>
+        <p:txBody>
+          <a:bodyPr/>
+          <a:lstStyle/>
+          <a:p>
+            <a:endParaRPr/>
+          </a:p>
+        </p:txBody>
+      </p:sp>
+      <p:pic>
+        <p:nvPicPr>
+          <p:cNvPr id="4" name="Picture 3" descr="image.png"/>
+          <p:cNvPicPr>
+            <a:picLocks noChangeAspect="1"/>
+          </p:cNvPicPr>
+          <p:nvPr/>
+        </p:nvPicPr>
+        <p:blipFill>
+          <a:blip r:embed="rId3"/>
+          <a:stretch>
+            <a:fillRect/>
+          </a:stretch>
+        </p:blipFill>
+        <p:spPr>
+          <a:xfrm>
+            <a:off x="9326880" y="5989320"/>
+            <a:ext cx="2560320" cy="640080"/>
+          </a:xfrm>
+          <a:prstGeom prst="rect">
+            <a:avLst/>
+          </a:prstGeom>
+        </p:spPr>
+      </p:pic>
     </p:spTree>
   </p:cSld>
   <p:clrMapOvr>
@@ -12083,7 +12015,7 @@
 </file>
 
 <file path=ppt/slides/slide28.xml><?xml version="1.0" encoding="utf-8"?>
-<p:sld xmlns:a="http://schemas.openxmlformats.org/drawingml/2006/main" xmlns:r="http://schemas.openxmlformats.org/officeDocument/2006/relationships" xmlns:p="http://schemas.openxmlformats.org/presentationml/2006/main">
+<p:sld xmlns:a="http://schemas.openxmlformats.org/drawingml/2006/main" xmlns:p="http://schemas.openxmlformats.org/presentationml/2006/main" xmlns:r="http://schemas.openxmlformats.org/officeDocument/2006/relationships">
   <p:cSld>
     <p:spTree>
       <p:nvGrpSpPr>
@@ -12091,71 +12023,97 @@
         <p:cNvGrpSpPr/>
         <p:nvPr/>
       </p:nvGrpSpPr>
-      <p:grpSpPr>
-        <a:xfrm>
-          <a:off x="0" y="0"/>
-          <a:ext cx="0" cy="0"/>
-          <a:chOff x="0" y="0"/>
-          <a:chExt cx="0" cy="0"/>
-        </a:xfrm>
-      </p:grpSpPr>
-      <p:sp>
-        <p:nvSpPr>
-          <p:cNvPr id="2" name="Title 1"/>
-          <p:cNvSpPr>
-            <a:spLocks noGrp="1"/>
-          </p:cNvSpPr>
-          <p:nvPr>
-            <p:ph type="title"/>
-          </p:nvPr>
-        </p:nvSpPr>
-        <p:spPr/>
-        <p:txBody>
-          <a:bodyPr wrap="square"/>
-          <a:lstStyle/>
-          <a:p>
-            <a:r>
-              <a:t>F03 · Sentiment · Leadership Card</a:t>
-            </a:r>
-          </a:p>
-        </p:txBody>
-      </p:sp>
-      <p:sp>
-        <p:nvSpPr>
-          <p:cNvPr id="3" name="Content Placeholder 2"/>
-          <p:cNvSpPr>
-            <a:spLocks noGrp="1"/>
-          </p:cNvSpPr>
-          <p:nvPr>
-            <p:ph idx="1"/>
-          </p:nvPr>
-        </p:nvSpPr>
-        <p:spPr>
-          <a:xfrm>
-            <a:off x="612648" y="1920240"/>
-            <a:ext cx="10966704" cy="4617720"/>
-          </a:xfrm>
-        </p:spPr>
-        <p:txBody>
-          <a:bodyPr wrap="square"/>
-          <a:lstStyle/>
-          <a:p>
-            <a:pPr>
-              <a:spcAft>
-                <a:spcPts val="1400"/>
-              </a:spcAft>
-            </a:pPr>
-            <a:r>
-              <a:rPr sz="2800" b="1"/>
-              <a:t>When:</a:t>
-            </a:r>
-            <a:r>
-              <a:rPr sz="2800"/>
-              <a:t> A high-volume text stream needing a judgment call.</a:t>
-            </a:r>
-          </a:p>
-        </p:txBody>
-      </p:sp>
+      <p:grpSpPr/>
+      <p:pic>
+        <p:nvPicPr>
+          <p:cNvPr id="2" name="Picture 1" descr="image.png"/>
+          <p:cNvPicPr>
+            <a:picLocks noChangeAspect="1"/>
+          </p:cNvPicPr>
+          <p:nvPr/>
+        </p:nvPicPr>
+        <p:blipFill>
+          <a:blip r:embed="rId2"/>
+          <a:stretch>
+            <a:fillRect/>
+          </a:stretch>
+        </p:blipFill>
+        <p:spPr>
+          <a:xfrm>
+            <a:off x="5638800" y="1371600"/>
+            <a:ext cx="914400" cy="914400"/>
+          </a:xfrm>
+          <a:prstGeom prst="rect">
+            <a:avLst/>
+          </a:prstGeom>
+        </p:spPr>
+      </p:pic>
+      <p:sp>
+        <p:nvSpPr>
+          <p:cNvPr id="3" name="TextBox 2"/>
+          <p:cNvSpPr txBox="1"/>
+          <p:nvPr/>
+        </p:nvSpPr>
+        <p:spPr>
+          <a:xfrm>
+            <a:off x="914400" y="2834640"/>
+            <a:ext cx="10332720" cy="2011680"/>
+          </a:xfrm>
+          <a:prstGeom prst="rect">
+            <a:avLst/>
+          </a:prstGeom>
+          <a:noFill/>
+        </p:spPr>
+        <p:txBody>
+          <a:bodyPr wrap="square" anchor="ctr">
+            <a:spAutoFit/>
+          </a:bodyPr>
+          <a:lstStyle/>
+          <a:p>
+            <a:pPr algn="ctr"/>
+            <a:r>
+              <a:rPr sz="4000"/>
+              <a:t>Read text and judge </a:t>
+            </a:r>
+            <a:r>
+              <a:rPr b="1" sz="4000">
+                <a:solidFill>
+                  <a:srgbClr val="017AB4"/>
+                </a:solidFill>
+              </a:rPr>
+              <a:t>the feeling behind it</a:t>
+            </a:r>
+            <a:r>
+              <a:rPr sz="4000"/>
+              <a:t>: positive, negative, or mixed.</a:t>
+            </a:r>
+          </a:p>
+        </p:txBody>
+      </p:sp>
+      <p:pic>
+        <p:nvPicPr>
+          <p:cNvPr id="4" name="Picture 3" descr="image.png"/>
+          <p:cNvPicPr>
+            <a:picLocks noChangeAspect="1"/>
+          </p:cNvPicPr>
+          <p:nvPr/>
+        </p:nvPicPr>
+        <p:blipFill>
+          <a:blip r:embed="rId3"/>
+          <a:stretch>
+            <a:fillRect/>
+          </a:stretch>
+        </p:blipFill>
+        <p:spPr>
+          <a:xfrm>
+            <a:off x="9326880" y="5989320"/>
+            <a:ext cx="2560320" cy="640080"/>
+          </a:xfrm>
+          <a:prstGeom prst="rect">
+            <a:avLst/>
+          </a:prstGeom>
+        </p:spPr>
+      </p:pic>
     </p:spTree>
   </p:cSld>
   <p:clrMapOvr>
@@ -12183,76 +12141,115 @@
       </p:grpSpPr>
       <p:sp>
         <p:nvSpPr>
-          <p:cNvPr id="2" name="Title 1"/>
-          <p:cNvSpPr>
-            <a:spLocks noGrp="1"/>
-          </p:cNvSpPr>
-          <p:nvPr>
-            <p:ph type="title"/>
-          </p:nvPr>
-        </p:nvSpPr>
-        <p:spPr/>
-        <p:txBody>
-          <a:bodyPr wrap="square"/>
-          <a:lstStyle/>
-          <a:p>
-            <a:r>
-              <a:t>F03 · Sentiment · Leadership Card</a:t>
-            </a:r>
-          </a:p>
-        </p:txBody>
-      </p:sp>
-      <p:sp>
-        <p:nvSpPr>
-          <p:cNvPr id="3" name="Content Placeholder 2"/>
-          <p:cNvSpPr>
-            <a:spLocks noGrp="1"/>
-          </p:cNvSpPr>
-          <p:nvPr>
-            <p:ph idx="1"/>
-          </p:nvPr>
-        </p:nvSpPr>
-        <p:spPr>
-          <a:xfrm>
-            <a:off x="612648" y="1920240"/>
-            <a:ext cx="10966704" cy="4617720"/>
-          </a:xfrm>
-        </p:spPr>
-        <p:txBody>
-          <a:bodyPr wrap="square"/>
-          <a:lstStyle/>
-          <a:p>
-            <a:pPr>
-              <a:spcAft>
-                <a:spcPts val="1400"/>
-              </a:spcAft>
-            </a:pPr>
-            <a:r>
-              <a:rPr sz="2800" b="1"/>
-              <a:t>When:</a:t>
-            </a:r>
-            <a:r>
-              <a:rPr sz="2800"/>
-              <a:t> A high-volume text stream needing a judgment call.</a:t>
-            </a:r>
-          </a:p>
-          <a:p>
-            <a:pPr>
-              <a:spcAft>
-                <a:spcPts val="1400"/>
-              </a:spcAft>
-            </a:pPr>
-            <a:r>
-              <a:rPr sz="2800" b="1"/>
-              <a:t>Think:</a:t>
-            </a:r>
-            <a:r>
-              <a:rPr sz="2800"/>
-              <a:t> "We measured: the free local model matches the expensive one on most of this task, and we know exactly which slice needs the big gun."</a:t>
-            </a:r>
-          </a:p>
-        </p:txBody>
-      </p:sp>
+          <p:cNvPr id="2" name="Rectangle 1"/>
+          <p:cNvSpPr/>
+          <p:nvPr/>
+        </p:nvSpPr>
+        <p:spPr>
+          <a:xfrm>
+            <a:off x="0" y="0"/>
+            <a:ext cx="12192000" cy="6858000"/>
+          </a:xfrm>
+          <a:prstGeom prst="rect">
+            <a:avLst/>
+          </a:prstGeom>
+          <a:solidFill>
+            <a:srgbClr val="017AB4"/>
+          </a:solidFill>
+          <a:ln>
+            <a:noFill/>
+          </a:ln>
+          <a:effectLst/>
+        </p:spPr>
+        <p:style>
+          <a:lnRef idx="1">
+            <a:schemeClr val="accent1"/>
+          </a:lnRef>
+          <a:fillRef idx="3">
+            <a:schemeClr val="accent1"/>
+          </a:fillRef>
+          <a:effectRef idx="2">
+            <a:schemeClr val="accent1"/>
+          </a:effectRef>
+          <a:fontRef idx="minor">
+            <a:schemeClr val="lt1"/>
+          </a:fontRef>
+        </p:style>
+        <p:txBody>
+          <a:bodyPr rtlCol="0" anchor="ctr"/>
+          <a:lstStyle/>
+          <a:p>
+            <a:pPr algn="ctr"/>
+            <a:endParaRPr/>
+          </a:p>
+        </p:txBody>
+      </p:sp>
+      <p:sp>
+        <p:nvSpPr>
+          <p:cNvPr id="3" name="TextBox 2"/>
+          <p:cNvSpPr txBox="1"/>
+          <p:nvPr/>
+        </p:nvSpPr>
+        <p:spPr>
+          <a:xfrm>
+            <a:off x="914400" y="2916936"/>
+            <a:ext cx="10332720" cy="1014984"/>
+          </a:xfrm>
+          <a:prstGeom prst="rect">
+            <a:avLst/>
+          </a:prstGeom>
+          <a:noFill/>
+        </p:spPr>
+        <p:txBody>
+          <a:bodyPr wrap="square" anchor="ctr">
+            <a:spAutoFit/>
+          </a:bodyPr>
+          <a:lstStyle/>
+          <a:p>
+            <a:pPr algn="ctr"/>
+            <a:r>
+              <a:rPr sz="6000" b="1">
+                <a:solidFill>
+                  <a:srgbClr val="FFFFFF"/>
+                </a:solidFill>
+              </a:rPr>
+              <a:t>DEMO</a:t>
+            </a:r>
+            <a:r>
+              <a:rPr sz="6000">
+                <a:solidFill>
+                  <a:srgbClr val="FFFFFF"/>
+                </a:solidFill>
+              </a:rPr>
+              <a:t> · F03 Sentiment</a:t>
+            </a:r>
+          </a:p>
+        </p:txBody>
+      </p:sp>
+      <p:pic>
+        <p:nvPicPr>
+          <p:cNvPr id="4" name="Picture 3" descr="image.png"/>
+          <p:cNvPicPr>
+            <a:picLocks noChangeAspect="1"/>
+          </p:cNvPicPr>
+          <p:nvPr/>
+        </p:nvPicPr>
+        <p:blipFill>
+          <a:blip r:embed="rId2"/>
+          <a:stretch>
+            <a:fillRect/>
+          </a:stretch>
+        </p:blipFill>
+        <p:spPr>
+          <a:xfrm>
+            <a:off x="9326880" y="5989320"/>
+            <a:ext cx="2560320" cy="640080"/>
+          </a:xfrm>
+          <a:prstGeom prst="rect">
+            <a:avLst/>
+          </a:prstGeom>
+        </p:spPr>
+      </p:pic>
     </p:spTree>
   </p:cSld>
   <p:clrMapOvr>
@@ -12489,7 +12486,7 @@
           <a:lstStyle/>
           <a:p>
             <a:r>
-              <a:t>F03 · Sentiment · Leadership Card</a:t>
+              <a:t>F03 · Sentiment · Demo: What to Watch</a:t>
             </a:r>
           </a:p>
         </p:txBody>
@@ -12514,228 +12511,73 @@
           <a:bodyPr wrap="square"/>
           <a:lstStyle/>
           <a:p>
-            <a:pPr>
-              <a:spcAft>
-                <a:spcPts val="1400"/>
-              </a:spcAft>
-            </a:pPr>
-            <a:r>
-              <a:rPr sz="2800" b="1" dirty="0"/>
-              <a:t>When:</a:t>
-            </a:r>
-            <a:r>
-              <a:rPr sz="2800" dirty="0"/>
-              <a:t> A high-volume text stream needing a judgment call.</a:t>
-            </a:r>
-          </a:p>
-          <a:p>
-            <a:pPr>
-              <a:spcAft>
-                <a:spcPts val="1400"/>
-              </a:spcAft>
-            </a:pPr>
-            <a:r>
-              <a:rPr sz="2800" b="1" dirty="0"/>
-              <a:t>Think:</a:t>
-            </a:r>
-            <a:r>
-              <a:rPr sz="2800" dirty="0"/>
-              <a:t> "We measured: the free local model matches the expensive one on most of this task, and we know exactly which slice needs the big gun."</a:t>
-            </a:r>
-            <a:endParaRPr lang="en-US" sz="2800" dirty="0"/>
-          </a:p>
-          <a:p>
-            <a:pPr>
-              <a:spcAft>
-                <a:spcPts val="1400"/>
-              </a:spcAft>
-            </a:pPr>
-            <a:endParaRPr sz="2800" dirty="0"/>
-          </a:p>
-          <a:p>
-            <a:pPr>
-              <a:spcAft>
-                <a:spcPts val="1400"/>
-              </a:spcAft>
-            </a:pPr>
-            <a:r>
-              <a:rPr sz="2800" b="1" dirty="0"/>
-              <a:t>Difficulty:</a:t>
-            </a:r>
-            <a:r>
-              <a:rPr sz="2800" dirty="0"/>
-              <a:t> </a:t>
-            </a:r>
-          </a:p>
-        </p:txBody>
-      </p:sp>
-      <p:sp>
-        <p:nvSpPr>
-          <p:cNvPr id="4" name="Rounded Rectangle 3"/>
-          <p:cNvSpPr/>
-          <p:nvPr/>
-        </p:nvSpPr>
-        <p:spPr>
-          <a:xfrm>
-            <a:off x="2807208" y="4809744"/>
-            <a:ext cx="256032" cy="256032"/>
-          </a:xfrm>
-          <a:prstGeom prst="roundRect">
-            <a:avLst>
-              <a:gd name="adj" fmla="val 25000"/>
-            </a:avLst>
-          </a:prstGeom>
-          <a:solidFill>
-            <a:srgbClr val="017AB4"/>
-          </a:solidFill>
-          <a:ln>
-            <a:noFill/>
-          </a:ln>
-          <a:effectLst/>
-        </p:spPr>
-        <p:style>
-          <a:lnRef idx="1">
-            <a:schemeClr val="accent1"/>
-          </a:lnRef>
-          <a:fillRef idx="3">
-            <a:schemeClr val="accent1"/>
-          </a:fillRef>
-          <a:effectRef idx="2">
-            <a:schemeClr val="accent1"/>
-          </a:effectRef>
-          <a:fontRef idx="minor">
-            <a:schemeClr val="lt1"/>
-          </a:fontRef>
-        </p:style>
-        <p:txBody>
-          <a:bodyPr rtlCol="0" anchor="ctr"/>
-          <a:lstStyle/>
-          <a:p>
-            <a:pPr algn="ctr"/>
-            <a:endParaRPr/>
-          </a:p>
-        </p:txBody>
-      </p:sp>
-      <p:sp>
-        <p:nvSpPr>
-          <p:cNvPr id="5" name="Rounded Rectangle 4"/>
-          <p:cNvSpPr/>
-          <p:nvPr/>
-        </p:nvSpPr>
-        <p:spPr>
-          <a:xfrm>
-            <a:off x="3154680" y="4608576"/>
-            <a:ext cx="256032" cy="457200"/>
-          </a:xfrm>
-          <a:prstGeom prst="roundRect">
-            <a:avLst>
-              <a:gd name="adj" fmla="val 25000"/>
-            </a:avLst>
-          </a:prstGeom>
-          <a:solidFill>
-            <a:srgbClr val="D9D9D9"/>
-          </a:solidFill>
-          <a:ln>
-            <a:noFill/>
-          </a:ln>
-          <a:effectLst/>
-        </p:spPr>
-        <p:style>
-          <a:lnRef idx="1">
-            <a:schemeClr val="accent1"/>
-          </a:lnRef>
-          <a:fillRef idx="3">
-            <a:schemeClr val="accent1"/>
-          </a:fillRef>
-          <a:effectRef idx="2">
-            <a:schemeClr val="accent1"/>
-          </a:effectRef>
-          <a:fontRef idx="minor">
-            <a:schemeClr val="lt1"/>
-          </a:fontRef>
-        </p:style>
-        <p:txBody>
-          <a:bodyPr rtlCol="0" anchor="ctr"/>
-          <a:lstStyle/>
-          <a:p>
-            <a:pPr algn="ctr"/>
-            <a:endParaRPr/>
-          </a:p>
-        </p:txBody>
-      </p:sp>
-      <p:sp>
-        <p:nvSpPr>
-          <p:cNvPr id="6" name="Rounded Rectangle 5"/>
-          <p:cNvSpPr/>
-          <p:nvPr/>
-        </p:nvSpPr>
-        <p:spPr>
-          <a:xfrm>
-            <a:off x="3502152" y="4407408"/>
-            <a:ext cx="256032" cy="658368"/>
-          </a:xfrm>
-          <a:prstGeom prst="roundRect">
-            <a:avLst>
-              <a:gd name="adj" fmla="val 25000"/>
-            </a:avLst>
-          </a:prstGeom>
-          <a:solidFill>
-            <a:srgbClr val="D9D9D9"/>
-          </a:solidFill>
-          <a:ln>
-            <a:noFill/>
-          </a:ln>
-          <a:effectLst/>
-        </p:spPr>
-        <p:style>
-          <a:lnRef idx="1">
-            <a:schemeClr val="accent1"/>
-          </a:lnRef>
-          <a:fillRef idx="3">
-            <a:schemeClr val="accent1"/>
-          </a:fillRef>
-          <a:effectRef idx="2">
-            <a:schemeClr val="accent1"/>
-          </a:effectRef>
-          <a:fontRef idx="minor">
-            <a:schemeClr val="lt1"/>
-          </a:fontRef>
-        </p:style>
-        <p:txBody>
-          <a:bodyPr rtlCol="0" anchor="ctr"/>
-          <a:lstStyle/>
-          <a:p>
-            <a:pPr algn="ctr"/>
-            <a:endParaRPr/>
-          </a:p>
-        </p:txBody>
-      </p:sp>
-      <p:sp>
-        <p:nvSpPr>
-          <p:cNvPr id="7" name="TextBox 6"/>
-          <p:cNvSpPr txBox="1"/>
-          <p:nvPr/>
-        </p:nvSpPr>
-        <p:spPr>
-          <a:xfrm>
-            <a:off x="2532888" y="5120640"/>
-            <a:ext cx="1499616" cy="320040"/>
-          </a:xfrm>
-          <a:prstGeom prst="rect">
-            <a:avLst/>
-          </a:prstGeom>
-          <a:noFill/>
-        </p:spPr>
-        <p:txBody>
-          <a:bodyPr wrap="none">
-            <a:spAutoFit/>
-          </a:bodyPr>
-          <a:lstStyle/>
-          <a:p>
-            <a:pPr algn="ctr"/>
-            <a:r>
-              <a:rPr sz="1400" b="1"/>
-              <a:t>Easy</a:t>
+            <a:r>
+              <a:rPr sz="2800"/>
+              <a:t>One method · </a:t>
+            </a:r>
+            <a:r>
+              <a:rPr sz="2800">
+                <a:latin typeface="Consolas"/>
+              </a:rPr>
+              <a:t>positive | negative | mixed</a:t>
+            </a:r>
+            <a:r>
+              <a:rPr sz="2800"/>
+              <a:t> · swap = one DI line</a:t>
+            </a:r>
+          </a:p>
+          <a:p>
+            <a:r>
+              <a:rPr sz="2800"/>
+              <a:t>20 easy through </a:t>
+            </a:r>
+            <a:r>
+              <a:rPr sz="2800">
+                <a:latin typeface="Consolas"/>
+              </a:rPr>
+              <a:t>phi3</a:t>
+            </a:r>
+            <a:r>
+              <a:rPr sz="2800"/>
+              <a:t>: fast, free, correct</a:t>
+            </a:r>
+          </a:p>
+          <a:p>
+            <a:r>
+              <a:rPr sz="2800"/>
+              <a:t>Same 20 through Azure: 9 of 10 identical</a:t>
+            </a:r>
+          </a:p>
+          <a:p>
+            <a:r>
+              <a:rPr sz="2800"/>
+              <a:t>The hard set through both — diff on screen</a:t>
+            </a:r>
+          </a:p>
+          <a:p>
+            <a:r>
+              <a:rPr sz="2800"/>
+              <a:t>📊 </a:t>
+            </a:r>
+            <a:r>
+              <a:rPr sz="2800">
+                <a:latin typeface="Consolas"/>
+              </a:rPr>
+              <a:t>phi3</a:t>
+            </a:r>
+            <a:r>
+              <a:rPr sz="2800"/>
+              <a:t> 9/10 · 7/10 — </a:t>
+            </a:r>
+            <a:r>
+              <a:rPr sz="2800">
+                <a:latin typeface="Consolas"/>
+              </a:rPr>
+              <a:t>gpt-4.1</a:t>
+            </a:r>
+            <a:r>
+              <a:rPr sz="2800"/>
+              <a:t> 10/10 · 10/10</a:t>
             </a:r>
           </a:p>
         </p:txBody>
@@ -12781,7 +12623,7 @@
           <a:lstStyle/>
           <a:p>
             <a:r>
-              <a:t>Lab 1: ~60 Minutes</a:t>
+              <a:t>F03 · Sentiment · Leadership Card</a:t>
             </a:r>
           </a:p>
         </p:txBody>
@@ -12806,130 +12648,19 @@
           <a:bodyPr wrap="square"/>
           <a:lstStyle/>
           <a:p>
-            <a:pPr marL="0" indent="0">
-              <a:buNone/>
+            <a:pPr>
+              <a:spcAft>
+                <a:spcPts val="1400"/>
+              </a:spcAft>
             </a:pPr>
             <a:r>
-              <a:rPr sz="3600" dirty="0"/>
-              <a:t>⭐ Recommended: </a:t>
-            </a:r>
-            <a:r>
-              <a:rPr sz="3600" b="1" dirty="0"/>
-              <a:t>F01 Summarization</a:t>
-            </a:r>
-          </a:p>
-          <a:p>
-            <a:pPr marL="0" indent="0">
-              <a:buNone/>
-            </a:pPr>
-            <a:r>
-              <a:rPr sz="3600" dirty="0"/>
-              <a:t>⛰️ Challenge: </a:t>
-            </a:r>
-            <a:r>
-              <a:rPr sz="3600" b="1" dirty="0"/>
-              <a:t>F02 Extraction</a:t>
-            </a:r>
-            <a:r>
-              <a:rPr sz="3600" dirty="0"/>
-              <a:t> · </a:t>
-            </a:r>
-            <a:r>
-              <a:rPr sz="3600" b="1" dirty="0"/>
-              <a:t>F03 Sentiment</a:t>
-            </a:r>
-          </a:p>
-          <a:p>
-            <a:r>
-              <a:rPr sz="2800" dirty="0">
-                <a:latin typeface="Consolas"/>
-              </a:rPr>
-              <a:t>FNN-</a:t>
-            </a:r>
-            <a:r>
-              <a:rPr sz="2800" dirty="0" err="1">
-                <a:latin typeface="Consolas"/>
-              </a:rPr>
-              <a:t>lab.md</a:t>
-            </a:r>
-            <a:r>
-              <a:rPr sz="2800" dirty="0"/>
-              <a:t> · </a:t>
-            </a:r>
-            <a:r>
-              <a:rPr sz="2800" dirty="0">
-                <a:latin typeface="Consolas"/>
-              </a:rPr>
-              <a:t>http/</a:t>
-            </a:r>
-            <a:r>
-              <a:rPr sz="2800" dirty="0" err="1">
-                <a:latin typeface="Consolas"/>
-              </a:rPr>
-              <a:t>ollama.http</a:t>
-            </a:r>
-            <a:r>
-              <a:rPr sz="2800" dirty="0"/>
-              <a:t> · </a:t>
-            </a:r>
-            <a:r>
-              <a:rPr sz="2800" dirty="0">
-                <a:latin typeface="Consolas"/>
-              </a:rPr>
-              <a:t>expected-</a:t>
-            </a:r>
-            <a:r>
-              <a:rPr sz="2800" dirty="0" err="1">
-                <a:latin typeface="Consolas"/>
-              </a:rPr>
-              <a:t>output.md</a:t>
-            </a:r>
-            <a:r>
-              <a:rPr sz="2800" dirty="0"/>
-              <a:t> · </a:t>
-            </a:r>
-            <a:r>
-              <a:rPr sz="2800" dirty="0">
-                <a:latin typeface="Consolas"/>
-              </a:rPr>
-              <a:t>data/</a:t>
-            </a:r>
-          </a:p>
-          <a:p>
-            <a:pPr marL="0" indent="0">
-              <a:buNone/>
-            </a:pPr>
-            <a:endParaRPr lang="en-US" sz="3200" dirty="0"/>
-          </a:p>
-          <a:p>
-            <a:pPr marL="0" indent="0">
-              <a:buNone/>
-            </a:pPr>
-            <a:endParaRPr lang="en-US" sz="3200" dirty="0"/>
-          </a:p>
-          <a:p>
-            <a:pPr marL="0" indent="0">
-              <a:buNone/>
-            </a:pPr>
-            <a:r>
-              <a:rPr sz="3200" dirty="0"/>
-              <a:t>✅ Done = your output similar to </a:t>
-            </a:r>
-            <a:r>
-              <a:rPr sz="3200" dirty="0">
-                <a:latin typeface="Consolas"/>
-              </a:rPr>
-              <a:t>expected-</a:t>
-            </a:r>
-            <a:r>
-              <a:rPr sz="3200" dirty="0" err="1">
-                <a:latin typeface="Consolas"/>
-              </a:rPr>
-              <a:t>output.md</a:t>
-            </a:r>
-            <a:endParaRPr sz="3200" dirty="0">
-              <a:latin typeface="Consolas"/>
-            </a:endParaRPr>
+              <a:rPr sz="2800" b="1"/>
+              <a:t>When:</a:t>
+            </a:r>
+            <a:r>
+              <a:rPr sz="2800"/>
+              <a:t> A high-volume text stream needing a judgment call.</a:t>
+            </a:r>
           </a:p>
         </p:txBody>
       </p:sp>
@@ -12974,7 +12705,7 @@
           <a:lstStyle/>
           <a:p>
             <a:r>
-              <a:t>Lab 1: Debrief</a:t>
+              <a:t>F03 · Sentiment · Leadership Card</a:t>
             </a:r>
           </a:p>
         </p:txBody>
@@ -12999,26 +12730,33 @@
           <a:bodyPr wrap="square"/>
           <a:lstStyle/>
           <a:p>
-            <a:pPr marL="0" indent="0">
-              <a:buNone/>
+            <a:pPr>
+              <a:spcAft>
+                <a:spcPts val="1400"/>
+              </a:spcAft>
             </a:pPr>
-            <a:endParaRPr lang="en-US" sz="2800" dirty="0"/>
-          </a:p>
-          <a:p>
-            <a:pPr marL="0" indent="0">
-              <a:buNone/>
+            <a:r>
+              <a:rPr sz="2800" b="1"/>
+              <a:t>When:</a:t>
+            </a:r>
+            <a:r>
+              <a:rPr sz="2800"/>
+              <a:t> A high-volume text stream needing a judgment call.</a:t>
+            </a:r>
+          </a:p>
+          <a:p>
+            <a:pPr>
+              <a:spcAft>
+                <a:spcPts val="1400"/>
+              </a:spcAft>
             </a:pPr>
             <a:r>
-              <a:rPr sz="2800" dirty="0"/>
-              <a:t>How'd it go?</a:t>
-            </a:r>
-            <a:r>
-              <a:rPr lang="en-US" sz="2800" dirty="0"/>
-              <a:t>				  Observations?			        </a:t>
-            </a:r>
-            <a:r>
-              <a:rPr sz="2800" dirty="0"/>
-              <a:t>Questions?</a:t>
+              <a:rPr sz="2800" b="1"/>
+              <a:t>Think:</a:t>
+            </a:r>
+            <a:r>
+              <a:rPr sz="2800"/>
+              <a:t> "We measured: the free local model matches the expensive one on most of this task, and we know exactly which slice needs the big gun."</a:t>
             </a:r>
           </a:p>
         </p:txBody>
@@ -13032,7 +12770,7 @@
 </file>
 
 <file path=ppt/slides/slide33.xml><?xml version="1.0" encoding="utf-8"?>
-<p:sld xmlns:a="http://schemas.openxmlformats.org/drawingml/2006/main" xmlns:p="http://schemas.openxmlformats.org/presentationml/2006/main" xmlns:r="http://schemas.openxmlformats.org/officeDocument/2006/relationships">
+<p:sld xmlns:a="http://schemas.openxmlformats.org/drawingml/2006/main" xmlns:r="http://schemas.openxmlformats.org/officeDocument/2006/relationships" xmlns:p="http://schemas.openxmlformats.org/presentationml/2006/main">
   <p:cSld>
     <p:spTree>
       <p:nvGrpSpPr>
@@ -13040,41 +12778,261 @@
         <p:cNvGrpSpPr/>
         <p:nvPr/>
       </p:nvGrpSpPr>
-      <p:grpSpPr/>
-      <p:pic>
-        <p:nvPicPr>
-          <p:cNvPr id="2" name="Picture 1" descr="image.png"/>
-          <p:cNvPicPr>
-            <a:picLocks noChangeAspect="1"/>
-          </p:cNvPicPr>
+      <p:grpSpPr>
+        <a:xfrm>
+          <a:off x="0" y="0"/>
+          <a:ext cx="0" cy="0"/>
+          <a:chOff x="0" y="0"/>
+          <a:chExt cx="0" cy="0"/>
+        </a:xfrm>
+      </p:grpSpPr>
+      <p:sp>
+        <p:nvSpPr>
+          <p:cNvPr id="2" name="Title 1"/>
+          <p:cNvSpPr>
+            <a:spLocks noGrp="1"/>
+          </p:cNvSpPr>
+          <p:nvPr>
+            <p:ph type="title"/>
+          </p:nvPr>
+        </p:nvSpPr>
+        <p:spPr/>
+        <p:txBody>
+          <a:bodyPr wrap="square"/>
+          <a:lstStyle/>
+          <a:p>
+            <a:r>
+              <a:t>F03 · Sentiment · Leadership Card</a:t>
+            </a:r>
+          </a:p>
+        </p:txBody>
+      </p:sp>
+      <p:sp>
+        <p:nvSpPr>
+          <p:cNvPr id="3" name="Content Placeholder 2"/>
+          <p:cNvSpPr>
+            <a:spLocks noGrp="1"/>
+          </p:cNvSpPr>
+          <p:nvPr>
+            <p:ph idx="1"/>
+          </p:nvPr>
+        </p:nvSpPr>
+        <p:spPr>
+          <a:xfrm>
+            <a:off x="612648" y="1920240"/>
+            <a:ext cx="10966704" cy="4617720"/>
+          </a:xfrm>
+        </p:spPr>
+        <p:txBody>
+          <a:bodyPr wrap="square"/>
+          <a:lstStyle/>
+          <a:p>
+            <a:pPr>
+              <a:spcAft>
+                <a:spcPts val="1400"/>
+              </a:spcAft>
+            </a:pPr>
+            <a:r>
+              <a:rPr sz="2800" b="1" dirty="0"/>
+              <a:t>When:</a:t>
+            </a:r>
+            <a:r>
+              <a:rPr sz="2800" dirty="0"/>
+              <a:t> A high-volume text stream needing a judgment call.</a:t>
+            </a:r>
+          </a:p>
+          <a:p>
+            <a:pPr>
+              <a:spcAft>
+                <a:spcPts val="1400"/>
+              </a:spcAft>
+            </a:pPr>
+            <a:r>
+              <a:rPr sz="2800" b="1" dirty="0"/>
+              <a:t>Think:</a:t>
+            </a:r>
+            <a:r>
+              <a:rPr sz="2800" dirty="0"/>
+              <a:t> "We measured: the free local model matches the expensive one on most of this task, and we know exactly which slice needs the big gun."</a:t>
+            </a:r>
+            <a:endParaRPr lang="en-US" sz="2800" dirty="0"/>
+          </a:p>
+          <a:p>
+            <a:pPr>
+              <a:spcAft>
+                <a:spcPts val="1400"/>
+              </a:spcAft>
+            </a:pPr>
+            <a:endParaRPr sz="2800" dirty="0"/>
+          </a:p>
+          <a:p>
+            <a:pPr>
+              <a:spcAft>
+                <a:spcPts val="1400"/>
+              </a:spcAft>
+            </a:pPr>
+            <a:r>
+              <a:rPr sz="2800" b="1" dirty="0"/>
+              <a:t>Difficulty:</a:t>
+            </a:r>
+            <a:r>
+              <a:rPr sz="2800" dirty="0"/>
+              <a:t> </a:t>
+            </a:r>
+          </a:p>
+        </p:txBody>
+      </p:sp>
+      <p:sp>
+        <p:nvSpPr>
+          <p:cNvPr id="4" name="Rounded Rectangle 3"/>
+          <p:cNvSpPr/>
           <p:nvPr/>
-        </p:nvPicPr>
-        <p:blipFill>
-          <a:blip r:embed="rId2"/>
-          <a:stretch>
-            <a:fillRect/>
-          </a:stretch>
-        </p:blipFill>
-        <p:spPr>
-          <a:xfrm>
-            <a:off x="5638800" y="1371600"/>
-            <a:ext cx="914400" cy="914400"/>
-          </a:xfrm>
-          <a:prstGeom prst="rect">
-            <a:avLst/>
+        </p:nvSpPr>
+        <p:spPr>
+          <a:xfrm>
+            <a:off x="2807208" y="4809744"/>
+            <a:ext cx="256032" cy="256032"/>
+          </a:xfrm>
+          <a:prstGeom prst="roundRect">
+            <a:avLst>
+              <a:gd name="adj" fmla="val 25000"/>
+            </a:avLst>
           </a:prstGeom>
-        </p:spPr>
-      </p:pic>
-      <p:sp>
-        <p:nvSpPr>
-          <p:cNvPr id="3" name="TextBox 2"/>
+          <a:solidFill>
+            <a:srgbClr val="017AB4"/>
+          </a:solidFill>
+          <a:ln>
+            <a:noFill/>
+          </a:ln>
+          <a:effectLst/>
+        </p:spPr>
+        <p:style>
+          <a:lnRef idx="1">
+            <a:schemeClr val="accent1"/>
+          </a:lnRef>
+          <a:fillRef idx="3">
+            <a:schemeClr val="accent1"/>
+          </a:fillRef>
+          <a:effectRef idx="2">
+            <a:schemeClr val="accent1"/>
+          </a:effectRef>
+          <a:fontRef idx="minor">
+            <a:schemeClr val="lt1"/>
+          </a:fontRef>
+        </p:style>
+        <p:txBody>
+          <a:bodyPr rtlCol="0" anchor="ctr"/>
+          <a:lstStyle/>
+          <a:p>
+            <a:pPr algn="ctr"/>
+            <a:endParaRPr/>
+          </a:p>
+        </p:txBody>
+      </p:sp>
+      <p:sp>
+        <p:nvSpPr>
+          <p:cNvPr id="5" name="Rounded Rectangle 4"/>
+          <p:cNvSpPr/>
+          <p:nvPr/>
+        </p:nvSpPr>
+        <p:spPr>
+          <a:xfrm>
+            <a:off x="3154680" y="4608576"/>
+            <a:ext cx="256032" cy="457200"/>
+          </a:xfrm>
+          <a:prstGeom prst="roundRect">
+            <a:avLst>
+              <a:gd name="adj" fmla="val 25000"/>
+            </a:avLst>
+          </a:prstGeom>
+          <a:solidFill>
+            <a:srgbClr val="D9D9D9"/>
+          </a:solidFill>
+          <a:ln>
+            <a:noFill/>
+          </a:ln>
+          <a:effectLst/>
+        </p:spPr>
+        <p:style>
+          <a:lnRef idx="1">
+            <a:schemeClr val="accent1"/>
+          </a:lnRef>
+          <a:fillRef idx="3">
+            <a:schemeClr val="accent1"/>
+          </a:fillRef>
+          <a:effectRef idx="2">
+            <a:schemeClr val="accent1"/>
+          </a:effectRef>
+          <a:fontRef idx="minor">
+            <a:schemeClr val="lt1"/>
+          </a:fontRef>
+        </p:style>
+        <p:txBody>
+          <a:bodyPr rtlCol="0" anchor="ctr"/>
+          <a:lstStyle/>
+          <a:p>
+            <a:pPr algn="ctr"/>
+            <a:endParaRPr/>
+          </a:p>
+        </p:txBody>
+      </p:sp>
+      <p:sp>
+        <p:nvSpPr>
+          <p:cNvPr id="6" name="Rounded Rectangle 5"/>
+          <p:cNvSpPr/>
+          <p:nvPr/>
+        </p:nvSpPr>
+        <p:spPr>
+          <a:xfrm>
+            <a:off x="3502152" y="4407408"/>
+            <a:ext cx="256032" cy="658368"/>
+          </a:xfrm>
+          <a:prstGeom prst="roundRect">
+            <a:avLst>
+              <a:gd name="adj" fmla="val 25000"/>
+            </a:avLst>
+          </a:prstGeom>
+          <a:solidFill>
+            <a:srgbClr val="D9D9D9"/>
+          </a:solidFill>
+          <a:ln>
+            <a:noFill/>
+          </a:ln>
+          <a:effectLst/>
+        </p:spPr>
+        <p:style>
+          <a:lnRef idx="1">
+            <a:schemeClr val="accent1"/>
+          </a:lnRef>
+          <a:fillRef idx="3">
+            <a:schemeClr val="accent1"/>
+          </a:fillRef>
+          <a:effectRef idx="2">
+            <a:schemeClr val="accent1"/>
+          </a:effectRef>
+          <a:fontRef idx="minor">
+            <a:schemeClr val="lt1"/>
+          </a:fontRef>
+        </p:style>
+        <p:txBody>
+          <a:bodyPr rtlCol="0" anchor="ctr"/>
+          <a:lstStyle/>
+          <a:p>
+            <a:pPr algn="ctr"/>
+            <a:endParaRPr/>
+          </a:p>
+        </p:txBody>
+      </p:sp>
+      <p:sp>
+        <p:nvSpPr>
+          <p:cNvPr id="7" name="TextBox 6"/>
           <p:cNvSpPr txBox="1"/>
           <p:nvPr/>
         </p:nvSpPr>
         <p:spPr>
           <a:xfrm>
-            <a:off x="914400" y="2834640"/>
-            <a:ext cx="10332720" cy="2011680"/>
+            <a:off x="2532888" y="5120640"/>
+            <a:ext cx="1499616" cy="320040"/>
           </a:xfrm>
           <a:prstGeom prst="rect">
             <a:avLst/>
@@ -13082,55 +13040,19 @@
           <a:noFill/>
         </p:spPr>
         <p:txBody>
-          <a:bodyPr wrap="square" anchor="ctr">
+          <a:bodyPr wrap="none">
             <a:spAutoFit/>
           </a:bodyPr>
           <a:lstStyle/>
           <a:p>
             <a:pPr algn="ctr"/>
             <a:r>
-              <a:rPr sz="4000"/>
-              <a:t>Turn a long document into the </a:t>
-            </a:r>
-            <a:r>
-              <a:rPr b="1" sz="4000">
-                <a:solidFill>
-                  <a:srgbClr val="017AB4"/>
-                </a:solidFill>
-              </a:rPr>
-              <a:t>short version</a:t>
-            </a:r>
-            <a:r>
-              <a:rPr sz="4000"/>
-              <a:t> its reader needs.</a:t>
-            </a:r>
-          </a:p>
-        </p:txBody>
-      </p:sp>
-      <p:pic>
-        <p:nvPicPr>
-          <p:cNvPr id="4" name="Picture 3" descr="image.png"/>
-          <p:cNvPicPr>
-            <a:picLocks noChangeAspect="1"/>
-          </p:cNvPicPr>
-          <p:nvPr/>
-        </p:nvPicPr>
-        <p:blipFill>
-          <a:blip r:embed="rId3"/>
-          <a:stretch>
-            <a:fillRect/>
-          </a:stretch>
-        </p:blipFill>
-        <p:spPr>
-          <a:xfrm>
-            <a:off x="9326880" y="5989320"/>
-            <a:ext cx="2560320" cy="640080"/>
-          </a:xfrm>
-          <a:prstGeom prst="rect">
-            <a:avLst/>
-          </a:prstGeom>
-        </p:spPr>
-      </p:pic>
+              <a:rPr sz="1400" b="1"/>
+              <a:t>Easy</a:t>
+            </a:r>
+          </a:p>
+        </p:txBody>
+      </p:sp>
     </p:spTree>
   </p:cSld>
   <p:clrMapOvr>
@@ -13140,7 +13062,7 @@
 </file>
 
 <file path=ppt/slides/slide34.xml><?xml version="1.0" encoding="utf-8"?>
-<p:sld xmlns:a="http://schemas.openxmlformats.org/drawingml/2006/main" xmlns:p="http://schemas.openxmlformats.org/presentationml/2006/main" xmlns:r="http://schemas.openxmlformats.org/officeDocument/2006/relationships">
+<p:sld xmlns:a="http://schemas.openxmlformats.org/drawingml/2006/main" xmlns:r="http://schemas.openxmlformats.org/officeDocument/2006/relationships" xmlns:p="http://schemas.openxmlformats.org/presentationml/2006/main">
   <p:cSld>
     <p:spTree>
       <p:nvGrpSpPr>
@@ -13148,97 +13070,182 @@
         <p:cNvGrpSpPr/>
         <p:nvPr/>
       </p:nvGrpSpPr>
-      <p:grpSpPr/>
-      <p:pic>
-        <p:nvPicPr>
-          <p:cNvPr id="2" name="Picture 1" descr="image.png"/>
-          <p:cNvPicPr>
-            <a:picLocks noChangeAspect="1"/>
-          </p:cNvPicPr>
-          <p:nvPr/>
-        </p:nvPicPr>
-        <p:blipFill>
-          <a:blip r:embed="rId2"/>
-          <a:stretch>
-            <a:fillRect/>
-          </a:stretch>
-        </p:blipFill>
-        <p:spPr>
-          <a:xfrm>
-            <a:off x="5638800" y="1371600"/>
-            <a:ext cx="914400" cy="914400"/>
-          </a:xfrm>
-          <a:prstGeom prst="rect">
-            <a:avLst/>
-          </a:prstGeom>
-        </p:spPr>
-      </p:pic>
-      <p:sp>
-        <p:nvSpPr>
-          <p:cNvPr id="3" name="TextBox 2"/>
-          <p:cNvSpPr txBox="1"/>
-          <p:nvPr/>
-        </p:nvSpPr>
-        <p:spPr>
-          <a:xfrm>
-            <a:off x="914400" y="2834640"/>
-            <a:ext cx="10332720" cy="2011680"/>
-          </a:xfrm>
-          <a:prstGeom prst="rect">
-            <a:avLst/>
-          </a:prstGeom>
-          <a:noFill/>
-        </p:spPr>
-        <p:txBody>
-          <a:bodyPr wrap="square" anchor="ctr">
-            <a:spAutoFit/>
-          </a:bodyPr>
-          <a:lstStyle/>
-          <a:p>
-            <a:pPr algn="ctr"/>
-            <a:r>
-              <a:rPr sz="4000"/>
-              <a:t>Pull facts out of free-form text into </a:t>
-            </a:r>
-            <a:r>
-              <a:rPr b="1" sz="4000">
-                <a:solidFill>
-                  <a:srgbClr val="017AB4"/>
-                </a:solidFill>
+      <p:grpSpPr>
+        <a:xfrm>
+          <a:off x="0" y="0"/>
+          <a:ext cx="0" cy="0"/>
+          <a:chOff x="0" y="0"/>
+          <a:chExt cx="0" cy="0"/>
+        </a:xfrm>
+      </p:grpSpPr>
+      <p:sp>
+        <p:nvSpPr>
+          <p:cNvPr id="2" name="Title 1"/>
+          <p:cNvSpPr>
+            <a:spLocks noGrp="1"/>
+          </p:cNvSpPr>
+          <p:nvPr>
+            <p:ph type="title"/>
+          </p:nvPr>
+        </p:nvSpPr>
+        <p:spPr/>
+        <p:txBody>
+          <a:bodyPr wrap="square"/>
+          <a:lstStyle/>
+          <a:p>
+            <a:r>
+              <a:t>Lab 1: ~60 Minutes</a:t>
+            </a:r>
+          </a:p>
+        </p:txBody>
+      </p:sp>
+      <p:sp>
+        <p:nvSpPr>
+          <p:cNvPr id="3" name="Content Placeholder 2"/>
+          <p:cNvSpPr>
+            <a:spLocks noGrp="1"/>
+          </p:cNvSpPr>
+          <p:nvPr>
+            <p:ph idx="1"/>
+          </p:nvPr>
+        </p:nvSpPr>
+        <p:spPr>
+          <a:xfrm>
+            <a:off x="612648" y="1920240"/>
+            <a:ext cx="10966704" cy="4617720"/>
+          </a:xfrm>
+        </p:spPr>
+        <p:txBody>
+          <a:bodyPr wrap="square"/>
+          <a:lstStyle/>
+          <a:p>
+            <a:pPr marL="0" indent="0">
+              <a:buNone/>
+            </a:pPr>
+            <a:r>
+              <a:rPr sz="3600" dirty="0"/>
+              <a:t>⭐ Recommended: </a:t>
+            </a:r>
+            <a:r>
+              <a:rPr sz="3600" b="1" dirty="0"/>
+              <a:t>F01 Summarization</a:t>
+            </a:r>
+          </a:p>
+          <a:p>
+            <a:pPr marL="0" indent="0">
+              <a:buNone/>
+            </a:pPr>
+            <a:r>
+              <a:rPr sz="3600" dirty="0"/>
+              <a:t>⛰️ Challenge: </a:t>
+            </a:r>
+            <a:r>
+              <a:rPr sz="3600" b="1" dirty="0"/>
+              <a:t>F02 Extraction</a:t>
+            </a:r>
+            <a:r>
+              <a:rPr sz="3600" dirty="0"/>
+              <a:t> · </a:t>
+            </a:r>
+            <a:r>
+              <a:rPr sz="3600" b="1" dirty="0"/>
+              <a:t>F03 Sentiment</a:t>
+            </a:r>
+          </a:p>
+          <a:p>
+            <a:r>
+              <a:rPr sz="2800" dirty="0">
+                <a:latin typeface="Consolas"/>
               </a:rPr>
-              <a:t>fields your code can query</a:t>
-            </a:r>
-            <a:r>
-              <a:rPr sz="4000"/>
-              <a:t>.</a:t>
-            </a:r>
-          </a:p>
-        </p:txBody>
-      </p:sp>
-      <p:pic>
-        <p:nvPicPr>
-          <p:cNvPr id="4" name="Picture 3" descr="image.png"/>
-          <p:cNvPicPr>
-            <a:picLocks noChangeAspect="1"/>
-          </p:cNvPicPr>
-          <p:nvPr/>
-        </p:nvPicPr>
-        <p:blipFill>
-          <a:blip r:embed="rId3"/>
-          <a:stretch>
-            <a:fillRect/>
-          </a:stretch>
-        </p:blipFill>
-        <p:spPr>
-          <a:xfrm>
-            <a:off x="9326880" y="5989320"/>
-            <a:ext cx="2560320" cy="640080"/>
-          </a:xfrm>
-          <a:prstGeom prst="rect">
-            <a:avLst/>
-          </a:prstGeom>
-        </p:spPr>
-      </p:pic>
+              <a:t>FNN-</a:t>
+            </a:r>
+            <a:r>
+              <a:rPr sz="2800" dirty="0" err="1">
+                <a:latin typeface="Consolas"/>
+              </a:rPr>
+              <a:t>lab.md</a:t>
+            </a:r>
+            <a:r>
+              <a:rPr sz="2800" dirty="0"/>
+              <a:t> · </a:t>
+            </a:r>
+            <a:r>
+              <a:rPr sz="2800" dirty="0">
+                <a:latin typeface="Consolas"/>
+              </a:rPr>
+              <a:t>http/</a:t>
+            </a:r>
+            <a:r>
+              <a:rPr sz="2800" dirty="0" err="1">
+                <a:latin typeface="Consolas"/>
+              </a:rPr>
+              <a:t>ollama.http</a:t>
+            </a:r>
+            <a:r>
+              <a:rPr sz="2800" dirty="0"/>
+              <a:t> · </a:t>
+            </a:r>
+            <a:r>
+              <a:rPr sz="2800" dirty="0">
+                <a:latin typeface="Consolas"/>
+              </a:rPr>
+              <a:t>expected-</a:t>
+            </a:r>
+            <a:r>
+              <a:rPr sz="2800" dirty="0" err="1">
+                <a:latin typeface="Consolas"/>
+              </a:rPr>
+              <a:t>output.md</a:t>
+            </a:r>
+            <a:r>
+              <a:rPr sz="2800" dirty="0"/>
+              <a:t> · </a:t>
+            </a:r>
+            <a:r>
+              <a:rPr sz="2800" dirty="0">
+                <a:latin typeface="Consolas"/>
+              </a:rPr>
+              <a:t>data/</a:t>
+            </a:r>
+          </a:p>
+          <a:p>
+            <a:pPr marL="0" indent="0">
+              <a:buNone/>
+            </a:pPr>
+            <a:endParaRPr lang="en-US" sz="3200" dirty="0"/>
+          </a:p>
+          <a:p>
+            <a:pPr marL="0" indent="0">
+              <a:buNone/>
+            </a:pPr>
+            <a:endParaRPr lang="en-US" sz="3200" dirty="0"/>
+          </a:p>
+          <a:p>
+            <a:pPr marL="0" indent="0">
+              <a:buNone/>
+            </a:pPr>
+            <a:r>
+              <a:rPr sz="3200" dirty="0"/>
+              <a:t>✅ Done = your output similar to </a:t>
+            </a:r>
+            <a:r>
+              <a:rPr sz="3200" dirty="0">
+                <a:latin typeface="Consolas"/>
+              </a:rPr>
+              <a:t>expected-</a:t>
+            </a:r>
+            <a:r>
+              <a:rPr sz="3200" dirty="0" err="1">
+                <a:latin typeface="Consolas"/>
+              </a:rPr>
+              <a:t>output.md</a:t>
+            </a:r>
+            <a:endParaRPr sz="3200" dirty="0">
+              <a:latin typeface="Consolas"/>
+            </a:endParaRPr>
+          </a:p>
+        </p:txBody>
+      </p:sp>
     </p:spTree>
   </p:cSld>
   <p:clrMapOvr>
@@ -13248,7 +13255,7 @@
 </file>
 
 <file path=ppt/slides/slide35.xml><?xml version="1.0" encoding="utf-8"?>
-<p:sld xmlns:a="http://schemas.openxmlformats.org/drawingml/2006/main" xmlns:p="http://schemas.openxmlformats.org/presentationml/2006/main" xmlns:r="http://schemas.openxmlformats.org/officeDocument/2006/relationships">
+<p:sld xmlns:a="http://schemas.openxmlformats.org/drawingml/2006/main" xmlns:r="http://schemas.openxmlformats.org/officeDocument/2006/relationships" xmlns:p="http://schemas.openxmlformats.org/presentationml/2006/main">
   <p:cSld>
     <p:spTree>
       <p:nvGrpSpPr>
@@ -13256,97 +13263,79 @@
         <p:cNvGrpSpPr/>
         <p:nvPr/>
       </p:nvGrpSpPr>
-      <p:grpSpPr/>
-      <p:pic>
-        <p:nvPicPr>
-          <p:cNvPr id="2" name="Picture 1" descr="image.png"/>
-          <p:cNvPicPr>
-            <a:picLocks noChangeAspect="1"/>
-          </p:cNvPicPr>
-          <p:nvPr/>
-        </p:nvPicPr>
-        <p:blipFill>
-          <a:blip r:embed="rId2"/>
-          <a:stretch>
-            <a:fillRect/>
-          </a:stretch>
-        </p:blipFill>
-        <p:spPr>
-          <a:xfrm>
-            <a:off x="5638800" y="1371600"/>
-            <a:ext cx="914400" cy="914400"/>
-          </a:xfrm>
-          <a:prstGeom prst="rect">
-            <a:avLst/>
-          </a:prstGeom>
-        </p:spPr>
-      </p:pic>
-      <p:sp>
-        <p:nvSpPr>
-          <p:cNvPr id="3" name="TextBox 2"/>
-          <p:cNvSpPr txBox="1"/>
-          <p:nvPr/>
-        </p:nvSpPr>
-        <p:spPr>
-          <a:xfrm>
-            <a:off x="914400" y="2834640"/>
-            <a:ext cx="10332720" cy="2011680"/>
-          </a:xfrm>
-          <a:prstGeom prst="rect">
-            <a:avLst/>
-          </a:prstGeom>
-          <a:noFill/>
-        </p:spPr>
-        <p:txBody>
-          <a:bodyPr wrap="square" anchor="ctr">
-            <a:spAutoFit/>
-          </a:bodyPr>
-          <a:lstStyle/>
-          <a:p>
-            <a:pPr algn="ctr"/>
-            <a:r>
-              <a:rPr sz="4000"/>
-              <a:t>Read text and judge </a:t>
-            </a:r>
-            <a:r>
-              <a:rPr b="1" sz="4000">
-                <a:solidFill>
-                  <a:srgbClr val="017AB4"/>
-                </a:solidFill>
-              </a:rPr>
-              <a:t>the feeling behind it</a:t>
-            </a:r>
-            <a:r>
-              <a:rPr sz="4000"/>
-              <a:t>: positive, negative, or mixed.</a:t>
-            </a:r>
-          </a:p>
-        </p:txBody>
-      </p:sp>
-      <p:pic>
-        <p:nvPicPr>
-          <p:cNvPr id="4" name="Picture 3" descr="image.png"/>
-          <p:cNvPicPr>
-            <a:picLocks noChangeAspect="1"/>
-          </p:cNvPicPr>
-          <p:nvPr/>
-        </p:nvPicPr>
-        <p:blipFill>
-          <a:blip r:embed="rId3"/>
-          <a:stretch>
-            <a:fillRect/>
-          </a:stretch>
-        </p:blipFill>
-        <p:spPr>
-          <a:xfrm>
-            <a:off x="9326880" y="5989320"/>
-            <a:ext cx="2560320" cy="640080"/>
-          </a:xfrm>
-          <a:prstGeom prst="rect">
-            <a:avLst/>
-          </a:prstGeom>
-        </p:spPr>
-      </p:pic>
+      <p:grpSpPr>
+        <a:xfrm>
+          <a:off x="0" y="0"/>
+          <a:ext cx="0" cy="0"/>
+          <a:chOff x="0" y="0"/>
+          <a:chExt cx="0" cy="0"/>
+        </a:xfrm>
+      </p:grpSpPr>
+      <p:sp>
+        <p:nvSpPr>
+          <p:cNvPr id="2" name="Title 1"/>
+          <p:cNvSpPr>
+            <a:spLocks noGrp="1"/>
+          </p:cNvSpPr>
+          <p:nvPr>
+            <p:ph type="title"/>
+          </p:nvPr>
+        </p:nvSpPr>
+        <p:spPr/>
+        <p:txBody>
+          <a:bodyPr wrap="square"/>
+          <a:lstStyle/>
+          <a:p>
+            <a:r>
+              <a:t>Lab 1: Debrief</a:t>
+            </a:r>
+          </a:p>
+        </p:txBody>
+      </p:sp>
+      <p:sp>
+        <p:nvSpPr>
+          <p:cNvPr id="3" name="Content Placeholder 2"/>
+          <p:cNvSpPr>
+            <a:spLocks noGrp="1"/>
+          </p:cNvSpPr>
+          <p:nvPr>
+            <p:ph idx="1"/>
+          </p:nvPr>
+        </p:nvSpPr>
+        <p:spPr>
+          <a:xfrm>
+            <a:off x="612648" y="1920240"/>
+            <a:ext cx="10966704" cy="4617720"/>
+          </a:xfrm>
+        </p:spPr>
+        <p:txBody>
+          <a:bodyPr wrap="square"/>
+          <a:lstStyle/>
+          <a:p>
+            <a:pPr marL="0" indent="0">
+              <a:buNone/>
+            </a:pPr>
+            <a:endParaRPr lang="en-US" sz="2800" dirty="0"/>
+          </a:p>
+          <a:p>
+            <a:pPr marL="0" indent="0">
+              <a:buNone/>
+            </a:pPr>
+            <a:r>
+              <a:rPr sz="2800" dirty="0"/>
+              <a:t>How'd it go?</a:t>
+            </a:r>
+            <a:r>
+              <a:rPr lang="en-US" sz="2800" dirty="0"/>
+              <a:t>				  Observations?			        </a:t>
+            </a:r>
+            <a:r>
+              <a:rPr sz="2800" dirty="0"/>
+              <a:t>Questions?</a:t>
+            </a:r>
+          </a:p>
+        </p:txBody>
+      </p:sp>
     </p:spTree>
   </p:cSld>
   <p:clrMapOvr>
@@ -13741,7 +13730,7 @@
 </file>
 
 <file path=ppt/slides/slide6.xml><?xml version="1.0" encoding="utf-8"?>
-<p:sld xmlns:a="http://schemas.openxmlformats.org/drawingml/2006/main" xmlns:r="http://schemas.openxmlformats.org/officeDocument/2006/relationships" xmlns:p="http://schemas.openxmlformats.org/presentationml/2006/main">
+<p:sld xmlns:a="http://schemas.openxmlformats.org/drawingml/2006/main" xmlns:p="http://schemas.openxmlformats.org/presentationml/2006/main" xmlns:r="http://schemas.openxmlformats.org/officeDocument/2006/relationships">
   <p:cSld>
     <p:spTree>
       <p:nvGrpSpPr>
@@ -13749,59 +13738,31 @@
         <p:cNvGrpSpPr/>
         <p:nvPr/>
       </p:nvGrpSpPr>
-      <p:grpSpPr>
-        <a:xfrm>
-          <a:off x="0" y="0"/>
-          <a:ext cx="0" cy="0"/>
-          <a:chOff x="0" y="0"/>
-          <a:chExt cx="0" cy="0"/>
-        </a:xfrm>
-      </p:grpSpPr>
-      <p:sp>
-        <p:nvSpPr>
-          <p:cNvPr id="2" name="Rectangle 1"/>
-          <p:cNvSpPr/>
+      <p:grpSpPr/>
+      <p:pic>
+        <p:nvPicPr>
+          <p:cNvPr id="2" name="Picture 1" descr="image.png"/>
+          <p:cNvPicPr>
+            <a:picLocks noChangeAspect="1"/>
+          </p:cNvPicPr>
           <p:nvPr/>
-        </p:nvSpPr>
-        <p:spPr>
-          <a:xfrm>
-            <a:off x="0" y="0"/>
-            <a:ext cx="12192000" cy="6858000"/>
+        </p:nvPicPr>
+        <p:blipFill>
+          <a:blip r:embed="rId2"/>
+          <a:stretch>
+            <a:fillRect/>
+          </a:stretch>
+        </p:blipFill>
+        <p:spPr>
+          <a:xfrm>
+            <a:off x="5638800" y="1371600"/>
+            <a:ext cx="914400" cy="914400"/>
           </a:xfrm>
           <a:prstGeom prst="rect">
             <a:avLst/>
           </a:prstGeom>
-          <a:solidFill>
-            <a:srgbClr val="017AB4"/>
-          </a:solidFill>
-          <a:ln>
-            <a:noFill/>
-          </a:ln>
-          <a:effectLst/>
-        </p:spPr>
-        <p:style>
-          <a:lnRef idx="1">
-            <a:schemeClr val="accent1"/>
-          </a:lnRef>
-          <a:fillRef idx="3">
-            <a:schemeClr val="accent1"/>
-          </a:fillRef>
-          <a:effectRef idx="2">
-            <a:schemeClr val="accent1"/>
-          </a:effectRef>
-          <a:fontRef idx="minor">
-            <a:schemeClr val="lt1"/>
-          </a:fontRef>
-        </p:style>
-        <p:txBody>
-          <a:bodyPr rtlCol="0" anchor="ctr"/>
-          <a:lstStyle/>
-          <a:p>
-            <a:pPr algn="ctr"/>
-            <a:endParaRPr/>
-          </a:p>
-        </p:txBody>
-      </p:sp>
+        </p:spPr>
+      </p:pic>
       <p:sp>
         <p:nvSpPr>
           <p:cNvPr id="3" name="TextBox 2"/>
@@ -13810,8 +13771,8 @@
         </p:nvSpPr>
         <p:spPr>
           <a:xfrm>
-            <a:off x="914400" y="2916936"/>
-            <a:ext cx="10332720" cy="1014984"/>
+            <a:off x="914400" y="2834640"/>
+            <a:ext cx="10332720" cy="2011680"/>
           </a:xfrm>
           <a:prstGeom prst="rect">
             <a:avLst/>
@@ -13826,20 +13787,20 @@
           <a:p>
             <a:pPr algn="ctr"/>
             <a:r>
-              <a:rPr sz="6000" b="1">
+              <a:rPr sz="4000"/>
+              <a:t>Turn a long document into the </a:t>
+            </a:r>
+            <a:r>
+              <a:rPr b="1" sz="4000">
                 <a:solidFill>
-                  <a:srgbClr val="FFFFFF"/>
+                  <a:srgbClr val="017AB4"/>
                 </a:solidFill>
               </a:rPr>
-              <a:t>DEMO</a:t>
-            </a:r>
-            <a:r>
-              <a:rPr sz="6000">
-                <a:solidFill>
-                  <a:srgbClr val="FFFFFF"/>
-                </a:solidFill>
-              </a:rPr>
-              <a:t> · F01 Summarization</a:t>
+              <a:t>short version</a:t>
+            </a:r>
+            <a:r>
+              <a:rPr sz="4000"/>
+              <a:t> its reader needs.</a:t>
             </a:r>
           </a:p>
         </p:txBody>
@@ -13853,7 +13814,7 @@
           <p:nvPr/>
         </p:nvPicPr>
         <p:blipFill>
-          <a:blip r:embed="rId2"/>
+          <a:blip r:embed="rId3"/>
           <a:stretch>
             <a:fillRect/>
           </a:stretch>
@@ -13895,76 +13856,115 @@
       </p:grpSpPr>
       <p:sp>
         <p:nvSpPr>
-          <p:cNvPr id="2" name="Title 1"/>
-          <p:cNvSpPr>
-            <a:spLocks noGrp="1"/>
-          </p:cNvSpPr>
-          <p:nvPr>
-            <p:ph type="title"/>
-          </p:nvPr>
-        </p:nvSpPr>
-        <p:spPr/>
-        <p:txBody>
-          <a:bodyPr wrap="square"/>
-          <a:lstStyle/>
-          <a:p>
-            <a:r>
-              <a:t>F01 · Summarization · Demo: What to Watch</a:t>
-            </a:r>
-          </a:p>
-        </p:txBody>
-      </p:sp>
-      <p:sp>
-        <p:nvSpPr>
-          <p:cNvPr id="3" name="Content Placeholder 2"/>
-          <p:cNvSpPr>
-            <a:spLocks noGrp="1"/>
-          </p:cNvSpPr>
-          <p:nvPr>
-            <p:ph idx="1"/>
-          </p:nvPr>
-        </p:nvSpPr>
-        <p:spPr>
-          <a:xfrm>
-            <a:off x="612648" y="1920240"/>
-            <a:ext cx="10966704" cy="4617720"/>
-          </a:xfrm>
-        </p:spPr>
-        <p:txBody>
-          <a:bodyPr wrap="square"/>
-          <a:lstStyle/>
-          <a:p>
-            <a:r>
-              <a:rPr sz="2800"/>
-              <a:t>The raw report first</a:t>
-            </a:r>
-          </a:p>
-          <a:p>
-            <a:r>
-              <a:rPr sz="2800"/>
-              <a:t>❌ Naive prompt: faithful, generic, useless</a:t>
-            </a:r>
-          </a:p>
-          <a:p>
-            <a:r>
-              <a:rPr sz="2800"/>
-              <a:t>✅ Purpose-built prompt: the bridge surfaces</a:t>
-            </a:r>
-          </a:p>
-          <a:p>
-            <a:r>
-              <a:rPr sz="2800"/>
-              <a:t>Grounding lines — without them, ~half of runs invent a closure</a:t>
-            </a:r>
-          </a:p>
-          <a:p>
-            <a:r>
-              <a:rPr sz="2800"/>
-              <a:t>Same call, new shape: a one-line trail status</a:t>
-            </a:r>
-          </a:p>
-        </p:txBody>
-      </p:sp>
+          <p:cNvPr id="2" name="Rectangle 1"/>
+          <p:cNvSpPr/>
+          <p:nvPr/>
+        </p:nvSpPr>
+        <p:spPr>
+          <a:xfrm>
+            <a:off x="0" y="0"/>
+            <a:ext cx="12192000" cy="6858000"/>
+          </a:xfrm>
+          <a:prstGeom prst="rect">
+            <a:avLst/>
+          </a:prstGeom>
+          <a:solidFill>
+            <a:srgbClr val="017AB4"/>
+          </a:solidFill>
+          <a:ln>
+            <a:noFill/>
+          </a:ln>
+          <a:effectLst/>
+        </p:spPr>
+        <p:style>
+          <a:lnRef idx="1">
+            <a:schemeClr val="accent1"/>
+          </a:lnRef>
+          <a:fillRef idx="3">
+            <a:schemeClr val="accent1"/>
+          </a:fillRef>
+          <a:effectRef idx="2">
+            <a:schemeClr val="accent1"/>
+          </a:effectRef>
+          <a:fontRef idx="minor">
+            <a:schemeClr val="lt1"/>
+          </a:fontRef>
+        </p:style>
+        <p:txBody>
+          <a:bodyPr rtlCol="0" anchor="ctr"/>
+          <a:lstStyle/>
+          <a:p>
+            <a:pPr algn="ctr"/>
+            <a:endParaRPr/>
+          </a:p>
+        </p:txBody>
+      </p:sp>
+      <p:sp>
+        <p:nvSpPr>
+          <p:cNvPr id="3" name="TextBox 2"/>
+          <p:cNvSpPr txBox="1"/>
+          <p:nvPr/>
+        </p:nvSpPr>
+        <p:spPr>
+          <a:xfrm>
+            <a:off x="914400" y="2916936"/>
+            <a:ext cx="10332720" cy="1014984"/>
+          </a:xfrm>
+          <a:prstGeom prst="rect">
+            <a:avLst/>
+          </a:prstGeom>
+          <a:noFill/>
+        </p:spPr>
+        <p:txBody>
+          <a:bodyPr wrap="square" anchor="ctr">
+            <a:spAutoFit/>
+          </a:bodyPr>
+          <a:lstStyle/>
+          <a:p>
+            <a:pPr algn="ctr"/>
+            <a:r>
+              <a:rPr sz="6000" b="1">
+                <a:solidFill>
+                  <a:srgbClr val="FFFFFF"/>
+                </a:solidFill>
+              </a:rPr>
+              <a:t>DEMO</a:t>
+            </a:r>
+            <a:r>
+              <a:rPr sz="6000">
+                <a:solidFill>
+                  <a:srgbClr val="FFFFFF"/>
+                </a:solidFill>
+              </a:rPr>
+              <a:t> · F01 Summarization</a:t>
+            </a:r>
+          </a:p>
+        </p:txBody>
+      </p:sp>
+      <p:pic>
+        <p:nvPicPr>
+          <p:cNvPr id="4" name="Picture 3" descr="image.png"/>
+          <p:cNvPicPr>
+            <a:picLocks noChangeAspect="1"/>
+          </p:cNvPicPr>
+          <p:nvPr/>
+        </p:nvPicPr>
+        <p:blipFill>
+          <a:blip r:embed="rId2"/>
+          <a:stretch>
+            <a:fillRect/>
+          </a:stretch>
+        </p:blipFill>
+        <p:spPr>
+          <a:xfrm>
+            <a:off x="9326880" y="5989320"/>
+            <a:ext cx="2560320" cy="640080"/>
+          </a:xfrm>
+          <a:prstGeom prst="rect">
+            <a:avLst/>
+          </a:prstGeom>
+        </p:spPr>
+      </p:pic>
     </p:spTree>
   </p:cSld>
   <p:clrMapOvr>
@@ -14006,7 +14006,7 @@
           <a:lstStyle/>
           <a:p>
             <a:r>
-              <a:t>F01 · Summarization · Leadership Card</a:t>
+              <a:t>F01 · Summarization · Demo: What to Watch</a:t>
             </a:r>
           </a:p>
         </p:txBody>
@@ -14031,18 +14031,33 @@
           <a:bodyPr wrap="square"/>
           <a:lstStyle/>
           <a:p>
-            <a:pPr>
-              <a:spcAft>
-                <a:spcPts val="1400"/>
-              </a:spcAft>
-            </a:pPr>
-            <a:r>
-              <a:rPr sz="2800" b="1"/>
-              <a:t>When:</a:t>
-            </a:r>
             <a:r>
               <a:rPr sz="2800"/>
-              <a:t> Too much content for people to read, easy-to-miss detail buried in avalanche of text.</a:t>
+              <a:t>The raw report first</a:t>
+            </a:r>
+          </a:p>
+          <a:p>
+            <a:r>
+              <a:rPr sz="2800"/>
+              <a:t>❌ Naive prompt: faithful, generic, useless</a:t>
+            </a:r>
+          </a:p>
+          <a:p>
+            <a:r>
+              <a:rPr sz="2800"/>
+              <a:t>✅ Purpose-built prompt: the bridge surfaces</a:t>
+            </a:r>
+          </a:p>
+          <a:p>
+            <a:r>
+              <a:rPr sz="2800"/>
+              <a:t>Grounding lines — without them, ~half of runs invent a closure</a:t>
+            </a:r>
+          </a:p>
+          <a:p>
+            <a:r>
+              <a:rPr sz="2800"/>
+              <a:t>Same call, new shape: a one-line trail status</a:t>
             </a:r>
           </a:p>
         </p:txBody>
@@ -14125,21 +14140,6 @@
             <a:r>
               <a:rPr sz="2800"/>
               <a:t> Too much content for people to read, easy-to-miss detail buried in avalanche of text.</a:t>
-            </a:r>
-          </a:p>
-          <a:p>
-            <a:pPr>
-              <a:spcAft>
-                <a:spcPts val="1400"/>
-              </a:spcAft>
-            </a:pPr>
-            <a:r>
-              <a:rPr sz="2800" b="1"/>
-              <a:t>Think:</a:t>
-            </a:r>
-            <a:r>
-              <a:rPr sz="2800"/>
-              <a:t> "Our users are drowning in text we already have. A few hours of work turns it into automatic answers."</a:t>
             </a:r>
           </a:p>
         </p:txBody>

--- a/docs/slides/pptx/M1-understanding.pptx
+++ b/docs/slides/pptx/M1-understanding.pptx
@@ -5,7 +5,7 @@
     <p:sldMasterId id="2147483660" r:id="rId1"/>
   </p:sldMasterIdLst>
   <p:notesMasterIdLst>
-    <p:notesMasterId r:id="rId34"/>
+    <p:notesMasterId r:id="rId37"/>
   </p:notesMasterIdLst>
   <p:sldIdLst>
     <p:sldId id="576" r:id="rId2"/>
@@ -13,53 +13,53 @@
     <p:sldId id="608" r:id="rId4"/>
     <p:sldId id="609" r:id="rId5"/>
     <p:sldId id="580" r:id="rId6"/>
-    <p:sldId id="610" r:id="rId48"/>
-    <p:sldId id="581" r:id="rId7"/>
-    <p:sldId id="582" r:id="rId8"/>
-    <p:sldId id="583" r:id="rId9"/>
-    <p:sldId id="584" r:id="rId10"/>
-    <p:sldId id="585" r:id="rId11"/>
-    <p:sldId id="586" r:id="rId12"/>
-    <p:sldId id="611" r:id="rId49"/>
-    <p:sldId id="587" r:id="rId13"/>
-    <p:sldId id="588" r:id="rId14"/>
-    <p:sldId id="589" r:id="rId15"/>
-    <p:sldId id="590" r:id="rId16"/>
-    <p:sldId id="591" r:id="rId17"/>
-    <p:sldId id="592" r:id="rId18"/>
-    <p:sldId id="593" r:id="rId19"/>
-    <p:sldId id="594" r:id="rId20"/>
-    <p:sldId id="595" r:id="rId21"/>
-    <p:sldId id="596" r:id="rId22"/>
-    <p:sldId id="597" r:id="rId23"/>
-    <p:sldId id="598" r:id="rId24"/>
-    <p:sldId id="599" r:id="rId25"/>
-    <p:sldId id="600" r:id="rId26"/>
-    <p:sldId id="612" r:id="rId50"/>
-    <p:sldId id="601" r:id="rId27"/>
-    <p:sldId id="602" r:id="rId28"/>
-    <p:sldId id="603" r:id="rId29"/>
-    <p:sldId id="604" r:id="rId30"/>
-    <p:sldId id="605" r:id="rId31"/>
-    <p:sldId id="606" r:id="rId32"/>
-    <p:sldId id="607" r:id="rId33"/>
+    <p:sldId id="610" r:id="rId7"/>
+    <p:sldId id="581" r:id="rId8"/>
+    <p:sldId id="582" r:id="rId9"/>
+    <p:sldId id="583" r:id="rId10"/>
+    <p:sldId id="584" r:id="rId11"/>
+    <p:sldId id="613" r:id="rId12"/>
+    <p:sldId id="586" r:id="rId13"/>
+    <p:sldId id="611" r:id="rId14"/>
+    <p:sldId id="587" r:id="rId15"/>
+    <p:sldId id="588" r:id="rId16"/>
+    <p:sldId id="589" r:id="rId17"/>
+    <p:sldId id="590" r:id="rId18"/>
+    <p:sldId id="591" r:id="rId19"/>
+    <p:sldId id="592" r:id="rId20"/>
+    <p:sldId id="593" r:id="rId21"/>
+    <p:sldId id="594" r:id="rId22"/>
+    <p:sldId id="595" r:id="rId23"/>
+    <p:sldId id="596" r:id="rId24"/>
+    <p:sldId id="597" r:id="rId25"/>
+    <p:sldId id="598" r:id="rId26"/>
+    <p:sldId id="599" r:id="rId27"/>
+    <p:sldId id="600" r:id="rId28"/>
+    <p:sldId id="612" r:id="rId29"/>
+    <p:sldId id="601" r:id="rId30"/>
+    <p:sldId id="602" r:id="rId31"/>
+    <p:sldId id="603" r:id="rId32"/>
+    <p:sldId id="604" r:id="rId33"/>
+    <p:sldId id="605" r:id="rId34"/>
+    <p:sldId id="606" r:id="rId35"/>
+    <p:sldId id="607" r:id="rId36"/>
   </p:sldIdLst>
   <p:sldSz cx="12192000" cy="6858000"/>
   <p:notesSz cx="6858000" cy="9144000"/>
   <p:embeddedFontLst>
     <p:embeddedFont>
       <p:font typeface="Consolas" panose="020B0609020204030204" pitchFamily="49" charset="0"/>
-      <p:regular r:id="rId35"/>
-      <p:bold r:id="rId36"/>
-      <p:italic r:id="rId37"/>
-      <p:boldItalic r:id="rId38"/>
+      <p:regular r:id="rId38"/>
+      <p:bold r:id="rId39"/>
+      <p:italic r:id="rId40"/>
+      <p:boldItalic r:id="rId41"/>
     </p:embeddedFont>
     <p:embeddedFont>
       <p:font typeface="Segoe UI" panose="020B0502040204020203" pitchFamily="34" charset="0"/>
-      <p:regular r:id="rId39"/>
-      <p:bold r:id="rId40"/>
-      <p:italic r:id="rId41"/>
-      <p:boldItalic r:id="rId42"/>
+      <p:regular r:id="rId42"/>
+      <p:bold r:id="rId43"/>
+      <p:italic r:id="rId44"/>
+      <p:boldItalic r:id="rId45"/>
     </p:embeddedFont>
   </p:embeddedFontLst>
   <p:defaultTextStyle>
@@ -170,23 +170,24 @@
   <pc:docChgLst>
     <pc:chgData name="J. Tower" userId="9d06de10716639e5" providerId="LiveId" clId="{F8931099-75CA-5660-A155-55881DF68D84}"/>
     <pc:docChg chg="undo redo custSel addSld delSld modSld sldOrd modSection">
-      <pc:chgData name="J. Tower" userId="9d06de10716639e5" providerId="LiveId" clId="{F8931099-75CA-5660-A155-55881DF68D84}" dt="2026-09-01T19:27:00.215" v="1077" actId="20577"/>
+      <pc:chgData name="J. Tower" userId="9d06de10716639e5" providerId="LiveId" clId="{F8931099-75CA-5660-A155-55881DF68D84}" dt="2026-09-03T19:14:50.590" v="1091" actId="20577"/>
       <pc:docMkLst>
         <pc:docMk/>
       </pc:docMkLst>
-      <pc:sldChg chg="del">
-        <pc:chgData name="J. Tower" userId="9d06de10716639e5" providerId="LiveId" clId="{F8931099-75CA-5660-A155-55881DF68D84}" dt="2026-09-01T19:23:51.287" v="998" actId="2696"/>
+      <pc:sldChg chg="modSp mod">
+        <pc:chgData name="J. Tower" userId="9d06de10716639e5" providerId="LiveId" clId="{F8931099-75CA-5660-A155-55881DF68D84}" dt="2026-09-03T19:08:53.270" v="1086" actId="27636"/>
         <pc:sldMkLst>
           <pc:docMk/>
-          <pc:sldMk cId="0" sldId="577"/>
+          <pc:sldMk cId="0" sldId="576"/>
         </pc:sldMkLst>
-      </pc:sldChg>
-      <pc:sldChg chg="del">
-        <pc:chgData name="J. Tower" userId="9d06de10716639e5" providerId="LiveId" clId="{F8931099-75CA-5660-A155-55881DF68D84}" dt="2026-09-01T19:23:51.294" v="999" actId="2696"/>
-        <pc:sldMkLst>
-          <pc:docMk/>
-          <pc:sldMk cId="0" sldId="578"/>
-        </pc:sldMkLst>
+        <pc:spChg chg="mod">
+          <ac:chgData name="J. Tower" userId="9d06de10716639e5" providerId="LiveId" clId="{F8931099-75CA-5660-A155-55881DF68D84}" dt="2026-09-03T19:08:53.270" v="1086" actId="27636"/>
+          <ac:spMkLst>
+            <pc:docMk/>
+            <pc:sldMk cId="0" sldId="576"/>
+            <ac:spMk id="3" creationId="{00000000-0000-0000-0000-000000000000}"/>
+          </ac:spMkLst>
+        </pc:spChg>
       </pc:sldChg>
       <pc:sldChg chg="delSp modSp mod">
         <pc:chgData name="J. Tower" userId="9d06de10716639e5" providerId="LiveId" clId="{F8931099-75CA-5660-A155-55881DF68D84}" dt="2026-09-01T19:23:57.043" v="1004" actId="478"/>
@@ -210,22 +211,6 @@
             <ac:spMk id="4" creationId="{00000000-0000-0000-0000-000000000000}"/>
           </ac:spMkLst>
         </pc:spChg>
-        <pc:spChg chg="del mod">
-          <ac:chgData name="J. Tower" userId="9d06de10716639e5" providerId="LiveId" clId="{F8931099-75CA-5660-A155-55881DF68D84}" dt="2026-09-01T19:23:57.043" v="1004" actId="478"/>
-          <ac:spMkLst>
-            <pc:docMk/>
-            <pc:sldMk cId="0" sldId="579"/>
-            <ac:spMk id="6" creationId="{00000000-0000-0000-0000-000000000000}"/>
-          </ac:spMkLst>
-        </pc:spChg>
-        <pc:spChg chg="del mod">
-          <ac:chgData name="J. Tower" userId="9d06de10716639e5" providerId="LiveId" clId="{F8931099-75CA-5660-A155-55881DF68D84}" dt="2026-09-01T19:23:57.043" v="1004" actId="478"/>
-          <ac:spMkLst>
-            <pc:docMk/>
-            <pc:sldMk cId="0" sldId="579"/>
-            <ac:spMk id="8" creationId="{00000000-0000-0000-0000-000000000000}"/>
-          </ac:spMkLst>
-        </pc:spChg>
         <pc:picChg chg="mod">
           <ac:chgData name="J. Tower" userId="9d06de10716639e5" providerId="LiveId" clId="{F8931099-75CA-5660-A155-55881DF68D84}" dt="2026-09-01T19:23:40.416" v="994" actId="1076"/>
           <ac:picMkLst>
@@ -234,42 +219,80 @@
             <ac:picMk id="3" creationId="{00000000-0000-0000-0000-000000000000}"/>
           </ac:picMkLst>
         </pc:picChg>
-        <pc:picChg chg="del mod">
-          <ac:chgData name="J. Tower" userId="9d06de10716639e5" providerId="LiveId" clId="{F8931099-75CA-5660-A155-55881DF68D84}" dt="2026-09-01T19:23:57.043" v="1004" actId="478"/>
-          <ac:picMkLst>
-            <pc:docMk/>
-            <pc:sldMk cId="0" sldId="579"/>
-            <ac:picMk id="5" creationId="{00000000-0000-0000-0000-000000000000}"/>
-          </ac:picMkLst>
-        </pc:picChg>
-        <pc:picChg chg="del mod">
-          <ac:chgData name="J. Tower" userId="9d06de10716639e5" providerId="LiveId" clId="{F8931099-75CA-5660-A155-55881DF68D84}" dt="2026-09-01T19:23:57.043" v="1004" actId="478"/>
-          <ac:picMkLst>
-            <pc:docMk/>
-            <pc:sldMk cId="0" sldId="579"/>
-            <ac:picMk id="7" creationId="{00000000-0000-0000-0000-000000000000}"/>
-          </ac:picMkLst>
-        </pc:picChg>
-        <pc:picChg chg="del">
-          <ac:chgData name="J. Tower" userId="9d06de10716639e5" providerId="LiveId" clId="{F8931099-75CA-5660-A155-55881DF68D84}" dt="2026-09-01T19:23:57.043" v="1004" actId="478"/>
-          <ac:picMkLst>
-            <pc:docMk/>
-            <pc:sldMk cId="0" sldId="579"/>
-            <ac:picMk id="9" creationId="{00000000-0000-0000-0000-000000000000}"/>
-          </ac:picMkLst>
-        </pc:picChg>
       </pc:sldChg>
       <pc:sldChg chg="modSp mod">
-        <pc:chgData name="J. Tower" userId="9d06de10716639e5" providerId="LiveId" clId="{F8931099-75CA-5660-A155-55881DF68D84}" dt="2026-09-01T19:24:24.221" v="1007" actId="20577"/>
+        <pc:chgData name="J. Tower" userId="9d06de10716639e5" providerId="LiveId" clId="{F8931099-75CA-5660-A155-55881DF68D84}" dt="2026-09-03T19:08:53.273" v="1087" actId="27636"/>
+        <pc:sldMkLst>
+          <pc:docMk/>
+          <pc:sldMk cId="0" sldId="580"/>
+        </pc:sldMkLst>
+        <pc:spChg chg="mod">
+          <ac:chgData name="J. Tower" userId="9d06de10716639e5" providerId="LiveId" clId="{F8931099-75CA-5660-A155-55881DF68D84}" dt="2026-09-03T19:08:53.273" v="1087" actId="27636"/>
+          <ac:spMkLst>
+            <pc:docMk/>
+            <pc:sldMk cId="0" sldId="580"/>
+            <ac:spMk id="3" creationId="{00000000-0000-0000-0000-000000000000}"/>
+          </ac:spMkLst>
+        </pc:spChg>
+      </pc:sldChg>
+      <pc:sldChg chg="delSp modSp del mod">
+        <pc:chgData name="J. Tower" userId="9d06de10716639e5" providerId="LiveId" clId="{F8931099-75CA-5660-A155-55881DF68D84}" dt="2026-09-03T19:09:00.344" v="1090" actId="2696"/>
         <pc:sldMkLst>
           <pc:docMk/>
           <pc:sldMk cId="0" sldId="585"/>
         </pc:sldMkLst>
         <pc:spChg chg="mod">
-          <ac:chgData name="J. Tower" userId="9d06de10716639e5" providerId="LiveId" clId="{F8931099-75CA-5660-A155-55881DF68D84}" dt="2026-09-01T19:24:24.221" v="1007" actId="20577"/>
+          <ac:chgData name="J. Tower" userId="9d06de10716639e5" providerId="LiveId" clId="{F8931099-75CA-5660-A155-55881DF68D84}" dt="2026-09-03T19:08:49.628" v="1080" actId="21"/>
           <ac:spMkLst>
             <pc:docMk/>
             <pc:sldMk cId="0" sldId="585"/>
+            <ac:spMk id="3" creationId="{00000000-0000-0000-0000-000000000000}"/>
+          </ac:spMkLst>
+        </pc:spChg>
+        <pc:spChg chg="del">
+          <ac:chgData name="J. Tower" userId="9d06de10716639e5" providerId="LiveId" clId="{F8931099-75CA-5660-A155-55881DF68D84}" dt="2026-09-03T19:08:57.937" v="1088" actId="21"/>
+          <ac:spMkLst>
+            <pc:docMk/>
+            <pc:sldMk cId="0" sldId="585"/>
+            <ac:spMk id="4" creationId="{00000000-0000-0000-0000-000000000000}"/>
+          </ac:spMkLst>
+        </pc:spChg>
+        <pc:spChg chg="del">
+          <ac:chgData name="J. Tower" userId="9d06de10716639e5" providerId="LiveId" clId="{F8931099-75CA-5660-A155-55881DF68D84}" dt="2026-09-03T19:08:57.937" v="1088" actId="21"/>
+          <ac:spMkLst>
+            <pc:docMk/>
+            <pc:sldMk cId="0" sldId="585"/>
+            <ac:spMk id="5" creationId="{00000000-0000-0000-0000-000000000000}"/>
+          </ac:spMkLst>
+        </pc:spChg>
+        <pc:spChg chg="del">
+          <ac:chgData name="J. Tower" userId="9d06de10716639e5" providerId="LiveId" clId="{F8931099-75CA-5660-A155-55881DF68D84}" dt="2026-09-03T19:08:57.937" v="1088" actId="21"/>
+          <ac:spMkLst>
+            <pc:docMk/>
+            <pc:sldMk cId="0" sldId="585"/>
+            <ac:spMk id="6" creationId="{00000000-0000-0000-0000-000000000000}"/>
+          </ac:spMkLst>
+        </pc:spChg>
+        <pc:spChg chg="del">
+          <ac:chgData name="J. Tower" userId="9d06de10716639e5" providerId="LiveId" clId="{F8931099-75CA-5660-A155-55881DF68D84}" dt="2026-09-03T19:08:57.937" v="1088" actId="21"/>
+          <ac:spMkLst>
+            <pc:docMk/>
+            <pc:sldMk cId="0" sldId="585"/>
+            <ac:spMk id="7" creationId="{00000000-0000-0000-0000-000000000000}"/>
+          </ac:spMkLst>
+        </pc:spChg>
+      </pc:sldChg>
+      <pc:sldChg chg="modSp mod">
+        <pc:chgData name="J. Tower" userId="9d06de10716639e5" providerId="LiveId" clId="{F8931099-75CA-5660-A155-55881DF68D84}" dt="2026-09-03T19:08:53.249" v="1084" actId="27636"/>
+        <pc:sldMkLst>
+          <pc:docMk/>
+          <pc:sldMk cId="0" sldId="586"/>
+        </pc:sldMkLst>
+        <pc:spChg chg="mod">
+          <ac:chgData name="J. Tower" userId="9d06de10716639e5" providerId="LiveId" clId="{F8931099-75CA-5660-A155-55881DF68D84}" dt="2026-09-03T19:08:53.249" v="1084" actId="27636"/>
+          <ac:spMkLst>
+            <pc:docMk/>
+            <pc:sldMk cId="0" sldId="586"/>
             <ac:spMk id="3" creationId="{00000000-0000-0000-0000-000000000000}"/>
           </ac:spMkLst>
         </pc:spChg>
@@ -359,6 +382,21 @@
         </pc:grpChg>
       </pc:sldChg>
       <pc:sldChg chg="modSp mod">
+        <pc:chgData name="J. Tower" userId="9d06de10716639e5" providerId="LiveId" clId="{F8931099-75CA-5660-A155-55881DF68D84}" dt="2026-09-03T19:08:53.260" v="1085" actId="27636"/>
+        <pc:sldMkLst>
+          <pc:docMk/>
+          <pc:sldMk cId="0" sldId="600"/>
+        </pc:sldMkLst>
+        <pc:spChg chg="mod">
+          <ac:chgData name="J. Tower" userId="9d06de10716639e5" providerId="LiveId" clId="{F8931099-75CA-5660-A155-55881DF68D84}" dt="2026-09-03T19:08:53.260" v="1085" actId="27636"/>
+          <ac:spMkLst>
+            <pc:docMk/>
+            <pc:sldMk cId="0" sldId="600"/>
+            <ac:spMk id="3" creationId="{00000000-0000-0000-0000-000000000000}"/>
+          </ac:spMkLst>
+        </pc:spChg>
+      </pc:sldChg>
+      <pc:sldChg chg="modSp mod">
         <pc:chgData name="J. Tower" userId="9d06de10716639e5" providerId="LiveId" clId="{F8931099-75CA-5660-A155-55881DF68D84}" dt="2026-09-01T19:25:35.687" v="1033" actId="20577"/>
         <pc:sldMkLst>
           <pc:docMk/>
@@ -409,30 +447,6 @@
           <pc:docMk/>
           <pc:sldMk cId="2827037887" sldId="608"/>
         </pc:sldMkLst>
-        <pc:spChg chg="add del">
-          <ac:chgData name="J. Tower" userId="9d06de10716639e5" providerId="LiveId" clId="{F8931099-75CA-5660-A155-55881DF68D84}" dt="2026-09-01T19:24:37.019" v="1009" actId="478"/>
-          <ac:spMkLst>
-            <pc:docMk/>
-            <pc:sldMk cId="2827037887" sldId="608"/>
-            <ac:spMk id="8" creationId="{98A7B041-8925-5027-3FDF-98C905535506}"/>
-          </ac:spMkLst>
-        </pc:spChg>
-        <pc:picChg chg="add del">
-          <ac:chgData name="J. Tower" userId="9d06de10716639e5" providerId="LiveId" clId="{F8931099-75CA-5660-A155-55881DF68D84}" dt="2026-09-01T19:24:37.019" v="1009" actId="478"/>
-          <ac:picMkLst>
-            <pc:docMk/>
-            <pc:sldMk cId="2827037887" sldId="608"/>
-            <ac:picMk id="7" creationId="{B5559A96-24DD-C547-2558-2EDE80D64158}"/>
-          </ac:picMkLst>
-        </pc:picChg>
-        <pc:picChg chg="add del">
-          <ac:chgData name="J. Tower" userId="9d06de10716639e5" providerId="LiveId" clId="{F8931099-75CA-5660-A155-55881DF68D84}" dt="2026-09-01T19:24:37.019" v="1009" actId="478"/>
-          <ac:picMkLst>
-            <pc:docMk/>
-            <pc:sldMk cId="2827037887" sldId="608"/>
-            <ac:picMk id="9" creationId="{48C8BFB8-567E-4173-B470-6A689F056441}"/>
-          </ac:picMkLst>
-        </pc:picChg>
       </pc:sldChg>
       <pc:sldChg chg="add">
         <pc:chgData name="J. Tower" userId="9d06de10716639e5" providerId="LiveId" clId="{F8931099-75CA-5660-A155-55881DF68D84}" dt="2026-09-01T19:23:52.899" v="1001" actId="2890"/>
@@ -440,6 +454,83 @@
           <pc:docMk/>
           <pc:sldMk cId="640487153" sldId="609"/>
         </pc:sldMkLst>
+      </pc:sldChg>
+      <pc:sldChg chg="modSp mod">
+        <pc:chgData name="J. Tower" userId="9d06de10716639e5" providerId="LiveId" clId="{F8931099-75CA-5660-A155-55881DF68D84}" dt="2026-09-03T18:41:29.167" v="1078" actId="20577"/>
+        <pc:sldMkLst>
+          <pc:docMk/>
+          <pc:sldMk cId="0" sldId="610"/>
+        </pc:sldMkLst>
+        <pc:spChg chg="mod">
+          <ac:chgData name="J. Tower" userId="9d06de10716639e5" providerId="LiveId" clId="{F8931099-75CA-5660-A155-55881DF68D84}" dt="2026-09-03T18:41:29.167" v="1078" actId="20577"/>
+          <ac:spMkLst>
+            <pc:docMk/>
+            <pc:sldMk cId="0" sldId="610"/>
+            <ac:spMk id="3" creationId="{00000000-0000-0000-0000-000000000000}"/>
+          </ac:spMkLst>
+        </pc:spChg>
+      </pc:sldChg>
+      <pc:sldChg chg="modSp mod">
+        <pc:chgData name="J. Tower" userId="9d06de10716639e5" providerId="LiveId" clId="{F8931099-75CA-5660-A155-55881DF68D84}" dt="2026-09-03T19:14:50.590" v="1091" actId="20577"/>
+        <pc:sldMkLst>
+          <pc:docMk/>
+          <pc:sldMk cId="0" sldId="611"/>
+        </pc:sldMkLst>
+        <pc:spChg chg="mod">
+          <ac:chgData name="J. Tower" userId="9d06de10716639e5" providerId="LiveId" clId="{F8931099-75CA-5660-A155-55881DF68D84}" dt="2026-09-03T19:14:50.590" v="1091" actId="20577"/>
+          <ac:spMkLst>
+            <pc:docMk/>
+            <pc:sldMk cId="0" sldId="611"/>
+            <ac:spMk id="3" creationId="{00000000-0000-0000-0000-000000000000}"/>
+          </ac:spMkLst>
+        </pc:spChg>
+      </pc:sldChg>
+      <pc:sldChg chg="addSp modSp add mod">
+        <pc:chgData name="J. Tower" userId="9d06de10716639e5" providerId="LiveId" clId="{F8931099-75CA-5660-A155-55881DF68D84}" dt="2026-09-03T19:08:58.611" v="1089"/>
+        <pc:sldMkLst>
+          <pc:docMk/>
+          <pc:sldMk cId="4155427989" sldId="613"/>
+        </pc:sldMkLst>
+        <pc:spChg chg="mod">
+          <ac:chgData name="J. Tower" userId="9d06de10716639e5" providerId="LiveId" clId="{F8931099-75CA-5660-A155-55881DF68D84}" dt="2026-09-03T19:08:53.230" v="1083"/>
+          <ac:spMkLst>
+            <pc:docMk/>
+            <pc:sldMk cId="4155427989" sldId="613"/>
+            <ac:spMk id="3" creationId="{53AA7B6A-70F0-B6ED-7F8B-CFDD9B0C5D16}"/>
+          </ac:spMkLst>
+        </pc:spChg>
+        <pc:spChg chg="add mod">
+          <ac:chgData name="J. Tower" userId="9d06de10716639e5" providerId="LiveId" clId="{F8931099-75CA-5660-A155-55881DF68D84}" dt="2026-09-03T19:08:58.611" v="1089"/>
+          <ac:spMkLst>
+            <pc:docMk/>
+            <pc:sldMk cId="4155427989" sldId="613"/>
+            <ac:spMk id="4" creationId="{B1E8BDC2-EDF4-3F70-F39F-5D43BC13C20A}"/>
+          </ac:spMkLst>
+        </pc:spChg>
+        <pc:spChg chg="add mod">
+          <ac:chgData name="J. Tower" userId="9d06de10716639e5" providerId="LiveId" clId="{F8931099-75CA-5660-A155-55881DF68D84}" dt="2026-09-03T19:08:58.611" v="1089"/>
+          <ac:spMkLst>
+            <pc:docMk/>
+            <pc:sldMk cId="4155427989" sldId="613"/>
+            <ac:spMk id="5" creationId="{CAF20ED4-4633-3742-5916-E3B2624E2928}"/>
+          </ac:spMkLst>
+        </pc:spChg>
+        <pc:spChg chg="add mod">
+          <ac:chgData name="J. Tower" userId="9d06de10716639e5" providerId="LiveId" clId="{F8931099-75CA-5660-A155-55881DF68D84}" dt="2026-09-03T19:08:58.611" v="1089"/>
+          <ac:spMkLst>
+            <pc:docMk/>
+            <pc:sldMk cId="4155427989" sldId="613"/>
+            <ac:spMk id="6" creationId="{1D0D4B1B-DE8A-C911-7CFB-36A2E19A9B00}"/>
+          </ac:spMkLst>
+        </pc:spChg>
+        <pc:spChg chg="add mod">
+          <ac:chgData name="J. Tower" userId="9d06de10716639e5" providerId="LiveId" clId="{F8931099-75CA-5660-A155-55881DF68D84}" dt="2026-09-03T19:08:58.611" v="1089"/>
+          <ac:spMkLst>
+            <pc:docMk/>
+            <pc:sldMk cId="4155427989" sldId="613"/>
+            <ac:spMk id="7" creationId="{4BA60149-5DC8-C3A6-7EF7-64310D95CDE3}"/>
+          </ac:spMkLst>
+        </pc:spChg>
       </pc:sldChg>
     </pc:docChg>
   </pc:docChgLst>
@@ -528,7 +619,7 @@
           <a:p>
             <a:fld id="{4618B0EE-4D36-4F22-9622-021322CFFE3A}" type="datetimeFigureOut">
               <a:rPr lang="en-US" smtClean="0"/>
-              <a:t>9/1/26</a:t>
+              <a:t>9/3/26</a:t>
             </a:fld>
             <a:endParaRPr lang="en-US"/>
           </a:p>
@@ -870,7 +961,13 @@
   <p:cSld>
     <p:spTree>
       <p:nvGrpSpPr>
-        <p:cNvPr id="1" name=""/>
+        <p:cNvPr id="1" name="">
+          <a:extLst>
+            <a:ext uri="{FF2B5EF4-FFF2-40B4-BE49-F238E27FC236}">
+              <a16:creationId xmlns:a16="http://schemas.microsoft.com/office/drawing/2014/main" id="{87B6AA14-0B22-1FF2-8EE2-38F9AB0400B9}"/>
+            </a:ext>
+          </a:extLst>
+        </p:cNvPr>
         <p:cNvGrpSpPr/>
         <p:nvPr/>
       </p:nvGrpSpPr>
@@ -884,7 +981,13 @@
       </p:grpSpPr>
       <p:sp>
         <p:nvSpPr>
-          <p:cNvPr id="2" name="Slide Image Placeholder 1"/>
+          <p:cNvPr id="2" name="Slide Image Placeholder 1">
+            <a:extLst>
+              <a:ext uri="{FF2B5EF4-FFF2-40B4-BE49-F238E27FC236}">
+                <a16:creationId xmlns:a16="http://schemas.microsoft.com/office/drawing/2014/main" id="{A59D2D40-6F61-708C-A418-80332947701E}"/>
+              </a:ext>
+            </a:extLst>
+          </p:cNvPr>
           <p:cNvSpPr>
             <a:spLocks noGrp="1" noRot="1" noChangeAspect="1"/>
           </p:cNvSpPr>
@@ -896,7 +999,13 @@
       </p:sp>
       <p:sp>
         <p:nvSpPr>
-          <p:cNvPr id="3" name="Notes Placeholder 2"/>
+          <p:cNvPr id="3" name="Notes Placeholder 2">
+            <a:extLst>
+              <a:ext uri="{FF2B5EF4-FFF2-40B4-BE49-F238E27FC236}">
+                <a16:creationId xmlns:a16="http://schemas.microsoft.com/office/drawing/2014/main" id="{FA9C3CD7-0C20-33CD-C4F0-5746E87039A6}"/>
+              </a:ext>
+            </a:extLst>
+          </p:cNvPr>
           <p:cNvSpPr>
             <a:spLocks noGrp="1"/>
           </p:cNvSpPr>
@@ -910,19 +1019,20 @@
           <a:lstStyle/>
           <a:p>
             <a:r>
-              <a:t>The user problem, spoken, 60 seconds: Trailhead wants a "trail stats" panel — which trails, when, how far, what wildlife, what condition. All of it exists as prose across the forty reports, and today a human would re-read and re-type it. So the panel doesn't exist.</a:t>
-            </a:r>
-          </a:p>
-          <a:p>
-            <a:r>
-              <a:t>This one gets the module's one concept slide, because the pipeline — and where it lies to you — is the lesson.</a:t>
-            </a:r>
-          </a:p>
-        </p:txBody>
-      </p:sp>
-      <p:sp>
-        <p:nvSpPr>
-          <p:cNvPr id="4" name="Slide Number Placeholder 3"/>
+              <a:t>The line for your boss; read it. Row 1 of the framework.</a:t>
+            </a:r>
+          </a:p>
+        </p:txBody>
+      </p:sp>
+      <p:sp>
+        <p:nvSpPr>
+          <p:cNvPr id="4" name="Slide Number Placeholder 3">
+            <a:extLst>
+              <a:ext uri="{FF2B5EF4-FFF2-40B4-BE49-F238E27FC236}">
+                <a16:creationId xmlns:a16="http://schemas.microsoft.com/office/drawing/2014/main" id="{38FEB8C3-503B-9049-7658-CCB7B60590CF}"/>
+              </a:ext>
+            </a:extLst>
+          </p:cNvPr>
           <p:cNvSpPr>
             <a:spLocks noGrp="1"/>
           </p:cNvSpPr>
@@ -933,6 +1043,11 @@
         <p:spPr/>
       </p:sp>
     </p:spTree>
+    <p:extLst>
+      <p:ext uri="{BB962C8B-B14F-4D97-AF65-F5344CB8AC3E}">
+        <p14:creationId xmlns:p14="http://schemas.microsoft.com/office/powerpoint/2010/main" val="2190145711"/>
+      </p:ext>
+    </p:extLst>
   </p:cSld>
   <p:clrMapOvr>
     <a:masterClrMapping/>
@@ -985,12 +1100,12 @@
           <a:lstStyle/>
           <a:p>
             <a:r>
-              <a:t>JSON mode guarantees syntax, not truth. A silently stored zero is the bug.</a:t>
-            </a:r>
-          </a:p>
-          <a:p>
-            <a:r>
-              <a:t>The last box is the one people skip. Say plainly that extraction without validation is a data-corruption feature.</a:t>
+              <a:t>The user problem, spoken, 60 seconds: Trailhead wants a "trail stats" panel — which trails, when, how far, what wildlife, what condition. All of it exists as prose across the forty reports, and today a human would re-read and re-type it. So the panel doesn't exist.</a:t>
+            </a:r>
+          </a:p>
+          <a:p>
+            <a:r>
+              <a:t>This one gets the module's one concept slide, because the pipeline — and where it lies to you — is the lesson.</a:t>
             </a:r>
           </a:p>
         </p:txBody>
@@ -1060,12 +1175,7 @@
           <a:lstStyle/>
           <a:p>
             <a:r>
-              <a:t>JSON mode guarantees syntax, not truth. A silently stored zero is the bug.</a:t>
-            </a:r>
-          </a:p>
-          <a:p>
-            <a:r>
-              <a:t>The last box is the one people skip. Say plainly that extraction without validation is a data-corruption feature.</a:t>
+              <a:t>The textbook version: information extraction turns unstructured text into structured data. JSON mode guarantees the shape; it does not guarantee the truth.</a:t>
             </a:r>
           </a:p>
         </p:txBody>
@@ -1135,12 +1245,7 @@
           <a:lstStyle/>
           <a:p>
             <a:r>
-              <a:t>JSON mode guarantees syntax, not truth. A silently stored zero is the bug.</a:t>
-            </a:r>
-          </a:p>
-          <a:p>
-            <a:r>
-              <a:t>The last box is the one people skip. Say plainly that extraction without validation is a data-corruption feature.</a:t>
+              <a:t>The input is prose: the same trip report from 01.</a:t>
             </a:r>
           </a:p>
         </p:txBody>
@@ -1210,12 +1315,7 @@
           <a:lstStyle/>
           <a:p>
             <a:r>
-              <a:t>JSON mode guarantees syntax, not truth. A silently stored zero is the bug.</a:t>
-            </a:r>
-          </a:p>
-          <a:p>
-            <a:r>
-              <a:t>The last box is the one people skip. Say plainly that extraction without validation is a data-corruption feature.</a:t>
+              <a:t>The prompt is the schema in words: fields, types, examples, and "null when absent."</a:t>
             </a:r>
           </a:p>
         </p:txBody>
@@ -1285,12 +1385,7 @@
           <a:lstStyle/>
           <a:p>
             <a:r>
-              <a:t>JSON mode guarantees syntax, not truth. A silently stored zero is the bug.</a:t>
-            </a:r>
-          </a:p>
-          <a:p>
-            <a:r>
-              <a:t>The last box is the one people skip. Say plainly that extraction without validation is a data-corruption feature.</a:t>
+              <a:t>llama3.2 in JSON mode. JSON mode guarantees syntax, not truth.</a:t>
             </a:r>
           </a:p>
         </p:txBody>
@@ -1360,12 +1455,7 @@
           <a:lstStyle/>
           <a:p>
             <a:r>
-              <a:t>JSON mode guarantees syntax, not truth. A silently stored zero is the bug.</a:t>
-            </a:r>
-          </a:p>
-          <a:p>
-            <a:r>
-              <a:t>The last box is the one people skip. Say plainly that extraction without validation is a data-corruption feature.</a:t>
+              <a:t>Parse and validate against the schema. This is the box people skip.</a:t>
             </a:r>
           </a:p>
         </p:txBody>
@@ -1435,12 +1525,7 @@
           <a:lstStyle/>
           <a:p>
             <a:r>
-              <a:t>JSON mode guarantees syntax, not truth. A silently stored zero is the bug.</a:t>
-            </a:r>
-          </a:p>
-          <a:p>
-            <a:r>
-              <a:t>The last box is the one people skip. Say plainly that extraction without validation is a data-corruption feature.</a:t>
+              <a:t>Store, or reject and log. A silently stored zero is the bug.</a:t>
             </a:r>
           </a:p>
         </p:txBody>
@@ -1510,12 +1595,7 @@
           <a:lstStyle/>
           <a:p>
             <a:r>
-              <a:t>JSON mode guarantees syntax, not truth. A silently stored zero is the bug.</a:t>
-            </a:r>
-          </a:p>
-          <a:p>
-            <a:r>
-              <a:t>The last box is the one people skip. Say plainly that extraction without validation is a data-corruption feature.</a:t>
+              <a:t>The model writes JSON; your code decides whether to believe it.</a:t>
             </a:r>
           </a:p>
         </p:txBody>
@@ -1585,96 +1665,7 @@
           <a:lstStyle/>
           <a:p>
             <a:r>
-              <a:t>After the schema fix, something else usually still slips: </a:t>
-            </a:r>
-            <a:r>
-              <a:rPr>
-                <a:latin typeface="Consolas"/>
-              </a:rPr>
-              <a:t>elevation_gain_ft: 0</a:t>
-            </a:r>
-            <a:r>
-              <a:t> where the honest answer is </a:t>
-            </a:r>
-            <a:r>
-              <a:rPr>
-                <a:latin typeface="Consolas"/>
-              </a:rPr>
-              <a:t>null</a:t>
-            </a:r>
-            <a:r>
-              <a:t>, or "early last month" as a date. Zero is the dangerous miss: it is a value, and a pipeline will store it without complaint. Ship the schema plus a rejection rule.</a:t>
-            </a:r>
-          </a:p>
-          <a:p>
-            <a:r>
-              <a:t>Demo script (~10 min; the break-it beat in step 4 is the first cut):</a:t>
-            </a:r>
-          </a:p>
-          <a:p>
-            <a:r>
-              <a:t>1. Show the same messy trip report from feature 01. This time the goal isn't a summary, it's a database row.</a:t>
-            </a:r>
-          </a:p>
-          <a:p>
-            <a:r>
-              <a:t>2. Define a C# record (</a:t>
-            </a:r>
-            <a:r>
-              <a:rPr>
-                <a:latin typeface="Consolas"/>
-              </a:rPr>
-              <a:t>TripFacts</a:t>
-            </a:r>
-            <a:r>
-              <a:t>: trail, park, date, distance, wildlife, conditions) and use Microsoft.Extensions.AI's typed-response support to request it directly. The schema is code.</a:t>
-            </a:r>
-          </a:p>
-          <a:p>
-            <a:r>
-              <a:t>3. Run it: prose in, populated .NET object out, with no parsing step. This is the payoff moment.</a:t>
-            </a:r>
-          </a:p>
-          <a:p>
-            <a:r>
-              <a:t>4. Break it on purpose: run a report that never mentions distance, and watch the model invent </a:t>
-            </a:r>
-            <a:r>
-              <a:rPr>
-                <a:latin typeface="Consolas"/>
-              </a:rPr>
-              <a:t>distance_mi: 5.0</a:t>
-            </a:r>
-            <a:r>
-              <a:t>.</a:t>
-            </a:r>
-          </a:p>
-          <a:p>
-            <a:r>
-              <a:t>5. Fix it in the schema with nullable fields and "null when not stated" descriptions. Re-run: the invented distance usually goes away, and something else usually doesn't. Run it two or three times live so the room sees the variance rather than one lucky result. Then say the quiet part: this is better, and it is not a guarantee. The last mile is a validator that rejects a date like "early last month" and a </a:t>
-            </a:r>
-            <a:r>
-              <a:rPr>
-                <a:latin typeface="Consolas"/>
-              </a:rPr>
-              <a:t>0</a:t>
-            </a:r>
-            <a:r>
-              <a:t> that should have been </a:t>
-            </a:r>
-            <a:r>
-              <a:rPr>
-                <a:latin typeface="Consolas"/>
-              </a:rPr>
-              <a:t>null</a:t>
-            </a:r>
-            <a:r>
-              <a:t>, which is ordinary code your team already knows how to write.</a:t>
-            </a:r>
-          </a:p>
-          <a:p>
-            <a:r>
-              <a:t>6. Zoom out: loop over ten reports and print rows. That's an ingestion pipeline in thirty lines, and the "trail stats" panel is now just a query.</a:t>
+              <a:t>The null rule and the validator are the feature. Say plainly that extraction without validation is a data-corruption feature.</a:t>
             </a:r>
           </a:p>
         </p:txBody>
@@ -1754,12 +1745,7 @@
           </a:p>
           <a:p>
             <a:r>
-              <a:t>The thread to watch all module: asked for something it cannot find, a model supplies something plausible rather than nothing. 01 invents a closure, 02 invents a distance, 03 believes the sarcasm. A better model does not fix it; a tighter instruction, a null-able schema, and checking code do.</a:t>
-            </a:r>
-          </a:p>
-          <a:p>
-            <a:r>
-              <a:t>Set the rhythm expectation out loud: three quick demos with a card for your boss after each, then the room builds for an hour — 01 recommended, 02 and 03 for anyone with time left.</a:t>
+              <a:t>01: forty trip reports become a three-bullet briefing.</a:t>
             </a:r>
           </a:p>
         </p:txBody>
@@ -1829,12 +1815,7 @@
           <a:lstStyle/>
           <a:p>
             <a:r>
-              <a:t>Invoices, resumes, support emails, contracts, legacy records. Row 2.</a:t>
-            </a:r>
-          </a:p>
-          <a:p>
-            <a:r>
-              <a:t>If asked about cost: days to a working pipeline; the real work is schema design and spot-checking accuracy.</a:t>
+              <a:t>A rejected record is a good outcome; it is the pipeline telling you the truth.</a:t>
             </a:r>
           </a:p>
         </p:txBody>
@@ -1904,12 +1885,134 @@
           <a:lstStyle/>
           <a:p>
             <a:r>
-              <a:t>Invoices, resumes, support emails, contracts, legacy records. Row 2.</a:t>
-            </a:r>
-          </a:p>
-          <a:p>
-            <a:r>
-              <a:t>If asked about cost: days to a working pipeline; the real work is schema design and spot-checking accuracy.</a:t>
+              <a:rPr dirty="0"/>
+              <a:t>~10 min · Terminal 2 · </a:t>
+            </a:r>
+            <a:r>
+              <a:rPr dirty="0">
+                <a:latin typeface="Consolas"/>
+              </a:rPr>
+              <a:t>cd modules/M1-understanding/F02-extraction/dotnet</a:t>
+            </a:r>
+          </a:p>
+          <a:p>
+            <a:r>
+              <a:rPr dirty="0"/>
+              <a:t>Files: </a:t>
+            </a:r>
+            <a:r>
+              <a:rPr dirty="0">
+                <a:latin typeface="Consolas"/>
+              </a:rPr>
+              <a:t>tr-0007.md</a:t>
+            </a:r>
+            <a:r>
+              <a:rPr dirty="0"/>
+              <a:t> = full report, every field present · </a:t>
+            </a:r>
+            <a:r>
+              <a:rPr dirty="0">
+                <a:latin typeface="Consolas"/>
+              </a:rPr>
+              <a:t>tr-0011.md</a:t>
+            </a:r>
+            <a:r>
+              <a:rPr dirty="0"/>
+              <a:t> = sparse report, no distance stated (the null test)</a:t>
+            </a:r>
+          </a:p>
+          <a:p>
+            <a:r>
+              <a:rPr dirty="0" err="1"/>
+              <a:t>Args</a:t>
+            </a:r>
+            <a:r>
+              <a:rPr dirty="0"/>
+              <a:t>: a report path; complete with no </a:t>
+            </a:r>
+            <a:r>
+              <a:rPr dirty="0" err="1"/>
+              <a:t>args</a:t>
+            </a:r>
+            <a:r>
+              <a:rPr dirty="0"/>
+              <a:t> runs both</a:t>
+            </a:r>
+          </a:p>
+          <a:p>
+            <a:r>
+              <a:rPr dirty="0"/>
+              <a:t>1. Same kind of report as 01. This time the goal is a database row.</a:t>
+            </a:r>
+          </a:p>
+          <a:p>
+            <a:r>
+              <a:rPr dirty="0"/>
+              <a:t>2. Before: </a:t>
+            </a:r>
+            <a:r>
+              <a:rPr dirty="0">
+                <a:latin typeface="Consolas"/>
+              </a:rPr>
+              <a:t>cd starter &amp;&amp; dotnet run -- ../../data/tr-0007.md</a:t>
+            </a:r>
+            <a:r>
+              <a:rPr dirty="0"/>
+              <a:t>. JSON asked for in the prompt. Fences, preamble, drifting field names.</a:t>
+            </a:r>
+          </a:p>
+          <a:p>
+            <a:r>
+              <a:rPr dirty="0"/>
+              <a:t>3. After: </a:t>
+            </a:r>
+            <a:r>
+              <a:rPr dirty="0">
+                <a:latin typeface="Consolas"/>
+              </a:rPr>
+              <a:t>cd ../complete &amp;&amp; dotnet run -- ../../data/tr-0007.md</a:t>
+            </a:r>
+            <a:r>
+              <a:rPr dirty="0"/>
+              <a:t>. </a:t>
+            </a:r>
+            <a:r>
+              <a:rPr dirty="0" err="1">
+                <a:latin typeface="Consolas"/>
+              </a:rPr>
+              <a:t>TripFacts</a:t>
+            </a:r>
+            <a:r>
+              <a:rPr dirty="0"/>
+              <a:t> record, typed response, no parsing.</a:t>
+            </a:r>
+          </a:p>
+          <a:p>
+            <a:r>
+              <a:rPr dirty="0"/>
+              <a:t>4. </a:t>
+            </a:r>
+            <a:r>
+              <a:rPr dirty="0">
+                <a:latin typeface="Consolas"/>
+              </a:rPr>
+              <a:t>dotnet run -- ../../data/tr-0011.md</a:t>
+            </a:r>
+            <a:r>
+              <a:rPr dirty="0"/>
+              <a:t>, three times. Nulls where there is nothing, and watch what still slips.</a:t>
+            </a:r>
+          </a:p>
+          <a:p>
+            <a:r>
+              <a:rPr dirty="0"/>
+              <a:t>5. Point at the validator: PASS or REJECT. A rejected record is a good outcome.</a:t>
+            </a:r>
+          </a:p>
+          <a:p>
+            <a:r>
+              <a:rPr dirty="0"/>
+              <a:t>Cut: 4's repeats.</a:t>
             </a:r>
           </a:p>
         </p:txBody>
@@ -1979,12 +2082,7 @@
           <a:lstStyle/>
           <a:p>
             <a:r>
-              <a:t>Invoices, resumes, support emails, contracts, legacy records. Row 2.</a:t>
-            </a:r>
-          </a:p>
-          <a:p>
-            <a:r>
-              <a:t>If asked about cost: days to a working pipeline; the real work is schema design and spot-checking accuracy.</a:t>
+              <a:t>Invoices, resumes, support emails, contracts, legacy records.</a:t>
             </a:r>
           </a:p>
         </p:txBody>
@@ -2054,12 +2152,7 @@
           <a:lstStyle/>
           <a:p>
             <a:r>
-              <a:t>The user problem, spoken, 60 seconds: the Cascade 65 backpack has 300 reviews. Are people happy, and what are they mad about? Star ratings lie — "4 stars, but the hip belt broke on day two." The user here is the product team, not the hiker; track the signal weekly and a defect surfaces months before returns spike.</a:t>
-            </a:r>
-          </a:p>
-          <a:p>
-            <a:r>
-              <a:t>No concept slide: this is classification, and the demo IS the lesson — the day's model-selection experiment. phi3 free and local vs gpt-4.1 on Azure, same prompt, and you measure instead of assume.</a:t>
+              <a:t>The line for your boss. Row 2.</a:t>
             </a:r>
           </a:p>
         </p:txBody>
@@ -2129,114 +2222,7 @@
           <a:lstStyle/>
           <a:p>
             <a:r>
-              <a:t>Both halves of the argument hold: ordinary reviews barely need the big model, and the sarcastic slice does, 7/10 vs 10/10, with every disagreement going the frontier model's way. The local stand-in (</a:t>
-            </a:r>
-            <a:r>
-              <a:rPr>
-                <a:latin typeface="Consolas"/>
-              </a:rPr>
-              <a:t>llama3.2</a:t>
-            </a:r>
-            <a:r>
-              <a:t>) came within one review of phi3, so a comparison against the wrong big model would have said the gap barely exists. Side finding worth 20 seconds: reflowing the identical prompt onto one line dropped phi3 to 7/10 and 4/10. Small models are sensitive to formatting.</a:t>
-            </a:r>
-          </a:p>
-          <a:p>
-            <a:r>
-              <a:t>Close with the decision recipe: labeled sample, run both, count disagreements, price the errors. That recipe generalizes to every feature today.</a:t>
-            </a:r>
-          </a:p>
-          <a:p>
-            <a:r>
-              <a:t>Demo script (~10 min; the hard-set diff in step 5 is the heart — cut step 4's Azure easy-run first if behind):</a:t>
-            </a:r>
-          </a:p>
-          <a:p>
-            <a:r>
-              <a:t>1. Show the Cascade 65's reviews and point at a 4-star review with furious text, which is the whole case for reading the text rather than the stars.</a:t>
-            </a:r>
-          </a:p>
-          <a:p>
-            <a:r>
-              <a:t>2. Starter project: one classify method whose prompt returns exactly </a:t>
-            </a:r>
-            <a:r>
-              <a:rPr>
-                <a:latin typeface="Consolas"/>
-              </a:rPr>
-              <a:t>positive | negative | mixed</a:t>
-            </a:r>
-            <a:r>
-              <a:t>. Because of Microsoft.Extensions.AI, the same code runs against both providers, and the swap is one line in DI registration. Say that out loud, since it's the provider-flexibility slide made real.</a:t>
-            </a:r>
-          </a:p>
-          <a:p>
-            <a:r>
-              <a:t>3. Run 20 easy reviews through </a:t>
-            </a:r>
-            <a:r>
-              <a:rPr>
-                <a:latin typeface="Consolas"/>
-              </a:rPr>
-              <a:t>phi3</a:t>
-            </a:r>
-            <a:r>
-              <a:t> locally, where it is fast, free, and correct, and let the small model win the first round.</a:t>
-            </a:r>
-          </a:p>
-          <a:p>
-            <a:r>
-              <a:t>4. Run the same 20 through </a:t>
-            </a:r>
-            <a:r>
-              <a:rPr>
-                <a:latin typeface="Consolas"/>
-              </a:rPr>
-              <a:t>gpt-4.1</a:t>
-            </a:r>
-            <a:r>
-              <a:t> on Foundry and get the same labels on nine of ten (the frontier model also gets the deadpan four-star rave that </a:t>
-            </a:r>
-            <a:r>
-              <a:rPr>
-                <a:latin typeface="Consolas"/>
-              </a:rPr>
-              <a:t>phi3</a:t>
-            </a:r>
-            <a:r>
-              <a:t> calls mixed), which is the first payoff: on ordinary reviews you'd have paid for very little.</a:t>
-            </a:r>
-          </a:p>
-          <a:p>
-            <a:r>
-              <a:t>5. Now the hard set, sarcasm and mixed reviews. Run both and diff the labels on screen. Second payoff: </a:t>
-            </a:r>
-            <a:r>
-              <a:rPr>
-                <a:latin typeface="Consolas"/>
-              </a:rPr>
-              <a:t>phi3</a:t>
-            </a:r>
-            <a:r>
-              <a:t> drops to 7/10 and </a:t>
-            </a:r>
-            <a:r>
-              <a:rPr>
-                <a:latin typeface="Consolas"/>
-              </a:rPr>
-              <a:t>gpt-4.1</a:t>
-            </a:r>
-            <a:r>
-              <a:t> holds at 10/10, and every disagreement is one the frontier model gets right. This is the slice that earns its price, and you know that because you measured it rather than assumed it. Check </a:t>
-            </a:r>
-            <a:r>
-              <a:rPr>
-                <a:latin typeface="Consolas"/>
-              </a:rPr>
-              <a:t>expected-output.md</a:t>
-            </a:r>
-            <a:r>
-              <a:t> for what happened when this was built, and be ready for the room's answer to differ from yours.</a:t>
+              <a:t>Medium. If asked about cost: days to a working pipeline; the real work is schema design and spot-checking accuracy.</a:t>
             </a:r>
           </a:p>
         </p:txBody>
@@ -2306,12 +2292,12 @@
           <a:lstStyle/>
           <a:p>
             <a:r>
-              <a:t>Reviews, NPS verbatims, tickets, mentions, survey answers. Row 3.</a:t>
-            </a:r>
-          </a:p>
-          <a:p>
-            <a:r>
-              <a:t>If asked about cost: days; the classifier is trivial, the diligence is a labeled sample and an error count.</a:t>
+              <a:t>The user problem, spoken, 60 seconds: the Cascade 65 backpack has 300 reviews. Are people happy, and what are they mad about? Star ratings lie — "4 stars, but the hip belt broke on day two." The user here is the product team, not the hiker; track the signal weekly and a defect surfaces months before returns spike.</a:t>
+            </a:r>
+          </a:p>
+          <a:p>
+            <a:r>
+              <a:t>No concept slide: this is classification, and the demo IS the lesson — the day's model-selection experiment. phi3 free and local vs gpt-4.1 on Azure, same prompt, and you measure instead of assume.</a:t>
             </a:r>
           </a:p>
         </p:txBody>
@@ -2381,12 +2367,7 @@
           <a:lstStyle/>
           <a:p>
             <a:r>
-              <a:t>Reviews, NPS verbatims, tickets, mentions, survey answers. Row 3.</a:t>
-            </a:r>
-          </a:p>
-          <a:p>
-            <a:r>
-              <a:t>If asked about cost: days; the classifier is trivial, the diligence is a labeled sample and an error count.</a:t>
+              <a:t>The textbook version: sentiment analysis identifies the emotional polarity of a piece of text. The stars lie; the words mostly don't.</a:t>
             </a:r>
           </a:p>
         </p:txBody>
@@ -2456,12 +2437,134 @@
           <a:lstStyle/>
           <a:p>
             <a:r>
-              <a:t>Reviews, NPS verbatims, tickets, mentions, survey answers. Row 3.</a:t>
-            </a:r>
-          </a:p>
-          <a:p>
-            <a:r>
-              <a:t>If asked about cost: days; the classifier is trivial, the diligence is a labeled sample and an error count.</a:t>
+              <a:t>~10 min · Terminal 1 (Azure) · </a:t>
+            </a:r>
+            <a:r>
+              <a:rPr>
+                <a:latin typeface="Consolas"/>
+              </a:rPr>
+              <a:t>cd modules/M1-understanding/F03-sentiment/dotnet</a:t>
+            </a:r>
+          </a:p>
+          <a:p>
+            <a:r>
+              <a:t>Files: </a:t>
+            </a:r>
+            <a:r>
+              <a:rPr>
+                <a:latin typeface="Consolas"/>
+              </a:rPr>
+              <a:t>easy.jsonl</a:t>
+            </a:r>
+            <a:r>
+              <a:t> = 10 plain reviews · </a:t>
+            </a:r>
+            <a:r>
+              <a:rPr>
+                <a:latin typeface="Consolas"/>
+              </a:rPr>
+              <a:t>hard.jsonl</a:t>
+            </a:r>
+            <a:r>
+              <a:t> = 10 sarcastic or split reviews · </a:t>
+            </a:r>
+            <a:r>
+              <a:rPr>
+                <a:latin typeface="Consolas"/>
+              </a:rPr>
+              <a:t>reference-labels.json</a:t>
+            </a:r>
+            <a:r>
+              <a:t> = the hand labels</a:t>
+            </a:r>
+          </a:p>
+          <a:p>
+            <a:r>
+              <a:t>Flags: </a:t>
+            </a:r>
+            <a:r>
+              <a:rPr>
+                <a:latin typeface="Consolas"/>
+              </a:rPr>
+              <a:t>--easy</a:t>
+            </a:r>
+            <a:r>
+              <a:t> / </a:t>
+            </a:r>
+            <a:r>
+              <a:rPr>
+                <a:latin typeface="Consolas"/>
+              </a:rPr>
+              <a:t>--hard</a:t>
+            </a:r>
+            <a:r>
+              <a:t> = one set; none = both · starter takes a review id (default gr-0007, the sarcastic one)</a:t>
+            </a:r>
+          </a:p>
+          <a:p>
+            <a:r>
+              <a:t>1. Open </a:t>
+            </a:r>
+            <a:r>
+              <a:rPr>
+                <a:latin typeface="Consolas"/>
+              </a:rPr>
+              <a:t>data/hard.jsonl</a:t>
+            </a:r>
+            <a:r>
+              <a:t>. Find a two-star review with glowing text. Stars lie.</a:t>
+            </a:r>
+          </a:p>
+          <a:p>
+            <a:r>
+              <a:t>2. Before: </a:t>
+            </a:r>
+            <a:r>
+              <a:rPr>
+                <a:latin typeface="Consolas"/>
+              </a:rPr>
+              <a:t>cd starter &amp;&amp; dotnet run</a:t>
+            </a:r>
+            <a:r>
+              <a:t>. One method, one label, gr-0007. Show the DI line: the swap is one line.</a:t>
+            </a:r>
+          </a:p>
+          <a:p>
+            <a:r>
+              <a:t>3. After: </a:t>
+            </a:r>
+            <a:r>
+              <a:rPr>
+                <a:latin typeface="Consolas"/>
+              </a:rPr>
+              <a:t>cd ../complete &amp;&amp; dotnet run -- --easy</a:t>
+            </a:r>
+            <a:r>
+              <a:t>. phi3 9/10, gpt-4.1 10/10. Paid for one review.</a:t>
+            </a:r>
+          </a:p>
+          <a:p>
+            <a:r>
+              <a:t>4. </a:t>
+            </a:r>
+            <a:r>
+              <a:rPr>
+                <a:latin typeface="Consolas"/>
+              </a:rPr>
+              <a:t>dotnet run -- --hard</a:t>
+            </a:r>
+            <a:r>
+              <a:t>: phi3 7/10, gpt-4.1 10/10. Diff on screen. Every miss goes the frontier model's way.</a:t>
+            </a:r>
+          </a:p>
+          <a:p>
+            <a:r>
+              <a:t>5. The recipe: labeled sample, run both, count disagreements, price the errors.</a:t>
+            </a:r>
+          </a:p>
+          <a:p>
+            <a:r>
+              <a:t>Cut: 3, go straight to 4.</a:t>
             </a:r>
           </a:p>
         </p:txBody>
@@ -2531,17 +2634,7 @@
           <a:lstStyle/>
           <a:p>
             <a:r>
-              <a:t>Start with 01 regardless of experience: one endpoint, one prompt, two reports; everything else today assumes you've made one model call and seen what comes back. New to this? Budget the full time and do the stretch goal.</a:t>
-            </a:r>
-          </a:p>
-          <a:p>
-            <a:r>
-              <a:t>Pick 03 if your question at work is "which model should we pay for" — its Azure half needs the room key. 02's done-check: the sparse report comes back with nulls and the validator says PASS/REJECT honestly.</a:t>
-            </a:r>
-          </a:p>
-          <a:p>
-            <a:r>
-              <a:t>Finished everything? Help someone near you.</a:t>
+              <a:t>Reviews, NPS verbatims, tickets, mentions, survey answers.</a:t>
             </a:r>
           </a:p>
         </p:txBody>
@@ -2611,12 +2704,7 @@
           <a:lstStyle/>
           <a:p>
             <a:r>
-              <a:t>Ask two people what surprised them.</a:t>
-            </a:r>
-          </a:p>
-          <a:p>
-            <a:r>
-              <a:t>Prompts if quiet: what surfaced the buried bridge, and what invented one? Rows 1–3 of the framework are done. Break, then Module 2.</a:t>
+              <a:t>The line for your boss, and today you measured it. Row 3.</a:t>
             </a:r>
           </a:p>
         </p:txBody>
@@ -2704,22 +2792,7 @@
           <a:lstStyle/>
           <a:p>
             <a:r>
-              <a:t>One model call + one careful instruction; the rhythm is three demos, then your lab hour.</a:t>
-            </a:r>
-          </a:p>
-          <a:p>
-            <a:r>
-              <a:t>Three features, one shape: a single chat call and a carefully written instruction. No vector database, no training, no cloud.</a:t>
-            </a:r>
-          </a:p>
-          <a:p>
-            <a:r>
-              <a:t>The thread to watch all module: asked for something it cannot find, a model supplies something plausible rather than nothing. 01 invents a closure, 02 invents a distance, 03 believes the sarcasm. A better model does not fix it; a tighter instruction, a null-able schema, and checking code do.</a:t>
-            </a:r>
-          </a:p>
-          <a:p>
-            <a:r>
-              <a:t>Set the rhythm expectation out loud: three quick demos with a card for your boss after each, then the room builds for an hour — 01 recommended, 02 and 03 for anyone with time left.</a:t>
+              <a:t>02: the same prose becomes a database row, and your code decides whether to believe it.</a:t>
             </a:r>
           </a:p>
         </p:txBody>
@@ -2756,7 +2829,7 @@
 </file>
 
 <file path=ppt/notesSlides/notesSlide30.xml><?xml version="1.0" encoding="utf-8"?>
-<p:notes xmlns:a="http://schemas.openxmlformats.org/drawingml/2006/main" xmlns:p="http://schemas.openxmlformats.org/presentationml/2006/main" xmlns:r="http://schemas.openxmlformats.org/officeDocument/2006/relationships">
+<p:notes xmlns:a="http://schemas.openxmlformats.org/drawingml/2006/main" xmlns:r="http://schemas.openxmlformats.org/officeDocument/2006/relationships" xmlns:p="http://schemas.openxmlformats.org/presentationml/2006/main">
   <p:cSld>
     <p:spTree>
       <p:nvGrpSpPr>
@@ -2776,7 +2849,7 @@
         <p:nvSpPr>
           <p:cNvPr id="2" name="Slide Image Placeholder 1"/>
           <p:cNvSpPr>
-            <a:spLocks noGrp="1"/>
+            <a:spLocks noGrp="1" noRot="1" noChangeAspect="1"/>
           </p:cNvSpPr>
           <p:nvPr>
             <p:ph type="sldImg" idx="2"/>
@@ -2791,7 +2864,7 @@
             <a:spLocks noGrp="1"/>
           </p:cNvSpPr>
           <p:nvPr>
-            <p:ph type="body" idx="3" sz="quarter"/>
+            <p:ph type="body" sz="quarter" idx="3"/>
           </p:nvPr>
         </p:nvSpPr>
         <p:spPr/>
@@ -2800,7 +2873,7 @@
           <a:lstStyle/>
           <a:p>
             <a:r>
-              <a:t>The textbook version: automatic summarization produces a shorter text that keeps the key information of the source. Read the slide, let it sit a beat, then the problem.</a:t>
+              <a:t>Easy. If asked about cost: days; the classifier is trivial, the diligence is a labeled sample and an error count.</a:t>
             </a:r>
           </a:p>
         </p:txBody>
@@ -2812,7 +2885,7 @@
             <a:spLocks noGrp="1"/>
           </p:cNvSpPr>
           <p:nvPr>
-            <p:ph type="sldNum" idx="5" sz="quarter"/>
+            <p:ph type="sldNum" sz="quarter" idx="5"/>
           </p:nvPr>
         </p:nvSpPr>
         <p:spPr/>
@@ -2826,7 +2899,7 @@
 </file>
 
 <file path=ppt/notesSlides/notesSlide31.xml><?xml version="1.0" encoding="utf-8"?>
-<p:notes xmlns:a="http://schemas.openxmlformats.org/drawingml/2006/main" xmlns:p="http://schemas.openxmlformats.org/presentationml/2006/main" xmlns:r="http://schemas.openxmlformats.org/officeDocument/2006/relationships">
+<p:notes xmlns:a="http://schemas.openxmlformats.org/drawingml/2006/main" xmlns:r="http://schemas.openxmlformats.org/officeDocument/2006/relationships" xmlns:p="http://schemas.openxmlformats.org/presentationml/2006/main">
   <p:cSld>
     <p:spTree>
       <p:nvGrpSpPr>
@@ -2846,7 +2919,7 @@
         <p:nvSpPr>
           <p:cNvPr id="2" name="Slide Image Placeholder 1"/>
           <p:cNvSpPr>
-            <a:spLocks noGrp="1"/>
+            <a:spLocks noGrp="1" noRot="1" noChangeAspect="1"/>
           </p:cNvSpPr>
           <p:nvPr>
             <p:ph type="sldImg" idx="2"/>
@@ -2861,7 +2934,7 @@
             <a:spLocks noGrp="1"/>
           </p:cNvSpPr>
           <p:nvPr>
-            <p:ph type="body" idx="3" sz="quarter"/>
+            <p:ph type="body" sz="quarter" idx="3"/>
           </p:nvPr>
         </p:nvSpPr>
         <p:spPr/>
@@ -2870,7 +2943,17 @@
           <a:lstStyle/>
           <a:p>
             <a:r>
-              <a:t>The textbook version: information extraction turns unstructured text into structured data. JSON mode guarantees the shape; it does not guarantee the truth.</a:t>
+              <a:t>Start with 01 regardless of experience: one endpoint, one prompt, two reports; everything else today assumes you've made one model call and seen what comes back. New to this? Budget the full time and do the stretch goal.</a:t>
+            </a:r>
+          </a:p>
+          <a:p>
+            <a:r>
+              <a:t>Pick 03 if your question at work is "which model should we pay for" — its Azure half needs the room key. 02's done-check: the sparse report comes back with nulls and the validator says PASS/REJECT honestly.</a:t>
+            </a:r>
+          </a:p>
+          <a:p>
+            <a:r>
+              <a:t>Finished everything? Help someone near you.</a:t>
             </a:r>
           </a:p>
         </p:txBody>
@@ -2882,7 +2965,7 @@
             <a:spLocks noGrp="1"/>
           </p:cNvSpPr>
           <p:nvPr>
-            <p:ph type="sldNum" idx="5" sz="quarter"/>
+            <p:ph type="sldNum" sz="quarter" idx="5"/>
           </p:nvPr>
         </p:nvSpPr>
         <p:spPr/>
@@ -2896,7 +2979,7 @@
 </file>
 
 <file path=ppt/notesSlides/notesSlide32.xml><?xml version="1.0" encoding="utf-8"?>
-<p:notes xmlns:a="http://schemas.openxmlformats.org/drawingml/2006/main" xmlns:p="http://schemas.openxmlformats.org/presentationml/2006/main" xmlns:r="http://schemas.openxmlformats.org/officeDocument/2006/relationships">
+<p:notes xmlns:a="http://schemas.openxmlformats.org/drawingml/2006/main" xmlns:r="http://schemas.openxmlformats.org/officeDocument/2006/relationships" xmlns:p="http://schemas.openxmlformats.org/presentationml/2006/main">
   <p:cSld>
     <p:spTree>
       <p:nvGrpSpPr>
@@ -2916,7 +2999,7 @@
         <p:nvSpPr>
           <p:cNvPr id="2" name="Slide Image Placeholder 1"/>
           <p:cNvSpPr>
-            <a:spLocks noGrp="1"/>
+            <a:spLocks noGrp="1" noRot="1" noChangeAspect="1"/>
           </p:cNvSpPr>
           <p:nvPr>
             <p:ph type="sldImg" idx="2"/>
@@ -2931,7 +3014,7 @@
             <a:spLocks noGrp="1"/>
           </p:cNvSpPr>
           <p:nvPr>
-            <p:ph type="body" idx="3" sz="quarter"/>
+            <p:ph type="body" sz="quarter" idx="3"/>
           </p:nvPr>
         </p:nvSpPr>
         <p:spPr/>
@@ -2940,7 +3023,12 @@
           <a:lstStyle/>
           <a:p>
             <a:r>
-              <a:t>The textbook version: sentiment analysis identifies the emotional polarity of a piece of text. The stars lie; the words mostly don't.</a:t>
+              <a:t>Ask two people what surprised them.</a:t>
+            </a:r>
+          </a:p>
+          <a:p>
+            <a:r>
+              <a:t>Prompts if quiet: what surfaced the buried bridge, and what invented one? Rows 1–3 of the framework are done. Break, then Module 2.</a:t>
             </a:r>
           </a:p>
         </p:txBody>
@@ -2952,7 +3040,7 @@
             <a:spLocks noGrp="1"/>
           </p:cNvSpPr>
           <p:nvPr>
-            <p:ph type="sldNum" idx="5" sz="quarter"/>
+            <p:ph type="sldNum" sz="quarter" idx="5"/>
           </p:nvPr>
         </p:nvSpPr>
         <p:spPr/>
@@ -3028,12 +3116,7 @@
           <a:lstStyle/>
           <a:p>
             <a:r>
-              <a:t>One model call + one careful instruction; the rhythm is three demos, then your lab hour.</a:t>
-            </a:r>
-          </a:p>
-          <a:p>
-            <a:r>
-              <a:t>Three features, one shape: a single chat call and a carefully written instruction. No vector database, no training, no cloud.</a:t>
+              <a:t>03: three hundred reviews get a label, and you measure which model deserves the money.</a:t>
             </a:r>
           </a:p>
           <a:p>
@@ -3043,7 +3126,7 @@
           </a:p>
           <a:p>
             <a:r>
-              <a:t>Set the rhythm expectation out loud: three quick demos with a card for your boss after each, then the room builds for an hour — 01 recommended, 02 and 03 for anyone with time left.</a:t>
+              <a:t>Set the rhythm expectation out loud: three quick demos with a card for your boss after each, then the room builds for an hour: 01 recommended, 02 and 03 for anyone with time left.</a:t>
             </a:r>
           </a:p>
         </p:txBody>
@@ -3199,83 +3282,7 @@
           <a:lstStyle/>
           <a:p>
             <a:r>
-              <a:t>A required "hazards" slot with nothing honest to put in it is an invitation to make something up. The invented bear-related closure happens on the clean report; numbers are in </a:t>
-            </a:r>
-            <a:r>
-              <a:rPr>
-                <a:latin typeface="Consolas"/>
-              </a:rPr>
-              <a:t>expected-output.md</a:t>
-            </a:r>
-            <a:r>
-              <a:t>. Point at the Ollama endpoint at the end: there was no API key, and no data left the room.</a:t>
-            </a:r>
-          </a:p>
-          <a:p>
-            <a:r>
-              <a:t>Demo script (~8 min; the reshape in step 6 is the first cut):</a:t>
-            </a:r>
-          </a:p>
-          <a:p>
-            <a:r>
-              <a:t>1. Open a raw trip report from </a:t>
-            </a:r>
-            <a:r>
-              <a:rPr>
-                <a:latin typeface="Consolas"/>
-              </a:rPr>
-              <a:t>data/trip-reports/</a:t>
-            </a:r>
-            <a:r>
-              <a:t> on screen and scroll through it slowly, so the room feels the problem before seeing the fix.</a:t>
-            </a:r>
-          </a:p>
-          <a:p>
-            <a:r>
-              <a:t>2. Starter project: </a:t>
-            </a:r>
-            <a:r>
-              <a:rPr>
-                <a:latin typeface="Consolas"/>
-              </a:rPr>
-              <a:t>IChatClient</a:t>
-            </a:r>
-            <a:r>
-              <a:t> wired to Ollama via Microsoft.Extensions.AI. One method, one prompt: "Summarize this trip report."</a:t>
-            </a:r>
-          </a:p>
-          <a:p>
-            <a:r>
-              <a:t>3. Run it and get a faithful, generic, useless book report, then name the failure out loud: right model, wrong instruction.</a:t>
-            </a:r>
-          </a:p>
-          <a:p>
-            <a:r>
-              <a:t>4. Iterate the prompt live into the hiker-focused version (conditions, hazards, crowding, ignore everything else). Run again. This is the payoff: three bullets, and the bridge warning surfaces.</a:t>
-            </a:r>
-          </a:p>
-          <a:p>
-            <a:r>
-              <a:t>5. Point at the last two lines of that prompt, the grounding lines. Without them, this exact prompt run against the clean report invented a bear-related trail closure in roughly half of runs, because a required "hazards" slot with nothing honest to put in it is an invitation to make something up. The numbers and the failing outputs are in </a:t>
-            </a:r>
-            <a:r>
-              <a:rPr>
-                <a:latin typeface="Consolas"/>
-              </a:rPr>
-              <a:t>expected-output.md</a:t>
-            </a:r>
-            <a:r>
-              <a:t>.</a:t>
-            </a:r>
-          </a:p>
-          <a:p>
-            <a:r>
-              <a:t>6. Change the shape: same call, but output a one-line "trail status" headline for a card UI. Same feature, different product surface.</a:t>
-            </a:r>
-          </a:p>
-          <a:p>
-            <a:r>
-              <a:t>7. Point at the Ollama endpoint in the code. This ran entirely on the laptop, with no API key and no data leaving the room.</a:t>
+              <a:t>The textbook version: automatic summarization produces a shorter text that keeps the key information of the source. Read the slide, let it sit a beat, then the problem.</a:t>
             </a:r>
           </a:p>
         </p:txBody>
@@ -3345,12 +3352,178 @@
           <a:lstStyle/>
           <a:p>
             <a:r>
-              <a:t>Reviews, tickets, reports, meeting notes, threads. One call per document. Row 1 of the framework.</a:t>
-            </a:r>
-          </a:p>
-          <a:p>
-            <a:r>
-              <a:t>If asked about cost: days of work, free local models, no new infrastructure.</a:t>
+              <a:rPr dirty="0"/>
+              <a:t>~8 min · Terminal 2 · </a:t>
+            </a:r>
+            <a:r>
+              <a:rPr dirty="0">
+                <a:latin typeface="Consolas"/>
+              </a:rPr>
+              <a:t>cd modules/M1-understanding/F01-summarization/dotnet</a:t>
+            </a:r>
+          </a:p>
+          <a:p>
+            <a:r>
+              <a:rPr dirty="0"/>
+              <a:t>Files: </a:t>
+            </a:r>
+            <a:r>
+              <a:rPr dirty="0">
+                <a:latin typeface="Consolas"/>
+              </a:rPr>
+              <a:t>tr-0004.md</a:t>
+            </a:r>
+            <a:r>
+              <a:rPr dirty="0"/>
+              <a:t> = the story's report, bridge buried mid-text · </a:t>
+            </a:r>
+            <a:r>
+              <a:rPr dirty="0">
+                <a:latin typeface="Consolas"/>
+              </a:rPr>
+              <a:t>tr-0001.md</a:t>
+            </a:r>
+            <a:r>
+              <a:rPr dirty="0"/>
+              <a:t> = clean report, nothing closed (hallucination bait)</a:t>
+            </a:r>
+          </a:p>
+          <a:p>
+            <a:r>
+              <a:rPr dirty="0"/>
+              <a:t>Flags: none = naive "Summarize this" · </a:t>
+            </a:r>
+            <a:r>
+              <a:rPr dirty="0">
+                <a:latin typeface="Consolas"/>
+              </a:rPr>
+              <a:t>--briefing</a:t>
+            </a:r>
+            <a:r>
+              <a:rPr dirty="0"/>
+              <a:t> = 3 hiker bullets · </a:t>
+            </a:r>
+            <a:r>
+              <a:rPr dirty="0">
+                <a:latin typeface="Consolas"/>
+              </a:rPr>
+              <a:t>--headline</a:t>
+            </a:r>
+            <a:r>
+              <a:rPr dirty="0"/>
+              <a:t> = one-line trail card · </a:t>
+            </a:r>
+            <a:r>
+              <a:rPr dirty="0">
+                <a:latin typeface="Consolas"/>
+              </a:rPr>
+              <a:t>--audience ranger</a:t>
+            </a:r>
+            <a:r>
+              <a:rPr dirty="0"/>
+              <a:t> = same report, different reader</a:t>
+            </a:r>
+          </a:p>
+          <a:p>
+            <a:r>
+              <a:rPr dirty="0"/>
+              <a:t>1. Open </a:t>
+            </a:r>
+            <a:r>
+              <a:rPr dirty="0">
+                <a:latin typeface="Consolas"/>
+              </a:rPr>
+              <a:t>data/tr-0004.md</a:t>
+            </a:r>
+            <a:r>
+              <a:rPr dirty="0"/>
+              <a:t>, scroll. The bridge is one sentence, mid-report.</a:t>
+            </a:r>
+          </a:p>
+          <a:p>
+            <a:r>
+              <a:rPr dirty="0"/>
+              <a:t>2. Before: </a:t>
+            </a:r>
+            <a:r>
+              <a:rPr dirty="0">
+                <a:latin typeface="Consolas"/>
+              </a:rPr>
+              <a:t>cd starter &amp;&amp; dotnet run -- ../../data/tr-0004.md</a:t>
+            </a:r>
+            <a:r>
+              <a:rPr dirty="0"/>
+              <a:t>. Book report. Right model, wrong instruction.</a:t>
+            </a:r>
+          </a:p>
+          <a:p>
+            <a:r>
+              <a:rPr dirty="0"/>
+              <a:t>3. After: </a:t>
+            </a:r>
+            <a:r>
+              <a:rPr dirty="0">
+                <a:latin typeface="Consolas"/>
+              </a:rPr>
+              <a:t>cd ../complete &amp;&amp; dotnet run -- --briefing</a:t>
+            </a:r>
+            <a:r>
+              <a:rPr dirty="0"/>
+              <a:t>. Same report, three bullets, washout leads. Show the prompt.</a:t>
+            </a:r>
+          </a:p>
+          <a:p>
+            <a:r>
+              <a:rPr dirty="0"/>
+              <a:t>4. </a:t>
+            </a:r>
+            <a:r>
+              <a:rPr dirty="0">
+                <a:latin typeface="Consolas"/>
+              </a:rPr>
+              <a:t>dotnet run -- --briefing ../../data/tr-0001.md</a:t>
+            </a:r>
+            <a:r>
+              <a:rPr dirty="0"/>
+              <a:t>: the clean report, nothing closed. Last two prompt lines: 11 of 24 became 1 of 24.</a:t>
+            </a:r>
+          </a:p>
+          <a:p>
+            <a:r>
+              <a:rPr dirty="0"/>
+              <a:t>5. </a:t>
+            </a:r>
+            <a:r>
+              <a:rPr dirty="0">
+                <a:latin typeface="Consolas"/>
+              </a:rPr>
+              <a:t>dotnet run -- --headline</a:t>
+            </a:r>
+            <a:r>
+              <a:rPr dirty="0"/>
+              <a:t>: one line for a card.</a:t>
+            </a:r>
+          </a:p>
+          <a:p>
+            <a:r>
+              <a:rPr dirty="0"/>
+              <a:t>6. Line 11: </a:t>
+            </a:r>
+            <a:r>
+              <a:rPr dirty="0">
+                <a:latin typeface="Consolas"/>
+              </a:rPr>
+              <a:t>localhost:11434</a:t>
+            </a:r>
+            <a:r>
+              <a:rPr dirty="0"/>
+              <a:t>. No key, nothing left the room.</a:t>
+            </a:r>
+          </a:p>
+          <a:p>
+            <a:r>
+              <a:rPr dirty="0"/>
+              <a:t>Cut: 5, then 4.</a:t>
             </a:r>
           </a:p>
         </p:txBody>
@@ -3420,12 +3593,7 @@
           <a:lstStyle/>
           <a:p>
             <a:r>
-              <a:t>Reviews, tickets, reports, meeting notes, threads. One call per document. Row 1 of the framework.</a:t>
-            </a:r>
-          </a:p>
-          <a:p>
-            <a:r>
-              <a:t>If asked about cost: days of work, free local models, no new infrastructure.</a:t>
+              <a:t>Reviews, tickets, reports, meeting notes, threads. One call per document.</a:t>
             </a:r>
           </a:p>
         </p:txBody>
@@ -3495,12 +3663,7 @@
           <a:lstStyle/>
           <a:p>
             <a:r>
-              <a:t>Reviews, tickets, reports, meeting notes, threads. One call per document. Row 1 of the framework.</a:t>
-            </a:r>
-          </a:p>
-          <a:p>
-            <a:r>
-              <a:t>If asked about cost: days of work, free local models, no new infrastructure.</a:t>
+              <a:t>The line for your boss; read it. Row 1 of the framework.</a:t>
             </a:r>
           </a:p>
         </p:txBody>
@@ -3654,7 +3817,7 @@
             <a:fld id="{FDB08721-E45B-4A66-93A6-531BE00DB2CF}" type="datetimeFigureOut">
               <a:rPr lang="en-US" smtClean="0"/>
               <a:pPr defTabSz="342900"/>
-              <a:t>9/1/26</a:t>
+              <a:t>9/3/26</a:t>
             </a:fld>
             <a:endParaRPr lang="en-US"/>
           </a:p>
@@ -3996,7 +4159,7 @@
                 </a:solidFill>
               </a:rPr>
               <a:pPr defTabSz="342900"/>
-              <a:t>9/1/26</a:t>
+              <a:t>9/3/26</a:t>
             </a:fld>
             <a:endParaRPr lang="en-US">
               <a:solidFill>
@@ -4209,7 +4372,7 @@
                 </a:solidFill>
               </a:rPr>
               <a:pPr defTabSz="342900"/>
-              <a:t>9/1/26</a:t>
+              <a:t>9/3/26</a:t>
             </a:fld>
             <a:endParaRPr lang="en-US">
               <a:solidFill>
@@ -4412,7 +4575,7 @@
                 </a:solidFill>
               </a:rPr>
               <a:pPr defTabSz="342900"/>
-              <a:t>9/1/26</a:t>
+              <a:t>9/3/26</a:t>
             </a:fld>
             <a:endParaRPr lang="en-US">
               <a:solidFill>
@@ -4702,7 +4865,7 @@
                 </a:solidFill>
               </a:rPr>
               <a:pPr defTabSz="342900"/>
-              <a:t>9/1/26</a:t>
+              <a:t>9/3/26</a:t>
             </a:fld>
             <a:endParaRPr lang="en-US">
               <a:solidFill>
@@ -5022,7 +5185,7 @@
                 </a:solidFill>
               </a:rPr>
               <a:pPr defTabSz="342900"/>
-              <a:t>9/1/26</a:t>
+              <a:t>9/3/26</a:t>
             </a:fld>
             <a:endParaRPr lang="en-US">
               <a:solidFill>
@@ -5492,7 +5655,7 @@
                 </a:solidFill>
               </a:rPr>
               <a:pPr defTabSz="342900"/>
-              <a:t>9/1/26</a:t>
+              <a:t>9/3/26</a:t>
             </a:fld>
             <a:endParaRPr lang="en-US">
               <a:solidFill>
@@ -5644,7 +5807,7 @@
                 </a:solidFill>
               </a:rPr>
               <a:pPr defTabSz="342900"/>
-              <a:t>9/1/26</a:t>
+              <a:t>9/3/26</a:t>
             </a:fld>
             <a:endParaRPr lang="en-US">
               <a:solidFill>
@@ -5774,7 +5937,7 @@
                 </a:solidFill>
               </a:rPr>
               <a:pPr defTabSz="342900"/>
-              <a:t>9/1/26</a:t>
+              <a:t>9/3/26</a:t>
             </a:fld>
             <a:endParaRPr lang="en-US">
               <a:solidFill>
@@ -6163,7 +6326,7 @@
                 </a:solidFill>
               </a:rPr>
               <a:pPr defTabSz="342900"/>
-              <a:t>9/1/26</a:t>
+              <a:t>9/3/26</a:t>
             </a:fld>
             <a:endParaRPr lang="en-US">
               <a:solidFill>
@@ -6494,7 +6657,7 @@
             <a:fld id="{FDB08721-E45B-4A66-93A6-531BE00DB2CF}" type="datetimeFigureOut">
               <a:rPr lang="en-US" smtClean="0"/>
               <a:pPr defTabSz="342900"/>
-              <a:t>9/1/26</a:t>
+              <a:t>9/3/26</a:t>
             </a:fld>
             <a:endParaRPr lang="en-US"/>
           </a:p>
@@ -6738,7 +6901,7 @@
                 </a:solidFill>
               </a:rPr>
               <a:pPr defTabSz="342900"/>
-              <a:t>9/1/26</a:t>
+              <a:t>9/3/26</a:t>
             </a:fld>
             <a:endParaRPr lang="en-US">
               <a:solidFill>
@@ -7238,7 +7401,9 @@
         </p:nvSpPr>
         <p:spPr/>
         <p:txBody>
-          <a:bodyPr/>
+          <a:bodyPr>
+            <a:normAutofit lnSpcReduction="10000"/>
+          </a:bodyPr>
           <a:lstStyle/>
           <a:p>
             <a:r>
@@ -7429,7 +7594,13 @@
   <p:cSld>
     <p:spTree>
       <p:nvGrpSpPr>
-        <p:cNvPr id="1" name=""/>
+        <p:cNvPr id="1" name="">
+          <a:extLst>
+            <a:ext uri="{FF2B5EF4-FFF2-40B4-BE49-F238E27FC236}">
+              <a16:creationId xmlns:a16="http://schemas.microsoft.com/office/drawing/2014/main" id="{94C4CDB7-CDC5-8161-1D68-1BCE57C5D3B3}"/>
+            </a:ext>
+          </a:extLst>
+        </p:cNvPr>
         <p:cNvGrpSpPr/>
         <p:nvPr/>
       </p:nvGrpSpPr>
@@ -7443,7 +7614,13 @@
       </p:grpSpPr>
       <p:sp>
         <p:nvSpPr>
-          <p:cNvPr id="2" name="Title 1"/>
+          <p:cNvPr id="2" name="Title 1">
+            <a:extLst>
+              <a:ext uri="{FF2B5EF4-FFF2-40B4-BE49-F238E27FC236}">
+                <a16:creationId xmlns:a16="http://schemas.microsoft.com/office/drawing/2014/main" id="{D6205BD6-CF58-50B1-1C59-69EB2C3DCF1C}"/>
+              </a:ext>
+            </a:extLst>
+          </p:cNvPr>
           <p:cNvSpPr>
             <a:spLocks noGrp="1"/>
           </p:cNvSpPr>
@@ -7464,7 +7641,13 @@
       </p:sp>
       <p:sp>
         <p:nvSpPr>
-          <p:cNvPr id="3" name="Content Placeholder 2"/>
+          <p:cNvPr id="3" name="Content Placeholder 2">
+            <a:extLst>
+              <a:ext uri="{FF2B5EF4-FFF2-40B4-BE49-F238E27FC236}">
+                <a16:creationId xmlns:a16="http://schemas.microsoft.com/office/drawing/2014/main" id="{53AA7B6A-70F0-B6ED-7F8B-CFDD9B0C5D16}"/>
+              </a:ext>
+            </a:extLst>
+          </p:cNvPr>
           <p:cNvSpPr>
             <a:spLocks noGrp="1"/>
           </p:cNvSpPr>
@@ -7510,6 +7693,7 @@
               <a:rPr sz="2800" dirty="0"/>
               <a:t> "Our users are drowning in text we already have. A few hours of work turns it into automatic answers."</a:t>
             </a:r>
+            <a:endParaRPr lang="en-US" sz="2800" dirty="0"/>
           </a:p>
           <a:p>
             <a:pPr>
@@ -7517,20 +7701,31 @@
                 <a:spcPts val="1400"/>
               </a:spcAft>
             </a:pPr>
-            <a:r>
-              <a:rPr sz="2800" b="1" dirty="0"/>
+            <a:endParaRPr lang="en-US" sz="2800" dirty="0"/>
+          </a:p>
+          <a:p>
+            <a:pPr>
+              <a:spcAft>
+                <a:spcPts val="1400"/>
+              </a:spcAft>
+            </a:pPr>
+            <a:r>
+              <a:rPr lang="en-US" sz="2800" b="1" dirty="0"/>
               <a:t>Difficulty:</a:t>
             </a:r>
-            <a:r>
-              <a:rPr sz="2800" dirty="0"/>
-              <a:t> </a:t>
-            </a:r>
-          </a:p>
-        </p:txBody>
-      </p:sp>
-      <p:sp>
-        <p:nvSpPr>
-          <p:cNvPr id="4" name="Rounded Rectangle 3"/>
+            <a:endParaRPr sz="2800" dirty="0"/>
+          </a:p>
+        </p:txBody>
+      </p:sp>
+      <p:sp>
+        <p:nvSpPr>
+          <p:cNvPr id="4" name="Rounded Rectangle 3">
+            <a:extLst>
+              <a:ext uri="{FF2B5EF4-FFF2-40B4-BE49-F238E27FC236}">
+                <a16:creationId xmlns:a16="http://schemas.microsoft.com/office/drawing/2014/main" id="{B1E8BDC2-EDF4-3F70-F39F-5D43BC13C20A}"/>
+              </a:ext>
+            </a:extLst>
+          </p:cNvPr>
           <p:cNvSpPr/>
           <p:nvPr/>
         </p:nvSpPr>
@@ -7577,7 +7772,13 @@
       </p:sp>
       <p:sp>
         <p:nvSpPr>
-          <p:cNvPr id="5" name="Rounded Rectangle 4"/>
+          <p:cNvPr id="5" name="Rounded Rectangle 4">
+            <a:extLst>
+              <a:ext uri="{FF2B5EF4-FFF2-40B4-BE49-F238E27FC236}">
+                <a16:creationId xmlns:a16="http://schemas.microsoft.com/office/drawing/2014/main" id="{CAF20ED4-4633-3742-5916-E3B2624E2928}"/>
+              </a:ext>
+            </a:extLst>
+          </p:cNvPr>
           <p:cNvSpPr/>
           <p:nvPr/>
         </p:nvSpPr>
@@ -7624,7 +7825,13 @@
       </p:sp>
       <p:sp>
         <p:nvSpPr>
-          <p:cNvPr id="6" name="Rounded Rectangle 5"/>
+          <p:cNvPr id="6" name="Rounded Rectangle 5">
+            <a:extLst>
+              <a:ext uri="{FF2B5EF4-FFF2-40B4-BE49-F238E27FC236}">
+                <a16:creationId xmlns:a16="http://schemas.microsoft.com/office/drawing/2014/main" id="{1D0D4B1B-DE8A-C911-7CFB-36A2E19A9B00}"/>
+              </a:ext>
+            </a:extLst>
+          </p:cNvPr>
           <p:cNvSpPr/>
           <p:nvPr/>
         </p:nvSpPr>
@@ -7671,7 +7878,13 @@
       </p:sp>
       <p:sp>
         <p:nvSpPr>
-          <p:cNvPr id="7" name="TextBox 6"/>
+          <p:cNvPr id="7" name="TextBox 6">
+            <a:extLst>
+              <a:ext uri="{FF2B5EF4-FFF2-40B4-BE49-F238E27FC236}">
+                <a16:creationId xmlns:a16="http://schemas.microsoft.com/office/drawing/2014/main" id="{4BA60149-5DC8-C3A6-7EF7-64310D95CDE3}"/>
+              </a:ext>
+            </a:extLst>
+          </p:cNvPr>
           <p:cNvSpPr txBox="1"/>
           <p:nvPr/>
         </p:nvSpPr>
@@ -7700,6 +7913,11 @@
         </p:txBody>
       </p:sp>
     </p:spTree>
+    <p:extLst>
+      <p:ext uri="{BB962C8B-B14F-4D97-AF65-F5344CB8AC3E}">
+        <p14:creationId xmlns:p14="http://schemas.microsoft.com/office/powerpoint/2010/main" val="4155427989"/>
+      </p:ext>
+    </p:extLst>
   </p:cSld>
   <p:clrMapOvr>
     <a:masterClrMapping/>
@@ -7762,7 +7980,9 @@
         </p:nvSpPr>
         <p:spPr/>
         <p:txBody>
-          <a:bodyPr/>
+          <a:bodyPr>
+            <a:normAutofit lnSpcReduction="10000"/>
+          </a:bodyPr>
           <a:lstStyle/>
           <a:p>
             <a:endParaRPr/>
@@ -7802,7 +8022,7 @@
 </file>
 
 <file path=ppt/slides/slide13.xml><?xml version="1.0" encoding="utf-8"?>
-<p:sld xmlns:a="http://schemas.openxmlformats.org/drawingml/2006/main" xmlns:p="http://schemas.openxmlformats.org/presentationml/2006/main" xmlns:r="http://schemas.openxmlformats.org/officeDocument/2006/relationships">
+<p:sld xmlns:a="http://schemas.openxmlformats.org/drawingml/2006/main" xmlns:r="http://schemas.openxmlformats.org/officeDocument/2006/relationships" xmlns:p="http://schemas.openxmlformats.org/presentationml/2006/main">
   <p:cSld>
     <p:spTree>
       <p:nvGrpSpPr>
@@ -7810,7 +8030,14 @@
         <p:cNvGrpSpPr/>
         <p:nvPr/>
       </p:nvGrpSpPr>
-      <p:grpSpPr/>
+      <p:grpSpPr>
+        <a:xfrm>
+          <a:off x="0" y="0"/>
+          <a:ext cx="0" cy="0"/>
+          <a:chOff x="0" y="0"/>
+          <a:chExt cx="0" cy="0"/>
+        </a:xfrm>
+      </p:grpSpPr>
       <p:pic>
         <p:nvPicPr>
           <p:cNvPr id="2" name="Picture 1" descr="image.png"/>
@@ -7820,7 +8047,7 @@
           <p:nvPr/>
         </p:nvPicPr>
         <p:blipFill>
-          <a:blip r:embed="rId2"/>
+          <a:blip r:embed="rId3"/>
           <a:stretch>
             <a:fillRect/>
           </a:stretch>
@@ -7843,8 +8070,8 @@
         </p:nvSpPr>
         <p:spPr>
           <a:xfrm>
-            <a:off x="914400" y="2834640"/>
-            <a:ext cx="10332720" cy="2011680"/>
+            <a:off x="914400" y="3178760"/>
+            <a:ext cx="10332720" cy="1323439"/>
           </a:xfrm>
           <a:prstGeom prst="rect">
             <a:avLst/>
@@ -7859,11 +8086,19 @@
           <a:p>
             <a:pPr algn="ctr"/>
             <a:r>
-              <a:rPr sz="4000"/>
-              <a:t>Pull facts out of free-form text into </a:t>
-            </a:r>
-            <a:r>
-              <a:rPr b="1" sz="4000">
+              <a:rPr sz="4000" dirty="0"/>
+              <a:t>Pull facts out of free-form text </a:t>
+            </a:r>
+            <a:endParaRPr lang="en-US" sz="4000" dirty="0"/>
+          </a:p>
+          <a:p>
+            <a:pPr algn="ctr"/>
+            <a:r>
+              <a:rPr sz="4000" dirty="0"/>
+              <a:t>into </a:t>
+            </a:r>
+            <a:r>
+              <a:rPr sz="4000" b="1" dirty="0">
                 <a:solidFill>
                   <a:srgbClr val="017AB4"/>
                 </a:solidFill>
@@ -7871,7 +8106,7 @@
               <a:t>fields your code can query</a:t>
             </a:r>
             <a:r>
-              <a:rPr sz="4000"/>
+              <a:rPr sz="4000" dirty="0"/>
               <a:t>.</a:t>
             </a:r>
           </a:p>
@@ -7886,7 +8121,7 @@
           <p:nvPr/>
         </p:nvPicPr>
         <p:blipFill>
-          <a:blip r:embed="rId3"/>
+          <a:blip r:embed="rId4"/>
           <a:stretch>
             <a:fillRect/>
           </a:stretch>
@@ -11367,35 +11602,41 @@
           <a:lstStyle/>
           <a:p>
             <a:r>
-              <a:rPr sz="2800"/>
+              <a:rPr sz="2800" dirty="0"/>
               <a:t>A C# record (</a:t>
             </a:r>
             <a:r>
-              <a:rPr sz="2800">
+              <a:rPr sz="2800" dirty="0" err="1">
                 <a:latin typeface="Consolas"/>
               </a:rPr>
               <a:t>TripFacts</a:t>
             </a:r>
             <a:r>
-              <a:rPr sz="2800"/>
+              <a:rPr sz="2800" dirty="0"/>
               <a:t>) · typed response · no parsing</a:t>
             </a:r>
           </a:p>
           <a:p>
             <a:r>
-              <a:rPr sz="2800"/>
+              <a:rPr sz="2800" dirty="0"/>
               <a:t>❌ No distance in the report → </a:t>
             </a:r>
             <a:r>
-              <a:rPr sz="2800">
+              <a:rPr sz="2800" dirty="0" err="1">
                 <a:latin typeface="Consolas"/>
               </a:rPr>
-              <a:t>distance_mi: 5.0</a:t>
-            </a:r>
-          </a:p>
-          <a:p>
-            <a:r>
-              <a:rPr sz="2800"/>
+              <a:t>distance_mi</a:t>
+            </a:r>
+            <a:r>
+              <a:rPr sz="2800" dirty="0">
+                <a:latin typeface="Consolas"/>
+              </a:rPr>
+              <a:t>: 5.0</a:t>
+            </a:r>
+          </a:p>
+          <a:p>
+            <a:r>
+              <a:rPr sz="2800" dirty="0"/>
               <a:t>✅ Nullable fields + "null when not stated"</a:t>
             </a:r>
           </a:p>
@@ -11407,7 +11648,7 @@
           </a:p>
           <a:p>
             <a:r>
-              <a:rPr sz="2800"/>
+              <a:rPr sz="2800" dirty="0"/>
               <a:t>The last mile is a validator — ordinary code</a:t>
             </a:r>
           </a:p>
@@ -11975,7 +12216,9 @@
         </p:nvSpPr>
         <p:spPr/>
         <p:txBody>
-          <a:bodyPr/>
+          <a:bodyPr>
+            <a:normAutofit lnSpcReduction="10000"/>
+          </a:bodyPr>
           <a:lstStyle/>
           <a:p>
             <a:endParaRPr/>
@@ -12015,7 +12258,7 @@
 </file>
 
 <file path=ppt/slides/slide28.xml><?xml version="1.0" encoding="utf-8"?>
-<p:sld xmlns:a="http://schemas.openxmlformats.org/drawingml/2006/main" xmlns:p="http://schemas.openxmlformats.org/presentationml/2006/main" xmlns:r="http://schemas.openxmlformats.org/officeDocument/2006/relationships">
+<p:sld xmlns:a="http://schemas.openxmlformats.org/drawingml/2006/main" xmlns:r="http://schemas.openxmlformats.org/officeDocument/2006/relationships" xmlns:p="http://schemas.openxmlformats.org/presentationml/2006/main">
   <p:cSld>
     <p:spTree>
       <p:nvGrpSpPr>
@@ -12023,7 +12266,14 @@
         <p:cNvGrpSpPr/>
         <p:nvPr/>
       </p:nvGrpSpPr>
-      <p:grpSpPr/>
+      <p:grpSpPr>
+        <a:xfrm>
+          <a:off x="0" y="0"/>
+          <a:ext cx="0" cy="0"/>
+          <a:chOff x="0" y="0"/>
+          <a:chExt cx="0" cy="0"/>
+        </a:xfrm>
+      </p:grpSpPr>
       <p:pic>
         <p:nvPicPr>
           <p:cNvPr id="2" name="Picture 1" descr="image.png"/>
@@ -12033,7 +12283,7 @@
           <p:nvPr/>
         </p:nvPicPr>
         <p:blipFill>
-          <a:blip r:embed="rId2"/>
+          <a:blip r:embed="rId3"/>
           <a:stretch>
             <a:fillRect/>
           </a:stretch>
@@ -12076,7 +12326,7 @@
               <a:t>Read text and judge </a:t>
             </a:r>
             <a:r>
-              <a:rPr b="1" sz="4000">
+              <a:rPr sz="4000" b="1">
                 <a:solidFill>
                   <a:srgbClr val="017AB4"/>
                 </a:solidFill>
@@ -12099,7 +12349,7 @@
           <p:nvPr/>
         </p:nvPicPr>
         <p:blipFill>
-          <a:blip r:embed="rId3"/>
+          <a:blip r:embed="rId4"/>
           <a:stretch>
             <a:fillRect/>
           </a:stretch>
@@ -13690,7 +13940,9 @@
         </p:nvSpPr>
         <p:spPr/>
         <p:txBody>
-          <a:bodyPr/>
+          <a:bodyPr>
+            <a:normAutofit lnSpcReduction="10000"/>
+          </a:bodyPr>
           <a:lstStyle/>
           <a:p>
             <a:endParaRPr/>
@@ -13730,7 +13982,7 @@
 </file>
 
 <file path=ppt/slides/slide6.xml><?xml version="1.0" encoding="utf-8"?>
-<p:sld xmlns:a="http://schemas.openxmlformats.org/drawingml/2006/main" xmlns:p="http://schemas.openxmlformats.org/presentationml/2006/main" xmlns:r="http://schemas.openxmlformats.org/officeDocument/2006/relationships">
+<p:sld xmlns:a="http://schemas.openxmlformats.org/drawingml/2006/main" xmlns:r="http://schemas.openxmlformats.org/officeDocument/2006/relationships" xmlns:p="http://schemas.openxmlformats.org/presentationml/2006/main">
   <p:cSld>
     <p:spTree>
       <p:nvGrpSpPr>
@@ -13738,7 +13990,14 @@
         <p:cNvGrpSpPr/>
         <p:nvPr/>
       </p:nvGrpSpPr>
-      <p:grpSpPr/>
+      <p:grpSpPr>
+        <a:xfrm>
+          <a:off x="0" y="0"/>
+          <a:ext cx="0" cy="0"/>
+          <a:chOff x="0" y="0"/>
+          <a:chExt cx="0" cy="0"/>
+        </a:xfrm>
+      </p:grpSpPr>
       <p:pic>
         <p:nvPicPr>
           <p:cNvPr id="2" name="Picture 1" descr="image.png"/>
@@ -13748,7 +14007,7 @@
           <p:nvPr/>
         </p:nvPicPr>
         <p:blipFill>
-          <a:blip r:embed="rId2"/>
+          <a:blip r:embed="rId3"/>
           <a:stretch>
             <a:fillRect/>
           </a:stretch>
@@ -13771,8 +14030,8 @@
         </p:nvSpPr>
         <p:spPr>
           <a:xfrm>
-            <a:off x="914400" y="2834640"/>
-            <a:ext cx="10332720" cy="2011680"/>
+            <a:off x="914400" y="3178760"/>
+            <a:ext cx="10332720" cy="1323439"/>
           </a:xfrm>
           <a:prstGeom prst="rect">
             <a:avLst/>
@@ -13787,11 +14046,14 @@
           <a:p>
             <a:pPr algn="ctr"/>
             <a:r>
-              <a:rPr sz="4000"/>
+              <a:rPr sz="4000" dirty="0"/>
               <a:t>Turn a long document into the </a:t>
             </a:r>
-            <a:r>
-              <a:rPr b="1" sz="4000">
+            <a:br>
+              <a:rPr lang="en-US" sz="4000" dirty="0"/>
+            </a:br>
+            <a:r>
+              <a:rPr sz="4000" b="1" dirty="0">
                 <a:solidFill>
                   <a:srgbClr val="017AB4"/>
                 </a:solidFill>
@@ -13799,7 +14061,7 @@
               <a:t>short version</a:t>
             </a:r>
             <a:r>
-              <a:rPr sz="4000"/>
+              <a:rPr sz="4000" dirty="0"/>
               <a:t> its reader needs.</a:t>
             </a:r>
           </a:p>
@@ -13814,7 +14076,7 @@
           <p:nvPr/>
         </p:nvPicPr>
         <p:blipFill>
-          <a:blip r:embed="rId3"/>
+          <a:blip r:embed="rId4"/>
           <a:stretch>
             <a:fillRect/>
           </a:stretch>
@@ -14032,31 +14294,31 @@
           <a:lstStyle/>
           <a:p>
             <a:r>
-              <a:rPr sz="2800"/>
+              <a:rPr sz="2800" dirty="0"/>
               <a:t>The raw report first</a:t>
             </a:r>
           </a:p>
           <a:p>
             <a:r>
-              <a:rPr sz="2800"/>
+              <a:rPr sz="2800" dirty="0"/>
               <a:t>❌ Naive prompt: faithful, generic, useless</a:t>
             </a:r>
           </a:p>
           <a:p>
             <a:r>
-              <a:rPr sz="2800"/>
+              <a:rPr sz="2800" dirty="0"/>
               <a:t>✅ Purpose-built prompt: the bridge surfaces</a:t>
             </a:r>
           </a:p>
           <a:p>
             <a:r>
-              <a:rPr sz="2800"/>
+              <a:rPr sz="2800" dirty="0"/>
               <a:t>Grounding lines — without them, ~half of runs invent a closure</a:t>
             </a:r>
           </a:p>
           <a:p>
             <a:r>
-              <a:rPr sz="2800"/>
+              <a:rPr sz="2800" dirty="0"/>
               <a:t>Same call, new shape: a one-line trail status</a:t>
             </a:r>
           </a:p>

--- a/docs/slides/pptx/M1-understanding.pptx
+++ b/docs/slides/pptx/M1-understanding.pptx
@@ -1885,11 +1885,10 @@
           <a:lstStyle/>
           <a:p>
             <a:r>
-              <a:rPr dirty="0"/>
-              <a:t>~10 min · Terminal 2 · </a:t>
-            </a:r>
-            <a:r>
-              <a:rPr dirty="0">
+              <a:t>~10 min · </a:t>
+            </a:r>
+            <a:r>
+              <a:rPr>
                 <a:latin typeface="Consolas"/>
               </a:rPr>
               <a:t>cd modules/M1-understanding/F02-extraction/dotnet</a:t>
@@ -1897,121 +1896,95 @@
           </a:p>
           <a:p>
             <a:r>
-              <a:rPr dirty="0"/>
               <a:t>Files: </a:t>
             </a:r>
             <a:r>
-              <a:rPr dirty="0">
+              <a:rPr>
                 <a:latin typeface="Consolas"/>
               </a:rPr>
               <a:t>tr-0007.md</a:t>
             </a:r>
             <a:r>
-              <a:rPr dirty="0"/>
               <a:t> = full report, every field present · </a:t>
             </a:r>
             <a:r>
-              <a:rPr dirty="0">
+              <a:rPr>
                 <a:latin typeface="Consolas"/>
               </a:rPr>
               <a:t>tr-0011.md</a:t>
             </a:r>
             <a:r>
-              <a:rPr dirty="0"/>
               <a:t> = sparse report, no distance stated (the null test)</a:t>
             </a:r>
           </a:p>
           <a:p>
             <a:r>
-              <a:rPr dirty="0" err="1"/>
-              <a:t>Args</a:t>
-            </a:r>
-            <a:r>
-              <a:rPr dirty="0"/>
-              <a:t>: a report path; complete with no </a:t>
-            </a:r>
-            <a:r>
-              <a:rPr dirty="0" err="1"/>
-              <a:t>args</a:t>
-            </a:r>
-            <a:r>
-              <a:rPr dirty="0"/>
-              <a:t> runs both</a:t>
-            </a:r>
-          </a:p>
-          <a:p>
-            <a:r>
-              <a:rPr dirty="0"/>
+              <a:t>Args: a report path; complete with no args runs both</a:t>
+            </a:r>
+          </a:p>
+          <a:p>
+            <a:r>
               <a:t>1. Same kind of report as 01. This time the goal is a database row.</a:t>
             </a:r>
           </a:p>
           <a:p>
             <a:r>
-              <a:rPr dirty="0"/>
               <a:t>2. Before: </a:t>
             </a:r>
             <a:r>
-              <a:rPr dirty="0">
+              <a:rPr>
                 <a:latin typeface="Consolas"/>
               </a:rPr>
               <a:t>cd starter &amp;&amp; dotnet run -- ../../data/tr-0007.md</a:t>
             </a:r>
             <a:r>
-              <a:rPr dirty="0"/>
               <a:t>. JSON asked for in the prompt. Fences, preamble, drifting field names.</a:t>
             </a:r>
           </a:p>
           <a:p>
             <a:r>
-              <a:rPr dirty="0"/>
               <a:t>3. After: </a:t>
             </a:r>
             <a:r>
-              <a:rPr dirty="0">
+              <a:rPr>
                 <a:latin typeface="Consolas"/>
               </a:rPr>
               <a:t>cd ../complete &amp;&amp; dotnet run -- ../../data/tr-0007.md</a:t>
             </a:r>
             <a:r>
-              <a:rPr dirty="0"/>
               <a:t>. </a:t>
             </a:r>
             <a:r>
-              <a:rPr dirty="0" err="1">
+              <a:rPr>
                 <a:latin typeface="Consolas"/>
               </a:rPr>
               <a:t>TripFacts</a:t>
             </a:r>
             <a:r>
-              <a:rPr dirty="0"/>
               <a:t> record, typed response, no parsing.</a:t>
             </a:r>
           </a:p>
           <a:p>
             <a:r>
-              <a:rPr dirty="0"/>
               <a:t>4. </a:t>
             </a:r>
             <a:r>
-              <a:rPr dirty="0">
+              <a:rPr>
                 <a:latin typeface="Consolas"/>
               </a:rPr>
               <a:t>dotnet run -- ../../data/tr-0011.md</a:t>
             </a:r>
             <a:r>
-              <a:rPr dirty="0"/>
               <a:t>, three times. Nulls where there is nothing, and watch what still slips.</a:t>
             </a:r>
           </a:p>
           <a:p>
             <a:r>
-              <a:rPr dirty="0"/>
               <a:t>5. Point at the validator: PASS or REJECT. A rejected record is a good outcome.</a:t>
             </a:r>
           </a:p>
           <a:p>
             <a:r>
-              <a:rPr dirty="0"/>
               <a:t>Cut: 4's repeats.</a:t>
             </a:r>
           </a:p>
@@ -2437,7 +2410,7 @@
           <a:lstStyle/>
           <a:p>
             <a:r>
-              <a:t>~10 min · Terminal 1 (Azure) · </a:t>
+              <a:t>~10 min · </a:t>
             </a:r>
             <a:r>
               <a:rPr>
@@ -3352,11 +3325,10 @@
           <a:lstStyle/>
           <a:p>
             <a:r>
-              <a:rPr dirty="0"/>
-              <a:t>~8 min · Terminal 2 · </a:t>
-            </a:r>
-            <a:r>
-              <a:rPr dirty="0">
+              <a:t>~8 min · </a:t>
+            </a:r>
+            <a:r>
+              <a:rPr>
                 <a:latin typeface="Consolas"/>
               </a:rPr>
               <a:t>cd modules/M1-understanding/F01-summarization/dotnet</a:t>
@@ -3364,165 +3336,145 @@
           </a:p>
           <a:p>
             <a:r>
-              <a:rPr dirty="0"/>
               <a:t>Files: </a:t>
             </a:r>
             <a:r>
-              <a:rPr dirty="0">
+              <a:rPr>
                 <a:latin typeface="Consolas"/>
               </a:rPr>
               <a:t>tr-0004.md</a:t>
             </a:r>
             <a:r>
-              <a:rPr dirty="0"/>
               <a:t> = the story's report, bridge buried mid-text · </a:t>
             </a:r>
             <a:r>
-              <a:rPr dirty="0">
+              <a:rPr>
                 <a:latin typeface="Consolas"/>
               </a:rPr>
               <a:t>tr-0001.md</a:t>
             </a:r>
             <a:r>
-              <a:rPr dirty="0"/>
               <a:t> = clean report, nothing closed (hallucination bait)</a:t>
             </a:r>
           </a:p>
           <a:p>
             <a:r>
-              <a:rPr dirty="0"/>
               <a:t>Flags: none = naive "Summarize this" · </a:t>
             </a:r>
             <a:r>
-              <a:rPr dirty="0">
+              <a:rPr>
                 <a:latin typeface="Consolas"/>
               </a:rPr>
               <a:t>--briefing</a:t>
             </a:r>
             <a:r>
-              <a:rPr dirty="0"/>
               <a:t> = 3 hiker bullets · </a:t>
             </a:r>
             <a:r>
-              <a:rPr dirty="0">
+              <a:rPr>
                 <a:latin typeface="Consolas"/>
               </a:rPr>
               <a:t>--headline</a:t>
             </a:r>
             <a:r>
-              <a:rPr dirty="0"/>
               <a:t> = one-line trail card · </a:t>
             </a:r>
             <a:r>
-              <a:rPr dirty="0">
+              <a:rPr>
                 <a:latin typeface="Consolas"/>
               </a:rPr>
               <a:t>--audience ranger</a:t>
             </a:r>
             <a:r>
-              <a:rPr dirty="0"/>
               <a:t> = same report, different reader</a:t>
             </a:r>
           </a:p>
           <a:p>
             <a:r>
-              <a:rPr dirty="0"/>
               <a:t>1. Open </a:t>
             </a:r>
             <a:r>
-              <a:rPr dirty="0">
+              <a:rPr>
                 <a:latin typeface="Consolas"/>
               </a:rPr>
               <a:t>data/tr-0004.md</a:t>
             </a:r>
             <a:r>
-              <a:rPr dirty="0"/>
               <a:t>, scroll. The bridge is one sentence, mid-report.</a:t>
             </a:r>
           </a:p>
           <a:p>
             <a:r>
-              <a:rPr dirty="0"/>
               <a:t>2. Before: </a:t>
             </a:r>
             <a:r>
-              <a:rPr dirty="0">
+              <a:rPr>
                 <a:latin typeface="Consolas"/>
               </a:rPr>
               <a:t>cd starter &amp;&amp; dotnet run -- ../../data/tr-0004.md</a:t>
             </a:r>
             <a:r>
-              <a:rPr dirty="0"/>
               <a:t>. Book report. Right model, wrong instruction.</a:t>
             </a:r>
           </a:p>
           <a:p>
             <a:r>
-              <a:rPr dirty="0"/>
               <a:t>3. After: </a:t>
             </a:r>
             <a:r>
-              <a:rPr dirty="0">
+              <a:rPr>
                 <a:latin typeface="Consolas"/>
               </a:rPr>
               <a:t>cd ../complete &amp;&amp; dotnet run -- --briefing</a:t>
             </a:r>
             <a:r>
-              <a:rPr dirty="0"/>
               <a:t>. Same report, three bullets, washout leads. Show the prompt.</a:t>
             </a:r>
           </a:p>
           <a:p>
             <a:r>
-              <a:rPr dirty="0"/>
               <a:t>4. </a:t>
             </a:r>
             <a:r>
-              <a:rPr dirty="0">
+              <a:rPr>
                 <a:latin typeface="Consolas"/>
               </a:rPr>
               <a:t>dotnet run -- --briefing ../../data/tr-0001.md</a:t>
             </a:r>
             <a:r>
-              <a:rPr dirty="0"/>
               <a:t>: the clean report, nothing closed. Last two prompt lines: 11 of 24 became 1 of 24.</a:t>
             </a:r>
           </a:p>
           <a:p>
             <a:r>
-              <a:rPr dirty="0"/>
               <a:t>5. </a:t>
             </a:r>
             <a:r>
-              <a:rPr dirty="0">
+              <a:rPr>
                 <a:latin typeface="Consolas"/>
               </a:rPr>
               <a:t>dotnet run -- --headline</a:t>
             </a:r>
             <a:r>
-              <a:rPr dirty="0"/>
               <a:t>: one line for a card.</a:t>
             </a:r>
           </a:p>
           <a:p>
             <a:r>
-              <a:rPr dirty="0"/>
               <a:t>6. Line 11: </a:t>
             </a:r>
             <a:r>
-              <a:rPr dirty="0">
+              <a:rPr>
                 <a:latin typeface="Consolas"/>
               </a:rPr>
               <a:t>localhost:11434</a:t>
             </a:r>
             <a:r>
-              <a:rPr dirty="0"/>
               <a:t>. No key, nothing left the room.</a:t>
             </a:r>
           </a:p>
           <a:p>
             <a:r>
-              <a:rPr dirty="0"/>
               <a:t>Cut: 5, then 4.</a:t>
             </a:r>
           </a:p>
